--- a/docs/curso/slides/m08-cobranca.pptx
+++ b/docs/curso/slides/m08-cobranca.pptx
@@ -3251,6 +3251,54 @@
           <a:chExt cx="0" cy="0"/>
         </a:xfrm>
       </p:grpSpPr>
+      <p:sp>
+        <p:nvSpPr>
+          <p:cNvPr id="25" name="Slide Number Placeholder 0"/>
+          <p:cNvSpPr>
+            <a:spLocks noGrp="1"/>
+          </p:cNvSpPr>
+          <p:nvPr>
+            <p:ph type="sldNum" sz="quarter" idx="4294967295"/>
+          </p:nvPr>
+        </p:nvSpPr>
+        <p:spPr>
+          <a:xfrm>
+            <a:off x="11292840" y="6556248"/>
+            <a:ext cx="548640" cy="256032"/>
+          </a:xfrm>
+          <a:prstGeom prst="rect">
+            <a:avLst/>
+          </a:prstGeom>
+          <a:extLst>
+            <a:ext uri="{C572A759-6A51-4108-AA02-DFA0A04FC94B}">
+              <ma14:wrappingTextBoxFlag xmlns:ma14="http://schemas.microsoft.com/office/mac/drawingml/2011/main" val="0"/>
+            </a:ext>
+          </a:extLst>
+        </p:spPr>
+        <p:txBody>
+          <a:bodyPr/>
+          <a:lstStyle>
+            <a:lvl1pPr>
+              <a:defRPr sz="900">
+                <a:solidFill>
+                  <a:srgbClr val="1B3A6B"/>
+                </a:solidFill>
+                <a:latin typeface="Arial"/>
+                <a:ea typeface="Arial"/>
+                <a:cs typeface="Arial"/>
+              </a:defRPr>
+            </a:lvl1pPr>
+          </a:lstStyle>
+          <a:p>
+            <a:pPr algn="r"/>
+            <a:fld id="{F7021451-1387-4CA6-816F-3879F97B5CBC}" type="slidenum">
+              <a:rPr b="1" lang="en-US"/>
+              <a:t>1000</a:t>
+            </a:fld>
+            <a:endParaRPr lang="en-US"/>
+          </a:p>
+        </p:txBody>
+      </p:sp>
     </p:spTree>
   </p:cSld>
   <p:clrMapOvr>
@@ -3276,6 +3324,54 @@
           <a:chExt cx="0" cy="0"/>
         </a:xfrm>
       </p:grpSpPr>
+      <p:sp>
+        <p:nvSpPr>
+          <p:cNvPr id="25" name="Slide Number Placeholder 0"/>
+          <p:cNvSpPr>
+            <a:spLocks noGrp="1"/>
+          </p:cNvSpPr>
+          <p:nvPr>
+            <p:ph type="sldNum" sz="quarter" idx="4294967295"/>
+          </p:nvPr>
+        </p:nvSpPr>
+        <p:spPr>
+          <a:xfrm>
+            <a:off x="11292840" y="6556248"/>
+            <a:ext cx="548640" cy="256032"/>
+          </a:xfrm>
+          <a:prstGeom prst="rect">
+            <a:avLst/>
+          </a:prstGeom>
+          <a:extLst>
+            <a:ext uri="{C572A759-6A51-4108-AA02-DFA0A04FC94B}">
+              <ma14:wrappingTextBoxFlag xmlns:ma14="http://schemas.microsoft.com/office/mac/drawingml/2011/main" val="0"/>
+            </a:ext>
+          </a:extLst>
+        </p:spPr>
+        <p:txBody>
+          <a:bodyPr/>
+          <a:lstStyle>
+            <a:lvl1pPr>
+              <a:defRPr sz="900">
+                <a:solidFill>
+                  <a:srgbClr val="1B3A6B"/>
+                </a:solidFill>
+                <a:latin typeface="Arial"/>
+                <a:ea typeface="Arial"/>
+                <a:cs typeface="Arial"/>
+              </a:defRPr>
+            </a:lvl1pPr>
+          </a:lstStyle>
+          <a:p>
+            <a:pPr algn="r"/>
+            <a:fld id="{F7021451-1387-4CA6-816F-3879F97B5CBC}" type="slidenum">
+              <a:rPr b="1" lang="en-US"/>
+              <a:t>null</a:t>
+            </a:fld>
+            <a:endParaRPr lang="en-US"/>
+          </a:p>
+        </p:txBody>
+      </p:sp>
     </p:spTree>
   </p:cSld>
   <p:clrMap bg1="lt1" tx1="dk1" bg2="lt2" tx2="dk2" accent1="accent1" accent2="accent2" accent3="accent3" accent4="accent4" accent5="accent5" accent6="accent6" hlink="hlink" folHlink="folHlink"/>
@@ -4129,7 +4225,7 @@
         </p:blipFill>
         <p:spPr>
           <a:xfrm>
-            <a:off x="411480" y="6547104"/>
+            <a:off x="548640" y="6547104"/>
             <a:ext cx="274320" cy="274320"/>
           </a:xfrm>
           <a:prstGeom prst="rect">
@@ -4145,7 +4241,7 @@
         </p:nvSpPr>
         <p:spPr>
           <a:xfrm>
-            <a:off x="749808" y="6528816"/>
+            <a:off x="886968" y="6528816"/>
             <a:ext cx="6400800" cy="310896"/>
           </a:xfrm>
           <a:prstGeom prst="rect">
@@ -4185,7 +4281,7 @@
         <p:spPr>
           <a:xfrm>
             <a:off x="7132320" y="6528816"/>
-            <a:ext cx="4663440" cy="310896"/>
+            <a:ext cx="4023360" cy="310896"/>
           </a:xfrm>
           <a:prstGeom prst="rect">
             <a:avLst/>
@@ -4223,7 +4319,7 @@
         </p:nvSpPr>
         <p:spPr>
           <a:xfrm>
-            <a:off x="411480" y="384048"/>
+            <a:off x="548640" y="384048"/>
             <a:ext cx="82296" cy="658368"/>
           </a:xfrm>
           <a:prstGeom prst="rect">
@@ -4243,7 +4339,7 @@
         </p:nvSpPr>
         <p:spPr>
           <a:xfrm>
-            <a:off x="640080" y="292608"/>
+            <a:off x="777240" y="292608"/>
             <a:ext cx="10972800" cy="274320"/>
           </a:xfrm>
           <a:prstGeom prst="rect">
@@ -4282,8 +4378,8 @@
         </p:nvSpPr>
         <p:spPr>
           <a:xfrm>
-            <a:off x="640080" y="530352"/>
-            <a:ext cx="11155680" cy="566928"/>
+            <a:off x="777240" y="530352"/>
+            <a:ext cx="10881360" cy="566928"/>
           </a:xfrm>
           <a:prstGeom prst="rect">
             <a:avLst/>
@@ -4323,8 +4419,8 @@
         </p:nvSpPr>
         <p:spPr>
           <a:xfrm>
-            <a:off x="411480" y="1325880"/>
-            <a:ext cx="11384280" cy="4937760"/>
+            <a:off x="548640" y="1325880"/>
+            <a:ext cx="11091672" cy="4937760"/>
           </a:xfrm>
           <a:prstGeom prst="roundRect">
             <a:avLst>
@@ -4350,7 +4446,7 @@
         </p:nvSpPr>
         <p:spPr>
           <a:xfrm>
-            <a:off x="594360" y="1508760"/>
+            <a:off x="731520" y="1508760"/>
             <a:ext cx="822960" cy="384048"/>
           </a:xfrm>
           <a:prstGeom prst="roundRect">
@@ -4372,7 +4468,7 @@
         </p:nvSpPr>
         <p:spPr>
           <a:xfrm>
-            <a:off x="594360" y="1508760"/>
+            <a:off x="731520" y="1508760"/>
             <a:ext cx="822960" cy="384048"/>
           </a:xfrm>
           <a:prstGeom prst="rect">
@@ -4411,8 +4507,8 @@
         </p:nvSpPr>
         <p:spPr>
           <a:xfrm>
-            <a:off x="1508760" y="1463040"/>
-            <a:ext cx="10149840" cy="502920"/>
+            <a:off x="1645920" y="1463040"/>
+            <a:ext cx="9857232" cy="502920"/>
           </a:xfrm>
           <a:prstGeom prst="rect">
             <a:avLst/>
@@ -4452,8 +4548,8 @@
         </p:nvSpPr>
         <p:spPr>
           <a:xfrm>
-            <a:off x="640080" y="2057400"/>
-            <a:ext cx="10927080" cy="4069080"/>
+            <a:off x="777240" y="2057400"/>
+            <a:ext cx="10634472" cy="4069080"/>
           </a:xfrm>
           <a:prstGeom prst="rect">
             <a:avLst/>
@@ -4482,6 +4578,54 @@
               <a:t>Toda alteração fica registrada: quem, quando, o quê</a:t>
             </a:r>
             <a:endParaRPr lang="en-US" sz="1500" dirty="0"/>
+          </a:p>
+        </p:txBody>
+      </p:sp>
+      <p:sp>
+        <p:nvSpPr>
+          <p:cNvPr id="25" name="Slide Number Placeholder 0"/>
+          <p:cNvSpPr>
+            <a:spLocks noGrp="1"/>
+          </p:cNvSpPr>
+          <p:nvPr>
+            <p:ph type="sldNum" sz="quarter" idx="4294967295"/>
+          </p:nvPr>
+        </p:nvSpPr>
+        <p:spPr>
+          <a:xfrm>
+            <a:off x="11292840" y="6556248"/>
+            <a:ext cx="548640" cy="256032"/>
+          </a:xfrm>
+          <a:prstGeom prst="rect">
+            <a:avLst/>
+          </a:prstGeom>
+          <a:extLst>
+            <a:ext uri="{C572A759-6A51-4108-AA02-DFA0A04FC94B}">
+              <ma14:wrappingTextBoxFlag xmlns:ma14="http://schemas.microsoft.com/office/mac/drawingml/2011/main" val="0"/>
+            </a:ext>
+          </a:extLst>
+        </p:spPr>
+        <p:txBody>
+          <a:bodyPr/>
+          <a:lstStyle>
+            <a:lvl1pPr>
+              <a:defRPr sz="900">
+                <a:solidFill>
+                  <a:srgbClr val="1B3A6B"/>
+                </a:solidFill>
+                <a:latin typeface="Arial"/>
+                <a:ea typeface="Arial"/>
+                <a:cs typeface="Arial"/>
+              </a:defRPr>
+            </a:lvl1pPr>
+          </a:lstStyle>
+          <a:p>
+            <a:pPr algn="r"/>
+            <a:fld id="{F7021451-1387-4CA6-816F-3879F97B5CBC}" type="slidenum">
+              <a:rPr b="1" lang="en-US"/>
+              <a:t>10</a:t>
+            </a:fld>
+            <a:endParaRPr lang="en-US"/>
           </a:p>
         </p:txBody>
       </p:sp>
@@ -4558,7 +4702,7 @@
         </p:blipFill>
         <p:spPr>
           <a:xfrm>
-            <a:off x="411480" y="6547104"/>
+            <a:off x="548640" y="6547104"/>
             <a:ext cx="274320" cy="274320"/>
           </a:xfrm>
           <a:prstGeom prst="rect">
@@ -4574,7 +4718,7 @@
         </p:nvSpPr>
         <p:spPr>
           <a:xfrm>
-            <a:off x="749808" y="6528816"/>
+            <a:off x="886968" y="6528816"/>
             <a:ext cx="6400800" cy="310896"/>
           </a:xfrm>
           <a:prstGeom prst="rect">
@@ -4614,7 +4758,7 @@
         <p:spPr>
           <a:xfrm>
             <a:off x="7132320" y="6528816"/>
-            <a:ext cx="4663440" cy="310896"/>
+            <a:ext cx="4023360" cy="310896"/>
           </a:xfrm>
           <a:prstGeom prst="rect">
             <a:avLst/>
@@ -4652,7 +4796,7 @@
         </p:nvSpPr>
         <p:spPr>
           <a:xfrm>
-            <a:off x="411480" y="384048"/>
+            <a:off x="548640" y="384048"/>
             <a:ext cx="82296" cy="658368"/>
           </a:xfrm>
           <a:prstGeom prst="rect">
@@ -4672,7 +4816,7 @@
         </p:nvSpPr>
         <p:spPr>
           <a:xfrm>
-            <a:off x="640080" y="292608"/>
+            <a:off x="777240" y="292608"/>
             <a:ext cx="10972800" cy="274320"/>
           </a:xfrm>
           <a:prstGeom prst="rect">
@@ -4711,8 +4855,8 @@
         </p:nvSpPr>
         <p:spPr>
           <a:xfrm>
-            <a:off x="640080" y="530352"/>
-            <a:ext cx="11155680" cy="566928"/>
+            <a:off x="777240" y="530352"/>
+            <a:ext cx="10881360" cy="566928"/>
           </a:xfrm>
           <a:prstGeom prst="rect">
             <a:avLst/>
@@ -4752,8 +4896,8 @@
         </p:nvSpPr>
         <p:spPr>
           <a:xfrm>
-            <a:off x="411480" y="1325880"/>
-            <a:ext cx="5577840" cy="2331720"/>
+            <a:off x="548640" y="1325880"/>
+            <a:ext cx="5431536" cy="2331720"/>
           </a:xfrm>
           <a:prstGeom prst="roundRect">
             <a:avLst>
@@ -4786,7 +4930,7 @@
         </p:nvSpPr>
         <p:spPr>
           <a:xfrm>
-            <a:off x="594360" y="1508760"/>
+            <a:off x="731520" y="1508760"/>
             <a:ext cx="457200" cy="457200"/>
           </a:xfrm>
           <a:prstGeom prst="ellipse">
@@ -4806,7 +4950,7 @@
         </p:nvSpPr>
         <p:spPr>
           <a:xfrm>
-            <a:off x="594360" y="1508760"/>
+            <a:off x="731520" y="1508760"/>
             <a:ext cx="457200" cy="457200"/>
           </a:xfrm>
           <a:prstGeom prst="rect">
@@ -4845,8 +4989,8 @@
         </p:nvSpPr>
         <p:spPr>
           <a:xfrm>
-            <a:off x="1188720" y="1435608"/>
-            <a:ext cx="4663440" cy="2112264"/>
+            <a:off x="1325880" y="1435608"/>
+            <a:ext cx="4517136" cy="2112264"/>
           </a:xfrm>
           <a:prstGeom prst="rect">
             <a:avLst/>
@@ -4886,8 +5030,8 @@
         </p:nvSpPr>
         <p:spPr>
           <a:xfrm>
-            <a:off x="6217920" y="1325880"/>
-            <a:ext cx="5577840" cy="2331720"/>
+            <a:off x="6208776" y="1325880"/>
+            <a:ext cx="5431536" cy="2331720"/>
           </a:xfrm>
           <a:prstGeom prst="roundRect">
             <a:avLst>
@@ -4920,7 +5064,7 @@
         </p:nvSpPr>
         <p:spPr>
           <a:xfrm>
-            <a:off x="6400800" y="1508760"/>
+            <a:off x="6391656" y="1508760"/>
             <a:ext cx="457200" cy="457200"/>
           </a:xfrm>
           <a:prstGeom prst="ellipse">
@@ -4940,7 +5084,7 @@
         </p:nvSpPr>
         <p:spPr>
           <a:xfrm>
-            <a:off x="6400800" y="1508760"/>
+            <a:off x="6391656" y="1508760"/>
             <a:ext cx="457200" cy="457200"/>
           </a:xfrm>
           <a:prstGeom prst="rect">
@@ -4979,8 +5123,8 @@
         </p:nvSpPr>
         <p:spPr>
           <a:xfrm>
-            <a:off x="6995160" y="1435608"/>
-            <a:ext cx="4663440" cy="2112264"/>
+            <a:off x="6986016" y="1435608"/>
+            <a:ext cx="4517136" cy="2112264"/>
           </a:xfrm>
           <a:prstGeom prst="rect">
             <a:avLst/>
@@ -5020,8 +5164,8 @@
         </p:nvSpPr>
         <p:spPr>
           <a:xfrm>
-            <a:off x="411480" y="3886200"/>
-            <a:ext cx="5577840" cy="2331720"/>
+            <a:off x="548640" y="3886200"/>
+            <a:ext cx="5431536" cy="2331720"/>
           </a:xfrm>
           <a:prstGeom prst="roundRect">
             <a:avLst>
@@ -5054,7 +5198,7 @@
         </p:nvSpPr>
         <p:spPr>
           <a:xfrm>
-            <a:off x="594360" y="4069080"/>
+            <a:off x="731520" y="4069080"/>
             <a:ext cx="457200" cy="457200"/>
           </a:xfrm>
           <a:prstGeom prst="ellipse">
@@ -5074,7 +5218,7 @@
         </p:nvSpPr>
         <p:spPr>
           <a:xfrm>
-            <a:off x="594360" y="4069080"/>
+            <a:off x="731520" y="4069080"/>
             <a:ext cx="457200" cy="457200"/>
           </a:xfrm>
           <a:prstGeom prst="rect">
@@ -5113,8 +5257,8 @@
         </p:nvSpPr>
         <p:spPr>
           <a:xfrm>
-            <a:off x="1188720" y="3995928"/>
-            <a:ext cx="4663440" cy="2112264"/>
+            <a:off x="1325880" y="3995928"/>
+            <a:ext cx="4517136" cy="2112264"/>
           </a:xfrm>
           <a:prstGeom prst="rect">
             <a:avLst/>
@@ -5154,8 +5298,8 @@
         </p:nvSpPr>
         <p:spPr>
           <a:xfrm>
-            <a:off x="6217920" y="3886200"/>
-            <a:ext cx="5577840" cy="2331720"/>
+            <a:off x="6208776" y="3886200"/>
+            <a:ext cx="5431536" cy="2331720"/>
           </a:xfrm>
           <a:prstGeom prst="roundRect">
             <a:avLst>
@@ -5188,7 +5332,7 @@
         </p:nvSpPr>
         <p:spPr>
           <a:xfrm>
-            <a:off x="6400800" y="4069080"/>
+            <a:off x="6391656" y="4069080"/>
             <a:ext cx="457200" cy="457200"/>
           </a:xfrm>
           <a:prstGeom prst="ellipse">
@@ -5208,7 +5352,7 @@
         </p:nvSpPr>
         <p:spPr>
           <a:xfrm>
-            <a:off x="6400800" y="4069080"/>
+            <a:off x="6391656" y="4069080"/>
             <a:ext cx="457200" cy="457200"/>
           </a:xfrm>
           <a:prstGeom prst="rect">
@@ -5247,8 +5391,8 @@
         </p:nvSpPr>
         <p:spPr>
           <a:xfrm>
-            <a:off x="6995160" y="3995928"/>
-            <a:ext cx="4663440" cy="2112264"/>
+            <a:off x="6986016" y="3995928"/>
+            <a:ext cx="4517136" cy="2112264"/>
           </a:xfrm>
           <a:prstGeom prst="rect">
             <a:avLst/>
@@ -5277,6 +5421,54 @@
               <a:t>histórico completo</a:t>
             </a:r>
             <a:endParaRPr lang="en-US" sz="1800" dirty="0"/>
+          </a:p>
+        </p:txBody>
+      </p:sp>
+      <p:sp>
+        <p:nvSpPr>
+          <p:cNvPr id="25" name="Slide Number Placeholder 0"/>
+          <p:cNvSpPr>
+            <a:spLocks noGrp="1"/>
+          </p:cNvSpPr>
+          <p:nvPr>
+            <p:ph type="sldNum" sz="quarter" idx="4294967295"/>
+          </p:nvPr>
+        </p:nvSpPr>
+        <p:spPr>
+          <a:xfrm>
+            <a:off x="11292840" y="6556248"/>
+            <a:ext cx="548640" cy="256032"/>
+          </a:xfrm>
+          <a:prstGeom prst="rect">
+            <a:avLst/>
+          </a:prstGeom>
+          <a:extLst>
+            <a:ext uri="{C572A759-6A51-4108-AA02-DFA0A04FC94B}">
+              <ma14:wrappingTextBoxFlag xmlns:ma14="http://schemas.microsoft.com/office/mac/drawingml/2011/main" val="0"/>
+            </a:ext>
+          </a:extLst>
+        </p:spPr>
+        <p:txBody>
+          <a:bodyPr/>
+          <a:lstStyle>
+            <a:lvl1pPr>
+              <a:defRPr sz="900">
+                <a:solidFill>
+                  <a:srgbClr val="1B3A6B"/>
+                </a:solidFill>
+                <a:latin typeface="Arial"/>
+                <a:ea typeface="Arial"/>
+                <a:cs typeface="Arial"/>
+              </a:defRPr>
+            </a:lvl1pPr>
+          </a:lstStyle>
+          <a:p>
+            <a:pPr algn="r"/>
+            <a:fld id="{F7021451-1387-4CA6-816F-3879F97B5CBC}" type="slidenum">
+              <a:rPr b="1" lang="en-US"/>
+              <a:t>11</a:t>
+            </a:fld>
+            <a:endParaRPr lang="en-US"/>
           </a:p>
         </p:txBody>
       </p:sp>
@@ -5340,6 +5532,45 @@
         </p:nvSpPr>
         <p:spPr>
           <a:xfrm>
+            <a:off x="457200" y="548640"/>
+            <a:ext cx="3474720" cy="1737360"/>
+          </a:xfrm>
+          <a:prstGeom prst="rect">
+            <a:avLst/>
+          </a:prstGeom>
+          <a:noFill/>
+          <a:ln/>
+        </p:spPr>
+        <p:txBody>
+          <a:bodyPr wrap="square" rtlCol="0" anchor="ctr"/>
+          <a:lstStyle/>
+          <a:p>
+            <a:pPr indent="0" marL="0">
+              <a:buNone/>
+            </a:pPr>
+            <a:r>
+              <a:rPr lang="en-US" sz="11000" b="1" dirty="0">
+                <a:solidFill>
+                  <a:srgbClr val="11396F"/>
+                </a:solidFill>
+                <a:latin typeface="Arial" pitchFamily="34" charset="0"/>
+                <a:ea typeface="Arial" pitchFamily="34" charset="-122"/>
+                <a:cs typeface="Arial" pitchFamily="34" charset="-120"/>
+              </a:rPr>
+              <a:t>03</a:t>
+            </a:r>
+            <a:endParaRPr lang="en-US" sz="11000" dirty="0"/>
+          </a:p>
+        </p:txBody>
+      </p:sp>
+      <p:sp>
+        <p:nvSpPr>
+          <p:cNvPr id="4" name="Text 2"/>
+          <p:cNvSpPr/>
+          <p:nvPr/>
+        </p:nvSpPr>
+        <p:spPr>
+          <a:xfrm>
             <a:off x="548640" y="2194560"/>
             <a:ext cx="3291840" cy="548640"/>
           </a:xfrm>
@@ -5373,7 +5604,46 @@
       </p:sp>
       <p:sp>
         <p:nvSpPr>
-          <p:cNvPr id="4" name="Text 2"/>
+          <p:cNvPr id="5" name="Text 3"/>
+          <p:cNvSpPr/>
+          <p:nvPr/>
+        </p:nvSpPr>
+        <p:spPr>
+          <a:xfrm>
+            <a:off x="548640" y="3200400"/>
+            <a:ext cx="3383280" cy="457200"/>
+          </a:xfrm>
+          <a:prstGeom prst="rect">
+            <a:avLst/>
+          </a:prstGeom>
+          <a:noFill/>
+          <a:ln/>
+        </p:spPr>
+        <p:txBody>
+          <a:bodyPr wrap="square" rtlCol="0" anchor="ctr"/>
+          <a:lstStyle/>
+          <a:p>
+            <a:pPr indent="0" marL="0">
+              <a:buNone/>
+            </a:pPr>
+            <a:r>
+              <a:rPr lang="en-US" sz="1100" dirty="0">
+                <a:solidFill>
+                  <a:srgbClr val="C7D2E3"/>
+                </a:solidFill>
+                <a:latin typeface="Arial" pitchFamily="34" charset="0"/>
+                <a:ea typeface="Arial" pitchFamily="34" charset="-122"/>
+                <a:cs typeface="Arial" pitchFamily="34" charset="-120"/>
+              </a:rPr>
+              <a:t>M8 · Etapa 3 · Operação ponta a ponta</a:t>
+            </a:r>
+            <a:endParaRPr lang="en-US" sz="1100" dirty="0"/>
+          </a:p>
+        </p:txBody>
+      </p:sp>
+      <p:sp>
+        <p:nvSpPr>
+          <p:cNvPr id="6" name="Text 4"/>
           <p:cNvSpPr/>
           <p:nvPr/>
         </p:nvSpPr>
@@ -5412,7 +5682,7 @@
       </p:sp>
       <p:pic>
         <p:nvPicPr>
-          <p:cNvPr id="5" name="Image 0" descr="/www/wwwroot/rexar/gdsolar/docs/curso/slides/assets/logo-gdsolar.png">    </p:cNvPr>
+          <p:cNvPr id="7" name="Image 0" descr="/www/wwwroot/rexar/gdsolar/docs/curso/slides/assets/logo-gdsolar.png">    </p:cNvPr>
           <p:cNvPicPr>
             <a:picLocks noChangeAspect="1"/>
           </p:cNvPicPr>
@@ -5436,7 +5706,7 @@
       </p:pic>
       <p:sp>
         <p:nvSpPr>
-          <p:cNvPr id="6" name="Text 3"/>
+          <p:cNvPr id="8" name="Text 5"/>
           <p:cNvSpPr/>
           <p:nvPr/>
         </p:nvSpPr>
@@ -5477,7 +5747,7 @@
       </p:sp>
       <p:sp>
         <p:nvSpPr>
-          <p:cNvPr id="7" name="Text 4"/>
+          <p:cNvPr id="9" name="Text 6"/>
           <p:cNvSpPr/>
           <p:nvPr/>
         </p:nvSpPr>
@@ -5518,7 +5788,7 @@
       </p:sp>
       <p:sp>
         <p:nvSpPr>
-          <p:cNvPr id="8" name="Text 5"/>
+          <p:cNvPr id="10" name="Text 7"/>
           <p:cNvSpPr/>
           <p:nvPr/>
         </p:nvSpPr>
@@ -5718,7 +5988,7 @@
         </p:blipFill>
         <p:spPr>
           <a:xfrm>
-            <a:off x="411480" y="6547104"/>
+            <a:off x="548640" y="6547104"/>
             <a:ext cx="274320" cy="274320"/>
           </a:xfrm>
           <a:prstGeom prst="rect">
@@ -5734,7 +6004,7 @@
         </p:nvSpPr>
         <p:spPr>
           <a:xfrm>
-            <a:off x="749808" y="6528816"/>
+            <a:off x="886968" y="6528816"/>
             <a:ext cx="6400800" cy="310896"/>
           </a:xfrm>
           <a:prstGeom prst="rect">
@@ -5774,7 +6044,7 @@
         <p:spPr>
           <a:xfrm>
             <a:off x="7132320" y="6528816"/>
-            <a:ext cx="4663440" cy="310896"/>
+            <a:ext cx="4023360" cy="310896"/>
           </a:xfrm>
           <a:prstGeom prst="rect">
             <a:avLst/>
@@ -5812,7 +6082,7 @@
         </p:nvSpPr>
         <p:spPr>
           <a:xfrm>
-            <a:off x="411480" y="384048"/>
+            <a:off x="548640" y="384048"/>
             <a:ext cx="82296" cy="658368"/>
           </a:xfrm>
           <a:prstGeom prst="rect">
@@ -5832,7 +6102,7 @@
         </p:nvSpPr>
         <p:spPr>
           <a:xfrm>
-            <a:off x="640080" y="292608"/>
+            <a:off x="777240" y="292608"/>
             <a:ext cx="10972800" cy="274320"/>
           </a:xfrm>
           <a:prstGeom prst="rect">
@@ -5871,8 +6141,8 @@
         </p:nvSpPr>
         <p:spPr>
           <a:xfrm>
-            <a:off x="640080" y="530352"/>
-            <a:ext cx="11155680" cy="566928"/>
+            <a:off x="777240" y="530352"/>
+            <a:ext cx="10881360" cy="566928"/>
           </a:xfrm>
           <a:prstGeom prst="rect">
             <a:avLst/>
@@ -5912,12 +6182,12 @@
         </p:nvSpPr>
         <p:spPr>
           <a:xfrm>
-            <a:off x="411480" y="1325880"/>
-            <a:ext cx="3611880" cy="4937760"/>
+            <a:off x="548640" y="1325880"/>
+            <a:ext cx="3514344" cy="4937760"/>
           </a:xfrm>
           <a:prstGeom prst="roundRect">
             <a:avLst>
-              <a:gd name="adj" fmla="val 2025"/>
+              <a:gd name="adj" fmla="val 2082"/>
             </a:avLst>
           </a:prstGeom>
           <a:solidFill>
@@ -5946,8 +6216,8 @@
         </p:nvSpPr>
         <p:spPr>
           <a:xfrm>
-            <a:off x="411480" y="1325880"/>
-            <a:ext cx="3611880" cy="109728"/>
+            <a:off x="548640" y="1325880"/>
+            <a:ext cx="3514344" cy="109728"/>
           </a:xfrm>
           <a:prstGeom prst="rect">
             <a:avLst/>
@@ -5966,8 +6236,8 @@
         </p:nvSpPr>
         <p:spPr>
           <a:xfrm>
-            <a:off x="685800" y="1554480"/>
-            <a:ext cx="3063240" cy="685800"/>
+            <a:off x="822960" y="1554480"/>
+            <a:ext cx="2965704" cy="685800"/>
           </a:xfrm>
           <a:prstGeom prst="rect">
             <a:avLst/>
@@ -6007,8 +6277,8 @@
         </p:nvSpPr>
         <p:spPr>
           <a:xfrm>
-            <a:off x="685800" y="2286000"/>
-            <a:ext cx="3063240" cy="3749040"/>
+            <a:off x="822960" y="2286000"/>
+            <a:ext cx="2965704" cy="3749040"/>
           </a:xfrm>
           <a:prstGeom prst="rect">
             <a:avLst/>
@@ -6030,7 +6300,7 @@
               <a:buChar char="●"/>
             </a:pPr>
             <a:r>
-              <a:rPr lang="en-US" sz="1200" dirty="0">
+              <a:rPr lang="en-US" sz="1700" dirty="0">
                 <a:solidFill>
                   <a:srgbClr val="1F2937"/>
                 </a:solidFill>
@@ -6040,7 +6310,7 @@
               </a:rPr>
               <a:t>Pix: copia e cola · confirmação em minutos · padrão da plataforma</a:t>
             </a:r>
-            <a:endParaRPr lang="en-US" sz="1200" dirty="0"/>
+            <a:endParaRPr lang="en-US" sz="1700" dirty="0"/>
           </a:p>
           <a:p>
             <a:pPr marL="342900" indent="-342900">
@@ -6051,7 +6321,7 @@
               <a:buChar char="●"/>
             </a:pPr>
             <a:r>
-              <a:rPr lang="en-US" sz="1200" dirty="0">
+              <a:rPr lang="en-US" sz="1700" dirty="0">
                 <a:solidFill>
                   <a:srgbClr val="1F2937"/>
                 </a:solidFill>
@@ -6061,7 +6331,7 @@
               </a:rPr>
               <a:t>Boleto: linha digitável e PDF com código de barras · compensação em até 3 dias úteis · exige endereço completo do pagador</a:t>
             </a:r>
-            <a:endParaRPr lang="en-US" sz="1200" dirty="0"/>
+            <a:endParaRPr lang="en-US" sz="1700" dirty="0"/>
           </a:p>
           <a:p>
             <a:pPr marL="342900" indent="-342900">
@@ -6072,7 +6342,7 @@
               <a:buChar char="●"/>
             </a:pPr>
             <a:r>
-              <a:rPr lang="en-US" sz="1200" dirty="0">
+              <a:rPr lang="en-US" sz="1700" dirty="0">
                 <a:solidFill>
                   <a:srgbClr val="1F2937"/>
                 </a:solidFill>
@@ -6082,7 +6352,7 @@
               </a:rPr>
               <a:t>Um pedido = um método (Pix OU boleto)</a:t>
             </a:r>
-            <a:endParaRPr lang="en-US" sz="1200" dirty="0"/>
+            <a:endParaRPr lang="en-US" sz="1700" dirty="0"/>
           </a:p>
         </p:txBody>
       </p:sp>
@@ -6094,12 +6364,12 @@
         </p:nvSpPr>
         <p:spPr>
           <a:xfrm>
-            <a:off x="4297680" y="1325880"/>
-            <a:ext cx="3611880" cy="4937760"/>
+            <a:off x="4337304" y="1325880"/>
+            <a:ext cx="3514344" cy="4937760"/>
           </a:xfrm>
           <a:prstGeom prst="roundRect">
             <a:avLst>
-              <a:gd name="adj" fmla="val 2025"/>
+              <a:gd name="adj" fmla="val 2082"/>
             </a:avLst>
           </a:prstGeom>
           <a:solidFill>
@@ -6128,8 +6398,8 @@
         </p:nvSpPr>
         <p:spPr>
           <a:xfrm>
-            <a:off x="4297680" y="1325880"/>
-            <a:ext cx="3611880" cy="109728"/>
+            <a:off x="4337304" y="1325880"/>
+            <a:ext cx="3514344" cy="109728"/>
           </a:xfrm>
           <a:prstGeom prst="rect">
             <a:avLst/>
@@ -6148,8 +6418,8 @@
         </p:nvSpPr>
         <p:spPr>
           <a:xfrm>
-            <a:off x="4572000" y="1554480"/>
-            <a:ext cx="3063240" cy="685800"/>
+            <a:off x="4611624" y="1554480"/>
+            <a:ext cx="2965704" cy="685800"/>
           </a:xfrm>
           <a:prstGeom prst="rect">
             <a:avLst/>
@@ -6189,8 +6459,8 @@
         </p:nvSpPr>
         <p:spPr>
           <a:xfrm>
-            <a:off x="4572000" y="2286000"/>
-            <a:ext cx="3063240" cy="3749040"/>
+            <a:off x="4611624" y="2286000"/>
+            <a:ext cx="2965704" cy="3749040"/>
           </a:xfrm>
           <a:prstGeom prst="rect">
             <a:avLst/>
@@ -6212,7 +6482,7 @@
               <a:buChar char="●"/>
             </a:pPr>
             <a:r>
-              <a:rPr lang="en-US" sz="1400" dirty="0">
+              <a:rPr lang="en-US" sz="1700" dirty="0">
                 <a:solidFill>
                   <a:srgbClr val="1F2937"/>
                 </a:solidFill>
@@ -6222,7 +6492,7 @@
               </a:rPr>
               <a:t>Vencimento da cobrança enviado ao Mercado Pago</a:t>
             </a:r>
-            <a:endParaRPr lang="en-US" sz="1400" dirty="0"/>
+            <a:endParaRPr lang="en-US" sz="1700" dirty="0"/>
           </a:p>
           <a:p>
             <a:pPr marL="342900" indent="-342900">
@@ -6233,7 +6503,7 @@
               <a:buChar char="●"/>
             </a:pPr>
             <a:r>
-              <a:rPr lang="en-US" sz="1400" dirty="0">
+              <a:rPr lang="en-US" sz="1700" dirty="0">
                 <a:solidFill>
                   <a:srgbClr val="1F2937"/>
                 </a:solidFill>
@@ -6243,7 +6513,7 @@
               </a:rPr>
               <a:t>fim de semana → próximo dia útil</a:t>
             </a:r>
-            <a:endParaRPr lang="en-US" sz="1400" dirty="0"/>
+            <a:endParaRPr lang="en-US" sz="1700" dirty="0"/>
           </a:p>
           <a:p>
             <a:pPr marL="342900" indent="-342900">
@@ -6254,7 +6524,7 @@
               <a:buChar char="●"/>
             </a:pPr>
             <a:r>
-              <a:rPr lang="en-US" sz="1400" dirty="0">
+              <a:rPr lang="en-US" sz="1700" dirty="0">
                 <a:solidFill>
                   <a:srgbClr val="1F2937"/>
                 </a:solidFill>
@@ -6264,7 +6534,7 @@
               </a:rPr>
               <a:t>data lida do código de barras é a que vale</a:t>
             </a:r>
-            <a:endParaRPr lang="en-US" sz="1400" dirty="0"/>
+            <a:endParaRPr lang="en-US" sz="1700" dirty="0"/>
           </a:p>
         </p:txBody>
       </p:sp>
@@ -6276,12 +6546,12 @@
         </p:nvSpPr>
         <p:spPr>
           <a:xfrm>
-            <a:off x="8183880" y="1325880"/>
-            <a:ext cx="3611880" cy="4937760"/>
+            <a:off x="8125968" y="1325880"/>
+            <a:ext cx="3514344" cy="4937760"/>
           </a:xfrm>
           <a:prstGeom prst="roundRect">
             <a:avLst>
-              <a:gd name="adj" fmla="val 2025"/>
+              <a:gd name="adj" fmla="val 2082"/>
             </a:avLst>
           </a:prstGeom>
           <a:solidFill>
@@ -6310,8 +6580,8 @@
         </p:nvSpPr>
         <p:spPr>
           <a:xfrm>
-            <a:off x="8183880" y="1325880"/>
-            <a:ext cx="3611880" cy="109728"/>
+            <a:off x="8125968" y="1325880"/>
+            <a:ext cx="3514344" cy="109728"/>
           </a:xfrm>
           <a:prstGeom prst="rect">
             <a:avLst/>
@@ -6330,8 +6600,8 @@
         </p:nvSpPr>
         <p:spPr>
           <a:xfrm>
-            <a:off x="8458200" y="1554480"/>
-            <a:ext cx="3063240" cy="685800"/>
+            <a:off x="8400288" y="1554480"/>
+            <a:ext cx="2965704" cy="685800"/>
           </a:xfrm>
           <a:prstGeom prst="rect">
             <a:avLst/>
@@ -6371,8 +6641,8 @@
         </p:nvSpPr>
         <p:spPr>
           <a:xfrm>
-            <a:off x="8458200" y="2286000"/>
-            <a:ext cx="3063240" cy="3749040"/>
+            <a:off x="8400288" y="2286000"/>
+            <a:ext cx="2965704" cy="3749040"/>
           </a:xfrm>
           <a:prstGeom prst="rect">
             <a:avLst/>
@@ -6390,7 +6660,7 @@
               <a:buNone/>
             </a:pPr>
             <a:r>
-              <a:rPr lang="en-US" sz="2000" dirty="0">
+              <a:rPr lang="en-US" sz="2200" dirty="0">
                 <a:solidFill>
                   <a:srgbClr val="1F2937"/>
                 </a:solidFill>
@@ -6400,7 +6670,55 @@
               </a:rPr>
               <a:t>Dois caminhos de baixa: webhook (na hora) + sincronização a cada 5 min</a:t>
             </a:r>
-            <a:endParaRPr lang="en-US" sz="2000" dirty="0"/>
+            <a:endParaRPr lang="en-US" sz="2200" dirty="0"/>
+          </a:p>
+        </p:txBody>
+      </p:sp>
+      <p:sp>
+        <p:nvSpPr>
+          <p:cNvPr id="25" name="Slide Number Placeholder 0"/>
+          <p:cNvSpPr>
+            <a:spLocks noGrp="1"/>
+          </p:cNvSpPr>
+          <p:nvPr>
+            <p:ph type="sldNum" sz="quarter" idx="4294967295"/>
+          </p:nvPr>
+        </p:nvSpPr>
+        <p:spPr>
+          <a:xfrm>
+            <a:off x="11292840" y="6556248"/>
+            <a:ext cx="548640" cy="256032"/>
+          </a:xfrm>
+          <a:prstGeom prst="rect">
+            <a:avLst/>
+          </a:prstGeom>
+          <a:extLst>
+            <a:ext uri="{C572A759-6A51-4108-AA02-DFA0A04FC94B}">
+              <ma14:wrappingTextBoxFlag xmlns:ma14="http://schemas.microsoft.com/office/mac/drawingml/2011/main" val="0"/>
+            </a:ext>
+          </a:extLst>
+        </p:spPr>
+        <p:txBody>
+          <a:bodyPr/>
+          <a:lstStyle>
+            <a:lvl1pPr>
+              <a:defRPr sz="900">
+                <a:solidFill>
+                  <a:srgbClr val="1B3A6B"/>
+                </a:solidFill>
+                <a:latin typeface="Arial"/>
+                <a:ea typeface="Arial"/>
+                <a:cs typeface="Arial"/>
+              </a:defRPr>
+            </a:lvl1pPr>
+          </a:lstStyle>
+          <a:p>
+            <a:pPr algn="r"/>
+            <a:fld id="{F7021451-1387-4CA6-816F-3879F97B5CBC}" type="slidenum">
+              <a:rPr b="1" lang="en-US"/>
+              <a:t>13</a:t>
+            </a:fld>
+            <a:endParaRPr lang="en-US"/>
           </a:p>
         </p:txBody>
       </p:sp>
@@ -6477,7 +6795,7 @@
         </p:blipFill>
         <p:spPr>
           <a:xfrm>
-            <a:off x="411480" y="6547104"/>
+            <a:off x="548640" y="6547104"/>
             <a:ext cx="274320" cy="274320"/>
           </a:xfrm>
           <a:prstGeom prst="rect">
@@ -6493,7 +6811,7 @@
         </p:nvSpPr>
         <p:spPr>
           <a:xfrm>
-            <a:off x="749808" y="6528816"/>
+            <a:off x="886968" y="6528816"/>
             <a:ext cx="6400800" cy="310896"/>
           </a:xfrm>
           <a:prstGeom prst="rect">
@@ -6533,7 +6851,7 @@
         <p:spPr>
           <a:xfrm>
             <a:off x="7132320" y="6528816"/>
-            <a:ext cx="4663440" cy="310896"/>
+            <a:ext cx="4023360" cy="310896"/>
           </a:xfrm>
           <a:prstGeom prst="rect">
             <a:avLst/>
@@ -6571,7 +6889,7 @@
         </p:nvSpPr>
         <p:spPr>
           <a:xfrm>
-            <a:off x="411480" y="384048"/>
+            <a:off x="548640" y="384048"/>
             <a:ext cx="82296" cy="658368"/>
           </a:xfrm>
           <a:prstGeom prst="rect">
@@ -6591,7 +6909,7 @@
         </p:nvSpPr>
         <p:spPr>
           <a:xfrm>
-            <a:off x="640080" y="292608"/>
+            <a:off x="777240" y="292608"/>
             <a:ext cx="10972800" cy="274320"/>
           </a:xfrm>
           <a:prstGeom prst="rect">
@@ -6630,8 +6948,8 @@
         </p:nvSpPr>
         <p:spPr>
           <a:xfrm>
-            <a:off x="640080" y="530352"/>
-            <a:ext cx="11155680" cy="566928"/>
+            <a:off x="777240" y="530352"/>
+            <a:ext cx="10881360" cy="566928"/>
           </a:xfrm>
           <a:prstGeom prst="rect">
             <a:avLst/>
@@ -6671,8 +6989,8 @@
         </p:nvSpPr>
         <p:spPr>
           <a:xfrm>
-            <a:off x="411480" y="1325880"/>
-            <a:ext cx="5554980" cy="4937760"/>
+            <a:off x="548640" y="1325880"/>
+            <a:ext cx="5408676" cy="4937760"/>
           </a:xfrm>
           <a:prstGeom prst="roundRect">
             <a:avLst>
@@ -6705,8 +7023,8 @@
         </p:nvSpPr>
         <p:spPr>
           <a:xfrm>
-            <a:off x="411480" y="1325880"/>
-            <a:ext cx="5554980" cy="109728"/>
+            <a:off x="548640" y="1325880"/>
+            <a:ext cx="5408676" cy="109728"/>
           </a:xfrm>
           <a:prstGeom prst="rect">
             <a:avLst/>
@@ -6725,8 +7043,8 @@
         </p:nvSpPr>
         <p:spPr>
           <a:xfrm>
-            <a:off x="685800" y="1554480"/>
-            <a:ext cx="5006340" cy="685800"/>
+            <a:off x="822960" y="1554480"/>
+            <a:ext cx="4860036" cy="685800"/>
           </a:xfrm>
           <a:prstGeom prst="rect">
             <a:avLst/>
@@ -6766,8 +7084,8 @@
         </p:nvSpPr>
         <p:spPr>
           <a:xfrm>
-            <a:off x="685800" y="2286000"/>
-            <a:ext cx="5006340" cy="3749040"/>
+            <a:off x="822960" y="2286000"/>
+            <a:ext cx="4860036" cy="3749040"/>
           </a:xfrm>
           <a:prstGeom prst="rect">
             <a:avLst/>
@@ -6789,7 +7107,7 @@
               <a:buChar char="●"/>
             </a:pPr>
             <a:r>
-              <a:rPr lang="en-US" sz="1300" dirty="0">
+              <a:rPr lang="en-US" sz="1700" dirty="0">
                 <a:solidFill>
                   <a:srgbClr val="1F2937"/>
                 </a:solidFill>
@@ -6799,7 +7117,7 @@
               </a:rPr>
               <a:t>Boleto vencido → marcado como vencido às 06:00 · PDF bloqueado · alerta ao consultor para reemitir · acompanhado por 10 dias</a:t>
             </a:r>
-            <a:endParaRPr lang="en-US" sz="1300" dirty="0"/>
+            <a:endParaRPr lang="en-US" sz="1700" dirty="0"/>
           </a:p>
           <a:p>
             <a:pPr marL="342900" indent="-342900">
@@ -6810,7 +7128,7 @@
               <a:buChar char="●"/>
             </a:pPr>
             <a:r>
-              <a:rPr lang="en-US" sz="1300" dirty="0">
+              <a:rPr lang="en-US" sz="1700" dirty="0">
                 <a:solidFill>
                   <a:srgbClr val="1F2937"/>
                 </a:solidFill>
@@ -6820,7 +7138,7 @@
               </a:rPr>
               <a:t>Cobrança cancelada ou paga manualmente → boleto cancelado no Mercado Pago</a:t>
             </a:r>
-            <a:endParaRPr lang="en-US" sz="1300" dirty="0"/>
+            <a:endParaRPr lang="en-US" sz="1700" dirty="0"/>
           </a:p>
           <a:p>
             <a:pPr marL="342900" indent="-342900">
@@ -6831,7 +7149,7 @@
               <a:buChar char="●"/>
             </a:pPr>
             <a:r>
-              <a:rPr lang="en-US" sz="1300" dirty="0">
+              <a:rPr lang="en-US" sz="1700" dirty="0">
                 <a:solidFill>
                   <a:srgbClr val="1F2937"/>
                 </a:solidFill>
@@ -6841,7 +7159,7 @@
               </a:rPr>
               <a:t>Estorno → registrado; cobrança segue paga; caso vai para revisão humana</a:t>
             </a:r>
-            <a:endParaRPr lang="en-US" sz="1300" dirty="0"/>
+            <a:endParaRPr lang="en-US" sz="1700" dirty="0"/>
           </a:p>
         </p:txBody>
       </p:sp>
@@ -6853,8 +7171,8 @@
         </p:nvSpPr>
         <p:spPr>
           <a:xfrm>
-            <a:off x="6240780" y="1325880"/>
-            <a:ext cx="5554980" cy="4937760"/>
+            <a:off x="6231636" y="1325880"/>
+            <a:ext cx="5408676" cy="4937760"/>
           </a:xfrm>
           <a:prstGeom prst="roundRect">
             <a:avLst>
@@ -6887,8 +7205,8 @@
         </p:nvSpPr>
         <p:spPr>
           <a:xfrm>
-            <a:off x="6240780" y="1325880"/>
-            <a:ext cx="5554980" cy="109728"/>
+            <a:off x="6231636" y="1325880"/>
+            <a:ext cx="5408676" cy="109728"/>
           </a:xfrm>
           <a:prstGeom prst="rect">
             <a:avLst/>
@@ -6907,8 +7225,8 @@
         </p:nvSpPr>
         <p:spPr>
           <a:xfrm>
-            <a:off x="6515100" y="1554480"/>
-            <a:ext cx="5006340" cy="685800"/>
+            <a:off x="6505956" y="1554480"/>
+            <a:ext cx="4860036" cy="685800"/>
           </a:xfrm>
           <a:prstGeom prst="rect">
             <a:avLst/>
@@ -6948,8 +7266,8 @@
         </p:nvSpPr>
         <p:spPr>
           <a:xfrm>
-            <a:off x="6515100" y="2286000"/>
-            <a:ext cx="5006340" cy="3749040"/>
+            <a:off x="6505956" y="2286000"/>
+            <a:ext cx="4860036" cy="3749040"/>
           </a:xfrm>
           <a:prstGeom prst="rect">
             <a:avLst/>
@@ -6971,7 +7289,7 @@
               <a:buChar char="●"/>
             </a:pPr>
             <a:r>
-              <a:rPr lang="en-US" sz="1600" dirty="0">
+              <a:rPr lang="en-US" sz="1700" dirty="0">
                 <a:solidFill>
                   <a:srgbClr val="1F2937"/>
                 </a:solidFill>
@@ -6981,7 +7299,7 @@
               </a:rPr>
               <a:t>Tarifas do meio de pagamento entram no custo variável (M3)</a:t>
             </a:r>
-            <a:endParaRPr lang="en-US" sz="1600" dirty="0"/>
+            <a:endParaRPr lang="en-US" sz="1700" dirty="0"/>
           </a:p>
           <a:p>
             <a:pPr marL="342900" indent="-342900">
@@ -6992,7 +7310,7 @@
               <a:buChar char="●"/>
             </a:pPr>
             <a:r>
-              <a:rPr lang="en-US" sz="1600" dirty="0">
+              <a:rPr lang="en-US" sz="1700" dirty="0">
                 <a:solidFill>
                   <a:srgbClr val="1F2937"/>
                 </a:solidFill>
@@ -7002,7 +7320,7 @@
               </a:rPr>
               <a:t>conta Mercado Pago configurada pelo admin</a:t>
             </a:r>
-            <a:endParaRPr lang="en-US" sz="1600" dirty="0"/>
+            <a:endParaRPr lang="en-US" sz="1700" dirty="0"/>
           </a:p>
           <a:p>
             <a:pPr marL="342900" indent="-342900">
@@ -7013,7 +7331,7 @@
               <a:buChar char="●"/>
             </a:pPr>
             <a:r>
-              <a:rPr lang="en-US" sz="1600" dirty="0">
+              <a:rPr lang="en-US" sz="1700" dirty="0">
                 <a:solidFill>
                   <a:srgbClr val="1F2937"/>
                 </a:solidFill>
@@ -7023,7 +7341,55 @@
               </a:rPr>
               <a:t>credenciais criptografadas</a:t>
             </a:r>
-            <a:endParaRPr lang="en-US" sz="1600" dirty="0"/>
+            <a:endParaRPr lang="en-US" sz="1700" dirty="0"/>
+          </a:p>
+        </p:txBody>
+      </p:sp>
+      <p:sp>
+        <p:nvSpPr>
+          <p:cNvPr id="25" name="Slide Number Placeholder 0"/>
+          <p:cNvSpPr>
+            <a:spLocks noGrp="1"/>
+          </p:cNvSpPr>
+          <p:nvPr>
+            <p:ph type="sldNum" sz="quarter" idx="4294967295"/>
+          </p:nvPr>
+        </p:nvSpPr>
+        <p:spPr>
+          <a:xfrm>
+            <a:off x="11292840" y="6556248"/>
+            <a:ext cx="548640" cy="256032"/>
+          </a:xfrm>
+          <a:prstGeom prst="rect">
+            <a:avLst/>
+          </a:prstGeom>
+          <a:extLst>
+            <a:ext uri="{C572A759-6A51-4108-AA02-DFA0A04FC94B}">
+              <ma14:wrappingTextBoxFlag xmlns:ma14="http://schemas.microsoft.com/office/mac/drawingml/2011/main" val="0"/>
+            </a:ext>
+          </a:extLst>
+        </p:spPr>
+        <p:txBody>
+          <a:bodyPr/>
+          <a:lstStyle>
+            <a:lvl1pPr>
+              <a:defRPr sz="900">
+                <a:solidFill>
+                  <a:srgbClr val="1B3A6B"/>
+                </a:solidFill>
+                <a:latin typeface="Arial"/>
+                <a:ea typeface="Arial"/>
+                <a:cs typeface="Arial"/>
+              </a:defRPr>
+            </a:lvl1pPr>
+          </a:lstStyle>
+          <a:p>
+            <a:pPr algn="r"/>
+            <a:fld id="{F7021451-1387-4CA6-816F-3879F97B5CBC}" type="slidenum">
+              <a:rPr b="1" lang="en-US"/>
+              <a:t>14</a:t>
+            </a:fld>
+            <a:endParaRPr lang="en-US"/>
           </a:p>
         </p:txBody>
       </p:sp>
@@ -7100,7 +7466,7 @@
         </p:blipFill>
         <p:spPr>
           <a:xfrm>
-            <a:off x="411480" y="6547104"/>
+            <a:off x="548640" y="6547104"/>
             <a:ext cx="274320" cy="274320"/>
           </a:xfrm>
           <a:prstGeom prst="rect">
@@ -7116,7 +7482,7 @@
         </p:nvSpPr>
         <p:spPr>
           <a:xfrm>
-            <a:off x="749808" y="6528816"/>
+            <a:off x="886968" y="6528816"/>
             <a:ext cx="6400800" cy="310896"/>
           </a:xfrm>
           <a:prstGeom prst="rect">
@@ -7156,7 +7522,7 @@
         <p:spPr>
           <a:xfrm>
             <a:off x="7132320" y="6528816"/>
-            <a:ext cx="4663440" cy="310896"/>
+            <a:ext cx="4023360" cy="310896"/>
           </a:xfrm>
           <a:prstGeom prst="rect">
             <a:avLst/>
@@ -7194,7 +7560,7 @@
         </p:nvSpPr>
         <p:spPr>
           <a:xfrm>
-            <a:off x="411480" y="384048"/>
+            <a:off x="548640" y="384048"/>
             <a:ext cx="82296" cy="658368"/>
           </a:xfrm>
           <a:prstGeom prst="rect">
@@ -7214,7 +7580,7 @@
         </p:nvSpPr>
         <p:spPr>
           <a:xfrm>
-            <a:off x="640080" y="292608"/>
+            <a:off x="777240" y="292608"/>
             <a:ext cx="10972800" cy="274320"/>
           </a:xfrm>
           <a:prstGeom prst="rect">
@@ -7253,8 +7619,8 @@
         </p:nvSpPr>
         <p:spPr>
           <a:xfrm>
-            <a:off x="640080" y="530352"/>
-            <a:ext cx="11155680" cy="566928"/>
+            <a:off x="777240" y="530352"/>
+            <a:ext cx="10881360" cy="566928"/>
           </a:xfrm>
           <a:prstGeom prst="rect">
             <a:avLst/>
@@ -7294,8 +7660,8 @@
         </p:nvSpPr>
         <p:spPr>
           <a:xfrm>
-            <a:off x="411480" y="1325880"/>
-            <a:ext cx="5577840" cy="2331720"/>
+            <a:off x="548640" y="1325880"/>
+            <a:ext cx="5431536" cy="2331720"/>
           </a:xfrm>
           <a:prstGeom prst="roundRect">
             <a:avLst>
@@ -7328,7 +7694,7 @@
         </p:nvSpPr>
         <p:spPr>
           <a:xfrm>
-            <a:off x="594360" y="1508760"/>
+            <a:off x="731520" y="1508760"/>
             <a:ext cx="457200" cy="457200"/>
           </a:xfrm>
           <a:prstGeom prst="ellipse">
@@ -7348,7 +7714,7 @@
         </p:nvSpPr>
         <p:spPr>
           <a:xfrm>
-            <a:off x="594360" y="1508760"/>
+            <a:off x="731520" y="1508760"/>
             <a:ext cx="457200" cy="457200"/>
           </a:xfrm>
           <a:prstGeom prst="rect">
@@ -7387,8 +7753,8 @@
         </p:nvSpPr>
         <p:spPr>
           <a:xfrm>
-            <a:off x="1188720" y="1435608"/>
-            <a:ext cx="4663440" cy="2112264"/>
+            <a:off x="1325880" y="1435608"/>
+            <a:ext cx="4517136" cy="2112264"/>
           </a:xfrm>
           <a:prstGeom prst="rect">
             <a:avLst/>
@@ -7428,8 +7794,8 @@
         </p:nvSpPr>
         <p:spPr>
           <a:xfrm>
-            <a:off x="6217920" y="1325880"/>
-            <a:ext cx="5577840" cy="2331720"/>
+            <a:off x="6208776" y="1325880"/>
+            <a:ext cx="5431536" cy="2331720"/>
           </a:xfrm>
           <a:prstGeom prst="roundRect">
             <a:avLst>
@@ -7462,7 +7828,7 @@
         </p:nvSpPr>
         <p:spPr>
           <a:xfrm>
-            <a:off x="6400800" y="1508760"/>
+            <a:off x="6391656" y="1508760"/>
             <a:ext cx="457200" cy="457200"/>
           </a:xfrm>
           <a:prstGeom prst="ellipse">
@@ -7482,7 +7848,7 @@
         </p:nvSpPr>
         <p:spPr>
           <a:xfrm>
-            <a:off x="6400800" y="1508760"/>
+            <a:off x="6391656" y="1508760"/>
             <a:ext cx="457200" cy="457200"/>
           </a:xfrm>
           <a:prstGeom prst="rect">
@@ -7521,8 +7887,8 @@
         </p:nvSpPr>
         <p:spPr>
           <a:xfrm>
-            <a:off x="6995160" y="1435608"/>
-            <a:ext cx="4663440" cy="2112264"/>
+            <a:off x="6986016" y="1435608"/>
+            <a:ext cx="4517136" cy="2112264"/>
           </a:xfrm>
           <a:prstGeom prst="rect">
             <a:avLst/>
@@ -7562,8 +7928,8 @@
         </p:nvSpPr>
         <p:spPr>
           <a:xfrm>
-            <a:off x="411480" y="3886200"/>
-            <a:ext cx="5577840" cy="2331720"/>
+            <a:off x="548640" y="3886200"/>
+            <a:ext cx="5431536" cy="2331720"/>
           </a:xfrm>
           <a:prstGeom prst="roundRect">
             <a:avLst>
@@ -7596,7 +7962,7 @@
         </p:nvSpPr>
         <p:spPr>
           <a:xfrm>
-            <a:off x="594360" y="4069080"/>
+            <a:off x="731520" y="4069080"/>
             <a:ext cx="457200" cy="457200"/>
           </a:xfrm>
           <a:prstGeom prst="ellipse">
@@ -7616,7 +7982,7 @@
         </p:nvSpPr>
         <p:spPr>
           <a:xfrm>
-            <a:off x="594360" y="4069080"/>
+            <a:off x="731520" y="4069080"/>
             <a:ext cx="457200" cy="457200"/>
           </a:xfrm>
           <a:prstGeom prst="rect">
@@ -7655,8 +8021,8 @@
         </p:nvSpPr>
         <p:spPr>
           <a:xfrm>
-            <a:off x="1188720" y="3995928"/>
-            <a:ext cx="4663440" cy="2112264"/>
+            <a:off x="1325880" y="3995928"/>
+            <a:ext cx="4517136" cy="2112264"/>
           </a:xfrm>
           <a:prstGeom prst="rect">
             <a:avLst/>
@@ -7696,8 +8062,8 @@
         </p:nvSpPr>
         <p:spPr>
           <a:xfrm>
-            <a:off x="6217920" y="3886200"/>
-            <a:ext cx="5577840" cy="2331720"/>
+            <a:off x="6208776" y="3886200"/>
+            <a:ext cx="5431536" cy="2331720"/>
           </a:xfrm>
           <a:prstGeom prst="roundRect">
             <a:avLst>
@@ -7730,7 +8096,7 @@
         </p:nvSpPr>
         <p:spPr>
           <a:xfrm>
-            <a:off x="6400800" y="4069080"/>
+            <a:off x="6391656" y="4069080"/>
             <a:ext cx="457200" cy="457200"/>
           </a:xfrm>
           <a:prstGeom prst="ellipse">
@@ -7750,7 +8116,7 @@
         </p:nvSpPr>
         <p:spPr>
           <a:xfrm>
-            <a:off x="6400800" y="4069080"/>
+            <a:off x="6391656" y="4069080"/>
             <a:ext cx="457200" cy="457200"/>
           </a:xfrm>
           <a:prstGeom prst="rect">
@@ -7789,8 +8155,8 @@
         </p:nvSpPr>
         <p:spPr>
           <a:xfrm>
-            <a:off x="6995160" y="3995928"/>
-            <a:ext cx="4663440" cy="2112264"/>
+            <a:off x="6986016" y="3995928"/>
+            <a:ext cx="4517136" cy="2112264"/>
           </a:xfrm>
           <a:prstGeom prst="rect">
             <a:avLst/>
@@ -7819,6 +8185,54 @@
               <a:t>estorno: revisão</a:t>
             </a:r>
             <a:endParaRPr lang="en-US" sz="1800" dirty="0"/>
+          </a:p>
+        </p:txBody>
+      </p:sp>
+      <p:sp>
+        <p:nvSpPr>
+          <p:cNvPr id="25" name="Slide Number Placeholder 0"/>
+          <p:cNvSpPr>
+            <a:spLocks noGrp="1"/>
+          </p:cNvSpPr>
+          <p:nvPr>
+            <p:ph type="sldNum" sz="quarter" idx="4294967295"/>
+          </p:nvPr>
+        </p:nvSpPr>
+        <p:spPr>
+          <a:xfrm>
+            <a:off x="11292840" y="6556248"/>
+            <a:ext cx="548640" cy="256032"/>
+          </a:xfrm>
+          <a:prstGeom prst="rect">
+            <a:avLst/>
+          </a:prstGeom>
+          <a:extLst>
+            <a:ext uri="{C572A759-6A51-4108-AA02-DFA0A04FC94B}">
+              <ma14:wrappingTextBoxFlag xmlns:ma14="http://schemas.microsoft.com/office/mac/drawingml/2011/main" val="0"/>
+            </a:ext>
+          </a:extLst>
+        </p:spPr>
+        <p:txBody>
+          <a:bodyPr/>
+          <a:lstStyle>
+            <a:lvl1pPr>
+              <a:defRPr sz="900">
+                <a:solidFill>
+                  <a:srgbClr val="1B3A6B"/>
+                </a:solidFill>
+                <a:latin typeface="Arial"/>
+                <a:ea typeface="Arial"/>
+                <a:cs typeface="Arial"/>
+              </a:defRPr>
+            </a:lvl1pPr>
+          </a:lstStyle>
+          <a:p>
+            <a:pPr algn="r"/>
+            <a:fld id="{F7021451-1387-4CA6-816F-3879F97B5CBC}" type="slidenum">
+              <a:rPr b="1" lang="en-US"/>
+              <a:t>15</a:t>
+            </a:fld>
+            <a:endParaRPr lang="en-US"/>
           </a:p>
         </p:txBody>
       </p:sp>
@@ -7882,6 +8296,45 @@
         </p:nvSpPr>
         <p:spPr>
           <a:xfrm>
+            <a:off x="457200" y="548640"/>
+            <a:ext cx="3474720" cy="1737360"/>
+          </a:xfrm>
+          <a:prstGeom prst="rect">
+            <a:avLst/>
+          </a:prstGeom>
+          <a:noFill/>
+          <a:ln/>
+        </p:spPr>
+        <p:txBody>
+          <a:bodyPr wrap="square" rtlCol="0" anchor="ctr"/>
+          <a:lstStyle/>
+          <a:p>
+            <a:pPr indent="0" marL="0">
+              <a:buNone/>
+            </a:pPr>
+            <a:r>
+              <a:rPr lang="en-US" sz="11000" b="1" dirty="0">
+                <a:solidFill>
+                  <a:srgbClr val="11396F"/>
+                </a:solidFill>
+                <a:latin typeface="Arial" pitchFamily="34" charset="0"/>
+                <a:ea typeface="Arial" pitchFamily="34" charset="-122"/>
+                <a:cs typeface="Arial" pitchFamily="34" charset="-120"/>
+              </a:rPr>
+              <a:t>04</a:t>
+            </a:r>
+            <a:endParaRPr lang="en-US" sz="11000" dirty="0"/>
+          </a:p>
+        </p:txBody>
+      </p:sp>
+      <p:sp>
+        <p:nvSpPr>
+          <p:cNvPr id="4" name="Text 2"/>
+          <p:cNvSpPr/>
+          <p:nvPr/>
+        </p:nvSpPr>
+        <p:spPr>
+          <a:xfrm>
             <a:off x="548640" y="2194560"/>
             <a:ext cx="3291840" cy="548640"/>
           </a:xfrm>
@@ -7915,7 +8368,46 @@
       </p:sp>
       <p:sp>
         <p:nvSpPr>
-          <p:cNvPr id="4" name="Text 2"/>
+          <p:cNvPr id="5" name="Text 3"/>
+          <p:cNvSpPr/>
+          <p:nvPr/>
+        </p:nvSpPr>
+        <p:spPr>
+          <a:xfrm>
+            <a:off x="548640" y="3200400"/>
+            <a:ext cx="3383280" cy="457200"/>
+          </a:xfrm>
+          <a:prstGeom prst="rect">
+            <a:avLst/>
+          </a:prstGeom>
+          <a:noFill/>
+          <a:ln/>
+        </p:spPr>
+        <p:txBody>
+          <a:bodyPr wrap="square" rtlCol="0" anchor="ctr"/>
+          <a:lstStyle/>
+          <a:p>
+            <a:pPr indent="0" marL="0">
+              <a:buNone/>
+            </a:pPr>
+            <a:r>
+              <a:rPr lang="en-US" sz="1100" dirty="0">
+                <a:solidFill>
+                  <a:srgbClr val="C7D2E3"/>
+                </a:solidFill>
+                <a:latin typeface="Arial" pitchFamily="34" charset="0"/>
+                <a:ea typeface="Arial" pitchFamily="34" charset="-122"/>
+                <a:cs typeface="Arial" pitchFamily="34" charset="-120"/>
+              </a:rPr>
+              <a:t>M8 · Etapa 3 · Operação ponta a ponta</a:t>
+            </a:r>
+            <a:endParaRPr lang="en-US" sz="1100" dirty="0"/>
+          </a:p>
+        </p:txBody>
+      </p:sp>
+      <p:sp>
+        <p:nvSpPr>
+          <p:cNvPr id="6" name="Text 4"/>
           <p:cNvSpPr/>
           <p:nvPr/>
         </p:nvSpPr>
@@ -7954,7 +8446,7 @@
       </p:sp>
       <p:pic>
         <p:nvPicPr>
-          <p:cNvPr id="5" name="Image 0" descr="/www/wwwroot/rexar/gdsolar/docs/curso/slides/assets/logo-gdsolar.png">    </p:cNvPr>
+          <p:cNvPr id="7" name="Image 0" descr="/www/wwwroot/rexar/gdsolar/docs/curso/slides/assets/logo-gdsolar.png">    </p:cNvPr>
           <p:cNvPicPr>
             <a:picLocks noChangeAspect="1"/>
           </p:cNvPicPr>
@@ -7978,7 +8470,7 @@
       </p:pic>
       <p:sp>
         <p:nvSpPr>
-          <p:cNvPr id="6" name="Text 3"/>
+          <p:cNvPr id="8" name="Text 5"/>
           <p:cNvSpPr/>
           <p:nvPr/>
         </p:nvSpPr>
@@ -8019,7 +8511,7 @@
       </p:sp>
       <p:sp>
         <p:nvSpPr>
-          <p:cNvPr id="7" name="Text 4"/>
+          <p:cNvPr id="9" name="Text 6"/>
           <p:cNvSpPr/>
           <p:nvPr/>
         </p:nvSpPr>
@@ -8060,7 +8552,7 @@
       </p:sp>
       <p:sp>
         <p:nvSpPr>
-          <p:cNvPr id="8" name="Text 5"/>
+          <p:cNvPr id="10" name="Text 7"/>
           <p:cNvSpPr/>
           <p:nvPr/>
         </p:nvSpPr>
@@ -8260,7 +8752,7 @@
         </p:blipFill>
         <p:spPr>
           <a:xfrm>
-            <a:off x="411480" y="6547104"/>
+            <a:off x="548640" y="6547104"/>
             <a:ext cx="274320" cy="274320"/>
           </a:xfrm>
           <a:prstGeom prst="rect">
@@ -8276,7 +8768,7 @@
         </p:nvSpPr>
         <p:spPr>
           <a:xfrm>
-            <a:off x="749808" y="6528816"/>
+            <a:off x="886968" y="6528816"/>
             <a:ext cx="6400800" cy="310896"/>
           </a:xfrm>
           <a:prstGeom prst="rect">
@@ -8316,7 +8808,7 @@
         <p:spPr>
           <a:xfrm>
             <a:off x="7132320" y="6528816"/>
-            <a:ext cx="4663440" cy="310896"/>
+            <a:ext cx="4023360" cy="310896"/>
           </a:xfrm>
           <a:prstGeom prst="rect">
             <a:avLst/>
@@ -8354,7 +8846,7 @@
         </p:nvSpPr>
         <p:spPr>
           <a:xfrm>
-            <a:off x="411480" y="384048"/>
+            <a:off x="548640" y="384048"/>
             <a:ext cx="82296" cy="658368"/>
           </a:xfrm>
           <a:prstGeom prst="rect">
@@ -8374,7 +8866,7 @@
         </p:nvSpPr>
         <p:spPr>
           <a:xfrm>
-            <a:off x="640080" y="292608"/>
+            <a:off x="777240" y="292608"/>
             <a:ext cx="10972800" cy="274320"/>
           </a:xfrm>
           <a:prstGeom prst="rect">
@@ -8413,8 +8905,8 @@
         </p:nvSpPr>
         <p:spPr>
           <a:xfrm>
-            <a:off x="640080" y="530352"/>
-            <a:ext cx="11155680" cy="566928"/>
+            <a:off x="777240" y="530352"/>
+            <a:ext cx="10881360" cy="566928"/>
           </a:xfrm>
           <a:prstGeom prst="rect">
             <a:avLst/>
@@ -8454,8 +8946,8 @@
         </p:nvSpPr>
         <p:spPr>
           <a:xfrm>
-            <a:off x="411480" y="1325880"/>
-            <a:ext cx="3642360" cy="2331720"/>
+            <a:off x="548640" y="1325880"/>
+            <a:ext cx="3544824" cy="2331720"/>
           </a:xfrm>
           <a:prstGeom prst="roundRect">
             <a:avLst>
@@ -8488,7 +8980,7 @@
         </p:nvSpPr>
         <p:spPr>
           <a:xfrm>
-            <a:off x="594360" y="1508760"/>
+            <a:off x="731520" y="1508760"/>
             <a:ext cx="457200" cy="457200"/>
           </a:xfrm>
           <a:prstGeom prst="ellipse">
@@ -8508,7 +9000,7 @@
         </p:nvSpPr>
         <p:spPr>
           <a:xfrm>
-            <a:off x="594360" y="1508760"/>
+            <a:off x="731520" y="1508760"/>
             <a:ext cx="457200" cy="457200"/>
           </a:xfrm>
           <a:prstGeom prst="rect">
@@ -8547,8 +9039,8 @@
         </p:nvSpPr>
         <p:spPr>
           <a:xfrm>
-            <a:off x="1188720" y="1435608"/>
-            <a:ext cx="2727960" cy="2112264"/>
+            <a:off x="1325880" y="1435608"/>
+            <a:ext cx="2630424" cy="2112264"/>
           </a:xfrm>
           <a:prstGeom prst="rect">
             <a:avLst/>
@@ -8588,8 +9080,8 @@
         </p:nvSpPr>
         <p:spPr>
           <a:xfrm>
-            <a:off x="4282440" y="1325880"/>
-            <a:ext cx="3642360" cy="2331720"/>
+            <a:off x="4322064" y="1325880"/>
+            <a:ext cx="3544824" cy="2331720"/>
           </a:xfrm>
           <a:prstGeom prst="roundRect">
             <a:avLst>
@@ -8622,7 +9114,7 @@
         </p:nvSpPr>
         <p:spPr>
           <a:xfrm>
-            <a:off x="4465320" y="1508760"/>
+            <a:off x="4504944" y="1508760"/>
             <a:ext cx="457200" cy="457200"/>
           </a:xfrm>
           <a:prstGeom prst="ellipse">
@@ -8642,7 +9134,7 @@
         </p:nvSpPr>
         <p:spPr>
           <a:xfrm>
-            <a:off x="4465320" y="1508760"/>
+            <a:off x="4504944" y="1508760"/>
             <a:ext cx="457200" cy="457200"/>
           </a:xfrm>
           <a:prstGeom prst="rect">
@@ -8681,8 +9173,8 @@
         </p:nvSpPr>
         <p:spPr>
           <a:xfrm>
-            <a:off x="5059680" y="1435608"/>
-            <a:ext cx="2727960" cy="2112264"/>
+            <a:off x="5099304" y="1435608"/>
+            <a:ext cx="2630424" cy="2112264"/>
           </a:xfrm>
           <a:prstGeom prst="rect">
             <a:avLst/>
@@ -8722,8 +9214,8 @@
         </p:nvSpPr>
         <p:spPr>
           <a:xfrm>
-            <a:off x="8153400" y="1325880"/>
-            <a:ext cx="3642360" cy="2331720"/>
+            <a:off x="8095488" y="1325880"/>
+            <a:ext cx="3544824" cy="2331720"/>
           </a:xfrm>
           <a:prstGeom prst="roundRect">
             <a:avLst>
@@ -8756,7 +9248,7 @@
         </p:nvSpPr>
         <p:spPr>
           <a:xfrm>
-            <a:off x="8336280" y="1508760"/>
+            <a:off x="8278368" y="1508760"/>
             <a:ext cx="457200" cy="457200"/>
           </a:xfrm>
           <a:prstGeom prst="ellipse">
@@ -8776,7 +9268,7 @@
         </p:nvSpPr>
         <p:spPr>
           <a:xfrm>
-            <a:off x="8336280" y="1508760"/>
+            <a:off x="8278368" y="1508760"/>
             <a:ext cx="457200" cy="457200"/>
           </a:xfrm>
           <a:prstGeom prst="rect">
@@ -8815,8 +9307,8 @@
         </p:nvSpPr>
         <p:spPr>
           <a:xfrm>
-            <a:off x="8930640" y="1435608"/>
-            <a:ext cx="2727960" cy="2112264"/>
+            <a:off x="8872728" y="1435608"/>
+            <a:ext cx="2630424" cy="2112264"/>
           </a:xfrm>
           <a:prstGeom prst="rect">
             <a:avLst/>
@@ -8856,8 +9348,8 @@
         </p:nvSpPr>
         <p:spPr>
           <a:xfrm>
-            <a:off x="411480" y="3886200"/>
-            <a:ext cx="3642360" cy="2331720"/>
+            <a:off x="548640" y="3886200"/>
+            <a:ext cx="3544824" cy="2331720"/>
           </a:xfrm>
           <a:prstGeom prst="roundRect">
             <a:avLst>
@@ -8890,7 +9382,7 @@
         </p:nvSpPr>
         <p:spPr>
           <a:xfrm>
-            <a:off x="594360" y="4069080"/>
+            <a:off x="731520" y="4069080"/>
             <a:ext cx="457200" cy="457200"/>
           </a:xfrm>
           <a:prstGeom prst="ellipse">
@@ -8910,7 +9402,7 @@
         </p:nvSpPr>
         <p:spPr>
           <a:xfrm>
-            <a:off x="594360" y="4069080"/>
+            <a:off x="731520" y="4069080"/>
             <a:ext cx="457200" cy="457200"/>
           </a:xfrm>
           <a:prstGeom prst="rect">
@@ -8949,8 +9441,8 @@
         </p:nvSpPr>
         <p:spPr>
           <a:xfrm>
-            <a:off x="1188720" y="3995928"/>
-            <a:ext cx="2727960" cy="2112264"/>
+            <a:off x="1325880" y="3995928"/>
+            <a:ext cx="2630424" cy="2112264"/>
           </a:xfrm>
           <a:prstGeom prst="rect">
             <a:avLst/>
@@ -8990,8 +9482,8 @@
         </p:nvSpPr>
         <p:spPr>
           <a:xfrm>
-            <a:off x="4282440" y="3886200"/>
-            <a:ext cx="3642360" cy="2331720"/>
+            <a:off x="4322064" y="3886200"/>
+            <a:ext cx="3544824" cy="2331720"/>
           </a:xfrm>
           <a:prstGeom prst="roundRect">
             <a:avLst>
@@ -9024,7 +9516,7 @@
         </p:nvSpPr>
         <p:spPr>
           <a:xfrm>
-            <a:off x="4465320" y="4069080"/>
+            <a:off x="4504944" y="4069080"/>
             <a:ext cx="457200" cy="457200"/>
           </a:xfrm>
           <a:prstGeom prst="ellipse">
@@ -9044,7 +9536,7 @@
         </p:nvSpPr>
         <p:spPr>
           <a:xfrm>
-            <a:off x="4465320" y="4069080"/>
+            <a:off x="4504944" y="4069080"/>
             <a:ext cx="457200" cy="457200"/>
           </a:xfrm>
           <a:prstGeom prst="rect">
@@ -9083,8 +9575,8 @@
         </p:nvSpPr>
         <p:spPr>
           <a:xfrm>
-            <a:off x="5059680" y="3995928"/>
-            <a:ext cx="2727960" cy="2112264"/>
+            <a:off x="5099304" y="3995928"/>
+            <a:ext cx="2630424" cy="2112264"/>
           </a:xfrm>
           <a:prstGeom prst="rect">
             <a:avLst/>
@@ -9124,8 +9616,8 @@
         </p:nvSpPr>
         <p:spPr>
           <a:xfrm>
-            <a:off x="8153400" y="3886200"/>
-            <a:ext cx="3642360" cy="2331720"/>
+            <a:off x="8095488" y="3886200"/>
+            <a:ext cx="3544824" cy="2331720"/>
           </a:xfrm>
           <a:prstGeom prst="roundRect">
             <a:avLst>
@@ -9158,7 +9650,7 @@
         </p:nvSpPr>
         <p:spPr>
           <a:xfrm>
-            <a:off x="8336280" y="4069080"/>
+            <a:off x="8278368" y="4069080"/>
             <a:ext cx="457200" cy="457200"/>
           </a:xfrm>
           <a:prstGeom prst="ellipse">
@@ -9178,7 +9670,7 @@
         </p:nvSpPr>
         <p:spPr>
           <a:xfrm>
-            <a:off x="8336280" y="4069080"/>
+            <a:off x="8278368" y="4069080"/>
             <a:ext cx="457200" cy="457200"/>
           </a:xfrm>
           <a:prstGeom prst="rect">
@@ -9217,8 +9709,8 @@
         </p:nvSpPr>
         <p:spPr>
           <a:xfrm>
-            <a:off x="8930640" y="3995928"/>
-            <a:ext cx="2727960" cy="2112264"/>
+            <a:off x="8872728" y="3995928"/>
+            <a:ext cx="2630424" cy="2112264"/>
           </a:xfrm>
           <a:prstGeom prst="rect">
             <a:avLst/>
@@ -9247,6 +9739,54 @@
               <a:t>D+30: medidas contratuais (aviso formal, suspensão da participação)</a:t>
             </a:r>
             <a:endParaRPr lang="en-US" sz="1800" dirty="0"/>
+          </a:p>
+        </p:txBody>
+      </p:sp>
+      <p:sp>
+        <p:nvSpPr>
+          <p:cNvPr id="25" name="Slide Number Placeholder 0"/>
+          <p:cNvSpPr>
+            <a:spLocks noGrp="1"/>
+          </p:cNvSpPr>
+          <p:nvPr>
+            <p:ph type="sldNum" sz="quarter" idx="4294967295"/>
+          </p:nvPr>
+        </p:nvSpPr>
+        <p:spPr>
+          <a:xfrm>
+            <a:off x="11292840" y="6556248"/>
+            <a:ext cx="548640" cy="256032"/>
+          </a:xfrm>
+          <a:prstGeom prst="rect">
+            <a:avLst/>
+          </a:prstGeom>
+          <a:extLst>
+            <a:ext uri="{C572A759-6A51-4108-AA02-DFA0A04FC94B}">
+              <ma14:wrappingTextBoxFlag xmlns:ma14="http://schemas.microsoft.com/office/mac/drawingml/2011/main" val="0"/>
+            </a:ext>
+          </a:extLst>
+        </p:spPr>
+        <p:txBody>
+          <a:bodyPr/>
+          <a:lstStyle>
+            <a:lvl1pPr>
+              <a:defRPr sz="900">
+                <a:solidFill>
+                  <a:srgbClr val="1B3A6B"/>
+                </a:solidFill>
+                <a:latin typeface="Arial"/>
+                <a:ea typeface="Arial"/>
+                <a:cs typeface="Arial"/>
+              </a:defRPr>
+            </a:lvl1pPr>
+          </a:lstStyle>
+          <a:p>
+            <a:pPr algn="r"/>
+            <a:fld id="{F7021451-1387-4CA6-816F-3879F97B5CBC}" type="slidenum">
+              <a:rPr b="1" lang="en-US"/>
+              <a:t>17</a:t>
+            </a:fld>
+            <a:endParaRPr lang="en-US"/>
           </a:p>
         </p:txBody>
       </p:sp>
@@ -9323,7 +9863,7 @@
         </p:blipFill>
         <p:spPr>
           <a:xfrm>
-            <a:off x="411480" y="6547104"/>
+            <a:off x="548640" y="6547104"/>
             <a:ext cx="274320" cy="274320"/>
           </a:xfrm>
           <a:prstGeom prst="rect">
@@ -9339,7 +9879,7 @@
         </p:nvSpPr>
         <p:spPr>
           <a:xfrm>
-            <a:off x="749808" y="6528816"/>
+            <a:off x="886968" y="6528816"/>
             <a:ext cx="6400800" cy="310896"/>
           </a:xfrm>
           <a:prstGeom prst="rect">
@@ -9379,7 +9919,7 @@
         <p:spPr>
           <a:xfrm>
             <a:off x="7132320" y="6528816"/>
-            <a:ext cx="4663440" cy="310896"/>
+            <a:ext cx="4023360" cy="310896"/>
           </a:xfrm>
           <a:prstGeom prst="rect">
             <a:avLst/>
@@ -9417,7 +9957,7 @@
         </p:nvSpPr>
         <p:spPr>
           <a:xfrm>
-            <a:off x="411480" y="384048"/>
+            <a:off x="548640" y="384048"/>
             <a:ext cx="82296" cy="658368"/>
           </a:xfrm>
           <a:prstGeom prst="rect">
@@ -9437,7 +9977,7 @@
         </p:nvSpPr>
         <p:spPr>
           <a:xfrm>
-            <a:off x="640080" y="292608"/>
+            <a:off x="777240" y="292608"/>
             <a:ext cx="10972800" cy="274320"/>
           </a:xfrm>
           <a:prstGeom prst="rect">
@@ -9476,8 +10016,8 @@
         </p:nvSpPr>
         <p:spPr>
           <a:xfrm>
-            <a:off x="640080" y="530352"/>
-            <a:ext cx="11155680" cy="566928"/>
+            <a:off x="777240" y="530352"/>
+            <a:ext cx="10881360" cy="566928"/>
           </a:xfrm>
           <a:prstGeom prst="rect">
             <a:avLst/>
@@ -9517,8 +10057,8 @@
         </p:nvSpPr>
         <p:spPr>
           <a:xfrm>
-            <a:off x="411480" y="1325880"/>
-            <a:ext cx="5554980" cy="4937760"/>
+            <a:off x="548640" y="1325880"/>
+            <a:ext cx="5408676" cy="4937760"/>
           </a:xfrm>
           <a:prstGeom prst="roundRect">
             <a:avLst>
@@ -9551,8 +10091,8 @@
         </p:nvSpPr>
         <p:spPr>
           <a:xfrm>
-            <a:off x="411480" y="1325880"/>
-            <a:ext cx="5554980" cy="109728"/>
+            <a:off x="548640" y="1325880"/>
+            <a:ext cx="5408676" cy="109728"/>
           </a:xfrm>
           <a:prstGeom prst="rect">
             <a:avLst/>
@@ -9571,8 +10111,8 @@
         </p:nvSpPr>
         <p:spPr>
           <a:xfrm>
-            <a:off x="685800" y="1554480"/>
-            <a:ext cx="5006340" cy="685800"/>
+            <a:off x="822960" y="1554480"/>
+            <a:ext cx="4860036" cy="685800"/>
           </a:xfrm>
           <a:prstGeom prst="rect">
             <a:avLst/>
@@ -9612,8 +10152,8 @@
         </p:nvSpPr>
         <p:spPr>
           <a:xfrm>
-            <a:off x="685800" y="2286000"/>
-            <a:ext cx="5006340" cy="3749040"/>
+            <a:off x="822960" y="2286000"/>
+            <a:ext cx="4860036" cy="3749040"/>
           </a:xfrm>
           <a:prstGeom prst="rect">
             <a:avLst/>
@@ -9635,7 +10175,7 @@
               <a:buChar char="●"/>
             </a:pPr>
             <a:r>
-              <a:rPr lang="en-US" sz="1400" dirty="0">
+              <a:rPr lang="en-US" sz="1700" dirty="0">
                 <a:solidFill>
                   <a:srgbClr val="1F2937"/>
                 </a:solidFill>
@@ -9645,7 +10185,7 @@
               </a:rPr>
               <a:t>Lembrete: 'Sua economia deste mês está garantida! Segue o Pix…'</a:t>
             </a:r>
-            <a:endParaRPr lang="en-US" sz="1400" dirty="0"/>
+            <a:endParaRPr lang="en-US" sz="1700" dirty="0"/>
           </a:p>
           <a:p>
             <a:pPr marL="342900" indent="-342900">
@@ -9656,7 +10196,7 @@
               <a:buChar char="●"/>
             </a:pPr>
             <a:r>
-              <a:rPr lang="en-US" sz="1400" dirty="0">
+              <a:rPr lang="en-US" sz="1700" dirty="0">
                 <a:solidFill>
                   <a:srgbClr val="1F2937"/>
                 </a:solidFill>
@@ -9666,7 +10206,7 @@
               </a:rPr>
               <a:t>Atraso leve: 'Notamos que a cobrança de março ficou em aberto. Aconteceu algo?'</a:t>
             </a:r>
-            <a:endParaRPr lang="en-US" sz="1400" dirty="0"/>
+            <a:endParaRPr lang="en-US" sz="1700" dirty="0"/>
           </a:p>
           <a:p>
             <a:pPr marL="342900" indent="-342900">
@@ -9677,7 +10217,7 @@
               <a:buChar char="●"/>
             </a:pPr>
             <a:r>
-              <a:rPr lang="en-US" sz="1400" dirty="0">
+              <a:rPr lang="en-US" sz="1700" dirty="0">
                 <a:solidFill>
                   <a:srgbClr val="1F2937"/>
                 </a:solidFill>
@@ -9687,7 +10227,7 @@
               </a:rPr>
               <a:t>Atraso grave: 'Precisamos regularizar até DD/MM para manter sua participação.'</a:t>
             </a:r>
-            <a:endParaRPr lang="en-US" sz="1400" dirty="0"/>
+            <a:endParaRPr lang="en-US" sz="1700" dirty="0"/>
           </a:p>
         </p:txBody>
       </p:sp>
@@ -9699,8 +10239,8 @@
         </p:nvSpPr>
         <p:spPr>
           <a:xfrm>
-            <a:off x="6240780" y="1325880"/>
-            <a:ext cx="5554980" cy="4937760"/>
+            <a:off x="6231636" y="1325880"/>
+            <a:ext cx="5408676" cy="4937760"/>
           </a:xfrm>
           <a:prstGeom prst="roundRect">
             <a:avLst>
@@ -9733,8 +10273,8 @@
         </p:nvSpPr>
         <p:spPr>
           <a:xfrm>
-            <a:off x="6240780" y="1325880"/>
-            <a:ext cx="5554980" cy="109728"/>
+            <a:off x="6231636" y="1325880"/>
+            <a:ext cx="5408676" cy="109728"/>
           </a:xfrm>
           <a:prstGeom prst="rect">
             <a:avLst/>
@@ -9753,8 +10293,8 @@
         </p:nvSpPr>
         <p:spPr>
           <a:xfrm>
-            <a:off x="6515100" y="1554480"/>
-            <a:ext cx="5006340" cy="685800"/>
+            <a:off x="6505956" y="1554480"/>
+            <a:ext cx="4860036" cy="685800"/>
           </a:xfrm>
           <a:prstGeom prst="rect">
             <a:avLst/>
@@ -9794,8 +10334,8 @@
         </p:nvSpPr>
         <p:spPr>
           <a:xfrm>
-            <a:off x="6515100" y="2286000"/>
-            <a:ext cx="5006340" cy="3749040"/>
+            <a:off x="6505956" y="2286000"/>
+            <a:ext cx="4860036" cy="3749040"/>
           </a:xfrm>
           <a:prstGeom prst="rect">
             <a:avLst/>
@@ -9870,6 +10410,54 @@
               <a:t>nunca 'perdoar' sem registro</a:t>
             </a:r>
             <a:endParaRPr lang="en-US" sz="1700" dirty="0"/>
+          </a:p>
+        </p:txBody>
+      </p:sp>
+      <p:sp>
+        <p:nvSpPr>
+          <p:cNvPr id="25" name="Slide Number Placeholder 0"/>
+          <p:cNvSpPr>
+            <a:spLocks noGrp="1"/>
+          </p:cNvSpPr>
+          <p:nvPr>
+            <p:ph type="sldNum" sz="quarter" idx="4294967295"/>
+          </p:nvPr>
+        </p:nvSpPr>
+        <p:spPr>
+          <a:xfrm>
+            <a:off x="11292840" y="6556248"/>
+            <a:ext cx="548640" cy="256032"/>
+          </a:xfrm>
+          <a:prstGeom prst="rect">
+            <a:avLst/>
+          </a:prstGeom>
+          <a:extLst>
+            <a:ext uri="{C572A759-6A51-4108-AA02-DFA0A04FC94B}">
+              <ma14:wrappingTextBoxFlag xmlns:ma14="http://schemas.microsoft.com/office/mac/drawingml/2011/main" val="0"/>
+            </a:ext>
+          </a:extLst>
+        </p:spPr>
+        <p:txBody>
+          <a:bodyPr/>
+          <a:lstStyle>
+            <a:lvl1pPr>
+              <a:defRPr sz="900">
+                <a:solidFill>
+                  <a:srgbClr val="1B3A6B"/>
+                </a:solidFill>
+                <a:latin typeface="Arial"/>
+                <a:ea typeface="Arial"/>
+                <a:cs typeface="Arial"/>
+              </a:defRPr>
+            </a:lvl1pPr>
+          </a:lstStyle>
+          <a:p>
+            <a:pPr algn="r"/>
+            <a:fld id="{F7021451-1387-4CA6-816F-3879F97B5CBC}" type="slidenum">
+              <a:rPr b="1" lang="en-US"/>
+              <a:t>18</a:t>
+            </a:fld>
+            <a:endParaRPr lang="en-US"/>
           </a:p>
         </p:txBody>
       </p:sp>
@@ -9946,7 +10534,7 @@
         </p:blipFill>
         <p:spPr>
           <a:xfrm>
-            <a:off x="411480" y="6547104"/>
+            <a:off x="548640" y="6547104"/>
             <a:ext cx="274320" cy="274320"/>
           </a:xfrm>
           <a:prstGeom prst="rect">
@@ -9962,7 +10550,7 @@
         </p:nvSpPr>
         <p:spPr>
           <a:xfrm>
-            <a:off x="749808" y="6528816"/>
+            <a:off x="886968" y="6528816"/>
             <a:ext cx="6400800" cy="310896"/>
           </a:xfrm>
           <a:prstGeom prst="rect">
@@ -10002,7 +10590,7 @@
         <p:spPr>
           <a:xfrm>
             <a:off x="7132320" y="6528816"/>
-            <a:ext cx="4663440" cy="310896"/>
+            <a:ext cx="4023360" cy="310896"/>
           </a:xfrm>
           <a:prstGeom prst="rect">
             <a:avLst/>
@@ -10040,7 +10628,7 @@
         </p:nvSpPr>
         <p:spPr>
           <a:xfrm>
-            <a:off x="411480" y="384048"/>
+            <a:off x="548640" y="384048"/>
             <a:ext cx="82296" cy="658368"/>
           </a:xfrm>
           <a:prstGeom prst="rect">
@@ -10060,7 +10648,7 @@
         </p:nvSpPr>
         <p:spPr>
           <a:xfrm>
-            <a:off x="640080" y="292608"/>
+            <a:off x="777240" y="292608"/>
             <a:ext cx="10972800" cy="274320"/>
           </a:xfrm>
           <a:prstGeom prst="rect">
@@ -10099,8 +10687,8 @@
         </p:nvSpPr>
         <p:spPr>
           <a:xfrm>
-            <a:off x="640080" y="530352"/>
-            <a:ext cx="11155680" cy="566928"/>
+            <a:off x="777240" y="530352"/>
+            <a:ext cx="10881360" cy="566928"/>
           </a:xfrm>
           <a:prstGeom prst="rect">
             <a:avLst/>
@@ -10140,8 +10728,8 @@
         </p:nvSpPr>
         <p:spPr>
           <a:xfrm>
-            <a:off x="411480" y="1325880"/>
-            <a:ext cx="3642360" cy="2331720"/>
+            <a:off x="548640" y="1325880"/>
+            <a:ext cx="3544824" cy="2331720"/>
           </a:xfrm>
           <a:prstGeom prst="roundRect">
             <a:avLst>
@@ -10174,7 +10762,7 @@
         </p:nvSpPr>
         <p:spPr>
           <a:xfrm>
-            <a:off x="594360" y="1508760"/>
+            <a:off x="731520" y="1508760"/>
             <a:ext cx="457200" cy="457200"/>
           </a:xfrm>
           <a:prstGeom prst="ellipse">
@@ -10194,7 +10782,7 @@
         </p:nvSpPr>
         <p:spPr>
           <a:xfrm>
-            <a:off x="594360" y="1508760"/>
+            <a:off x="731520" y="1508760"/>
             <a:ext cx="457200" cy="457200"/>
           </a:xfrm>
           <a:prstGeom prst="rect">
@@ -10233,8 +10821,8 @@
         </p:nvSpPr>
         <p:spPr>
           <a:xfrm>
-            <a:off x="1188720" y="1435608"/>
-            <a:ext cx="2727960" cy="2112264"/>
+            <a:off x="1325880" y="1435608"/>
+            <a:ext cx="2630424" cy="2112264"/>
           </a:xfrm>
           <a:prstGeom prst="rect">
             <a:avLst/>
@@ -10274,8 +10862,8 @@
         </p:nvSpPr>
         <p:spPr>
           <a:xfrm>
-            <a:off x="4282440" y="1325880"/>
-            <a:ext cx="3642360" cy="2331720"/>
+            <a:off x="4322064" y="1325880"/>
+            <a:ext cx="3544824" cy="2331720"/>
           </a:xfrm>
           <a:prstGeom prst="roundRect">
             <a:avLst>
@@ -10308,7 +10896,7 @@
         </p:nvSpPr>
         <p:spPr>
           <a:xfrm>
-            <a:off x="4465320" y="1508760"/>
+            <a:off x="4504944" y="1508760"/>
             <a:ext cx="457200" cy="457200"/>
           </a:xfrm>
           <a:prstGeom prst="ellipse">
@@ -10328,7 +10916,7 @@
         </p:nvSpPr>
         <p:spPr>
           <a:xfrm>
-            <a:off x="4465320" y="1508760"/>
+            <a:off x="4504944" y="1508760"/>
             <a:ext cx="457200" cy="457200"/>
           </a:xfrm>
           <a:prstGeom prst="rect">
@@ -10367,8 +10955,8 @@
         </p:nvSpPr>
         <p:spPr>
           <a:xfrm>
-            <a:off x="5059680" y="1435608"/>
-            <a:ext cx="2727960" cy="2112264"/>
+            <a:off x="5099304" y="1435608"/>
+            <a:ext cx="2630424" cy="2112264"/>
           </a:xfrm>
           <a:prstGeom prst="rect">
             <a:avLst/>
@@ -10408,8 +10996,8 @@
         </p:nvSpPr>
         <p:spPr>
           <a:xfrm>
-            <a:off x="8153400" y="1325880"/>
-            <a:ext cx="3642360" cy="2331720"/>
+            <a:off x="8095488" y="1325880"/>
+            <a:ext cx="3544824" cy="2331720"/>
           </a:xfrm>
           <a:prstGeom prst="roundRect">
             <a:avLst>
@@ -10442,7 +11030,7 @@
         </p:nvSpPr>
         <p:spPr>
           <a:xfrm>
-            <a:off x="8336280" y="1508760"/>
+            <a:off x="8278368" y="1508760"/>
             <a:ext cx="457200" cy="457200"/>
           </a:xfrm>
           <a:prstGeom prst="ellipse">
@@ -10462,7 +11050,7 @@
         </p:nvSpPr>
         <p:spPr>
           <a:xfrm>
-            <a:off x="8336280" y="1508760"/>
+            <a:off x="8278368" y="1508760"/>
             <a:ext cx="457200" cy="457200"/>
           </a:xfrm>
           <a:prstGeom prst="rect">
@@ -10501,8 +11089,8 @@
         </p:nvSpPr>
         <p:spPr>
           <a:xfrm>
-            <a:off x="8930640" y="1435608"/>
-            <a:ext cx="2727960" cy="2112264"/>
+            <a:off x="8872728" y="1435608"/>
+            <a:ext cx="2630424" cy="2112264"/>
           </a:xfrm>
           <a:prstGeom prst="rect">
             <a:avLst/>
@@ -10542,8 +11130,8 @@
         </p:nvSpPr>
         <p:spPr>
           <a:xfrm>
-            <a:off x="411480" y="3886200"/>
-            <a:ext cx="3642360" cy="2331720"/>
+            <a:off x="548640" y="3886200"/>
+            <a:ext cx="3544824" cy="2331720"/>
           </a:xfrm>
           <a:prstGeom prst="roundRect">
             <a:avLst>
@@ -10576,7 +11164,7 @@
         </p:nvSpPr>
         <p:spPr>
           <a:xfrm>
-            <a:off x="594360" y="4069080"/>
+            <a:off x="731520" y="4069080"/>
             <a:ext cx="457200" cy="457200"/>
           </a:xfrm>
           <a:prstGeom prst="ellipse">
@@ -10596,7 +11184,7 @@
         </p:nvSpPr>
         <p:spPr>
           <a:xfrm>
-            <a:off x="594360" y="4069080"/>
+            <a:off x="731520" y="4069080"/>
             <a:ext cx="457200" cy="457200"/>
           </a:xfrm>
           <a:prstGeom prst="rect">
@@ -10635,8 +11223,8 @@
         </p:nvSpPr>
         <p:spPr>
           <a:xfrm>
-            <a:off x="1188720" y="3995928"/>
-            <a:ext cx="2727960" cy="2112264"/>
+            <a:off x="1325880" y="3995928"/>
+            <a:ext cx="2630424" cy="2112264"/>
           </a:xfrm>
           <a:prstGeom prst="rect">
             <a:avLst/>
@@ -10676,8 +11264,8 @@
         </p:nvSpPr>
         <p:spPr>
           <a:xfrm>
-            <a:off x="4282440" y="3886200"/>
-            <a:ext cx="3642360" cy="2331720"/>
+            <a:off x="4322064" y="3886200"/>
+            <a:ext cx="3544824" cy="2331720"/>
           </a:xfrm>
           <a:prstGeom prst="roundRect">
             <a:avLst>
@@ -10710,7 +11298,7 @@
         </p:nvSpPr>
         <p:spPr>
           <a:xfrm>
-            <a:off x="4465320" y="4069080"/>
+            <a:off x="4504944" y="4069080"/>
             <a:ext cx="457200" cy="457200"/>
           </a:xfrm>
           <a:prstGeom prst="ellipse">
@@ -10730,7 +11318,7 @@
         </p:nvSpPr>
         <p:spPr>
           <a:xfrm>
-            <a:off x="4465320" y="4069080"/>
+            <a:off x="4504944" y="4069080"/>
             <a:ext cx="457200" cy="457200"/>
           </a:xfrm>
           <a:prstGeom prst="rect">
@@ -10769,8 +11357,8 @@
         </p:nvSpPr>
         <p:spPr>
           <a:xfrm>
-            <a:off x="5059680" y="3995928"/>
-            <a:ext cx="2727960" cy="2112264"/>
+            <a:off x="5099304" y="3995928"/>
+            <a:ext cx="2630424" cy="2112264"/>
           </a:xfrm>
           <a:prstGeom prst="rect">
             <a:avLst/>
@@ -10810,8 +11398,8 @@
         </p:nvSpPr>
         <p:spPr>
           <a:xfrm>
-            <a:off x="8153400" y="3886200"/>
-            <a:ext cx="3642360" cy="2331720"/>
+            <a:off x="8095488" y="3886200"/>
+            <a:ext cx="3544824" cy="2331720"/>
           </a:xfrm>
           <a:prstGeom prst="roundRect">
             <a:avLst>
@@ -10844,7 +11432,7 @@
         </p:nvSpPr>
         <p:spPr>
           <a:xfrm>
-            <a:off x="8336280" y="4069080"/>
+            <a:off x="8278368" y="4069080"/>
             <a:ext cx="457200" cy="457200"/>
           </a:xfrm>
           <a:prstGeom prst="ellipse">
@@ -10864,7 +11452,7 @@
         </p:nvSpPr>
         <p:spPr>
           <a:xfrm>
-            <a:off x="8336280" y="4069080"/>
+            <a:off x="8278368" y="4069080"/>
             <a:ext cx="457200" cy="457200"/>
           </a:xfrm>
           <a:prstGeom prst="rect">
@@ -10903,8 +11491,8 @@
         </p:nvSpPr>
         <p:spPr>
           <a:xfrm>
-            <a:off x="8930640" y="3995928"/>
-            <a:ext cx="2727960" cy="2112264"/>
+            <a:off x="8872728" y="3995928"/>
+            <a:ext cx="2630424" cy="2112264"/>
           </a:xfrm>
           <a:prstGeom prst="rect">
             <a:avLst/>
@@ -10933,6 +11521,54 @@
               <a:t>análise na entrada</a:t>
             </a:r>
             <a:endParaRPr lang="en-US" sz="1800" dirty="0"/>
+          </a:p>
+        </p:txBody>
+      </p:sp>
+      <p:sp>
+        <p:nvSpPr>
+          <p:cNvPr id="25" name="Slide Number Placeholder 0"/>
+          <p:cNvSpPr>
+            <a:spLocks noGrp="1"/>
+          </p:cNvSpPr>
+          <p:nvPr>
+            <p:ph type="sldNum" sz="quarter" idx="4294967295"/>
+          </p:nvPr>
+        </p:nvSpPr>
+        <p:spPr>
+          <a:xfrm>
+            <a:off x="11292840" y="6556248"/>
+            <a:ext cx="548640" cy="256032"/>
+          </a:xfrm>
+          <a:prstGeom prst="rect">
+            <a:avLst/>
+          </a:prstGeom>
+          <a:extLst>
+            <a:ext uri="{C572A759-6A51-4108-AA02-DFA0A04FC94B}">
+              <ma14:wrappingTextBoxFlag xmlns:ma14="http://schemas.microsoft.com/office/mac/drawingml/2011/main" val="0"/>
+            </a:ext>
+          </a:extLst>
+        </p:spPr>
+        <p:txBody>
+          <a:bodyPr/>
+          <a:lstStyle>
+            <a:lvl1pPr>
+              <a:defRPr sz="900">
+                <a:solidFill>
+                  <a:srgbClr val="1B3A6B"/>
+                </a:solidFill>
+                <a:latin typeface="Arial"/>
+                <a:ea typeface="Arial"/>
+                <a:cs typeface="Arial"/>
+              </a:defRPr>
+            </a:lvl1pPr>
+          </a:lstStyle>
+          <a:p>
+            <a:pPr algn="r"/>
+            <a:fld id="{F7021451-1387-4CA6-816F-3879F97B5CBC}" type="slidenum">
+              <a:rPr b="1" lang="en-US"/>
+              <a:t>19</a:t>
+            </a:fld>
+            <a:endParaRPr lang="en-US"/>
           </a:p>
         </p:txBody>
       </p:sp>
@@ -10996,6 +11632,45 @@
         </p:nvSpPr>
         <p:spPr>
           <a:xfrm>
+            <a:off x="457200" y="548640"/>
+            <a:ext cx="3474720" cy="1737360"/>
+          </a:xfrm>
+          <a:prstGeom prst="rect">
+            <a:avLst/>
+          </a:prstGeom>
+          <a:noFill/>
+          <a:ln/>
+        </p:spPr>
+        <p:txBody>
+          <a:bodyPr wrap="square" rtlCol="0" anchor="ctr"/>
+          <a:lstStyle/>
+          <a:p>
+            <a:pPr indent="0" marL="0">
+              <a:buNone/>
+            </a:pPr>
+            <a:r>
+              <a:rPr lang="en-US" sz="11000" b="1" dirty="0">
+                <a:solidFill>
+                  <a:srgbClr val="11396F"/>
+                </a:solidFill>
+                <a:latin typeface="Arial" pitchFamily="34" charset="0"/>
+                <a:ea typeface="Arial" pitchFamily="34" charset="-122"/>
+                <a:cs typeface="Arial" pitchFamily="34" charset="-120"/>
+              </a:rPr>
+              <a:t>01</a:t>
+            </a:r>
+            <a:endParaRPr lang="en-US" sz="11000" dirty="0"/>
+          </a:p>
+        </p:txBody>
+      </p:sp>
+      <p:sp>
+        <p:nvSpPr>
+          <p:cNvPr id="4" name="Text 2"/>
+          <p:cNvSpPr/>
+          <p:nvPr/>
+        </p:nvSpPr>
+        <p:spPr>
+          <a:xfrm>
             <a:off x="548640" y="2194560"/>
             <a:ext cx="3291840" cy="548640"/>
           </a:xfrm>
@@ -11029,7 +11704,46 @@
       </p:sp>
       <p:sp>
         <p:nvSpPr>
-          <p:cNvPr id="4" name="Text 2"/>
+          <p:cNvPr id="5" name="Text 3"/>
+          <p:cNvSpPr/>
+          <p:nvPr/>
+        </p:nvSpPr>
+        <p:spPr>
+          <a:xfrm>
+            <a:off x="548640" y="3200400"/>
+            <a:ext cx="3383280" cy="457200"/>
+          </a:xfrm>
+          <a:prstGeom prst="rect">
+            <a:avLst/>
+          </a:prstGeom>
+          <a:noFill/>
+          <a:ln/>
+        </p:spPr>
+        <p:txBody>
+          <a:bodyPr wrap="square" rtlCol="0" anchor="ctr"/>
+          <a:lstStyle/>
+          <a:p>
+            <a:pPr indent="0" marL="0">
+              <a:buNone/>
+            </a:pPr>
+            <a:r>
+              <a:rPr lang="en-US" sz="1100" dirty="0">
+                <a:solidFill>
+                  <a:srgbClr val="C7D2E3"/>
+                </a:solidFill>
+                <a:latin typeface="Arial" pitchFamily="34" charset="0"/>
+                <a:ea typeface="Arial" pitchFamily="34" charset="-122"/>
+                <a:cs typeface="Arial" pitchFamily="34" charset="-120"/>
+              </a:rPr>
+              <a:t>M8 · Etapa 3 · Operação ponta a ponta</a:t>
+            </a:r>
+            <a:endParaRPr lang="en-US" sz="1100" dirty="0"/>
+          </a:p>
+        </p:txBody>
+      </p:sp>
+      <p:sp>
+        <p:nvSpPr>
+          <p:cNvPr id="6" name="Text 4"/>
           <p:cNvSpPr/>
           <p:nvPr/>
         </p:nvSpPr>
@@ -11068,7 +11782,7 @@
       </p:sp>
       <p:pic>
         <p:nvPicPr>
-          <p:cNvPr id="5" name="Image 0" descr="/www/wwwroot/rexar/gdsolar/docs/curso/slides/assets/logo-gdsolar.png">    </p:cNvPr>
+          <p:cNvPr id="7" name="Image 0" descr="/www/wwwroot/rexar/gdsolar/docs/curso/slides/assets/logo-gdsolar.png">    </p:cNvPr>
           <p:cNvPicPr>
             <a:picLocks noChangeAspect="1"/>
           </p:cNvPicPr>
@@ -11092,7 +11806,7 @@
       </p:pic>
       <p:sp>
         <p:nvSpPr>
-          <p:cNvPr id="6" name="Text 3"/>
+          <p:cNvPr id="8" name="Text 5"/>
           <p:cNvSpPr/>
           <p:nvPr/>
         </p:nvSpPr>
@@ -11133,7 +11847,7 @@
       </p:sp>
       <p:sp>
         <p:nvSpPr>
-          <p:cNvPr id="7" name="Text 4"/>
+          <p:cNvPr id="9" name="Text 6"/>
           <p:cNvSpPr/>
           <p:nvPr/>
         </p:nvSpPr>
@@ -11174,7 +11888,7 @@
       </p:sp>
       <p:sp>
         <p:nvSpPr>
-          <p:cNvPr id="8" name="Text 5"/>
+          <p:cNvPr id="10" name="Text 7"/>
           <p:cNvSpPr/>
           <p:nvPr/>
         </p:nvSpPr>
@@ -11353,7 +12067,7 @@
         </p:blipFill>
         <p:spPr>
           <a:xfrm>
-            <a:off x="411480" y="6547104"/>
+            <a:off x="548640" y="6547104"/>
             <a:ext cx="274320" cy="274320"/>
           </a:xfrm>
           <a:prstGeom prst="rect">
@@ -11369,7 +12083,7 @@
         </p:nvSpPr>
         <p:spPr>
           <a:xfrm>
-            <a:off x="749808" y="6528816"/>
+            <a:off x="886968" y="6528816"/>
             <a:ext cx="6400800" cy="310896"/>
           </a:xfrm>
           <a:prstGeom prst="rect">
@@ -11409,7 +12123,7 @@
         <p:spPr>
           <a:xfrm>
             <a:off x="7132320" y="6528816"/>
-            <a:ext cx="4663440" cy="310896"/>
+            <a:ext cx="4023360" cy="310896"/>
           </a:xfrm>
           <a:prstGeom prst="rect">
             <a:avLst/>
@@ -11447,7 +12161,7 @@
         </p:nvSpPr>
         <p:spPr>
           <a:xfrm>
-            <a:off x="411480" y="384048"/>
+            <a:off x="548640" y="384048"/>
             <a:ext cx="82296" cy="658368"/>
           </a:xfrm>
           <a:prstGeom prst="rect">
@@ -11467,7 +12181,7 @@
         </p:nvSpPr>
         <p:spPr>
           <a:xfrm>
-            <a:off x="640080" y="292608"/>
+            <a:off x="777240" y="292608"/>
             <a:ext cx="10972800" cy="274320"/>
           </a:xfrm>
           <a:prstGeom prst="rect">
@@ -11506,8 +12220,8 @@
         </p:nvSpPr>
         <p:spPr>
           <a:xfrm>
-            <a:off x="640080" y="530352"/>
-            <a:ext cx="11155680" cy="566928"/>
+            <a:off x="777240" y="530352"/>
+            <a:ext cx="10881360" cy="566928"/>
           </a:xfrm>
           <a:prstGeom prst="rect">
             <a:avLst/>
@@ -11547,8 +12261,8 @@
         </p:nvSpPr>
         <p:spPr>
           <a:xfrm>
-            <a:off x="411480" y="1325880"/>
-            <a:ext cx="3642360" cy="2331720"/>
+            <a:off x="548640" y="1325880"/>
+            <a:ext cx="3544824" cy="2331720"/>
           </a:xfrm>
           <a:prstGeom prst="roundRect">
             <a:avLst>
@@ -11581,7 +12295,7 @@
         </p:nvSpPr>
         <p:spPr>
           <a:xfrm>
-            <a:off x="594360" y="1508760"/>
+            <a:off x="731520" y="1508760"/>
             <a:ext cx="457200" cy="457200"/>
           </a:xfrm>
           <a:prstGeom prst="ellipse">
@@ -11601,7 +12315,7 @@
         </p:nvSpPr>
         <p:spPr>
           <a:xfrm>
-            <a:off x="594360" y="1508760"/>
+            <a:off x="731520" y="1508760"/>
             <a:ext cx="457200" cy="457200"/>
           </a:xfrm>
           <a:prstGeom prst="rect">
@@ -11640,8 +12354,8 @@
         </p:nvSpPr>
         <p:spPr>
           <a:xfrm>
-            <a:off x="1188720" y="1435608"/>
-            <a:ext cx="2727960" cy="2112264"/>
+            <a:off x="1325880" y="1435608"/>
+            <a:ext cx="2630424" cy="2112264"/>
           </a:xfrm>
           <a:prstGeom prst="rect">
             <a:avLst/>
@@ -11681,8 +12395,8 @@
         </p:nvSpPr>
         <p:spPr>
           <a:xfrm>
-            <a:off x="4282440" y="1325880"/>
-            <a:ext cx="3642360" cy="2331720"/>
+            <a:off x="4322064" y="1325880"/>
+            <a:ext cx="3544824" cy="2331720"/>
           </a:xfrm>
           <a:prstGeom prst="roundRect">
             <a:avLst>
@@ -11715,7 +12429,7 @@
         </p:nvSpPr>
         <p:spPr>
           <a:xfrm>
-            <a:off x="4465320" y="1508760"/>
+            <a:off x="4504944" y="1508760"/>
             <a:ext cx="457200" cy="457200"/>
           </a:xfrm>
           <a:prstGeom prst="ellipse">
@@ -11735,7 +12449,7 @@
         </p:nvSpPr>
         <p:spPr>
           <a:xfrm>
-            <a:off x="4465320" y="1508760"/>
+            <a:off x="4504944" y="1508760"/>
             <a:ext cx="457200" cy="457200"/>
           </a:xfrm>
           <a:prstGeom prst="rect">
@@ -11774,8 +12488,8 @@
         </p:nvSpPr>
         <p:spPr>
           <a:xfrm>
-            <a:off x="5059680" y="1435608"/>
-            <a:ext cx="2727960" cy="2112264"/>
+            <a:off x="5099304" y="1435608"/>
+            <a:ext cx="2630424" cy="2112264"/>
           </a:xfrm>
           <a:prstGeom prst="rect">
             <a:avLst/>
@@ -11815,8 +12529,8 @@
         </p:nvSpPr>
         <p:spPr>
           <a:xfrm>
-            <a:off x="8153400" y="1325880"/>
-            <a:ext cx="3642360" cy="2331720"/>
+            <a:off x="8095488" y="1325880"/>
+            <a:ext cx="3544824" cy="2331720"/>
           </a:xfrm>
           <a:prstGeom prst="roundRect">
             <a:avLst>
@@ -11849,7 +12563,7 @@
         </p:nvSpPr>
         <p:spPr>
           <a:xfrm>
-            <a:off x="8336280" y="1508760"/>
+            <a:off x="8278368" y="1508760"/>
             <a:ext cx="457200" cy="457200"/>
           </a:xfrm>
           <a:prstGeom prst="ellipse">
@@ -11869,7 +12583,7 @@
         </p:nvSpPr>
         <p:spPr>
           <a:xfrm>
-            <a:off x="8336280" y="1508760"/>
+            <a:off x="8278368" y="1508760"/>
             <a:ext cx="457200" cy="457200"/>
           </a:xfrm>
           <a:prstGeom prst="rect">
@@ -11908,8 +12622,8 @@
         </p:nvSpPr>
         <p:spPr>
           <a:xfrm>
-            <a:off x="8930640" y="1435608"/>
-            <a:ext cx="2727960" cy="2112264"/>
+            <a:off x="8872728" y="1435608"/>
+            <a:ext cx="2630424" cy="2112264"/>
           </a:xfrm>
           <a:prstGeom prst="rect">
             <a:avLst/>
@@ -11949,8 +12663,8 @@
         </p:nvSpPr>
         <p:spPr>
           <a:xfrm>
-            <a:off x="411480" y="3886200"/>
-            <a:ext cx="3642360" cy="2331720"/>
+            <a:off x="548640" y="3886200"/>
+            <a:ext cx="3544824" cy="2331720"/>
           </a:xfrm>
           <a:prstGeom prst="roundRect">
             <a:avLst>
@@ -11983,7 +12697,7 @@
         </p:nvSpPr>
         <p:spPr>
           <a:xfrm>
-            <a:off x="594360" y="4069080"/>
+            <a:off x="731520" y="4069080"/>
             <a:ext cx="457200" cy="457200"/>
           </a:xfrm>
           <a:prstGeom prst="ellipse">
@@ -12003,7 +12717,7 @@
         </p:nvSpPr>
         <p:spPr>
           <a:xfrm>
-            <a:off x="594360" y="4069080"/>
+            <a:off x="731520" y="4069080"/>
             <a:ext cx="457200" cy="457200"/>
           </a:xfrm>
           <a:prstGeom prst="rect">
@@ -12042,8 +12756,8 @@
         </p:nvSpPr>
         <p:spPr>
           <a:xfrm>
-            <a:off x="1188720" y="3995928"/>
-            <a:ext cx="2727960" cy="2112264"/>
+            <a:off x="1325880" y="3995928"/>
+            <a:ext cx="2630424" cy="2112264"/>
           </a:xfrm>
           <a:prstGeom prst="rect">
             <a:avLst/>
@@ -12083,8 +12797,8 @@
         </p:nvSpPr>
         <p:spPr>
           <a:xfrm>
-            <a:off x="4282440" y="3886200"/>
-            <a:ext cx="3642360" cy="2331720"/>
+            <a:off x="4322064" y="3886200"/>
+            <a:ext cx="3544824" cy="2331720"/>
           </a:xfrm>
           <a:prstGeom prst="roundRect">
             <a:avLst>
@@ -12117,7 +12831,7 @@
         </p:nvSpPr>
         <p:spPr>
           <a:xfrm>
-            <a:off x="4465320" y="4069080"/>
+            <a:off x="4504944" y="4069080"/>
             <a:ext cx="457200" cy="457200"/>
           </a:xfrm>
           <a:prstGeom prst="ellipse">
@@ -12137,7 +12851,7 @@
         </p:nvSpPr>
         <p:spPr>
           <a:xfrm>
-            <a:off x="4465320" y="4069080"/>
+            <a:off x="4504944" y="4069080"/>
             <a:ext cx="457200" cy="457200"/>
           </a:xfrm>
           <a:prstGeom prst="rect">
@@ -12176,8 +12890,8 @@
         </p:nvSpPr>
         <p:spPr>
           <a:xfrm>
-            <a:off x="5059680" y="3995928"/>
-            <a:ext cx="2727960" cy="2112264"/>
+            <a:off x="5099304" y="3995928"/>
+            <a:ext cx="2630424" cy="2112264"/>
           </a:xfrm>
           <a:prstGeom prst="rect">
             <a:avLst/>
@@ -12217,8 +12931,8 @@
         </p:nvSpPr>
         <p:spPr>
           <a:xfrm>
-            <a:off x="8153400" y="3886200"/>
-            <a:ext cx="3642360" cy="2331720"/>
+            <a:off x="8095488" y="3886200"/>
+            <a:ext cx="3544824" cy="2331720"/>
           </a:xfrm>
           <a:prstGeom prst="roundRect">
             <a:avLst>
@@ -12251,7 +12965,7 @@
         </p:nvSpPr>
         <p:spPr>
           <a:xfrm>
-            <a:off x="8336280" y="4069080"/>
+            <a:off x="8278368" y="4069080"/>
             <a:ext cx="457200" cy="457200"/>
           </a:xfrm>
           <a:prstGeom prst="ellipse">
@@ -12271,7 +12985,7 @@
         </p:nvSpPr>
         <p:spPr>
           <a:xfrm>
-            <a:off x="8336280" y="4069080"/>
+            <a:off x="8278368" y="4069080"/>
             <a:ext cx="457200" cy="457200"/>
           </a:xfrm>
           <a:prstGeom prst="rect">
@@ -12310,8 +13024,8 @@
         </p:nvSpPr>
         <p:spPr>
           <a:xfrm>
-            <a:off x="8930640" y="3995928"/>
-            <a:ext cx="2727960" cy="2112264"/>
+            <a:off x="8872728" y="3995928"/>
+            <a:ext cx="2630424" cy="2112264"/>
           </a:xfrm>
           <a:prstGeom prst="rect">
             <a:avLst/>
@@ -12340,6 +13054,54 @@
               <a:t>inadimplência por consultor</a:t>
             </a:r>
             <a:endParaRPr lang="en-US" sz="1800" dirty="0"/>
+          </a:p>
+        </p:txBody>
+      </p:sp>
+      <p:sp>
+        <p:nvSpPr>
+          <p:cNvPr id="25" name="Slide Number Placeholder 0"/>
+          <p:cNvSpPr>
+            <a:spLocks noGrp="1"/>
+          </p:cNvSpPr>
+          <p:nvPr>
+            <p:ph type="sldNum" sz="quarter" idx="4294967295"/>
+          </p:nvPr>
+        </p:nvSpPr>
+        <p:spPr>
+          <a:xfrm>
+            <a:off x="11292840" y="6556248"/>
+            <a:ext cx="548640" cy="256032"/>
+          </a:xfrm>
+          <a:prstGeom prst="rect">
+            <a:avLst/>
+          </a:prstGeom>
+          <a:extLst>
+            <a:ext uri="{C572A759-6A51-4108-AA02-DFA0A04FC94B}">
+              <ma14:wrappingTextBoxFlag xmlns:ma14="http://schemas.microsoft.com/office/mac/drawingml/2011/main" val="0"/>
+            </a:ext>
+          </a:extLst>
+        </p:spPr>
+        <p:txBody>
+          <a:bodyPr/>
+          <a:lstStyle>
+            <a:lvl1pPr>
+              <a:defRPr sz="900">
+                <a:solidFill>
+                  <a:srgbClr val="1B3A6B"/>
+                </a:solidFill>
+                <a:latin typeface="Arial"/>
+                <a:ea typeface="Arial"/>
+                <a:cs typeface="Arial"/>
+              </a:defRPr>
+            </a:lvl1pPr>
+          </a:lstStyle>
+          <a:p>
+            <a:pPr algn="r"/>
+            <a:fld id="{F7021451-1387-4CA6-816F-3879F97B5CBC}" type="slidenum">
+              <a:rPr b="1" lang="en-US"/>
+              <a:t>20</a:t>
+            </a:fld>
+            <a:endParaRPr lang="en-US"/>
           </a:p>
         </p:txBody>
       </p:sp>
@@ -12416,7 +13178,7 @@
         </p:blipFill>
         <p:spPr>
           <a:xfrm>
-            <a:off x="411480" y="6547104"/>
+            <a:off x="548640" y="6547104"/>
             <a:ext cx="274320" cy="274320"/>
           </a:xfrm>
           <a:prstGeom prst="rect">
@@ -12432,7 +13194,7 @@
         </p:nvSpPr>
         <p:spPr>
           <a:xfrm>
-            <a:off x="749808" y="6528816"/>
+            <a:off x="886968" y="6528816"/>
             <a:ext cx="6400800" cy="310896"/>
           </a:xfrm>
           <a:prstGeom prst="rect">
@@ -12472,7 +13234,7 @@
         <p:spPr>
           <a:xfrm>
             <a:off x="7132320" y="6528816"/>
-            <a:ext cx="4663440" cy="310896"/>
+            <a:ext cx="4023360" cy="310896"/>
           </a:xfrm>
           <a:prstGeom prst="rect">
             <a:avLst/>
@@ -12510,7 +13272,7 @@
         </p:nvSpPr>
         <p:spPr>
           <a:xfrm>
-            <a:off x="411480" y="384048"/>
+            <a:off x="548640" y="384048"/>
             <a:ext cx="82296" cy="658368"/>
           </a:xfrm>
           <a:prstGeom prst="rect">
@@ -12530,7 +13292,7 @@
         </p:nvSpPr>
         <p:spPr>
           <a:xfrm>
-            <a:off x="640080" y="292608"/>
+            <a:off x="777240" y="292608"/>
             <a:ext cx="10972800" cy="274320"/>
           </a:xfrm>
           <a:prstGeom prst="rect">
@@ -12569,8 +13331,8 @@
         </p:nvSpPr>
         <p:spPr>
           <a:xfrm>
-            <a:off x="640080" y="530352"/>
-            <a:ext cx="11155680" cy="566928"/>
+            <a:off x="777240" y="530352"/>
+            <a:ext cx="10881360" cy="566928"/>
           </a:xfrm>
           <a:prstGeom prst="rect">
             <a:avLst/>
@@ -12610,8 +13372,8 @@
         </p:nvSpPr>
         <p:spPr>
           <a:xfrm>
-            <a:off x="411480" y="1325880"/>
-            <a:ext cx="3642360" cy="2331720"/>
+            <a:off x="548640" y="1325880"/>
+            <a:ext cx="3544824" cy="2331720"/>
           </a:xfrm>
           <a:prstGeom prst="roundRect">
             <a:avLst>
@@ -12644,7 +13406,7 @@
         </p:nvSpPr>
         <p:spPr>
           <a:xfrm>
-            <a:off x="594360" y="1508760"/>
+            <a:off x="731520" y="1508760"/>
             <a:ext cx="457200" cy="457200"/>
           </a:xfrm>
           <a:prstGeom prst="ellipse">
@@ -12664,7 +13426,7 @@
         </p:nvSpPr>
         <p:spPr>
           <a:xfrm>
-            <a:off x="594360" y="1508760"/>
+            <a:off x="731520" y="1508760"/>
             <a:ext cx="457200" cy="457200"/>
           </a:xfrm>
           <a:prstGeom prst="rect">
@@ -12703,8 +13465,8 @@
         </p:nvSpPr>
         <p:spPr>
           <a:xfrm>
-            <a:off x="1188720" y="1435608"/>
-            <a:ext cx="2727960" cy="2112264"/>
+            <a:off x="1325880" y="1435608"/>
+            <a:ext cx="2630424" cy="2112264"/>
           </a:xfrm>
           <a:prstGeom prst="rect">
             <a:avLst/>
@@ -12744,8 +13506,8 @@
         </p:nvSpPr>
         <p:spPr>
           <a:xfrm>
-            <a:off x="4282440" y="1325880"/>
-            <a:ext cx="3642360" cy="2331720"/>
+            <a:off x="4322064" y="1325880"/>
+            <a:ext cx="3544824" cy="2331720"/>
           </a:xfrm>
           <a:prstGeom prst="roundRect">
             <a:avLst>
@@ -12778,7 +13540,7 @@
         </p:nvSpPr>
         <p:spPr>
           <a:xfrm>
-            <a:off x="4465320" y="1508760"/>
+            <a:off x="4504944" y="1508760"/>
             <a:ext cx="457200" cy="457200"/>
           </a:xfrm>
           <a:prstGeom prst="ellipse">
@@ -12798,7 +13560,7 @@
         </p:nvSpPr>
         <p:spPr>
           <a:xfrm>
-            <a:off x="4465320" y="1508760"/>
+            <a:off x="4504944" y="1508760"/>
             <a:ext cx="457200" cy="457200"/>
           </a:xfrm>
           <a:prstGeom prst="rect">
@@ -12837,8 +13599,8 @@
         </p:nvSpPr>
         <p:spPr>
           <a:xfrm>
-            <a:off x="5059680" y="1435608"/>
-            <a:ext cx="2727960" cy="2112264"/>
+            <a:off x="5099304" y="1435608"/>
+            <a:ext cx="2630424" cy="2112264"/>
           </a:xfrm>
           <a:prstGeom prst="rect">
             <a:avLst/>
@@ -12878,8 +13640,8 @@
         </p:nvSpPr>
         <p:spPr>
           <a:xfrm>
-            <a:off x="8153400" y="1325880"/>
-            <a:ext cx="3642360" cy="2331720"/>
+            <a:off x="8095488" y="1325880"/>
+            <a:ext cx="3544824" cy="2331720"/>
           </a:xfrm>
           <a:prstGeom prst="roundRect">
             <a:avLst>
@@ -12912,7 +13674,7 @@
         </p:nvSpPr>
         <p:spPr>
           <a:xfrm>
-            <a:off x="8336280" y="1508760"/>
+            <a:off x="8278368" y="1508760"/>
             <a:ext cx="457200" cy="457200"/>
           </a:xfrm>
           <a:prstGeom prst="ellipse">
@@ -12932,7 +13694,7 @@
         </p:nvSpPr>
         <p:spPr>
           <a:xfrm>
-            <a:off x="8336280" y="1508760"/>
+            <a:off x="8278368" y="1508760"/>
             <a:ext cx="457200" cy="457200"/>
           </a:xfrm>
           <a:prstGeom prst="rect">
@@ -12971,8 +13733,8 @@
         </p:nvSpPr>
         <p:spPr>
           <a:xfrm>
-            <a:off x="8930640" y="1435608"/>
-            <a:ext cx="2727960" cy="2112264"/>
+            <a:off x="8872728" y="1435608"/>
+            <a:ext cx="2630424" cy="2112264"/>
           </a:xfrm>
           <a:prstGeom prst="rect">
             <a:avLst/>
@@ -13012,8 +13774,8 @@
         </p:nvSpPr>
         <p:spPr>
           <a:xfrm>
-            <a:off x="411480" y="3886200"/>
-            <a:ext cx="3642360" cy="2331720"/>
+            <a:off x="548640" y="3886200"/>
+            <a:ext cx="3544824" cy="2331720"/>
           </a:xfrm>
           <a:prstGeom prst="roundRect">
             <a:avLst>
@@ -13046,7 +13808,7 @@
         </p:nvSpPr>
         <p:spPr>
           <a:xfrm>
-            <a:off x="594360" y="4069080"/>
+            <a:off x="731520" y="4069080"/>
             <a:ext cx="457200" cy="457200"/>
           </a:xfrm>
           <a:prstGeom prst="ellipse">
@@ -13066,7 +13828,7 @@
         </p:nvSpPr>
         <p:spPr>
           <a:xfrm>
-            <a:off x="594360" y="4069080"/>
+            <a:off x="731520" y="4069080"/>
             <a:ext cx="457200" cy="457200"/>
           </a:xfrm>
           <a:prstGeom prst="rect">
@@ -13105,8 +13867,8 @@
         </p:nvSpPr>
         <p:spPr>
           <a:xfrm>
-            <a:off x="1188720" y="3995928"/>
-            <a:ext cx="2727960" cy="2112264"/>
+            <a:off x="1325880" y="3995928"/>
+            <a:ext cx="2630424" cy="2112264"/>
           </a:xfrm>
           <a:prstGeom prst="rect">
             <a:avLst/>
@@ -13146,8 +13908,8 @@
         </p:nvSpPr>
         <p:spPr>
           <a:xfrm>
-            <a:off x="4282440" y="3886200"/>
-            <a:ext cx="3642360" cy="2331720"/>
+            <a:off x="4322064" y="3886200"/>
+            <a:ext cx="3544824" cy="2331720"/>
           </a:xfrm>
           <a:prstGeom prst="roundRect">
             <a:avLst>
@@ -13180,7 +13942,7 @@
         </p:nvSpPr>
         <p:spPr>
           <a:xfrm>
-            <a:off x="4465320" y="4069080"/>
+            <a:off x="4504944" y="4069080"/>
             <a:ext cx="457200" cy="457200"/>
           </a:xfrm>
           <a:prstGeom prst="ellipse">
@@ -13200,7 +13962,7 @@
         </p:nvSpPr>
         <p:spPr>
           <a:xfrm>
-            <a:off x="4465320" y="4069080"/>
+            <a:off x="4504944" y="4069080"/>
             <a:ext cx="457200" cy="457200"/>
           </a:xfrm>
           <a:prstGeom prst="rect">
@@ -13239,8 +14001,8 @@
         </p:nvSpPr>
         <p:spPr>
           <a:xfrm>
-            <a:off x="5059680" y="3995928"/>
-            <a:ext cx="2727960" cy="2112264"/>
+            <a:off x="5099304" y="3995928"/>
+            <a:ext cx="2630424" cy="2112264"/>
           </a:xfrm>
           <a:prstGeom prst="rect">
             <a:avLst/>
@@ -13280,8 +14042,8 @@
         </p:nvSpPr>
         <p:spPr>
           <a:xfrm>
-            <a:off x="8153400" y="3886200"/>
-            <a:ext cx="3642360" cy="2331720"/>
+            <a:off x="8095488" y="3886200"/>
+            <a:ext cx="3544824" cy="2331720"/>
           </a:xfrm>
           <a:prstGeom prst="roundRect">
             <a:avLst>
@@ -13314,7 +14076,7 @@
         </p:nvSpPr>
         <p:spPr>
           <a:xfrm>
-            <a:off x="8336280" y="4069080"/>
+            <a:off x="8278368" y="4069080"/>
             <a:ext cx="457200" cy="457200"/>
           </a:xfrm>
           <a:prstGeom prst="ellipse">
@@ -13334,7 +14096,7 @@
         </p:nvSpPr>
         <p:spPr>
           <a:xfrm>
-            <a:off x="8336280" y="4069080"/>
+            <a:off x="8278368" y="4069080"/>
             <a:ext cx="457200" cy="457200"/>
           </a:xfrm>
           <a:prstGeom prst="rect">
@@ -13373,8 +14135,8 @@
         </p:nvSpPr>
         <p:spPr>
           <a:xfrm>
-            <a:off x="8930640" y="3995928"/>
-            <a:ext cx="2727960" cy="2112264"/>
+            <a:off x="8872728" y="3995928"/>
+            <a:ext cx="2630424" cy="2112264"/>
           </a:xfrm>
           <a:prstGeom prst="rect">
             <a:avLst/>
@@ -13403,6 +14165,54 @@
               <a:t>tom certo</a:t>
             </a:r>
             <a:endParaRPr lang="en-US" sz="1800" dirty="0"/>
+          </a:p>
+        </p:txBody>
+      </p:sp>
+      <p:sp>
+        <p:nvSpPr>
+          <p:cNvPr id="25" name="Slide Number Placeholder 0"/>
+          <p:cNvSpPr>
+            <a:spLocks noGrp="1"/>
+          </p:cNvSpPr>
+          <p:nvPr>
+            <p:ph type="sldNum" sz="quarter" idx="4294967295"/>
+          </p:nvPr>
+        </p:nvSpPr>
+        <p:spPr>
+          <a:xfrm>
+            <a:off x="11292840" y="6556248"/>
+            <a:ext cx="548640" cy="256032"/>
+          </a:xfrm>
+          <a:prstGeom prst="rect">
+            <a:avLst/>
+          </a:prstGeom>
+          <a:extLst>
+            <a:ext uri="{C572A759-6A51-4108-AA02-DFA0A04FC94B}">
+              <ma14:wrappingTextBoxFlag xmlns:ma14="http://schemas.microsoft.com/office/mac/drawingml/2011/main" val="0"/>
+            </a:ext>
+          </a:extLst>
+        </p:spPr>
+        <p:txBody>
+          <a:bodyPr/>
+          <a:lstStyle>
+            <a:lvl1pPr>
+              <a:defRPr sz="900">
+                <a:solidFill>
+                  <a:srgbClr val="1B3A6B"/>
+                </a:solidFill>
+                <a:latin typeface="Arial"/>
+                <a:ea typeface="Arial"/>
+                <a:cs typeface="Arial"/>
+              </a:defRPr>
+            </a:lvl1pPr>
+          </a:lstStyle>
+          <a:p>
+            <a:pPr algn="r"/>
+            <a:fld id="{F7021451-1387-4CA6-816F-3879F97B5CBC}" type="slidenum">
+              <a:rPr b="1" lang="en-US"/>
+              <a:t>21</a:t>
+            </a:fld>
+            <a:endParaRPr lang="en-US"/>
           </a:p>
         </p:txBody>
       </p:sp>
@@ -13466,6 +14276,45 @@
         </p:nvSpPr>
         <p:spPr>
           <a:xfrm>
+            <a:off x="457200" y="548640"/>
+            <a:ext cx="3474720" cy="1737360"/>
+          </a:xfrm>
+          <a:prstGeom prst="rect">
+            <a:avLst/>
+          </a:prstGeom>
+          <a:noFill/>
+          <a:ln/>
+        </p:spPr>
+        <p:txBody>
+          <a:bodyPr wrap="square" rtlCol="0" anchor="ctr"/>
+          <a:lstStyle/>
+          <a:p>
+            <a:pPr indent="0" marL="0">
+              <a:buNone/>
+            </a:pPr>
+            <a:r>
+              <a:rPr lang="en-US" sz="11000" b="1" dirty="0">
+                <a:solidFill>
+                  <a:srgbClr val="11396F"/>
+                </a:solidFill>
+                <a:latin typeface="Arial" pitchFamily="34" charset="0"/>
+                <a:ea typeface="Arial" pitchFamily="34" charset="-122"/>
+                <a:cs typeface="Arial" pitchFamily="34" charset="-120"/>
+              </a:rPr>
+              <a:t>05</a:t>
+            </a:r>
+            <a:endParaRPr lang="en-US" sz="11000" dirty="0"/>
+          </a:p>
+        </p:txBody>
+      </p:sp>
+      <p:sp>
+        <p:nvSpPr>
+          <p:cNvPr id="4" name="Text 2"/>
+          <p:cNvSpPr/>
+          <p:nvPr/>
+        </p:nvSpPr>
+        <p:spPr>
+          <a:xfrm>
             <a:off x="548640" y="2194560"/>
             <a:ext cx="3291840" cy="548640"/>
           </a:xfrm>
@@ -13499,7 +14348,46 @@
       </p:sp>
       <p:sp>
         <p:nvSpPr>
-          <p:cNvPr id="4" name="Text 2"/>
+          <p:cNvPr id="5" name="Text 3"/>
+          <p:cNvSpPr/>
+          <p:nvPr/>
+        </p:nvSpPr>
+        <p:spPr>
+          <a:xfrm>
+            <a:off x="548640" y="3200400"/>
+            <a:ext cx="3383280" cy="457200"/>
+          </a:xfrm>
+          <a:prstGeom prst="rect">
+            <a:avLst/>
+          </a:prstGeom>
+          <a:noFill/>
+          <a:ln/>
+        </p:spPr>
+        <p:txBody>
+          <a:bodyPr wrap="square" rtlCol="0" anchor="ctr"/>
+          <a:lstStyle/>
+          <a:p>
+            <a:pPr indent="0" marL="0">
+              <a:buNone/>
+            </a:pPr>
+            <a:r>
+              <a:rPr lang="en-US" sz="1100" dirty="0">
+                <a:solidFill>
+                  <a:srgbClr val="C7D2E3"/>
+                </a:solidFill>
+                <a:latin typeface="Arial" pitchFamily="34" charset="0"/>
+                <a:ea typeface="Arial" pitchFamily="34" charset="-122"/>
+                <a:cs typeface="Arial" pitchFamily="34" charset="-120"/>
+              </a:rPr>
+              <a:t>M8 · Etapa 3 · Operação ponta a ponta</a:t>
+            </a:r>
+            <a:endParaRPr lang="en-US" sz="1100" dirty="0"/>
+          </a:p>
+        </p:txBody>
+      </p:sp>
+      <p:sp>
+        <p:nvSpPr>
+          <p:cNvPr id="6" name="Text 4"/>
           <p:cNvSpPr/>
           <p:nvPr/>
         </p:nvSpPr>
@@ -13538,7 +14426,7 @@
       </p:sp>
       <p:pic>
         <p:nvPicPr>
-          <p:cNvPr id="5" name="Image 0" descr="/www/wwwroot/rexar/gdsolar/docs/curso/slides/assets/logo-gdsolar.png">    </p:cNvPr>
+          <p:cNvPr id="7" name="Image 0" descr="/www/wwwroot/rexar/gdsolar/docs/curso/slides/assets/logo-gdsolar.png">    </p:cNvPr>
           <p:cNvPicPr>
             <a:picLocks noChangeAspect="1"/>
           </p:cNvPicPr>
@@ -13562,7 +14450,7 @@
       </p:pic>
       <p:sp>
         <p:nvSpPr>
-          <p:cNvPr id="6" name="Text 3"/>
+          <p:cNvPr id="8" name="Text 5"/>
           <p:cNvSpPr/>
           <p:nvPr/>
         </p:nvSpPr>
@@ -13603,7 +14491,7 @@
       </p:sp>
       <p:sp>
         <p:nvSpPr>
-          <p:cNvPr id="7" name="Text 4"/>
+          <p:cNvPr id="9" name="Text 6"/>
           <p:cNvSpPr/>
           <p:nvPr/>
         </p:nvSpPr>
@@ -13644,7 +14532,7 @@
       </p:sp>
       <p:sp>
         <p:nvSpPr>
-          <p:cNvPr id="8" name="Text 5"/>
+          <p:cNvPr id="10" name="Text 7"/>
           <p:cNvSpPr/>
           <p:nvPr/>
         </p:nvSpPr>
@@ -13760,7 +14648,7 @@
         </p:blipFill>
         <p:spPr>
           <a:xfrm>
-            <a:off x="411480" y="6547104"/>
+            <a:off x="548640" y="6547104"/>
             <a:ext cx="274320" cy="274320"/>
           </a:xfrm>
           <a:prstGeom prst="rect">
@@ -13776,7 +14664,7 @@
         </p:nvSpPr>
         <p:spPr>
           <a:xfrm>
-            <a:off x="749808" y="6528816"/>
+            <a:off x="886968" y="6528816"/>
             <a:ext cx="6400800" cy="310896"/>
           </a:xfrm>
           <a:prstGeom prst="rect">
@@ -13816,7 +14704,7 @@
         <p:spPr>
           <a:xfrm>
             <a:off x="7132320" y="6528816"/>
-            <a:ext cx="4663440" cy="310896"/>
+            <a:ext cx="4023360" cy="310896"/>
           </a:xfrm>
           <a:prstGeom prst="rect">
             <a:avLst/>
@@ -13854,7 +14742,7 @@
         </p:nvSpPr>
         <p:spPr>
           <a:xfrm>
-            <a:off x="411480" y="384048"/>
+            <a:off x="548640" y="384048"/>
             <a:ext cx="82296" cy="658368"/>
           </a:xfrm>
           <a:prstGeom prst="rect">
@@ -13874,7 +14762,7 @@
         </p:nvSpPr>
         <p:spPr>
           <a:xfrm>
-            <a:off x="640080" y="292608"/>
+            <a:off x="777240" y="292608"/>
             <a:ext cx="10972800" cy="274320"/>
           </a:xfrm>
           <a:prstGeom prst="rect">
@@ -13913,8 +14801,8 @@
         </p:nvSpPr>
         <p:spPr>
           <a:xfrm>
-            <a:off x="640080" y="530352"/>
-            <a:ext cx="11155680" cy="566928"/>
+            <a:off x="777240" y="530352"/>
+            <a:ext cx="10881360" cy="566928"/>
           </a:xfrm>
           <a:prstGeom prst="rect">
             <a:avLst/>
@@ -14268,6 +15156,54 @@
               <a:t>Gerar pagamento → Pix · copia e cola · cliente recebe e-mail automaticamente</a:t>
             </a:r>
             <a:endParaRPr lang="en-US" sz="1500" dirty="0"/>
+          </a:p>
+        </p:txBody>
+      </p:sp>
+      <p:sp>
+        <p:nvSpPr>
+          <p:cNvPr id="25" name="Slide Number Placeholder 0"/>
+          <p:cNvSpPr>
+            <a:spLocks noGrp="1"/>
+          </p:cNvSpPr>
+          <p:nvPr>
+            <p:ph type="sldNum" sz="quarter" idx="4294967295"/>
+          </p:nvPr>
+        </p:nvSpPr>
+        <p:spPr>
+          <a:xfrm>
+            <a:off x="11292840" y="6556248"/>
+            <a:ext cx="548640" cy="256032"/>
+          </a:xfrm>
+          <a:prstGeom prst="rect">
+            <a:avLst/>
+          </a:prstGeom>
+          <a:extLst>
+            <a:ext uri="{C572A759-6A51-4108-AA02-DFA0A04FC94B}">
+              <ma14:wrappingTextBoxFlag xmlns:ma14="http://schemas.microsoft.com/office/mac/drawingml/2011/main" val="0"/>
+            </a:ext>
+          </a:extLst>
+        </p:spPr>
+        <p:txBody>
+          <a:bodyPr/>
+          <a:lstStyle>
+            <a:lvl1pPr>
+              <a:defRPr sz="900">
+                <a:solidFill>
+                  <a:srgbClr val="1B3A6B"/>
+                </a:solidFill>
+                <a:latin typeface="Arial"/>
+                <a:ea typeface="Arial"/>
+                <a:cs typeface="Arial"/>
+              </a:defRPr>
+            </a:lvl1pPr>
+          </a:lstStyle>
+          <a:p>
+            <a:pPr algn="r"/>
+            <a:fld id="{F7021451-1387-4CA6-816F-3879F97B5CBC}" type="slidenum">
+              <a:rPr b="1" lang="en-US"/>
+              <a:t>23</a:t>
+            </a:fld>
+            <a:endParaRPr lang="en-US"/>
           </a:p>
         </p:txBody>
       </p:sp>
@@ -14344,7 +15280,7 @@
         </p:blipFill>
         <p:spPr>
           <a:xfrm>
-            <a:off x="411480" y="6547104"/>
+            <a:off x="548640" y="6547104"/>
             <a:ext cx="274320" cy="274320"/>
           </a:xfrm>
           <a:prstGeom prst="rect">
@@ -14360,7 +15296,7 @@
         </p:nvSpPr>
         <p:spPr>
           <a:xfrm>
-            <a:off x="749808" y="6528816"/>
+            <a:off x="886968" y="6528816"/>
             <a:ext cx="6400800" cy="310896"/>
           </a:xfrm>
           <a:prstGeom prst="rect">
@@ -14400,7 +15336,7 @@
         <p:spPr>
           <a:xfrm>
             <a:off x="7132320" y="6528816"/>
-            <a:ext cx="4663440" cy="310896"/>
+            <a:ext cx="4023360" cy="310896"/>
           </a:xfrm>
           <a:prstGeom prst="rect">
             <a:avLst/>
@@ -14438,7 +15374,7 @@
         </p:nvSpPr>
         <p:spPr>
           <a:xfrm>
-            <a:off x="411480" y="384048"/>
+            <a:off x="548640" y="384048"/>
             <a:ext cx="82296" cy="658368"/>
           </a:xfrm>
           <a:prstGeom prst="rect">
@@ -14458,7 +15394,7 @@
         </p:nvSpPr>
         <p:spPr>
           <a:xfrm>
-            <a:off x="640080" y="292608"/>
+            <a:off x="777240" y="292608"/>
             <a:ext cx="10972800" cy="274320"/>
           </a:xfrm>
           <a:prstGeom prst="rect">
@@ -14497,8 +15433,8 @@
         </p:nvSpPr>
         <p:spPr>
           <a:xfrm>
-            <a:off x="640080" y="530352"/>
-            <a:ext cx="11155680" cy="566928"/>
+            <a:off x="777240" y="530352"/>
+            <a:ext cx="10881360" cy="566928"/>
           </a:xfrm>
           <a:prstGeom prst="rect">
             <a:avLst/>
@@ -14699,6 +15635,54 @@
               <a:t>WhatsApp: mensagem pronta, envio com 1 clique · Boleto exige endereço completo</a:t>
             </a:r>
             <a:endParaRPr lang="en-US" sz="1500" dirty="0"/>
+          </a:p>
+        </p:txBody>
+      </p:sp>
+      <p:sp>
+        <p:nvSpPr>
+          <p:cNvPr id="25" name="Slide Number Placeholder 0"/>
+          <p:cNvSpPr>
+            <a:spLocks noGrp="1"/>
+          </p:cNvSpPr>
+          <p:nvPr>
+            <p:ph type="sldNum" sz="quarter" idx="4294967295"/>
+          </p:nvPr>
+        </p:nvSpPr>
+        <p:spPr>
+          <a:xfrm>
+            <a:off x="11292840" y="6556248"/>
+            <a:ext cx="548640" cy="256032"/>
+          </a:xfrm>
+          <a:prstGeom prst="rect">
+            <a:avLst/>
+          </a:prstGeom>
+          <a:extLst>
+            <a:ext uri="{C572A759-6A51-4108-AA02-DFA0A04FC94B}">
+              <ma14:wrappingTextBoxFlag xmlns:ma14="http://schemas.microsoft.com/office/mac/drawingml/2011/main" val="0"/>
+            </a:ext>
+          </a:extLst>
+        </p:spPr>
+        <p:txBody>
+          <a:bodyPr/>
+          <a:lstStyle>
+            <a:lvl1pPr>
+              <a:defRPr sz="900">
+                <a:solidFill>
+                  <a:srgbClr val="1B3A6B"/>
+                </a:solidFill>
+                <a:latin typeface="Arial"/>
+                <a:ea typeface="Arial"/>
+                <a:cs typeface="Arial"/>
+              </a:defRPr>
+            </a:lvl1pPr>
+          </a:lstStyle>
+          <a:p>
+            <a:pPr algn="r"/>
+            <a:fld id="{F7021451-1387-4CA6-816F-3879F97B5CBC}" type="slidenum">
+              <a:rPr b="1" lang="en-US"/>
+              <a:t>24</a:t>
+            </a:fld>
+            <a:endParaRPr lang="en-US"/>
           </a:p>
         </p:txBody>
       </p:sp>
@@ -14762,6 +15746,45 @@
         </p:nvSpPr>
         <p:spPr>
           <a:xfrm>
+            <a:off x="457200" y="548640"/>
+            <a:ext cx="3474720" cy="1737360"/>
+          </a:xfrm>
+          <a:prstGeom prst="rect">
+            <a:avLst/>
+          </a:prstGeom>
+          <a:noFill/>
+          <a:ln/>
+        </p:spPr>
+        <p:txBody>
+          <a:bodyPr wrap="square" rtlCol="0" anchor="ctr"/>
+          <a:lstStyle/>
+          <a:p>
+            <a:pPr indent="0" marL="0">
+              <a:buNone/>
+            </a:pPr>
+            <a:r>
+              <a:rPr lang="en-US" sz="11000" b="1" dirty="0">
+                <a:solidFill>
+                  <a:srgbClr val="11396F"/>
+                </a:solidFill>
+                <a:latin typeface="Arial" pitchFamily="34" charset="0"/>
+                <a:ea typeface="Arial" pitchFamily="34" charset="-122"/>
+                <a:cs typeface="Arial" pitchFamily="34" charset="-120"/>
+              </a:rPr>
+              <a:t>06</a:t>
+            </a:r>
+            <a:endParaRPr lang="en-US" sz="11000" dirty="0"/>
+          </a:p>
+        </p:txBody>
+      </p:sp>
+      <p:sp>
+        <p:nvSpPr>
+          <p:cNvPr id="4" name="Text 2"/>
+          <p:cNvSpPr/>
+          <p:nvPr/>
+        </p:nvSpPr>
+        <p:spPr>
+          <a:xfrm>
             <a:off x="548640" y="2194560"/>
             <a:ext cx="3291840" cy="548640"/>
           </a:xfrm>
@@ -14795,7 +15818,46 @@
       </p:sp>
       <p:sp>
         <p:nvSpPr>
-          <p:cNvPr id="4" name="Text 2"/>
+          <p:cNvPr id="5" name="Text 3"/>
+          <p:cNvSpPr/>
+          <p:nvPr/>
+        </p:nvSpPr>
+        <p:spPr>
+          <a:xfrm>
+            <a:off x="548640" y="3200400"/>
+            <a:ext cx="3383280" cy="457200"/>
+          </a:xfrm>
+          <a:prstGeom prst="rect">
+            <a:avLst/>
+          </a:prstGeom>
+          <a:noFill/>
+          <a:ln/>
+        </p:spPr>
+        <p:txBody>
+          <a:bodyPr wrap="square" rtlCol="0" anchor="ctr"/>
+          <a:lstStyle/>
+          <a:p>
+            <a:pPr indent="0" marL="0">
+              <a:buNone/>
+            </a:pPr>
+            <a:r>
+              <a:rPr lang="en-US" sz="1100" dirty="0">
+                <a:solidFill>
+                  <a:srgbClr val="C7D2E3"/>
+                </a:solidFill>
+                <a:latin typeface="Arial" pitchFamily="34" charset="0"/>
+                <a:ea typeface="Arial" pitchFamily="34" charset="-122"/>
+                <a:cs typeface="Arial" pitchFamily="34" charset="-120"/>
+              </a:rPr>
+              <a:t>M8 · Etapa 3 · Operação ponta a ponta</a:t>
+            </a:r>
+            <a:endParaRPr lang="en-US" sz="1100" dirty="0"/>
+          </a:p>
+        </p:txBody>
+      </p:sp>
+      <p:sp>
+        <p:nvSpPr>
+          <p:cNvPr id="6" name="Text 4"/>
           <p:cNvSpPr/>
           <p:nvPr/>
         </p:nvSpPr>
@@ -14834,7 +15896,7 @@
       </p:sp>
       <p:pic>
         <p:nvPicPr>
-          <p:cNvPr id="5" name="Image 0" descr="/www/wwwroot/rexar/gdsolar/docs/curso/slides/assets/logo-gdsolar.png">    </p:cNvPr>
+          <p:cNvPr id="7" name="Image 0" descr="/www/wwwroot/rexar/gdsolar/docs/curso/slides/assets/logo-gdsolar.png">    </p:cNvPr>
           <p:cNvPicPr>
             <a:picLocks noChangeAspect="1"/>
           </p:cNvPicPr>
@@ -14858,7 +15920,7 @@
       </p:pic>
       <p:sp>
         <p:nvSpPr>
-          <p:cNvPr id="6" name="Text 3"/>
+          <p:cNvPr id="8" name="Text 5"/>
           <p:cNvSpPr/>
           <p:nvPr/>
         </p:nvSpPr>
@@ -14899,7 +15961,7 @@
       </p:sp>
       <p:sp>
         <p:nvSpPr>
-          <p:cNvPr id="7" name="Text 4"/>
+          <p:cNvPr id="9" name="Text 6"/>
           <p:cNvSpPr/>
           <p:nvPr/>
         </p:nvSpPr>
@@ -14940,7 +16002,7 @@
       </p:sp>
       <p:sp>
         <p:nvSpPr>
-          <p:cNvPr id="8" name="Text 5"/>
+          <p:cNvPr id="10" name="Text 7"/>
           <p:cNvSpPr/>
           <p:nvPr/>
         </p:nvSpPr>
@@ -15056,7 +16118,7 @@
         </p:blipFill>
         <p:spPr>
           <a:xfrm>
-            <a:off x="411480" y="6547104"/>
+            <a:off x="548640" y="6547104"/>
             <a:ext cx="274320" cy="274320"/>
           </a:xfrm>
           <a:prstGeom prst="rect">
@@ -15072,7 +16134,7 @@
         </p:nvSpPr>
         <p:spPr>
           <a:xfrm>
-            <a:off x="749808" y="6528816"/>
+            <a:off x="886968" y="6528816"/>
             <a:ext cx="6400800" cy="310896"/>
           </a:xfrm>
           <a:prstGeom prst="rect">
@@ -15112,7 +16174,7 @@
         <p:spPr>
           <a:xfrm>
             <a:off x="7132320" y="6528816"/>
-            <a:ext cx="4663440" cy="310896"/>
+            <a:ext cx="4023360" cy="310896"/>
           </a:xfrm>
           <a:prstGeom prst="rect">
             <a:avLst/>
@@ -15150,7 +16212,7 @@
         </p:nvSpPr>
         <p:spPr>
           <a:xfrm>
-            <a:off x="411480" y="384048"/>
+            <a:off x="548640" y="384048"/>
             <a:ext cx="82296" cy="658368"/>
           </a:xfrm>
           <a:prstGeom prst="rect">
@@ -15170,7 +16232,7 @@
         </p:nvSpPr>
         <p:spPr>
           <a:xfrm>
-            <a:off x="640080" y="292608"/>
+            <a:off x="777240" y="292608"/>
             <a:ext cx="10972800" cy="274320"/>
           </a:xfrm>
           <a:prstGeom prst="rect">
@@ -15209,8 +16271,8 @@
         </p:nvSpPr>
         <p:spPr>
           <a:xfrm>
-            <a:off x="640080" y="530352"/>
-            <a:ext cx="11155680" cy="566928"/>
+            <a:off x="777240" y="530352"/>
+            <a:ext cx="10881360" cy="566928"/>
           </a:xfrm>
           <a:prstGeom prst="rect">
             <a:avLst/>
@@ -15564,6 +16626,54 @@
               <a:t>Recebeu por fora? Confirmar Pagamento + observação · boleto ativo é cancelado</a:t>
             </a:r>
             <a:endParaRPr lang="en-US" sz="1500" dirty="0"/>
+          </a:p>
+        </p:txBody>
+      </p:sp>
+      <p:sp>
+        <p:nvSpPr>
+          <p:cNvPr id="25" name="Slide Number Placeholder 0"/>
+          <p:cNvSpPr>
+            <a:spLocks noGrp="1"/>
+          </p:cNvSpPr>
+          <p:nvPr>
+            <p:ph type="sldNum" sz="quarter" idx="4294967295"/>
+          </p:nvPr>
+        </p:nvSpPr>
+        <p:spPr>
+          <a:xfrm>
+            <a:off x="11292840" y="6556248"/>
+            <a:ext cx="548640" cy="256032"/>
+          </a:xfrm>
+          <a:prstGeom prst="rect">
+            <a:avLst/>
+          </a:prstGeom>
+          <a:extLst>
+            <a:ext uri="{C572A759-6A51-4108-AA02-DFA0A04FC94B}">
+              <ma14:wrappingTextBoxFlag xmlns:ma14="http://schemas.microsoft.com/office/mac/drawingml/2011/main" val="0"/>
+            </a:ext>
+          </a:extLst>
+        </p:spPr>
+        <p:txBody>
+          <a:bodyPr/>
+          <a:lstStyle>
+            <a:lvl1pPr>
+              <a:defRPr sz="900">
+                <a:solidFill>
+                  <a:srgbClr val="1B3A6B"/>
+                </a:solidFill>
+                <a:latin typeface="Arial"/>
+                <a:ea typeface="Arial"/>
+                <a:cs typeface="Arial"/>
+              </a:defRPr>
+            </a:lvl1pPr>
+          </a:lstStyle>
+          <a:p>
+            <a:pPr algn="r"/>
+            <a:fld id="{F7021451-1387-4CA6-816F-3879F97B5CBC}" type="slidenum">
+              <a:rPr b="1" lang="en-US"/>
+              <a:t>26</a:t>
+            </a:fld>
+            <a:endParaRPr lang="en-US"/>
           </a:p>
         </p:txBody>
       </p:sp>
@@ -15640,7 +16750,7 @@
         </p:blipFill>
         <p:spPr>
           <a:xfrm>
-            <a:off x="411480" y="6547104"/>
+            <a:off x="548640" y="6547104"/>
             <a:ext cx="274320" cy="274320"/>
           </a:xfrm>
           <a:prstGeom prst="rect">
@@ -15656,7 +16766,7 @@
         </p:nvSpPr>
         <p:spPr>
           <a:xfrm>
-            <a:off x="749808" y="6528816"/>
+            <a:off x="886968" y="6528816"/>
             <a:ext cx="6400800" cy="310896"/>
           </a:xfrm>
           <a:prstGeom prst="rect">
@@ -15696,7 +16806,7 @@
         <p:spPr>
           <a:xfrm>
             <a:off x="7132320" y="6528816"/>
-            <a:ext cx="4663440" cy="310896"/>
+            <a:ext cx="4023360" cy="310896"/>
           </a:xfrm>
           <a:prstGeom prst="rect">
             <a:avLst/>
@@ -15734,7 +16844,7 @@
         </p:nvSpPr>
         <p:spPr>
           <a:xfrm>
-            <a:off x="411480" y="384048"/>
+            <a:off x="548640" y="384048"/>
             <a:ext cx="82296" cy="658368"/>
           </a:xfrm>
           <a:prstGeom prst="rect">
@@ -15754,7 +16864,7 @@
         </p:nvSpPr>
         <p:spPr>
           <a:xfrm>
-            <a:off x="640080" y="292608"/>
+            <a:off x="777240" y="292608"/>
             <a:ext cx="10972800" cy="274320"/>
           </a:xfrm>
           <a:prstGeom prst="rect">
@@ -15793,8 +16903,8 @@
         </p:nvSpPr>
         <p:spPr>
           <a:xfrm>
-            <a:off x="640080" y="530352"/>
-            <a:ext cx="11155680" cy="566928"/>
+            <a:off x="777240" y="530352"/>
+            <a:ext cx="10881360" cy="566928"/>
           </a:xfrm>
           <a:prstGeom prst="rect">
             <a:avLst/>
@@ -15884,6 +16994,54 @@
           </a:prstGeom>
         </p:spPr>
       </p:pic>
+      <p:sp>
+        <p:nvSpPr>
+          <p:cNvPr id="25" name="Slide Number Placeholder 0"/>
+          <p:cNvSpPr>
+            <a:spLocks noGrp="1"/>
+          </p:cNvSpPr>
+          <p:nvPr>
+            <p:ph type="sldNum" sz="quarter" idx="4294967295"/>
+          </p:nvPr>
+        </p:nvSpPr>
+        <p:spPr>
+          <a:xfrm>
+            <a:off x="11292840" y="6556248"/>
+            <a:ext cx="548640" cy="256032"/>
+          </a:xfrm>
+          <a:prstGeom prst="rect">
+            <a:avLst/>
+          </a:prstGeom>
+          <a:extLst>
+            <a:ext uri="{C572A759-6A51-4108-AA02-DFA0A04FC94B}">
+              <ma14:wrappingTextBoxFlag xmlns:ma14="http://schemas.microsoft.com/office/mac/drawingml/2011/main" val="0"/>
+            </a:ext>
+          </a:extLst>
+        </p:spPr>
+        <p:txBody>
+          <a:bodyPr/>
+          <a:lstStyle>
+            <a:lvl1pPr>
+              <a:defRPr sz="900">
+                <a:solidFill>
+                  <a:srgbClr val="1B3A6B"/>
+                </a:solidFill>
+                <a:latin typeface="Arial"/>
+                <a:ea typeface="Arial"/>
+                <a:cs typeface="Arial"/>
+              </a:defRPr>
+            </a:lvl1pPr>
+          </a:lstStyle>
+          <a:p>
+            <a:pPr algn="r"/>
+            <a:fld id="{F7021451-1387-4CA6-816F-3879F97B5CBC}" type="slidenum">
+              <a:rPr b="1" lang="en-US"/>
+              <a:t>27</a:t>
+            </a:fld>
+            <a:endParaRPr lang="en-US"/>
+          </a:p>
+        </p:txBody>
+      </p:sp>
     </p:spTree>
   </p:cSld>
   <p:clrMapOvr>
@@ -15944,6 +17102,45 @@
         </p:nvSpPr>
         <p:spPr>
           <a:xfrm>
+            <a:off x="457200" y="548640"/>
+            <a:ext cx="3474720" cy="1737360"/>
+          </a:xfrm>
+          <a:prstGeom prst="rect">
+            <a:avLst/>
+          </a:prstGeom>
+          <a:noFill/>
+          <a:ln/>
+        </p:spPr>
+        <p:txBody>
+          <a:bodyPr wrap="square" rtlCol="0" anchor="ctr"/>
+          <a:lstStyle/>
+          <a:p>
+            <a:pPr indent="0" marL="0">
+              <a:buNone/>
+            </a:pPr>
+            <a:r>
+              <a:rPr lang="en-US" sz="11000" b="1" dirty="0">
+                <a:solidFill>
+                  <a:srgbClr val="11396F"/>
+                </a:solidFill>
+                <a:latin typeface="Arial" pitchFamily="34" charset="0"/>
+                <a:ea typeface="Arial" pitchFamily="34" charset="-122"/>
+                <a:cs typeface="Arial" pitchFamily="34" charset="-120"/>
+              </a:rPr>
+              <a:t>07</a:t>
+            </a:r>
+            <a:endParaRPr lang="en-US" sz="11000" dirty="0"/>
+          </a:p>
+        </p:txBody>
+      </p:sp>
+      <p:sp>
+        <p:nvSpPr>
+          <p:cNvPr id="4" name="Text 2"/>
+          <p:cNvSpPr/>
+          <p:nvPr/>
+        </p:nvSpPr>
+        <p:spPr>
+          <a:xfrm>
             <a:off x="548640" y="2194560"/>
             <a:ext cx="3291840" cy="548640"/>
           </a:xfrm>
@@ -15977,7 +17174,46 @@
       </p:sp>
       <p:sp>
         <p:nvSpPr>
-          <p:cNvPr id="4" name="Text 2"/>
+          <p:cNvPr id="5" name="Text 3"/>
+          <p:cNvSpPr/>
+          <p:nvPr/>
+        </p:nvSpPr>
+        <p:spPr>
+          <a:xfrm>
+            <a:off x="548640" y="3200400"/>
+            <a:ext cx="3383280" cy="457200"/>
+          </a:xfrm>
+          <a:prstGeom prst="rect">
+            <a:avLst/>
+          </a:prstGeom>
+          <a:noFill/>
+          <a:ln/>
+        </p:spPr>
+        <p:txBody>
+          <a:bodyPr wrap="square" rtlCol="0" anchor="ctr"/>
+          <a:lstStyle/>
+          <a:p>
+            <a:pPr indent="0" marL="0">
+              <a:buNone/>
+            </a:pPr>
+            <a:r>
+              <a:rPr lang="en-US" sz="1100" dirty="0">
+                <a:solidFill>
+                  <a:srgbClr val="C7D2E3"/>
+                </a:solidFill>
+                <a:latin typeface="Arial" pitchFamily="34" charset="0"/>
+                <a:ea typeface="Arial" pitchFamily="34" charset="-122"/>
+                <a:cs typeface="Arial" pitchFamily="34" charset="-120"/>
+              </a:rPr>
+              <a:t>M8 · Etapa 3 · Operação ponta a ponta</a:t>
+            </a:r>
+            <a:endParaRPr lang="en-US" sz="1100" dirty="0"/>
+          </a:p>
+        </p:txBody>
+      </p:sp>
+      <p:sp>
+        <p:nvSpPr>
+          <p:cNvPr id="6" name="Text 4"/>
           <p:cNvSpPr/>
           <p:nvPr/>
         </p:nvSpPr>
@@ -16016,7 +17252,7 @@
       </p:sp>
       <p:pic>
         <p:nvPicPr>
-          <p:cNvPr id="5" name="Image 0" descr="/www/wwwroot/rexar/gdsolar/docs/curso/slides/assets/logo-gdsolar.png">    </p:cNvPr>
+          <p:cNvPr id="7" name="Image 0" descr="/www/wwwroot/rexar/gdsolar/docs/curso/slides/assets/logo-gdsolar.png">    </p:cNvPr>
           <p:cNvPicPr>
             <a:picLocks noChangeAspect="1"/>
           </p:cNvPicPr>
@@ -16040,7 +17276,7 @@
       </p:pic>
       <p:sp>
         <p:nvSpPr>
-          <p:cNvPr id="6" name="Text 3"/>
+          <p:cNvPr id="8" name="Text 5"/>
           <p:cNvSpPr/>
           <p:nvPr/>
         </p:nvSpPr>
@@ -16081,7 +17317,7 @@
       </p:sp>
       <p:sp>
         <p:nvSpPr>
-          <p:cNvPr id="7" name="Text 4"/>
+          <p:cNvPr id="9" name="Text 6"/>
           <p:cNvSpPr/>
           <p:nvPr/>
         </p:nvSpPr>
@@ -16122,7 +17358,7 @@
       </p:sp>
       <p:sp>
         <p:nvSpPr>
-          <p:cNvPr id="8" name="Text 5"/>
+          <p:cNvPr id="10" name="Text 7"/>
           <p:cNvSpPr/>
           <p:nvPr/>
         </p:nvSpPr>
@@ -16238,7 +17474,7 @@
         </p:blipFill>
         <p:spPr>
           <a:xfrm>
-            <a:off x="411480" y="6547104"/>
+            <a:off x="548640" y="6547104"/>
             <a:ext cx="274320" cy="274320"/>
           </a:xfrm>
           <a:prstGeom prst="rect">
@@ -16254,7 +17490,7 @@
         </p:nvSpPr>
         <p:spPr>
           <a:xfrm>
-            <a:off x="749808" y="6528816"/>
+            <a:off x="886968" y="6528816"/>
             <a:ext cx="6400800" cy="310896"/>
           </a:xfrm>
           <a:prstGeom prst="rect">
@@ -16294,7 +17530,7 @@
         <p:spPr>
           <a:xfrm>
             <a:off x="7132320" y="6528816"/>
-            <a:ext cx="4663440" cy="310896"/>
+            <a:ext cx="4023360" cy="310896"/>
           </a:xfrm>
           <a:prstGeom prst="rect">
             <a:avLst/>
@@ -16332,7 +17568,7 @@
         </p:nvSpPr>
         <p:spPr>
           <a:xfrm>
-            <a:off x="411480" y="384048"/>
+            <a:off x="548640" y="384048"/>
             <a:ext cx="82296" cy="658368"/>
           </a:xfrm>
           <a:prstGeom prst="rect">
@@ -16352,7 +17588,7 @@
         </p:nvSpPr>
         <p:spPr>
           <a:xfrm>
-            <a:off x="640080" y="292608"/>
+            <a:off x="777240" y="292608"/>
             <a:ext cx="10972800" cy="274320"/>
           </a:xfrm>
           <a:prstGeom prst="rect">
@@ -16391,8 +17627,8 @@
         </p:nvSpPr>
         <p:spPr>
           <a:xfrm>
-            <a:off x="640080" y="530352"/>
-            <a:ext cx="11155680" cy="566928"/>
+            <a:off x="777240" y="530352"/>
+            <a:ext cx="10881360" cy="566928"/>
           </a:xfrm>
           <a:prstGeom prst="rect">
             <a:avLst/>
@@ -16746,6 +17982,54 @@
               <a:t>Editar vencimento → pagamento anterior cancelado → novo emitido → histórico</a:t>
             </a:r>
             <a:endParaRPr lang="en-US" sz="1500" dirty="0"/>
+          </a:p>
+        </p:txBody>
+      </p:sp>
+      <p:sp>
+        <p:nvSpPr>
+          <p:cNvPr id="25" name="Slide Number Placeholder 0"/>
+          <p:cNvSpPr>
+            <a:spLocks noGrp="1"/>
+          </p:cNvSpPr>
+          <p:nvPr>
+            <p:ph type="sldNum" sz="quarter" idx="4294967295"/>
+          </p:nvPr>
+        </p:nvSpPr>
+        <p:spPr>
+          <a:xfrm>
+            <a:off x="11292840" y="6556248"/>
+            <a:ext cx="548640" cy="256032"/>
+          </a:xfrm>
+          <a:prstGeom prst="rect">
+            <a:avLst/>
+          </a:prstGeom>
+          <a:extLst>
+            <a:ext uri="{C572A759-6A51-4108-AA02-DFA0A04FC94B}">
+              <ma14:wrappingTextBoxFlag xmlns:ma14="http://schemas.microsoft.com/office/mac/drawingml/2011/main" val="0"/>
+            </a:ext>
+          </a:extLst>
+        </p:spPr>
+        <p:txBody>
+          <a:bodyPr/>
+          <a:lstStyle>
+            <a:lvl1pPr>
+              <a:defRPr sz="900">
+                <a:solidFill>
+                  <a:srgbClr val="1B3A6B"/>
+                </a:solidFill>
+                <a:latin typeface="Arial"/>
+                <a:ea typeface="Arial"/>
+                <a:cs typeface="Arial"/>
+              </a:defRPr>
+            </a:lvl1pPr>
+          </a:lstStyle>
+          <a:p>
+            <a:pPr algn="r"/>
+            <a:fld id="{F7021451-1387-4CA6-816F-3879F97B5CBC}" type="slidenum">
+              <a:rPr b="1" lang="en-US"/>
+              <a:t>29</a:t>
+            </a:fld>
+            <a:endParaRPr lang="en-US"/>
           </a:p>
         </p:txBody>
       </p:sp>
@@ -16822,7 +18106,7 @@
         </p:blipFill>
         <p:spPr>
           <a:xfrm>
-            <a:off x="411480" y="6547104"/>
+            <a:off x="548640" y="6547104"/>
             <a:ext cx="274320" cy="274320"/>
           </a:xfrm>
           <a:prstGeom prst="rect">
@@ -16838,7 +18122,7 @@
         </p:nvSpPr>
         <p:spPr>
           <a:xfrm>
-            <a:off x="749808" y="6528816"/>
+            <a:off x="886968" y="6528816"/>
             <a:ext cx="6400800" cy="310896"/>
           </a:xfrm>
           <a:prstGeom prst="rect">
@@ -16878,7 +18162,7 @@
         <p:spPr>
           <a:xfrm>
             <a:off x="7132320" y="6528816"/>
-            <a:ext cx="4663440" cy="310896"/>
+            <a:ext cx="4023360" cy="310896"/>
           </a:xfrm>
           <a:prstGeom prst="rect">
             <a:avLst/>
@@ -16916,7 +18200,7 @@
         </p:nvSpPr>
         <p:spPr>
           <a:xfrm>
-            <a:off x="411480" y="384048"/>
+            <a:off x="548640" y="384048"/>
             <a:ext cx="82296" cy="658368"/>
           </a:xfrm>
           <a:prstGeom prst="rect">
@@ -16936,7 +18220,7 @@
         </p:nvSpPr>
         <p:spPr>
           <a:xfrm>
-            <a:off x="640080" y="292608"/>
+            <a:off x="777240" y="292608"/>
             <a:ext cx="10972800" cy="274320"/>
           </a:xfrm>
           <a:prstGeom prst="rect">
@@ -16975,8 +18259,8 @@
         </p:nvSpPr>
         <p:spPr>
           <a:xfrm>
-            <a:off x="640080" y="530352"/>
-            <a:ext cx="11155680" cy="566928"/>
+            <a:off x="777240" y="530352"/>
+            <a:ext cx="10881360" cy="566928"/>
           </a:xfrm>
           <a:prstGeom prst="rect">
             <a:avLst/>
@@ -17016,8 +18300,8 @@
         </p:nvSpPr>
         <p:spPr>
           <a:xfrm>
-            <a:off x="411480" y="1325880"/>
-            <a:ext cx="11384280" cy="4937760"/>
+            <a:off x="548640" y="1325880"/>
+            <a:ext cx="11091672" cy="4937760"/>
           </a:xfrm>
           <a:prstGeom prst="roundRect">
             <a:avLst>
@@ -17038,8 +18322,8 @@
         </p:nvSpPr>
         <p:spPr>
           <a:xfrm>
-            <a:off x="777240" y="1554480"/>
-            <a:ext cx="10652760" cy="4480560"/>
+            <a:off x="914400" y="1554480"/>
+            <a:ext cx="10360152" cy="4480560"/>
           </a:xfrm>
           <a:prstGeom prst="rect">
             <a:avLst/>
@@ -17060,7 +18344,7 @@
               <a:buNone/>
             </a:pPr>
             <a:r>
-              <a:rPr lang="en-US" sz="1600" b="1" dirty="0">
+              <a:rPr lang="en-US" sz="2400" b="1" dirty="0">
                 <a:solidFill>
                   <a:srgbClr val="FFFFFF"/>
                 </a:solidFill>
@@ -17070,7 +18354,7 @@
               </a:rPr>
               <a:t>Valor original = consumo injetado da fatura (R$)</a:t>
             </a:r>
-            <a:endParaRPr lang="en-US" sz="1600" dirty="0"/>
+            <a:endParaRPr lang="en-US" sz="2400" dirty="0"/>
           </a:p>
           <a:p>
             <a:pPr indent="0" marL="0">
@@ -17080,7 +18364,7 @@
               <a:buNone/>
             </a:pPr>
             <a:r>
-              <a:rPr lang="en-US" sz="1600" dirty="0">
+              <a:rPr lang="en-US" sz="2400" dirty="0">
                 <a:solidFill>
                   <a:srgbClr val="FFFFFF"/>
                 </a:solidFill>
@@ -17090,7 +18374,7 @@
               </a:rPr>
               <a:t>Desconto = valor original × margem de desconto (%)</a:t>
             </a:r>
-            <a:endParaRPr lang="en-US" sz="1600" dirty="0"/>
+            <a:endParaRPr lang="en-US" sz="2400" dirty="0"/>
           </a:p>
           <a:p>
             <a:pPr indent="0" marL="0">
@@ -17100,7 +18384,7 @@
               <a:buNone/>
             </a:pPr>
             <a:r>
-              <a:rPr lang="en-US" sz="1600" dirty="0">
+              <a:rPr lang="en-US" sz="2400" dirty="0">
                 <a:solidFill>
                   <a:srgbClr val="FFFFFF"/>
                 </a:solidFill>
@@ -17110,7 +18394,7 @@
               </a:rPr>
               <a:t>Valor final = valor original − desconto − desconto manual + acréscimo manual</a:t>
             </a:r>
-            <a:endParaRPr lang="en-US" sz="1600" dirty="0"/>
+            <a:endParaRPr lang="en-US" sz="2400" dirty="0"/>
           </a:p>
           <a:p>
             <a:pPr indent="0" marL="0">
@@ -17120,7 +18404,7 @@
               <a:buNone/>
             </a:pPr>
             <a:r>
-              <a:rPr lang="en-US" sz="1600" b="1" dirty="0">
+              <a:rPr lang="en-US" sz="2400" b="1" dirty="0">
                 <a:solidFill>
                   <a:srgbClr val="F7A23B"/>
                 </a:solidFill>
@@ -17130,7 +18414,55 @@
               </a:rPr>
               <a:t>Padaria: 2.119,00 − 423,80 = R$ 1.695,20</a:t>
             </a:r>
-            <a:endParaRPr lang="en-US" sz="1600" dirty="0"/>
+            <a:endParaRPr lang="en-US" sz="2400" dirty="0"/>
+          </a:p>
+        </p:txBody>
+      </p:sp>
+      <p:sp>
+        <p:nvSpPr>
+          <p:cNvPr id="25" name="Slide Number Placeholder 0"/>
+          <p:cNvSpPr>
+            <a:spLocks noGrp="1"/>
+          </p:cNvSpPr>
+          <p:nvPr>
+            <p:ph type="sldNum" sz="quarter" idx="4294967295"/>
+          </p:nvPr>
+        </p:nvSpPr>
+        <p:spPr>
+          <a:xfrm>
+            <a:off x="11292840" y="6556248"/>
+            <a:ext cx="548640" cy="256032"/>
+          </a:xfrm>
+          <a:prstGeom prst="rect">
+            <a:avLst/>
+          </a:prstGeom>
+          <a:extLst>
+            <a:ext uri="{C572A759-6A51-4108-AA02-DFA0A04FC94B}">
+              <ma14:wrappingTextBoxFlag xmlns:ma14="http://schemas.microsoft.com/office/mac/drawingml/2011/main" val="0"/>
+            </a:ext>
+          </a:extLst>
+        </p:spPr>
+        <p:txBody>
+          <a:bodyPr/>
+          <a:lstStyle>
+            <a:lvl1pPr>
+              <a:defRPr sz="900">
+                <a:solidFill>
+                  <a:srgbClr val="1B3A6B"/>
+                </a:solidFill>
+                <a:latin typeface="Arial"/>
+                <a:ea typeface="Arial"/>
+                <a:cs typeface="Arial"/>
+              </a:defRPr>
+            </a:lvl1pPr>
+          </a:lstStyle>
+          <a:p>
+            <a:pPr algn="r"/>
+            <a:fld id="{F7021451-1387-4CA6-816F-3879F97B5CBC}" type="slidenum">
+              <a:rPr b="1" lang="en-US"/>
+              <a:t>3</a:t>
+            </a:fld>
+            <a:endParaRPr lang="en-US"/>
           </a:p>
         </p:txBody>
       </p:sp>
@@ -17207,7 +18539,7 @@
         </p:blipFill>
         <p:spPr>
           <a:xfrm>
-            <a:off x="411480" y="6547104"/>
+            <a:off x="548640" y="6547104"/>
             <a:ext cx="274320" cy="274320"/>
           </a:xfrm>
           <a:prstGeom prst="rect">
@@ -17223,7 +18555,7 @@
         </p:nvSpPr>
         <p:spPr>
           <a:xfrm>
-            <a:off x="749808" y="6528816"/>
+            <a:off x="886968" y="6528816"/>
             <a:ext cx="6400800" cy="310896"/>
           </a:xfrm>
           <a:prstGeom prst="rect">
@@ -17263,7 +18595,7 @@
         <p:spPr>
           <a:xfrm>
             <a:off x="7132320" y="6528816"/>
-            <a:ext cx="4663440" cy="310896"/>
+            <a:ext cx="4023360" cy="310896"/>
           </a:xfrm>
           <a:prstGeom prst="rect">
             <a:avLst/>
@@ -17301,7 +18633,7 @@
         </p:nvSpPr>
         <p:spPr>
           <a:xfrm>
-            <a:off x="411480" y="384048"/>
+            <a:off x="548640" y="384048"/>
             <a:ext cx="82296" cy="658368"/>
           </a:xfrm>
           <a:prstGeom prst="rect">
@@ -17321,7 +18653,7 @@
         </p:nvSpPr>
         <p:spPr>
           <a:xfrm>
-            <a:off x="640080" y="292608"/>
+            <a:off x="777240" y="292608"/>
             <a:ext cx="10972800" cy="274320"/>
           </a:xfrm>
           <a:prstGeom prst="rect">
@@ -17360,8 +18692,8 @@
         </p:nvSpPr>
         <p:spPr>
           <a:xfrm>
-            <a:off x="640080" y="530352"/>
-            <a:ext cx="11155680" cy="566928"/>
+            <a:off x="777240" y="530352"/>
+            <a:ext cx="10881360" cy="566928"/>
           </a:xfrm>
           <a:prstGeom prst="rect">
             <a:avLst/>
@@ -17562,6 +18894,54 @@
               <a:t>Cobrar via WhatsApp · Enviar Lembrete — o contato humano da régua</a:t>
             </a:r>
             <a:endParaRPr lang="en-US" sz="1500" dirty="0"/>
+          </a:p>
+        </p:txBody>
+      </p:sp>
+      <p:sp>
+        <p:nvSpPr>
+          <p:cNvPr id="25" name="Slide Number Placeholder 0"/>
+          <p:cNvSpPr>
+            <a:spLocks noGrp="1"/>
+          </p:cNvSpPr>
+          <p:nvPr>
+            <p:ph type="sldNum" sz="quarter" idx="4294967295"/>
+          </p:nvPr>
+        </p:nvSpPr>
+        <p:spPr>
+          <a:xfrm>
+            <a:off x="11292840" y="6556248"/>
+            <a:ext cx="548640" cy="256032"/>
+          </a:xfrm>
+          <a:prstGeom prst="rect">
+            <a:avLst/>
+          </a:prstGeom>
+          <a:extLst>
+            <a:ext uri="{C572A759-6A51-4108-AA02-DFA0A04FC94B}">
+              <ma14:wrappingTextBoxFlag xmlns:ma14="http://schemas.microsoft.com/office/mac/drawingml/2011/main" val="0"/>
+            </a:ext>
+          </a:extLst>
+        </p:spPr>
+        <p:txBody>
+          <a:bodyPr/>
+          <a:lstStyle>
+            <a:lvl1pPr>
+              <a:defRPr sz="900">
+                <a:solidFill>
+                  <a:srgbClr val="1B3A6B"/>
+                </a:solidFill>
+                <a:latin typeface="Arial"/>
+                <a:ea typeface="Arial"/>
+                <a:cs typeface="Arial"/>
+              </a:defRPr>
+            </a:lvl1pPr>
+          </a:lstStyle>
+          <a:p>
+            <a:pPr algn="r"/>
+            <a:fld id="{F7021451-1387-4CA6-816F-3879F97B5CBC}" type="slidenum">
+              <a:rPr b="1" lang="en-US"/>
+              <a:t>30</a:t>
+            </a:fld>
+            <a:endParaRPr lang="en-US"/>
           </a:p>
         </p:txBody>
       </p:sp>
@@ -17638,7 +19018,7 @@
         </p:blipFill>
         <p:spPr>
           <a:xfrm>
-            <a:off x="411480" y="6547104"/>
+            <a:off x="548640" y="6547104"/>
             <a:ext cx="274320" cy="274320"/>
           </a:xfrm>
           <a:prstGeom prst="rect">
@@ -17654,7 +19034,7 @@
         </p:nvSpPr>
         <p:spPr>
           <a:xfrm>
-            <a:off x="749808" y="6528816"/>
+            <a:off x="886968" y="6528816"/>
             <a:ext cx="6400800" cy="310896"/>
           </a:xfrm>
           <a:prstGeom prst="rect">
@@ -17694,7 +19074,7 @@
         <p:spPr>
           <a:xfrm>
             <a:off x="7132320" y="6528816"/>
-            <a:ext cx="4663440" cy="310896"/>
+            <a:ext cx="4023360" cy="310896"/>
           </a:xfrm>
           <a:prstGeom prst="rect">
             <a:avLst/>
@@ -17732,7 +19112,7 @@
         </p:nvSpPr>
         <p:spPr>
           <a:xfrm>
-            <a:off x="411480" y="384048"/>
+            <a:off x="548640" y="384048"/>
             <a:ext cx="82296" cy="658368"/>
           </a:xfrm>
           <a:prstGeom prst="rect">
@@ -17752,7 +19132,7 @@
         </p:nvSpPr>
         <p:spPr>
           <a:xfrm>
-            <a:off x="640080" y="292608"/>
+            <a:off x="777240" y="292608"/>
             <a:ext cx="10972800" cy="274320"/>
           </a:xfrm>
           <a:prstGeom prst="rect">
@@ -17791,8 +19171,8 @@
         </p:nvSpPr>
         <p:spPr>
           <a:xfrm>
-            <a:off x="640080" y="530352"/>
-            <a:ext cx="11155680" cy="566928"/>
+            <a:off x="777240" y="530352"/>
+            <a:ext cx="10881360" cy="566928"/>
           </a:xfrm>
           <a:prstGeom prst="rect">
             <a:avLst/>
@@ -17832,8 +19212,8 @@
         </p:nvSpPr>
         <p:spPr>
           <a:xfrm>
-            <a:off x="411480" y="1325880"/>
-            <a:ext cx="5577840" cy="411480"/>
+            <a:off x="548640" y="1325880"/>
+            <a:ext cx="5394960" cy="411480"/>
           </a:xfrm>
           <a:prstGeom prst="rect">
             <a:avLst/>
@@ -17871,8 +19251,8 @@
         </p:nvSpPr>
         <p:spPr>
           <a:xfrm>
-            <a:off x="411480" y="1783080"/>
-            <a:ext cx="5577840" cy="4480560"/>
+            <a:off x="548640" y="1783080"/>
+            <a:ext cx="5394960" cy="4480560"/>
           </a:xfrm>
           <a:prstGeom prst="rect">
             <a:avLst/>
@@ -17893,7 +19273,7 @@
               <a:buNone/>
             </a:pPr>
             <a:r>
-              <a:rPr lang="en-US" sz="1400" dirty="0">
+              <a:rPr lang="en-US" sz="1600" dirty="0">
                 <a:solidFill>
                   <a:srgbClr val="1F2937"/>
                 </a:solidFill>
@@ -17903,7 +19283,7 @@
               </a:rPr>
               <a:t>1. Cobrança de R$ 1.695,20 com um desconto manual de R$ 50 (cortesia pela demora no primeiro crédito). Valor final?</a:t>
             </a:r>
-            <a:endParaRPr lang="en-US" sz="1400" dirty="0"/>
+            <a:endParaRPr lang="en-US" sz="1600" dirty="0"/>
           </a:p>
           <a:p>
             <a:pPr indent="0" marL="0">
@@ -17913,7 +19293,7 @@
               <a:buNone/>
             </a:pPr>
             <a:r>
-              <a:rPr lang="en-US" sz="1400" dirty="0">
+              <a:rPr lang="en-US" sz="1600" dirty="0">
                 <a:solidFill>
                   <a:srgbClr val="1F2937"/>
                 </a:solidFill>
@@ -17923,7 +19303,7 @@
               </a:rPr>
               <a:t>2. Monte uma régua para uma cobrança com vencimento dia 10: o que acontece nos dias 7, 10, 11, 15, 20 e 30?</a:t>
             </a:r>
-            <a:endParaRPr lang="en-US" sz="1400" dirty="0"/>
+            <a:endParaRPr lang="en-US" sz="1600" dirty="0"/>
           </a:p>
           <a:p>
             <a:pPr indent="0" marL="0">
@@ -17933,7 +19313,7 @@
               <a:buNone/>
             </a:pPr>
             <a:r>
-              <a:rPr lang="en-US" sz="1400" dirty="0">
+              <a:rPr lang="en-US" sz="1600" dirty="0">
                 <a:solidFill>
                   <a:srgbClr val="1F2937"/>
                 </a:solidFill>
@@ -17943,7 +19323,7 @@
               </a:rPr>
               <a:t>3. Por que a plataforma não cancela o boleto vencido no Mercado Pago imediatamente?</a:t>
             </a:r>
-            <a:endParaRPr lang="en-US" sz="1400" dirty="0"/>
+            <a:endParaRPr lang="en-US" sz="1600" dirty="0"/>
           </a:p>
         </p:txBody>
       </p:sp>
@@ -17955,8 +19335,8 @@
         </p:nvSpPr>
         <p:spPr>
           <a:xfrm>
-            <a:off x="6309360" y="1325880"/>
-            <a:ext cx="5486400" cy="4937760"/>
+            <a:off x="6172200" y="1325880"/>
+            <a:ext cx="5468112" cy="4937760"/>
           </a:xfrm>
           <a:prstGeom prst="roundRect">
             <a:avLst>
@@ -17977,8 +19357,8 @@
         </p:nvSpPr>
         <p:spPr>
           <a:xfrm>
-            <a:off x="6629400" y="1554480"/>
-            <a:ext cx="4846320" cy="4480560"/>
+            <a:off x="6492240" y="1554480"/>
+            <a:ext cx="4828032" cy="4480560"/>
           </a:xfrm>
           <a:prstGeom prst="rect">
             <a:avLst/>
@@ -18022,6 +19402,54 @@
               <a:t>Primeiro faturamento: cobranças do mês 1 geradas e abertas para os 15 clientes; Pix ou boleto emitido para todos; pelo menos 10 pagos (simulados), 1 com ajuste justificado, 1 com vencimento alterado e 1 vencida tratada (boleto reemitido); e a régua de cobrança da sua empresa em uma página.</a:t>
             </a:r>
             <a:endParaRPr lang="en-US" sz="1300" dirty="0"/>
+          </a:p>
+        </p:txBody>
+      </p:sp>
+      <p:sp>
+        <p:nvSpPr>
+          <p:cNvPr id="25" name="Slide Number Placeholder 0"/>
+          <p:cNvSpPr>
+            <a:spLocks noGrp="1"/>
+          </p:cNvSpPr>
+          <p:nvPr>
+            <p:ph type="sldNum" sz="quarter" idx="4294967295"/>
+          </p:nvPr>
+        </p:nvSpPr>
+        <p:spPr>
+          <a:xfrm>
+            <a:off x="11292840" y="6556248"/>
+            <a:ext cx="548640" cy="256032"/>
+          </a:xfrm>
+          <a:prstGeom prst="rect">
+            <a:avLst/>
+          </a:prstGeom>
+          <a:extLst>
+            <a:ext uri="{C572A759-6A51-4108-AA02-DFA0A04FC94B}">
+              <ma14:wrappingTextBoxFlag xmlns:ma14="http://schemas.microsoft.com/office/mac/drawingml/2011/main" val="0"/>
+            </a:ext>
+          </a:extLst>
+        </p:spPr>
+        <p:txBody>
+          <a:bodyPr/>
+          <a:lstStyle>
+            <a:lvl1pPr>
+              <a:defRPr sz="900">
+                <a:solidFill>
+                  <a:srgbClr val="1B3A6B"/>
+                </a:solidFill>
+                <a:latin typeface="Arial"/>
+                <a:ea typeface="Arial"/>
+                <a:cs typeface="Arial"/>
+              </a:defRPr>
+            </a:lvl1pPr>
+          </a:lstStyle>
+          <a:p>
+            <a:pPr algn="r"/>
+            <a:fld id="{F7021451-1387-4CA6-816F-3879F97B5CBC}" type="slidenum">
+              <a:rPr b="1" lang="en-US"/>
+              <a:t>31</a:t>
+            </a:fld>
+            <a:endParaRPr lang="en-US"/>
           </a:p>
         </p:txBody>
       </p:sp>
@@ -18098,7 +19526,7 @@
         </p:blipFill>
         <p:spPr>
           <a:xfrm>
-            <a:off x="411480" y="6547104"/>
+            <a:off x="548640" y="6547104"/>
             <a:ext cx="274320" cy="274320"/>
           </a:xfrm>
           <a:prstGeom prst="rect">
@@ -18114,7 +19542,7 @@
         </p:nvSpPr>
         <p:spPr>
           <a:xfrm>
-            <a:off x="749808" y="6528816"/>
+            <a:off x="886968" y="6528816"/>
             <a:ext cx="6400800" cy="310896"/>
           </a:xfrm>
           <a:prstGeom prst="rect">
@@ -18154,7 +19582,7 @@
         <p:spPr>
           <a:xfrm>
             <a:off x="7132320" y="6528816"/>
-            <a:ext cx="4663440" cy="310896"/>
+            <a:ext cx="4023360" cy="310896"/>
           </a:xfrm>
           <a:prstGeom prst="rect">
             <a:avLst/>
@@ -18192,7 +19620,7 @@
         </p:nvSpPr>
         <p:spPr>
           <a:xfrm>
-            <a:off x="411480" y="384048"/>
+            <a:off x="548640" y="384048"/>
             <a:ext cx="82296" cy="658368"/>
           </a:xfrm>
           <a:prstGeom prst="rect">
@@ -18212,7 +19640,7 @@
         </p:nvSpPr>
         <p:spPr>
           <a:xfrm>
-            <a:off x="640080" y="292608"/>
+            <a:off x="777240" y="292608"/>
             <a:ext cx="10972800" cy="274320"/>
           </a:xfrm>
           <a:prstGeom prst="rect">
@@ -18251,8 +19679,8 @@
         </p:nvSpPr>
         <p:spPr>
           <a:xfrm>
-            <a:off x="640080" y="530352"/>
-            <a:ext cx="11155680" cy="566928"/>
+            <a:off x="777240" y="530352"/>
+            <a:ext cx="10881360" cy="566928"/>
           </a:xfrm>
           <a:prstGeom prst="rect">
             <a:avLst/>
@@ -18292,12 +19720,12 @@
         </p:nvSpPr>
         <p:spPr>
           <a:xfrm>
-            <a:off x="411480" y="1325880"/>
-            <a:ext cx="3611880" cy="4937760"/>
+            <a:off x="548640" y="1325880"/>
+            <a:ext cx="3514344" cy="4937760"/>
           </a:xfrm>
           <a:prstGeom prst="roundRect">
             <a:avLst>
-              <a:gd name="adj" fmla="val 2025"/>
+              <a:gd name="adj" fmla="val 2082"/>
             </a:avLst>
           </a:prstGeom>
           <a:solidFill>
@@ -18326,8 +19754,8 @@
         </p:nvSpPr>
         <p:spPr>
           <a:xfrm>
-            <a:off x="411480" y="1325880"/>
-            <a:ext cx="3611880" cy="109728"/>
+            <a:off x="548640" y="1325880"/>
+            <a:ext cx="3514344" cy="109728"/>
           </a:xfrm>
           <a:prstGeom prst="rect">
             <a:avLst/>
@@ -18346,8 +19774,8 @@
         </p:nvSpPr>
         <p:spPr>
           <a:xfrm>
-            <a:off x="685800" y="1554480"/>
-            <a:ext cx="3063240" cy="685800"/>
+            <a:off x="822960" y="1554480"/>
+            <a:ext cx="2965704" cy="685800"/>
           </a:xfrm>
           <a:prstGeom prst="rect">
             <a:avLst/>
@@ -18387,8 +19815,8 @@
         </p:nvSpPr>
         <p:spPr>
           <a:xfrm>
-            <a:off x="685800" y="2286000"/>
-            <a:ext cx="3063240" cy="3749040"/>
+            <a:off x="822960" y="2286000"/>
+            <a:ext cx="2965704" cy="3749040"/>
           </a:xfrm>
           <a:prstGeom prst="rect">
             <a:avLst/>
@@ -18410,7 +19838,7 @@
               <a:buChar char="●"/>
             </a:pPr>
             <a:r>
-              <a:rPr lang="en-US" sz="1600" dirty="0">
+              <a:rPr lang="en-US" sz="1700" dirty="0">
                 <a:solidFill>
                   <a:srgbClr val="1F2937"/>
                 </a:solidFill>
@@ -18420,7 +19848,7 @@
               </a:rPr>
               <a:t>Automática: rotina de hora em hora para faturas aprovadas</a:t>
             </a:r>
-            <a:endParaRPr lang="en-US" sz="1600" dirty="0"/>
+            <a:endParaRPr lang="en-US" sz="1700" dirty="0"/>
           </a:p>
           <a:p>
             <a:pPr marL="342900" indent="-342900">
@@ -18431,7 +19859,7 @@
               <a:buChar char="●"/>
             </a:pPr>
             <a:r>
-              <a:rPr lang="en-US" sz="1600" dirty="0">
+              <a:rPr lang="en-US" sz="1700" dirty="0">
                 <a:solidFill>
                   <a:srgbClr val="1F2937"/>
                 </a:solidFill>
@@ -18441,7 +19869,7 @@
               </a:rPr>
               <a:t>Manual: botão na fatura</a:t>
             </a:r>
-            <a:endParaRPr lang="en-US" sz="1600" dirty="0"/>
+            <a:endParaRPr lang="en-US" sz="1700" dirty="0"/>
           </a:p>
           <a:p>
             <a:pPr marL="342900" indent="-342900">
@@ -18452,7 +19880,7 @@
               <a:buChar char="●"/>
             </a:pPr>
             <a:r>
-              <a:rPr lang="en-US" sz="1600" dirty="0">
+              <a:rPr lang="en-US" sz="1700" dirty="0">
                 <a:solidFill>
                   <a:srgbClr val="1F2937"/>
                 </a:solidFill>
@@ -18462,7 +19890,7 @@
               </a:rPr>
               <a:t>1 fatura ativa = 1 cobrança</a:t>
             </a:r>
-            <a:endParaRPr lang="en-US" sz="1600" dirty="0"/>
+            <a:endParaRPr lang="en-US" sz="1700" dirty="0"/>
           </a:p>
         </p:txBody>
       </p:sp>
@@ -18474,12 +19902,12 @@
         </p:nvSpPr>
         <p:spPr>
           <a:xfrm>
-            <a:off x="4297680" y="1325880"/>
-            <a:ext cx="3611880" cy="4937760"/>
+            <a:off x="4337304" y="1325880"/>
+            <a:ext cx="3514344" cy="4937760"/>
           </a:xfrm>
           <a:prstGeom prst="roundRect">
             <a:avLst>
-              <a:gd name="adj" fmla="val 2025"/>
+              <a:gd name="adj" fmla="val 2082"/>
             </a:avLst>
           </a:prstGeom>
           <a:solidFill>
@@ -18508,8 +19936,8 @@
         </p:nvSpPr>
         <p:spPr>
           <a:xfrm>
-            <a:off x="4297680" y="1325880"/>
-            <a:ext cx="3611880" cy="109728"/>
+            <a:off x="4337304" y="1325880"/>
+            <a:ext cx="3514344" cy="109728"/>
           </a:xfrm>
           <a:prstGeom prst="rect">
             <a:avLst/>
@@ -18528,8 +19956,8 @@
         </p:nvSpPr>
         <p:spPr>
           <a:xfrm>
-            <a:off x="4572000" y="1554480"/>
-            <a:ext cx="3063240" cy="685800"/>
+            <a:off x="4611624" y="1554480"/>
+            <a:ext cx="2965704" cy="685800"/>
           </a:xfrm>
           <a:prstGeom prst="rect">
             <a:avLst/>
@@ -18569,8 +19997,8 @@
         </p:nvSpPr>
         <p:spPr>
           <a:xfrm>
-            <a:off x="4572000" y="2286000"/>
-            <a:ext cx="3063240" cy="3749040"/>
+            <a:off x="4611624" y="2286000"/>
+            <a:ext cx="2965704" cy="3749040"/>
           </a:xfrm>
           <a:prstGeom prst="rect">
             <a:avLst/>
@@ -18656,12 +20084,12 @@
         </p:nvSpPr>
         <p:spPr>
           <a:xfrm>
-            <a:off x="8183880" y="1325880"/>
-            <a:ext cx="3611880" cy="4937760"/>
+            <a:off x="8125968" y="1325880"/>
+            <a:ext cx="3514344" cy="4937760"/>
           </a:xfrm>
           <a:prstGeom prst="roundRect">
             <a:avLst>
-              <a:gd name="adj" fmla="val 2025"/>
+              <a:gd name="adj" fmla="val 2082"/>
             </a:avLst>
           </a:prstGeom>
           <a:solidFill>
@@ -18690,8 +20118,8 @@
         </p:nvSpPr>
         <p:spPr>
           <a:xfrm>
-            <a:off x="8183880" y="1325880"/>
-            <a:ext cx="3611880" cy="109728"/>
+            <a:off x="8125968" y="1325880"/>
+            <a:ext cx="3514344" cy="109728"/>
           </a:xfrm>
           <a:prstGeom prst="rect">
             <a:avLst/>
@@ -18710,8 +20138,8 @@
         </p:nvSpPr>
         <p:spPr>
           <a:xfrm>
-            <a:off x="8458200" y="1554480"/>
-            <a:ext cx="3063240" cy="685800"/>
+            <a:off x="8400288" y="1554480"/>
+            <a:ext cx="2965704" cy="685800"/>
           </a:xfrm>
           <a:prstGeom prst="rect">
             <a:avLst/>
@@ -18751,8 +20179,8 @@
         </p:nvSpPr>
         <p:spPr>
           <a:xfrm>
-            <a:off x="8458200" y="2286000"/>
-            <a:ext cx="3063240" cy="3749040"/>
+            <a:off x="8400288" y="2286000"/>
+            <a:ext cx="2965704" cy="3749040"/>
           </a:xfrm>
           <a:prstGeom prst="rect">
             <a:avLst/>
@@ -18774,7 +20202,7 @@
               <a:buChar char="●"/>
             </a:pPr>
             <a:r>
-              <a:rPr lang="en-US" sz="1600" dirty="0">
+              <a:rPr lang="en-US" sz="1700" dirty="0">
                 <a:solidFill>
                   <a:srgbClr val="1F2937"/>
                 </a:solidFill>
@@ -18784,7 +20212,7 @@
               </a:rPr>
               <a:t>Decisão de negócio: Pix/boleto é emitido por uma pessoa</a:t>
             </a:r>
-            <a:endParaRPr lang="en-US" sz="1600" dirty="0"/>
+            <a:endParaRPr lang="en-US" sz="1700" dirty="0"/>
           </a:p>
           <a:p>
             <a:pPr marL="342900" indent="-342900">
@@ -18795,7 +20223,7 @@
               <a:buChar char="●"/>
             </a:pPr>
             <a:r>
-              <a:rPr lang="en-US" sz="1600" dirty="0">
+              <a:rPr lang="en-US" sz="1700" dirty="0">
                 <a:solidFill>
                   <a:srgbClr val="1F2937"/>
                 </a:solidFill>
@@ -18805,7 +20233,55 @@
               </a:rPr>
               <a:t>alerta: cobrança vencendo em 5 dias sem pagamento gerado</a:t>
             </a:r>
-            <a:endParaRPr lang="en-US" sz="1600" dirty="0"/>
+            <a:endParaRPr lang="en-US" sz="1700" dirty="0"/>
+          </a:p>
+        </p:txBody>
+      </p:sp>
+      <p:sp>
+        <p:nvSpPr>
+          <p:cNvPr id="25" name="Slide Number Placeholder 0"/>
+          <p:cNvSpPr>
+            <a:spLocks noGrp="1"/>
+          </p:cNvSpPr>
+          <p:nvPr>
+            <p:ph type="sldNum" sz="quarter" idx="4294967295"/>
+          </p:nvPr>
+        </p:nvSpPr>
+        <p:spPr>
+          <a:xfrm>
+            <a:off x="11292840" y="6556248"/>
+            <a:ext cx="548640" cy="256032"/>
+          </a:xfrm>
+          <a:prstGeom prst="rect">
+            <a:avLst/>
+          </a:prstGeom>
+          <a:extLst>
+            <a:ext uri="{C572A759-6A51-4108-AA02-DFA0A04FC94B}">
+              <ma14:wrappingTextBoxFlag xmlns:ma14="http://schemas.microsoft.com/office/mac/drawingml/2011/main" val="0"/>
+            </a:ext>
+          </a:extLst>
+        </p:spPr>
+        <p:txBody>
+          <a:bodyPr/>
+          <a:lstStyle>
+            <a:lvl1pPr>
+              <a:defRPr sz="900">
+                <a:solidFill>
+                  <a:srgbClr val="1B3A6B"/>
+                </a:solidFill>
+                <a:latin typeface="Arial"/>
+                <a:ea typeface="Arial"/>
+                <a:cs typeface="Arial"/>
+              </a:defRPr>
+            </a:lvl1pPr>
+          </a:lstStyle>
+          <a:p>
+            <a:pPr algn="r"/>
+            <a:fld id="{F7021451-1387-4CA6-816F-3879F97B5CBC}" type="slidenum">
+              <a:rPr b="1" lang="en-US"/>
+              <a:t>4</a:t>
+            </a:fld>
+            <a:endParaRPr lang="en-US"/>
           </a:p>
         </p:txBody>
       </p:sp>
@@ -18882,7 +20358,7 @@
         </p:blipFill>
         <p:spPr>
           <a:xfrm>
-            <a:off x="411480" y="6547104"/>
+            <a:off x="548640" y="6547104"/>
             <a:ext cx="274320" cy="274320"/>
           </a:xfrm>
           <a:prstGeom prst="rect">
@@ -18898,7 +20374,7 @@
         </p:nvSpPr>
         <p:spPr>
           <a:xfrm>
-            <a:off x="749808" y="6528816"/>
+            <a:off x="886968" y="6528816"/>
             <a:ext cx="6400800" cy="310896"/>
           </a:xfrm>
           <a:prstGeom prst="rect">
@@ -18938,7 +20414,7 @@
         <p:spPr>
           <a:xfrm>
             <a:off x="7132320" y="6528816"/>
-            <a:ext cx="4663440" cy="310896"/>
+            <a:ext cx="4023360" cy="310896"/>
           </a:xfrm>
           <a:prstGeom prst="rect">
             <a:avLst/>
@@ -18976,7 +20452,7 @@
         </p:nvSpPr>
         <p:spPr>
           <a:xfrm>
-            <a:off x="411480" y="384048"/>
+            <a:off x="548640" y="384048"/>
             <a:ext cx="82296" cy="658368"/>
           </a:xfrm>
           <a:prstGeom prst="rect">
@@ -18996,7 +20472,7 @@
         </p:nvSpPr>
         <p:spPr>
           <a:xfrm>
-            <a:off x="640080" y="292608"/>
+            <a:off x="777240" y="292608"/>
             <a:ext cx="10972800" cy="274320"/>
           </a:xfrm>
           <a:prstGeom prst="rect">
@@ -19035,8 +20511,8 @@
         </p:nvSpPr>
         <p:spPr>
           <a:xfrm>
-            <a:off x="640080" y="530352"/>
-            <a:ext cx="11155680" cy="566928"/>
+            <a:off x="777240" y="530352"/>
+            <a:ext cx="10881360" cy="566928"/>
           </a:xfrm>
           <a:prstGeom prst="rect">
             <a:avLst/>
@@ -19076,12 +20552,12 @@
         </p:nvSpPr>
         <p:spPr>
           <a:xfrm>
-            <a:off x="411480" y="1325880"/>
-            <a:ext cx="3642360" cy="4892040"/>
+            <a:off x="548640" y="1325880"/>
+            <a:ext cx="3544824" cy="4892040"/>
           </a:xfrm>
           <a:prstGeom prst="roundRect">
             <a:avLst>
-              <a:gd name="adj" fmla="val 2008"/>
+              <a:gd name="adj" fmla="val 2064"/>
             </a:avLst>
           </a:prstGeom>
           <a:solidFill>
@@ -19110,7 +20586,7 @@
         </p:nvSpPr>
         <p:spPr>
           <a:xfrm>
-            <a:off x="594360" y="1508760"/>
+            <a:off x="731520" y="1508760"/>
             <a:ext cx="457200" cy="457200"/>
           </a:xfrm>
           <a:prstGeom prst="ellipse">
@@ -19130,7 +20606,7 @@
         </p:nvSpPr>
         <p:spPr>
           <a:xfrm>
-            <a:off x="594360" y="1508760"/>
+            <a:off x="731520" y="1508760"/>
             <a:ext cx="457200" cy="457200"/>
           </a:xfrm>
           <a:prstGeom prst="rect">
@@ -19169,8 +20645,8 @@
         </p:nvSpPr>
         <p:spPr>
           <a:xfrm>
-            <a:off x="1188720" y="1435608"/>
-            <a:ext cx="2727960" cy="4672584"/>
+            <a:off x="1325880" y="1435608"/>
+            <a:ext cx="2630424" cy="4672584"/>
           </a:xfrm>
           <a:prstGeom prst="rect">
             <a:avLst/>
@@ -19210,12 +20686,12 @@
         </p:nvSpPr>
         <p:spPr>
           <a:xfrm>
-            <a:off x="4282440" y="1325880"/>
-            <a:ext cx="3642360" cy="4892040"/>
+            <a:off x="4322064" y="1325880"/>
+            <a:ext cx="3544824" cy="4892040"/>
           </a:xfrm>
           <a:prstGeom prst="roundRect">
             <a:avLst>
-              <a:gd name="adj" fmla="val 2008"/>
+              <a:gd name="adj" fmla="val 2064"/>
             </a:avLst>
           </a:prstGeom>
           <a:solidFill>
@@ -19244,7 +20720,7 @@
         </p:nvSpPr>
         <p:spPr>
           <a:xfrm>
-            <a:off x="4465320" y="1508760"/>
+            <a:off x="4504944" y="1508760"/>
             <a:ext cx="457200" cy="457200"/>
           </a:xfrm>
           <a:prstGeom prst="ellipse">
@@ -19264,7 +20740,7 @@
         </p:nvSpPr>
         <p:spPr>
           <a:xfrm>
-            <a:off x="4465320" y="1508760"/>
+            <a:off x="4504944" y="1508760"/>
             <a:ext cx="457200" cy="457200"/>
           </a:xfrm>
           <a:prstGeom prst="rect">
@@ -19303,8 +20779,8 @@
         </p:nvSpPr>
         <p:spPr>
           <a:xfrm>
-            <a:off x="5059680" y="1435608"/>
-            <a:ext cx="2727960" cy="4672584"/>
+            <a:off x="5099304" y="1435608"/>
+            <a:ext cx="2630424" cy="4672584"/>
           </a:xfrm>
           <a:prstGeom prst="rect">
             <a:avLst/>
@@ -19344,12 +20820,12 @@
         </p:nvSpPr>
         <p:spPr>
           <a:xfrm>
-            <a:off x="8153400" y="1325880"/>
-            <a:ext cx="3642360" cy="4892040"/>
+            <a:off x="8095488" y="1325880"/>
+            <a:ext cx="3544824" cy="4892040"/>
           </a:xfrm>
           <a:prstGeom prst="roundRect">
             <a:avLst>
-              <a:gd name="adj" fmla="val 2008"/>
+              <a:gd name="adj" fmla="val 2064"/>
             </a:avLst>
           </a:prstGeom>
           <a:solidFill>
@@ -19378,7 +20854,7 @@
         </p:nvSpPr>
         <p:spPr>
           <a:xfrm>
-            <a:off x="8336280" y="1508760"/>
+            <a:off x="8278368" y="1508760"/>
             <a:ext cx="457200" cy="457200"/>
           </a:xfrm>
           <a:prstGeom prst="ellipse">
@@ -19398,7 +20874,7 @@
         </p:nvSpPr>
         <p:spPr>
           <a:xfrm>
-            <a:off x="8336280" y="1508760"/>
+            <a:off x="8278368" y="1508760"/>
             <a:ext cx="457200" cy="457200"/>
           </a:xfrm>
           <a:prstGeom prst="rect">
@@ -19437,8 +20913,8 @@
         </p:nvSpPr>
         <p:spPr>
           <a:xfrm>
-            <a:off x="8930640" y="1435608"/>
-            <a:ext cx="2727960" cy="4672584"/>
+            <a:off x="8872728" y="1435608"/>
+            <a:ext cx="2630424" cy="4672584"/>
           </a:xfrm>
           <a:prstGeom prst="rect">
             <a:avLst/>
@@ -19467,6 +20943,54 @@
               <a:t>Pix/boleto por clique humano</a:t>
             </a:r>
             <a:endParaRPr lang="en-US" sz="1800" dirty="0"/>
+          </a:p>
+        </p:txBody>
+      </p:sp>
+      <p:sp>
+        <p:nvSpPr>
+          <p:cNvPr id="25" name="Slide Number Placeholder 0"/>
+          <p:cNvSpPr>
+            <a:spLocks noGrp="1"/>
+          </p:cNvSpPr>
+          <p:nvPr>
+            <p:ph type="sldNum" sz="quarter" idx="4294967295"/>
+          </p:nvPr>
+        </p:nvSpPr>
+        <p:spPr>
+          <a:xfrm>
+            <a:off x="11292840" y="6556248"/>
+            <a:ext cx="548640" cy="256032"/>
+          </a:xfrm>
+          <a:prstGeom prst="rect">
+            <a:avLst/>
+          </a:prstGeom>
+          <a:extLst>
+            <a:ext uri="{C572A759-6A51-4108-AA02-DFA0A04FC94B}">
+              <ma14:wrappingTextBoxFlag xmlns:ma14="http://schemas.microsoft.com/office/mac/drawingml/2011/main" val="0"/>
+            </a:ext>
+          </a:extLst>
+        </p:spPr>
+        <p:txBody>
+          <a:bodyPr/>
+          <a:lstStyle>
+            <a:lvl1pPr>
+              <a:defRPr sz="900">
+                <a:solidFill>
+                  <a:srgbClr val="1B3A6B"/>
+                </a:solidFill>
+                <a:latin typeface="Arial"/>
+                <a:ea typeface="Arial"/>
+                <a:cs typeface="Arial"/>
+              </a:defRPr>
+            </a:lvl1pPr>
+          </a:lstStyle>
+          <a:p>
+            <a:pPr algn="r"/>
+            <a:fld id="{F7021451-1387-4CA6-816F-3879F97B5CBC}" type="slidenum">
+              <a:rPr b="1" lang="en-US"/>
+              <a:t>5</a:t>
+            </a:fld>
+            <a:endParaRPr lang="en-US"/>
           </a:p>
         </p:txBody>
       </p:sp>
@@ -19530,6 +21054,45 @@
         </p:nvSpPr>
         <p:spPr>
           <a:xfrm>
+            <a:off x="457200" y="548640"/>
+            <a:ext cx="3474720" cy="1737360"/>
+          </a:xfrm>
+          <a:prstGeom prst="rect">
+            <a:avLst/>
+          </a:prstGeom>
+          <a:noFill/>
+          <a:ln/>
+        </p:spPr>
+        <p:txBody>
+          <a:bodyPr wrap="square" rtlCol="0" anchor="ctr"/>
+          <a:lstStyle/>
+          <a:p>
+            <a:pPr indent="0" marL="0">
+              <a:buNone/>
+            </a:pPr>
+            <a:r>
+              <a:rPr lang="en-US" sz="11000" b="1" dirty="0">
+                <a:solidFill>
+                  <a:srgbClr val="11396F"/>
+                </a:solidFill>
+                <a:latin typeface="Arial" pitchFamily="34" charset="0"/>
+                <a:ea typeface="Arial" pitchFamily="34" charset="-122"/>
+                <a:cs typeface="Arial" pitchFamily="34" charset="-120"/>
+              </a:rPr>
+              <a:t>02</a:t>
+            </a:r>
+            <a:endParaRPr lang="en-US" sz="11000" dirty="0"/>
+          </a:p>
+        </p:txBody>
+      </p:sp>
+      <p:sp>
+        <p:nvSpPr>
+          <p:cNvPr id="4" name="Text 2"/>
+          <p:cNvSpPr/>
+          <p:nvPr/>
+        </p:nvSpPr>
+        <p:spPr>
+          <a:xfrm>
             <a:off x="548640" y="2194560"/>
             <a:ext cx="3291840" cy="548640"/>
           </a:xfrm>
@@ -19563,7 +21126,46 @@
       </p:sp>
       <p:sp>
         <p:nvSpPr>
-          <p:cNvPr id="4" name="Text 2"/>
+          <p:cNvPr id="5" name="Text 3"/>
+          <p:cNvSpPr/>
+          <p:nvPr/>
+        </p:nvSpPr>
+        <p:spPr>
+          <a:xfrm>
+            <a:off x="548640" y="3200400"/>
+            <a:ext cx="3383280" cy="457200"/>
+          </a:xfrm>
+          <a:prstGeom prst="rect">
+            <a:avLst/>
+          </a:prstGeom>
+          <a:noFill/>
+          <a:ln/>
+        </p:spPr>
+        <p:txBody>
+          <a:bodyPr wrap="square" rtlCol="0" anchor="ctr"/>
+          <a:lstStyle/>
+          <a:p>
+            <a:pPr indent="0" marL="0">
+              <a:buNone/>
+            </a:pPr>
+            <a:r>
+              <a:rPr lang="en-US" sz="1100" dirty="0">
+                <a:solidFill>
+                  <a:srgbClr val="C7D2E3"/>
+                </a:solidFill>
+                <a:latin typeface="Arial" pitchFamily="34" charset="0"/>
+                <a:ea typeface="Arial" pitchFamily="34" charset="-122"/>
+                <a:cs typeface="Arial" pitchFamily="34" charset="-120"/>
+              </a:rPr>
+              <a:t>M8 · Etapa 3 · Operação ponta a ponta</a:t>
+            </a:r>
+            <a:endParaRPr lang="en-US" sz="1100" dirty="0"/>
+          </a:p>
+        </p:txBody>
+      </p:sp>
+      <p:sp>
+        <p:nvSpPr>
+          <p:cNvPr id="6" name="Text 4"/>
           <p:cNvSpPr/>
           <p:nvPr/>
         </p:nvSpPr>
@@ -19602,7 +21204,7 @@
       </p:sp>
       <p:pic>
         <p:nvPicPr>
-          <p:cNvPr id="5" name="Image 0" descr="/www/wwwroot/rexar/gdsolar/docs/curso/slides/assets/logo-gdsolar.png">    </p:cNvPr>
+          <p:cNvPr id="7" name="Image 0" descr="/www/wwwroot/rexar/gdsolar/docs/curso/slides/assets/logo-gdsolar.png">    </p:cNvPr>
           <p:cNvPicPr>
             <a:picLocks noChangeAspect="1"/>
           </p:cNvPicPr>
@@ -19626,7 +21228,7 @@
       </p:pic>
       <p:sp>
         <p:nvSpPr>
-          <p:cNvPr id="6" name="Text 3"/>
+          <p:cNvPr id="8" name="Text 5"/>
           <p:cNvSpPr/>
           <p:nvPr/>
         </p:nvSpPr>
@@ -19667,7 +21269,7 @@
       </p:sp>
       <p:sp>
         <p:nvSpPr>
-          <p:cNvPr id="7" name="Text 4"/>
+          <p:cNvPr id="9" name="Text 6"/>
           <p:cNvSpPr/>
           <p:nvPr/>
         </p:nvSpPr>
@@ -19708,7 +21310,7 @@
       </p:sp>
       <p:sp>
         <p:nvSpPr>
-          <p:cNvPr id="8" name="Text 5"/>
+          <p:cNvPr id="10" name="Text 7"/>
           <p:cNvSpPr/>
           <p:nvPr/>
         </p:nvSpPr>
@@ -19887,7 +21489,7 @@
         </p:blipFill>
         <p:spPr>
           <a:xfrm>
-            <a:off x="411480" y="6547104"/>
+            <a:off x="548640" y="6547104"/>
             <a:ext cx="274320" cy="274320"/>
           </a:xfrm>
           <a:prstGeom prst="rect">
@@ -19903,7 +21505,7 @@
         </p:nvSpPr>
         <p:spPr>
           <a:xfrm>
-            <a:off x="749808" y="6528816"/>
+            <a:off x="886968" y="6528816"/>
             <a:ext cx="6400800" cy="310896"/>
           </a:xfrm>
           <a:prstGeom prst="rect">
@@ -19943,7 +21545,7 @@
         <p:spPr>
           <a:xfrm>
             <a:off x="7132320" y="6528816"/>
-            <a:ext cx="4663440" cy="310896"/>
+            <a:ext cx="4023360" cy="310896"/>
           </a:xfrm>
           <a:prstGeom prst="rect">
             <a:avLst/>
@@ -19981,7 +21583,7 @@
         </p:nvSpPr>
         <p:spPr>
           <a:xfrm>
-            <a:off x="411480" y="384048"/>
+            <a:off x="548640" y="384048"/>
             <a:ext cx="82296" cy="658368"/>
           </a:xfrm>
           <a:prstGeom prst="rect">
@@ -20001,7 +21603,7 @@
         </p:nvSpPr>
         <p:spPr>
           <a:xfrm>
-            <a:off x="640080" y="292608"/>
+            <a:off x="777240" y="292608"/>
             <a:ext cx="10972800" cy="274320"/>
           </a:xfrm>
           <a:prstGeom prst="rect">
@@ -20040,8 +21642,8 @@
         </p:nvSpPr>
         <p:spPr>
           <a:xfrm>
-            <a:off x="640080" y="530352"/>
-            <a:ext cx="11155680" cy="566928"/>
+            <a:off x="777240" y="530352"/>
+            <a:ext cx="10881360" cy="566928"/>
           </a:xfrm>
           <a:prstGeom prst="rect">
             <a:avLst/>
@@ -20081,12 +21683,12 @@
         </p:nvSpPr>
         <p:spPr>
           <a:xfrm>
-            <a:off x="411480" y="1325880"/>
-            <a:ext cx="3642360" cy="4892040"/>
+            <a:off x="548640" y="1325880"/>
+            <a:ext cx="3544824" cy="4892040"/>
           </a:xfrm>
           <a:prstGeom prst="roundRect">
             <a:avLst>
-              <a:gd name="adj" fmla="val 2008"/>
+              <a:gd name="adj" fmla="val 2064"/>
             </a:avLst>
           </a:prstGeom>
           <a:solidFill>
@@ -20115,7 +21717,7 @@
         </p:nvSpPr>
         <p:spPr>
           <a:xfrm>
-            <a:off x="594360" y="1508760"/>
+            <a:off x="731520" y="1508760"/>
             <a:ext cx="457200" cy="457200"/>
           </a:xfrm>
           <a:prstGeom prst="ellipse">
@@ -20135,7 +21737,7 @@
         </p:nvSpPr>
         <p:spPr>
           <a:xfrm>
-            <a:off x="594360" y="1508760"/>
+            <a:off x="731520" y="1508760"/>
             <a:ext cx="457200" cy="457200"/>
           </a:xfrm>
           <a:prstGeom prst="rect">
@@ -20174,8 +21776,8 @@
         </p:nvSpPr>
         <p:spPr>
           <a:xfrm>
-            <a:off x="1188720" y="1435608"/>
-            <a:ext cx="2727960" cy="4672584"/>
+            <a:off x="1325880" y="1435608"/>
+            <a:ext cx="2630424" cy="4672584"/>
           </a:xfrm>
           <a:prstGeom prst="rect">
             <a:avLst/>
@@ -20215,12 +21817,12 @@
         </p:nvSpPr>
         <p:spPr>
           <a:xfrm>
-            <a:off x="4282440" y="1325880"/>
-            <a:ext cx="3642360" cy="4892040"/>
+            <a:off x="4322064" y="1325880"/>
+            <a:ext cx="3544824" cy="4892040"/>
           </a:xfrm>
           <a:prstGeom prst="roundRect">
             <a:avLst>
-              <a:gd name="adj" fmla="val 2008"/>
+              <a:gd name="adj" fmla="val 2064"/>
             </a:avLst>
           </a:prstGeom>
           <a:solidFill>
@@ -20249,7 +21851,7 @@
         </p:nvSpPr>
         <p:spPr>
           <a:xfrm>
-            <a:off x="4465320" y="1508760"/>
+            <a:off x="4504944" y="1508760"/>
             <a:ext cx="457200" cy="457200"/>
           </a:xfrm>
           <a:prstGeom prst="ellipse">
@@ -20269,7 +21871,7 @@
         </p:nvSpPr>
         <p:spPr>
           <a:xfrm>
-            <a:off x="4465320" y="1508760"/>
+            <a:off x="4504944" y="1508760"/>
             <a:ext cx="457200" cy="457200"/>
           </a:xfrm>
           <a:prstGeom prst="rect">
@@ -20308,8 +21910,8 @@
         </p:nvSpPr>
         <p:spPr>
           <a:xfrm>
-            <a:off x="5059680" y="1435608"/>
-            <a:ext cx="2727960" cy="4672584"/>
+            <a:off x="5099304" y="1435608"/>
+            <a:ext cx="2630424" cy="4672584"/>
           </a:xfrm>
           <a:prstGeom prst="rect">
             <a:avLst/>
@@ -20349,12 +21951,12 @@
         </p:nvSpPr>
         <p:spPr>
           <a:xfrm>
-            <a:off x="8153400" y="1325880"/>
-            <a:ext cx="3642360" cy="4892040"/>
+            <a:off x="8095488" y="1325880"/>
+            <a:ext cx="3544824" cy="4892040"/>
           </a:xfrm>
           <a:prstGeom prst="roundRect">
             <a:avLst>
-              <a:gd name="adj" fmla="val 2008"/>
+              <a:gd name="adj" fmla="val 2064"/>
             </a:avLst>
           </a:prstGeom>
           <a:solidFill>
@@ -20383,7 +21985,7 @@
         </p:nvSpPr>
         <p:spPr>
           <a:xfrm>
-            <a:off x="8336280" y="1508760"/>
+            <a:off x="8278368" y="1508760"/>
             <a:ext cx="457200" cy="457200"/>
           </a:xfrm>
           <a:prstGeom prst="ellipse">
@@ -20403,7 +22005,7 @@
         </p:nvSpPr>
         <p:spPr>
           <a:xfrm>
-            <a:off x="8336280" y="1508760"/>
+            <a:off x="8278368" y="1508760"/>
             <a:ext cx="457200" cy="457200"/>
           </a:xfrm>
           <a:prstGeom prst="rect">
@@ -20442,8 +22044,8 @@
         </p:nvSpPr>
         <p:spPr>
           <a:xfrm>
-            <a:off x="8930640" y="1435608"/>
-            <a:ext cx="2727960" cy="4672584"/>
+            <a:off x="8872728" y="1435608"/>
+            <a:ext cx="2630424" cy="4672584"/>
           </a:xfrm>
           <a:prstGeom prst="rect">
             <a:avLst/>
@@ -20472,6 +22074,54 @@
               <a:t>Sempre: tipo + valor + descrição</a:t>
             </a:r>
             <a:endParaRPr lang="en-US" sz="1800" dirty="0"/>
+          </a:p>
+        </p:txBody>
+      </p:sp>
+      <p:sp>
+        <p:nvSpPr>
+          <p:cNvPr id="25" name="Slide Number Placeholder 0"/>
+          <p:cNvSpPr>
+            <a:spLocks noGrp="1"/>
+          </p:cNvSpPr>
+          <p:nvPr>
+            <p:ph type="sldNum" sz="quarter" idx="4294967295"/>
+          </p:nvPr>
+        </p:nvSpPr>
+        <p:spPr>
+          <a:xfrm>
+            <a:off x="11292840" y="6556248"/>
+            <a:ext cx="548640" cy="256032"/>
+          </a:xfrm>
+          <a:prstGeom prst="rect">
+            <a:avLst/>
+          </a:prstGeom>
+          <a:extLst>
+            <a:ext uri="{C572A759-6A51-4108-AA02-DFA0A04FC94B}">
+              <ma14:wrappingTextBoxFlag xmlns:ma14="http://schemas.microsoft.com/office/mac/drawingml/2011/main" val="0"/>
+            </a:ext>
+          </a:extLst>
+        </p:spPr>
+        <p:txBody>
+          <a:bodyPr/>
+          <a:lstStyle>
+            <a:lvl1pPr>
+              <a:defRPr sz="900">
+                <a:solidFill>
+                  <a:srgbClr val="1B3A6B"/>
+                </a:solidFill>
+                <a:latin typeface="Arial"/>
+                <a:ea typeface="Arial"/>
+                <a:cs typeface="Arial"/>
+              </a:defRPr>
+            </a:lvl1pPr>
+          </a:lstStyle>
+          <a:p>
+            <a:pPr algn="r"/>
+            <a:fld id="{F7021451-1387-4CA6-816F-3879F97B5CBC}" type="slidenum">
+              <a:rPr b="1" lang="en-US"/>
+              <a:t>7</a:t>
+            </a:fld>
+            <a:endParaRPr lang="en-US"/>
           </a:p>
         </p:txBody>
       </p:sp>
@@ -20548,7 +22198,7 @@
         </p:blipFill>
         <p:spPr>
           <a:xfrm>
-            <a:off x="411480" y="6547104"/>
+            <a:off x="548640" y="6547104"/>
             <a:ext cx="274320" cy="274320"/>
           </a:xfrm>
           <a:prstGeom prst="rect">
@@ -20564,7 +22214,7 @@
         </p:nvSpPr>
         <p:spPr>
           <a:xfrm>
-            <a:off x="749808" y="6528816"/>
+            <a:off x="886968" y="6528816"/>
             <a:ext cx="6400800" cy="310896"/>
           </a:xfrm>
           <a:prstGeom prst="rect">
@@ -20604,7 +22254,7 @@
         <p:spPr>
           <a:xfrm>
             <a:off x="7132320" y="6528816"/>
-            <a:ext cx="4663440" cy="310896"/>
+            <a:ext cx="4023360" cy="310896"/>
           </a:xfrm>
           <a:prstGeom prst="rect">
             <a:avLst/>
@@ -20642,7 +22292,7 @@
         </p:nvSpPr>
         <p:spPr>
           <a:xfrm>
-            <a:off x="411480" y="384048"/>
+            <a:off x="548640" y="384048"/>
             <a:ext cx="82296" cy="658368"/>
           </a:xfrm>
           <a:prstGeom prst="rect">
@@ -20662,7 +22312,7 @@
         </p:nvSpPr>
         <p:spPr>
           <a:xfrm>
-            <a:off x="640080" y="292608"/>
+            <a:off x="777240" y="292608"/>
             <a:ext cx="10972800" cy="274320"/>
           </a:xfrm>
           <a:prstGeom prst="rect">
@@ -20701,8 +22351,8 @@
         </p:nvSpPr>
         <p:spPr>
           <a:xfrm>
-            <a:off x="640080" y="530352"/>
-            <a:ext cx="11155680" cy="566928"/>
+            <a:off x="777240" y="530352"/>
+            <a:ext cx="10881360" cy="566928"/>
           </a:xfrm>
           <a:prstGeom prst="rect">
             <a:avLst/>
@@ -20742,8 +22392,8 @@
         </p:nvSpPr>
         <p:spPr>
           <a:xfrm>
-            <a:off x="411480" y="2651760"/>
-            <a:ext cx="5779008" cy="1463040"/>
+            <a:off x="548640" y="2651760"/>
+            <a:ext cx="5596128" cy="1463040"/>
           </a:xfrm>
           <a:prstGeom prst="chevron">
             <a:avLst/>
@@ -20767,8 +22417,8 @@
         </p:nvSpPr>
         <p:spPr>
           <a:xfrm>
-            <a:off x="731520" y="2651760"/>
-            <a:ext cx="5257800" cy="1463040"/>
+            <a:off x="868680" y="2651760"/>
+            <a:ext cx="5074920" cy="1463040"/>
           </a:xfrm>
           <a:prstGeom prst="rect">
             <a:avLst/>
@@ -20808,8 +22458,8 @@
         </p:nvSpPr>
         <p:spPr>
           <a:xfrm>
-            <a:off x="6080760" y="2651760"/>
-            <a:ext cx="5779008" cy="1463040"/>
+            <a:off x="6035040" y="2651760"/>
+            <a:ext cx="5596128" cy="1463040"/>
           </a:xfrm>
           <a:prstGeom prst="chevron">
             <a:avLst/>
@@ -20833,8 +22483,8 @@
         </p:nvSpPr>
         <p:spPr>
           <a:xfrm>
-            <a:off x="6400800" y="2651760"/>
-            <a:ext cx="5257800" cy="1463040"/>
+            <a:off x="6355080" y="2651760"/>
+            <a:ext cx="5074920" cy="1463040"/>
           </a:xfrm>
           <a:prstGeom prst="rect">
             <a:avLst/>
@@ -20863,6 +22513,54 @@
               <a:t>recalcular a cobrança (enquanto não paga)</a:t>
             </a:r>
             <a:endParaRPr lang="en-US" sz="1500" dirty="0"/>
+          </a:p>
+        </p:txBody>
+      </p:sp>
+      <p:sp>
+        <p:nvSpPr>
+          <p:cNvPr id="25" name="Slide Number Placeholder 0"/>
+          <p:cNvSpPr>
+            <a:spLocks noGrp="1"/>
+          </p:cNvSpPr>
+          <p:nvPr>
+            <p:ph type="sldNum" sz="quarter" idx="4294967295"/>
+          </p:nvPr>
+        </p:nvSpPr>
+        <p:spPr>
+          <a:xfrm>
+            <a:off x="11292840" y="6556248"/>
+            <a:ext cx="548640" cy="256032"/>
+          </a:xfrm>
+          <a:prstGeom prst="rect">
+            <a:avLst/>
+          </a:prstGeom>
+          <a:extLst>
+            <a:ext uri="{C572A759-6A51-4108-AA02-DFA0A04FC94B}">
+              <ma14:wrappingTextBoxFlag xmlns:ma14="http://schemas.microsoft.com/office/mac/drawingml/2011/main" val="0"/>
+            </a:ext>
+          </a:extLst>
+        </p:spPr>
+        <p:txBody>
+          <a:bodyPr/>
+          <a:lstStyle>
+            <a:lvl1pPr>
+              <a:defRPr sz="900">
+                <a:solidFill>
+                  <a:srgbClr val="1B3A6B"/>
+                </a:solidFill>
+                <a:latin typeface="Arial"/>
+                <a:ea typeface="Arial"/>
+                <a:cs typeface="Arial"/>
+              </a:defRPr>
+            </a:lvl1pPr>
+          </a:lstStyle>
+          <a:p>
+            <a:pPr algn="r"/>
+            <a:fld id="{F7021451-1387-4CA6-816F-3879F97B5CBC}" type="slidenum">
+              <a:rPr b="1" lang="en-US"/>
+              <a:t>8</a:t>
+            </a:fld>
+            <a:endParaRPr lang="en-US"/>
           </a:p>
         </p:txBody>
       </p:sp>
@@ -20939,7 +22637,7 @@
         </p:blipFill>
         <p:spPr>
           <a:xfrm>
-            <a:off x="411480" y="6547104"/>
+            <a:off x="548640" y="6547104"/>
             <a:ext cx="274320" cy="274320"/>
           </a:xfrm>
           <a:prstGeom prst="rect">
@@ -20955,7 +22653,7 @@
         </p:nvSpPr>
         <p:spPr>
           <a:xfrm>
-            <a:off x="749808" y="6528816"/>
+            <a:off x="886968" y="6528816"/>
             <a:ext cx="6400800" cy="310896"/>
           </a:xfrm>
           <a:prstGeom prst="rect">
@@ -20995,7 +22693,7 @@
         <p:spPr>
           <a:xfrm>
             <a:off x="7132320" y="6528816"/>
-            <a:ext cx="4663440" cy="310896"/>
+            <a:ext cx="4023360" cy="310896"/>
           </a:xfrm>
           <a:prstGeom prst="rect">
             <a:avLst/>
@@ -21033,7 +22731,7 @@
         </p:nvSpPr>
         <p:spPr>
           <a:xfrm>
-            <a:off x="411480" y="384048"/>
+            <a:off x="548640" y="384048"/>
             <a:ext cx="82296" cy="658368"/>
           </a:xfrm>
           <a:prstGeom prst="rect">
@@ -21053,7 +22751,7 @@
         </p:nvSpPr>
         <p:spPr>
           <a:xfrm>
-            <a:off x="640080" y="292608"/>
+            <a:off x="777240" y="292608"/>
             <a:ext cx="10972800" cy="274320"/>
           </a:xfrm>
           <a:prstGeom prst="rect">
@@ -21092,8 +22790,8 @@
         </p:nvSpPr>
         <p:spPr>
           <a:xfrm>
-            <a:off x="640080" y="530352"/>
-            <a:ext cx="11155680" cy="566928"/>
+            <a:off x="777240" y="530352"/>
+            <a:ext cx="10881360" cy="566928"/>
           </a:xfrm>
           <a:prstGeom prst="rect">
             <a:avLst/>
@@ -21133,8 +22831,8 @@
         </p:nvSpPr>
         <p:spPr>
           <a:xfrm>
-            <a:off x="411480" y="1325880"/>
-            <a:ext cx="11384280" cy="4892040"/>
+            <a:off x="548640" y="1325880"/>
+            <a:ext cx="11091672" cy="4892040"/>
           </a:xfrm>
           <a:prstGeom prst="roundRect">
             <a:avLst>
@@ -21167,7 +22865,7 @@
         </p:nvSpPr>
         <p:spPr>
           <a:xfrm>
-            <a:off x="594360" y="1508760"/>
+            <a:off x="731520" y="1508760"/>
             <a:ext cx="457200" cy="457200"/>
           </a:xfrm>
           <a:prstGeom prst="ellipse">
@@ -21187,7 +22885,7 @@
         </p:nvSpPr>
         <p:spPr>
           <a:xfrm>
-            <a:off x="594360" y="1508760"/>
+            <a:off x="731520" y="1508760"/>
             <a:ext cx="457200" cy="457200"/>
           </a:xfrm>
           <a:prstGeom prst="rect">
@@ -21226,8 +22924,8 @@
         </p:nvSpPr>
         <p:spPr>
           <a:xfrm>
-            <a:off x="1188720" y="1435608"/>
-            <a:ext cx="10469880" cy="4672584"/>
+            <a:off x="1325880" y="1435608"/>
+            <a:ext cx="10177272" cy="4672584"/>
           </a:xfrm>
           <a:prstGeom prst="rect">
             <a:avLst/>
@@ -21256,6 +22954,54 @@
               <a:t>Mudou o vencimento ou o valor? O boleto ativo é cancelado e reemitido</a:t>
             </a:r>
             <a:endParaRPr lang="en-US" sz="1800" dirty="0"/>
+          </a:p>
+        </p:txBody>
+      </p:sp>
+      <p:sp>
+        <p:nvSpPr>
+          <p:cNvPr id="25" name="Slide Number Placeholder 0"/>
+          <p:cNvSpPr>
+            <a:spLocks noGrp="1"/>
+          </p:cNvSpPr>
+          <p:nvPr>
+            <p:ph type="sldNum" sz="quarter" idx="4294967295"/>
+          </p:nvPr>
+        </p:nvSpPr>
+        <p:spPr>
+          <a:xfrm>
+            <a:off x="11292840" y="6556248"/>
+            <a:ext cx="548640" cy="256032"/>
+          </a:xfrm>
+          <a:prstGeom prst="rect">
+            <a:avLst/>
+          </a:prstGeom>
+          <a:extLst>
+            <a:ext uri="{C572A759-6A51-4108-AA02-DFA0A04FC94B}">
+              <ma14:wrappingTextBoxFlag xmlns:ma14="http://schemas.microsoft.com/office/mac/drawingml/2011/main" val="0"/>
+            </a:ext>
+          </a:extLst>
+        </p:spPr>
+        <p:txBody>
+          <a:bodyPr/>
+          <a:lstStyle>
+            <a:lvl1pPr>
+              <a:defRPr sz="900">
+                <a:solidFill>
+                  <a:srgbClr val="1B3A6B"/>
+                </a:solidFill>
+                <a:latin typeface="Arial"/>
+                <a:ea typeface="Arial"/>
+                <a:cs typeface="Arial"/>
+              </a:defRPr>
+            </a:lvl1pPr>
+          </a:lstStyle>
+          <a:p>
+            <a:pPr algn="r"/>
+            <a:fld id="{F7021451-1387-4CA6-816F-3879F97B5CBC}" type="slidenum">
+              <a:rPr b="1" lang="en-US"/>
+              <a:t>9</a:t>
+            </a:fld>
+            <a:endParaRPr lang="en-US"/>
           </a:p>
         </p:txBody>
       </p:sp>

--- a/docs/curso/slides/m08-cobranca.pptx
+++ b/docs/curso/slides/m08-cobranca.pptx
@@ -36,9 +36,14 @@
     <p:sldId id="284" r:id="rId30"/>
     <p:sldId id="285" r:id="rId31"/>
     <p:sldId id="286" r:id="rId32"/>
+    <p:sldId id="287" r:id="rId33"/>
+    <p:sldId id="288" r:id="rId34"/>
+    <p:sldId id="289" r:id="rId35"/>
+    <p:sldId id="290" r:id="rId36"/>
+    <p:sldId id="291" r:id="rId37"/>
   </p:sldIdLst>
   <p:notesMasterIdLst>
-    <p:notesMasterId r:id="rId33"/>
+    <p:notesMasterId r:id="rId38"/>
   </p:notesMasterIdLst>
   <p:sldSz cx="12192000" cy="6858000"/>
   <p:notesSz cx="6858000" cy="12192000"/>
@@ -620,7 +625,7 @@
           <a:p>
             <a:r>
               <a:rPr lang="en-US" dirty="0"/>
-              <a:t>Tudo isso fica registrado no histórico de alterações da cobrança: quem mudou o vencimento, quem lançou um ajuste, quando o status mudou, quando um boleto foi emitido ou cancelado. É a trilha de auditoria da sua operação financeira. Numa discussão com um cliente, ou numa auditoria, você reconstrói a história de cada cobrança em segundos.</a:t>
+              <a:t>Toda alteração fica registrada: quem, quando, o quê</a:t>
             </a:r>
             <a:endParaRPr lang="en-US" dirty="0"/>
           </a:p>
@@ -708,7 +713,7 @@
           <a:p>
             <a:r>
               <a:rPr lang="en-US" dirty="0"/>
-              <a:t>Resumindo: ajustes sempre com descrição e combinados com o cliente; recalcule antes de emitir; mudança de vencimento ou valor reemite o boleto; e o histórico registra tudo. Na próxima aula, como funcionam o Pix e o boleto.</a:t>
+              <a:t/>
             </a:r>
             <a:endParaRPr lang="en-US" dirty="0"/>
           </a:p>
@@ -884,9 +889,9 @@
           <a:p>
             <a:r>
               <a:rPr lang="en-US" dirty="0"/>
-              <a:t>A plataforma oferece dois métodos. O Pix, que é o padrão: o cliente recebe um código copia e cola, paga no aplicativo do banco e a confirmação chega em minutos. E o boleto, com linha digitável e um PDF com código de barras e a marca da sua empresa. O boleto leva até três dias úteis para compensar e exige o endereço completo do pagador — sem ele, o Mercado Pago recusa a emissão. Um detalhe: cada emissão é um método. Não dá para gerar Pix e boleto juntos no mesmo pedido; se o cliente quiser os dois, você gera um e, se ele preferir o outro, cancela e gera o outro.
-Ao emitir, a plataforma envia ao Mercado Pago o vencimento da cobrança. Se o vencimento cai num fim de semana, o banco joga para o próximo dia útil, e a plataforma registra a data real lida do próprio código de barras — é ela que aparece no PDF e que o banco aceita. Cobrança já vencida, quando emitida, recebe alguns dias de prazo.
-Quando o cliente paga, a baixa acontece por dois caminhos. O principal é o webhook: o Mercado Pago avisa a plataforma no momento em que o status muda. Por segurança, a plataforma não confia só no aviso: ela confere o status diretamente no Mercado Pago antes de dar baixa, e só aceita avisos assinados com a chave secreta da sua conta. O segundo caminho é a sincronização: a cada cinco minutos, a plataforma consulta os pagamentos pendentes. Se o aviso falhar por qualquer motivo, a sincronização pega. Resultado: ninguém precisa conferir extrato para dar baixa. E, se algo falhar repetidamente — credencial recusada, pagamento que não sincroniza há horas, aviso com erro —, vira alerta operacional.</a:t>
+              <a:t>O Pix é o padrão: confirma em minutos. O boleto exige endereço completo e leva até três dias úteis. Cada emissão é um método só.
+O vencimento real é o lido do código de barras, porque o banco joga datas de fim de semana para o dia útil seguinte.
+A baixa chega por dois caminhos: o aviso do Mercado Pago, conferido pela plataforma, e uma sincronização a cada cinco minutos. Ninguém precisa conferir extrato.</a:t>
             </a:r>
             <a:endParaRPr lang="en-US" dirty="0"/>
           </a:p>
@@ -974,8 +979,8 @@
           <a:p>
             <a:r>
               <a:rPr lang="en-US" dirty="0"/>
-              <a:t>Três situações especiais. Primeiro, o boleto vencido. O Mercado Pago devolve ao pagador um boleto pago depois do vencimento, então todo dia às seis da manhã a plataforma marca como vencidos os boletos e Pix cuja data passou, bloqueia o PDF para o cliente não pagar um boleto que vai ser devolvido e alerta o consultor para gerar um novo e enviar. Mas ela não cancela o boleto antigo na hora: um boleto pago no último dia pode levar até três dias úteis para compensar. Por isso, o boleto vencido continua sendo acompanhado por dez dias; se o pagamento cair, a cobrança é baixada e o boleto substituto é cancelado automaticamente. Segundo: se você cancelar a cobrança ou confirmar um pagamento manualmente, o boleto ativo é cancelado no Mercado Pago — e, se o Mercado Pago responder que ele já foi pago, o pagamento é registrado. Terceiro: estorno. Se um pagamento for estornado no Mercado Pago, ele aparece como estornado, a cobrança continua marcada como paga e o caso fica registrado para revisão humana.
-Lembre que o meio de pagamento cobra tarifas por transação, diferentes para Pix e boleto; elas entram no custo variável da sua conta do módulo 3. A conta do Mercado Pago é configurada pelo administrador, com as credenciais guardadas de forma criptografada. O passo a passo está no material de apoio, e voltamos a isso no módulo 11.</a:t>
+              <a:t>Boleto vencido tem o PDF bloqueado e gera alerta para reemitir, mas continua monitorado por dez dias, porque um pagamento do último dia pode compensar depois. Estornos ficam registrados para revisão.
+As tarifas do meio de pagamento entram no custo variável da sua conta.</a:t>
             </a:r>
             <a:endParaRPr lang="en-US" dirty="0"/>
           </a:p>
@@ -1063,7 +1068,7 @@
           <a:p>
             <a:r>
               <a:rPr lang="en-US" dirty="0"/>
-              <a:t>Resumindo: Pix ou boleto, baixa automática por dois caminhos, boleto vencido tratado com alerta e reemissão, e estornos registrados. Na próxima aula, a régua de cobrança.</a:t>
+              <a:t/>
             </a:r>
             <a:endParaRPr lang="en-US" dirty="0"/>
           </a:p>
@@ -1239,7 +1244,7 @@
           <a:p>
             <a:r>
               <a:rPr lang="en-US" dirty="0"/>
-              <a:t>Vamos montar a régua, combinando o que a plataforma faz sozinha com o que a sua equipe faz. Três dias antes do vencimento, o cliente recebe automaticamente um e-mail de lembrete com o Pix ou o boleto, se já houver um pagável, e o consultor responsável recebe um alerta com uma mensagem de WhatsApp pronta, para enviar com um clique. No vencimento, nada acontece — muitos clientes pagam no próprio dia. No dia seguinte, a cobrança é marcada como vencida automaticamente. A partir daí, a cada cinco dias, o consultor recebe um novo alerta com o link de WhatsApp para cobrar — e, se o boleto venceu sem um substituto, o alerta pede para gerar um novo boleto antes. Por volta de quinze dias de atraso, entra o contato pessoal: uma ligação, entender o motivo e propor um acordo, se for o caso. E, depois de trinta dias, as medidas previstas no contrato: aviso formal e, se o contrato permitir, a suspensão da participação do cliente na usina, com a retirada da unidade dele da lista de rateio. Os prazos são exemplos; defina os seus e escreva no contrato.</a:t>
+              <a:t>A régua combina automação e contato humano: lembrete três dias antes, marcação de vencida, alertas ao consultor a cada cinco dias, contato pessoal e, depois de trinta dias, as medidas do contrato.</a:t>
             </a:r>
             <a:endParaRPr lang="en-US" dirty="0"/>
           </a:p>
@@ -1327,8 +1332,8 @@
           <a:p>
             <a:r>
               <a:rPr lang="en-US" dirty="0"/>
-              <a:t>O tom importa. No lembrete, reforce o benefício: "a sua economia deste mês está garantida, segue o Pix". No atraso leve, pergunte, não acuse: "notamos que a cobrança ficou em aberto, aconteceu alguma coisa?" — muitas vezes o cliente simplesmente não entendeu as duas contas e achou que já tinha pago. No atraso grave, seja claro e objetivo, com data e consequência. As mensagens de WhatsApp da plataforma usam modelos que você pode editar, com campos como o nome do cliente, o valor e o vencimento, preenchidos automaticamente.
-Sobre multa e juros: em relações de consumo, a multa de mora tem limite legal, e os juros também precisam respeitar a lei e o contrato. Cobre o que está previsto, nada além. Para acordos, por exemplo parcelar uma dívida de dois meses, registre na plataforma — como ajustes nas cobranças seguintes, com descrição clara. Nunca perdoe uma dívida "de boca", sem registro: além do prejuízo, isso bagunça os relatórios e o repasse ao produtor.</a:t>
+              <a:t>O tom muda com o atraso. No atraso leve, pergunte em vez de acusar: muitas vezes o cliente não entendeu as duas contas.
+Multa e juros só dentro da lei e do contrato. Acordos sempre registrados, nunca de boca.</a:t>
             </a:r>
             <a:endParaRPr lang="en-US" dirty="0"/>
           </a:p>
@@ -1416,7 +1421,7 @@
           <a:p>
             <a:r>
               <a:rPr lang="en-US" dirty="0"/>
-              <a:t>A melhor cobrança é a que não precisa acontecer. Algumas práticas reduzem muito a inadimplência. Explicar as duas contas na venda e nas boas-vindas. Alinhar o vencimento com o da fatura da distribuidora, ou com a data que o cliente pediu. Usar o Pix como padrão: é mais fácil de pagar. Colocar o cliente no portal, onde ele vê as cobranças e a economia. Pagar a comissão do vendedor só depois da primeira cobrança paga. E avaliar o cliente na entrada: histórico, tempo de empresa, referências.</a:t>
+              <a:t>A melhor cobrança é a que não precisa acontecer. As práticas da tela reduzem muito a inadimplência.</a:t>
             </a:r>
             <a:endParaRPr lang="en-US" dirty="0"/>
           </a:p>
@@ -1592,7 +1597,7 @@
           <a:p>
             <a:r>
               <a:rPr lang="en-US" dirty="0"/>
-              <a:t>Meça a inadimplência por faixa de atraso — até trinta dias, de trinta a sessenta, de sessenta a noventa e acima de noventa —, a recuperação no mês e a inadimplência por consultor. Um consultor com inadimplência muito acima da média provavelmente está vendendo para o cliente errado, ou explicando mal. Os relatórios de cobrança da plataforma trazem esses números, como você vai ver no módulo 10.</a:t>
+              <a:t>Meça por faixa de atraso e por consultor.</a:t>
             </a:r>
             <a:endParaRPr lang="en-US" dirty="0"/>
           </a:p>
@@ -1680,7 +1685,7 @@
           <a:p>
             <a:r>
               <a:rPr lang="en-US" dirty="0"/>
-              <a:t>Resumindo: uma régua clara, combinando automações e contato humano, tom adequado, acordos registrados e muita prevenção. Escreva a régua da sua empresa no entregável. Agora, para os laboratórios de cobrança.</a:t>
+              <a:t/>
             </a:r>
             <a:endParaRPr lang="en-US" dirty="0"/>
           </a:p>
@@ -1856,10 +1861,10 @@
           <a:p>
             <a:r>
               <a:rPr lang="en-US" dirty="0"/>
-              <a:t>Abra a fatura aprovada da padaria e gere a cobrança. Se você preferir, pode esperar: a rotina de hora em hora gera sozinha as cobranças das faturas aprovadas. Depois, abra Financeiro, Cobranças de Faturas, e filtre pelo nome do cliente. A cobrança da padaria está lá, em rascunho.
-Abra a cobrança. Em dados da cobrança, confira o titular, a referência, o vencimento, a usina e a unidade consumidora, o consumo e o consumo injetado. No resumo financeiro, o valor original, o desconto, os ajustes e o valor total: mil, seiscentos e noventa e cinco reais e vinte centavos. Se quiser rever a origem, o atalho da fatura de concessionária abre os dados técnicos da fatura. Tudo certo? Siga. Algo errado? Corrija antes, com um ajuste ou na fatura.
-Em ações disponíveis, clique em abrir esta cobrança para pagamento. O status passa de rascunho para aberta. A partir daqui, ela aparece para o cliente no portal e pode receber o Pix ou o boleto.
-Agora, gere o pagamento e escolha Pix. Em segundos, o pagamento aparece na seção de pagamentos gerados, com o valor, o vencimento e o código Pix copia e cola. A cobrança passa a aguardando pagamento. E o cliente recebe, automaticamente, um e-mail avisando que o pagamento está disponível, com o valor, o vencimento e o Pix — no laboratório, esse e-mail aparece na caixa de e-mails do ambiente de aula. Repare que o e-mail vai para o e-mail de contato real do cliente cadastrado na ficha dele.</a:t>
+              <a:t>Na fatura aprovada, gere a cobrança, ou aguarde a rotina. Ela aparece em Cobranças de Faturas como rascunho.
+Confira referência, vencimento, consumo injetado, desconto e valor total.
+Em Ações Disponíveis, clique em Abrir esta cobrança para pagamento.
+Gere o pagamento por Pix: o código aparece em Pagamentos Gerados e o cliente recebe o e-mail automaticamente.</a:t>
             </a:r>
             <a:endParaRPr lang="en-US" dirty="0"/>
           </a:p>
@@ -1947,7 +1952,7 @@
           <a:p>
             <a:r>
               <a:rPr lang="en-US" dirty="0"/>
-              <a:t>Use o botão de enviar ao cliente pelo WhatsApp: ele abre o WhatsApp com uma mensagem pronta, com o valor e o Pix — o envio é seu, com um clique. Agora, faça um boleto para a clínica. Se o cadastro da clínica não tiver o endereço completo, o Mercado Pago recusa, e a plataforma mostra o motivo; complete o endereço do cliente e gere de novo. O boleto vem com a linha digitável, o código de barras e o PDF com a marca da sua empresa.</a:t>
+              <a:t>Envie pelo WhatsApp com um clique. Para boleto, o cliente precisa ter endereço completo.</a:t>
             </a:r>
             <a:endParaRPr lang="en-US" dirty="0"/>
           </a:p>
@@ -2123,10 +2128,10 @@
           <a:p>
             <a:r>
               <a:rPr lang="en-US" dirty="0"/>
-              <a:t>Primeiro, veja pelo lado do cliente. Troque para o perfil Cliente e abra Minhas Cobranças. A cobrança do mês está lá, com o cartão de pagamento: o Pix copia e cola, pronto para colar no aplicativo do banco, e, quando for boleto, a linha digitável e o PDF para baixar. Repare que o cliente vê só o que precisa para pagar — nenhum dado técnico ou interno. Quanto mais clientes pagam pelo portal, menos mensagens a sua equipe responde.
-Volte ao Administrador. No laboratório, use o botão de simular pagamento na cobrança da padaria — ele imita exatamente o que o Mercado Pago faz quando o cliente paga. Em instantes, o pagamento aparece como pago, e a cobrança como paga, com a data do pagamento. Ninguém clicou em "dar baixa": a confirmação chegou pelo mesmo caminho do mundo real, o aviso do Mercado Pago, conferido pela plataforma. Abra o histórico de alterações: o pagamento está registrado.
-Em Financeiro, Pagamentos, você vê todos os Pix e boletos emitidos, com filtros por status, método e cliente. Dentro de um pagamento, existe um botão para sincronizar na hora com o Mercado Pago, útil quando um cliente diz "acabei de pagar". Como administrador, você também vê os avisos recebidos do Mercado Pago, um por um — e, se um deles falhou, a plataforma permite reprocessar.
-E quando o cliente paga por fora — uma transferência direta, por exemplo? Na cobrança, use confirmar pagamento: informe a data e uma observação com a referência do comprovante. A cobrança fica paga e, se houver um Pix ou boleto ativo, a plataforma cancela no Mercado Pago, para o cliente não pagar duas vezes. Use isso como exceção: o ideal é o pagamento passar pelo Pix ou boleto, que dão baixa sozinhos.</a:t>
+              <a:t>Como Cliente, abra Minhas Cobranças: Pix copia e cola e boleto em PDF prontos para pagar.
+Como Administrador, simule o pagamento: a cobrança fica paga sozinha, com o histórico registrado.
+Em Financeiro, Pagamentos, acompanhe todos os Pix e boletos e sincronize sob demanda.
+Recebeu por fora? Use Confirmar Pagamento com data e observação: o boleto ativo é cancelado.</a:t>
             </a:r>
             <a:endParaRPr lang="en-US" dirty="0"/>
           </a:p>
@@ -2390,10 +2395,10 @@
           <a:p>
             <a:r>
               <a:rPr lang="en-US" dirty="0"/>
-              <a:t>Avance o laboratório até três dias antes do vencimento. Na caixa de e-mails do laboratório, aparece o lembrete enviado aos clientes, com o Pix. E, em Alertas Operacionais, há um alerta de lembrete para o consultor responsável, com o link do WhatsApp e a mensagem pronta. Clique e veja a mensagem. Na vida real, o consultor só confere e envia.
-Avance para o dia seguinte ao vencimento. As cobranças não pagas foram marcadas como vencidas, sem ninguém clicar. No dashboard, o número de cobranças vencidas subiu, e o valor vencido aparece separado. Na lista de cobranças, filtre pelas vencidas: é a fila de trabalho da cobrança.
-Agora, a clínica, que tinha boleto. Repare no selo de boleto vencido e no PDF bloqueado: o cliente não consegue mais baixar um boleto que o banco devolveria. Em Alertas Operacionais, há um alerta pedindo para gerar um novo boleto e enviar. E o menu mostra quantas cobranças estão aguardando um novo boleto. Gere o novo pagamento para a clínica e envie ao cliente. Lembre do detalhe da aula 3: o boleto antigo não foi cancelado no banco; ele continua sendo acompanhado por dez dias. Se a clínica tiver pago o antigo no último dia, a cobrança é baixada e o novo boleto é cancelado sozinho.
-Por fim, a residência ligou: recebe o salário no dia quinze e pediu para pagar depois disso. Na cobrança, use editar vencimento e informe a nova data. A plataforma cancela o Pix anterior no Mercado Pago e emite um novo com a data nova. O histórico de alterações registra quem mudou e quando. Se o pedido se repetir todo mês, ajuste a data de vencimento padrão desse cliente no contrato.</a:t>
+              <a:t>Três dias antes: e-mail ao cliente e alerta ao consultor com a mensagem de WhatsApp pronta.
+No dia seguinte ao vencimento, a cobrança é marcada como vencida sozinha.
+Boleto vencido: PDF bloqueado e alerta para reemitir. Gere o novo boleto e envie.
+Use Editar vencimento: o pagamento anterior é cancelado, um novo é emitido e tudo fica no histórico.</a:t>
             </a:r>
             <a:endParaRPr lang="en-US" dirty="0"/>
           </a:p>
@@ -2481,7 +2486,7 @@
           <a:p>
             <a:r>
               <a:rPr lang="en-US" dirty="0"/>
-              <a:t>A fórmula você já conhece. O valor original é o consumo injetado da fatura, em reais. O desconto é esse valor vezes a margem de desconto do cliente. E o valor final é o original menos o desconto, mais ou menos os ajustes manuais, que veremos na próxima aula. Para a padaria: dois mil, cento e dezenove reais de consumo injetado, menos vinte por cento, que são quatrocentos e vinte e três reais e oitenta, dá mil, seiscentos e noventa e cinco reais e vinte centavos. O vencimento da cobrança, por padrão, acompanha o vencimento da fatura da distribuidora, para que o cliente tenha as duas contas na mesma data.</a:t>
+              <a:t>A cobrança parte do consumo injetado da fatura, aplica o desconto do cliente e soma os ajustes. O vencimento acompanha o da fatura, para o cliente ter as duas contas na mesma data.</a:t>
             </a:r>
             <a:endParaRPr lang="en-US" dirty="0"/>
           </a:p>
@@ -2569,7 +2574,7 @@
           <a:p>
             <a:r>
               <a:rPr lang="en-US" dirty="0"/>
-              <a:t>Para os contatos humanos da régua, a cobrança tem os botões de cobrar via WhatsApp e enviar lembrete, sempre com a mensagem pronta e o valor correto. Use-os nos dias de contato pessoal.</a:t>
+              <a:t>Nos contatos humanos, use Cobrar via WhatsApp e Enviar Lembrete.</a:t>
             </a:r>
             <a:endParaRPr lang="en-US" dirty="0"/>
           </a:p>
@@ -2699,6 +2704,446 @@
 </p:notes>
 </file>
 
+<file path=ppt/notesSlides/notesSlide32.xml><?xml version="1.0" encoding="utf-8"?>
+<p:notes xmlns:a="http://schemas.openxmlformats.org/drawingml/2006/main" xmlns:r="http://schemas.openxmlformats.org/officeDocument/2006/relationships" xmlns:p="http://schemas.openxmlformats.org/presentationml/2006/main">
+  <p:cSld>
+    <p:spTree>
+      <p:nvGrpSpPr>
+        <p:cNvPr id="1" name=""/>
+        <p:cNvGrpSpPr/>
+        <p:nvPr/>
+      </p:nvGrpSpPr>
+      <p:grpSpPr>
+        <a:xfrm>
+          <a:off x="0" y="0"/>
+          <a:ext cx="0" cy="0"/>
+          <a:chOff x="0" y="0"/>
+          <a:chExt cx="0" cy="0"/>
+        </a:xfrm>
+      </p:grpSpPr>
+      <p:sp>
+        <p:nvSpPr>
+          <p:cNvPr id="2" name="Slide Image Placeholder 1"/>
+          <p:cNvSpPr>
+            <a:spLocks noGrp="1" noRot="1" noChangeAspect="1"/>
+          </p:cNvSpPr>
+          <p:nvPr>
+            <p:ph type="sldImg"/>
+          </p:nvPr>
+        </p:nvSpPr>
+        <p:spPr/>
+      </p:sp>
+      <p:sp>
+        <p:nvSpPr>
+          <p:cNvPr id="3" name="Notes Placeholder 2"/>
+          <p:cNvSpPr>
+            <a:spLocks noGrp="1"/>
+          </p:cNvSpPr>
+          <p:nvPr>
+            <p:ph type="body" idx="1"/>
+          </p:nvPr>
+        </p:nvSpPr>
+        <p:spPr/>
+        <p:txBody>
+          <a:bodyPr/>
+          <a:lstStyle/>
+          <a:p>
+            <a:r>
+              <a:rPr lang="en-US" dirty="0"/>
+              <a:t/>
+            </a:r>
+            <a:endParaRPr lang="en-US" dirty="0"/>
+          </a:p>
+        </p:txBody>
+      </p:sp>
+      <p:sp>
+        <p:nvSpPr>
+          <p:cNvPr id="4" name="Slide Number Placeholder 3"/>
+          <p:cNvSpPr>
+            <a:spLocks noGrp="1"/>
+          </p:cNvSpPr>
+          <p:nvPr>
+            <p:ph type="sldNum" sz="quarter" idx="10"/>
+          </p:nvPr>
+        </p:nvSpPr>
+        <p:spPr/>
+        <p:txBody>
+          <a:bodyPr/>
+          <a:lstStyle/>
+          <a:p>
+            <a:fld id="{F7021451-1387-4CA6-816F-3879F97B5CBC}" type="slidenum">
+              <a:rPr lang="en-US"/>
+              <a:t>32</a:t>
+            </a:fld>
+            <a:endParaRPr lang="en-US"/>
+          </a:p>
+        </p:txBody>
+      </p:sp>
+    </p:spTree>
+    <p:extLst>
+      <p:ext uri="{BB962C8B-B14F-4D97-AF65-F5344CB8AC3E}">
+        <p14:creationId xmlns:p14="http://schemas.microsoft.com/office/powerpoint/2010/main" val="1024086991"/>
+      </p:ext>
+    </p:extLst>
+  </p:cSld>
+  <p:clrMapOvr>
+    <a:masterClrMapping/>
+  </p:clrMapOvr>
+</p:notes>
+</file>
+
+<file path=ppt/notesSlides/notesSlide33.xml><?xml version="1.0" encoding="utf-8"?>
+<p:notes xmlns:a="http://schemas.openxmlformats.org/drawingml/2006/main" xmlns:r="http://schemas.openxmlformats.org/officeDocument/2006/relationships" xmlns:p="http://schemas.openxmlformats.org/presentationml/2006/main">
+  <p:cSld>
+    <p:spTree>
+      <p:nvGrpSpPr>
+        <p:cNvPr id="1" name=""/>
+        <p:cNvGrpSpPr/>
+        <p:nvPr/>
+      </p:nvGrpSpPr>
+      <p:grpSpPr>
+        <a:xfrm>
+          <a:off x="0" y="0"/>
+          <a:ext cx="0" cy="0"/>
+          <a:chOff x="0" y="0"/>
+          <a:chExt cx="0" cy="0"/>
+        </a:xfrm>
+      </p:grpSpPr>
+      <p:sp>
+        <p:nvSpPr>
+          <p:cNvPr id="2" name="Slide Image Placeholder 1"/>
+          <p:cNvSpPr>
+            <a:spLocks noGrp="1" noRot="1" noChangeAspect="1"/>
+          </p:cNvSpPr>
+          <p:nvPr>
+            <p:ph type="sldImg"/>
+          </p:nvPr>
+        </p:nvSpPr>
+        <p:spPr/>
+      </p:sp>
+      <p:sp>
+        <p:nvSpPr>
+          <p:cNvPr id="3" name="Notes Placeholder 2"/>
+          <p:cNvSpPr>
+            <a:spLocks noGrp="1"/>
+          </p:cNvSpPr>
+          <p:nvPr>
+            <p:ph type="body" idx="1"/>
+          </p:nvPr>
+        </p:nvSpPr>
+        <p:spPr/>
+        <p:txBody>
+          <a:bodyPr/>
+          <a:lstStyle/>
+          <a:p>
+            <a:r>
+              <a:rPr lang="en-US" dirty="0"/>
+              <a:t/>
+            </a:r>
+            <a:endParaRPr lang="en-US" dirty="0"/>
+          </a:p>
+        </p:txBody>
+      </p:sp>
+      <p:sp>
+        <p:nvSpPr>
+          <p:cNvPr id="4" name="Slide Number Placeholder 3"/>
+          <p:cNvSpPr>
+            <a:spLocks noGrp="1"/>
+          </p:cNvSpPr>
+          <p:nvPr>
+            <p:ph type="sldNum" sz="quarter" idx="10"/>
+          </p:nvPr>
+        </p:nvSpPr>
+        <p:spPr/>
+        <p:txBody>
+          <a:bodyPr/>
+          <a:lstStyle/>
+          <a:p>
+            <a:fld id="{F7021451-1387-4CA6-816F-3879F97B5CBC}" type="slidenum">
+              <a:rPr lang="en-US"/>
+              <a:t>33</a:t>
+            </a:fld>
+            <a:endParaRPr lang="en-US"/>
+          </a:p>
+        </p:txBody>
+      </p:sp>
+    </p:spTree>
+    <p:extLst>
+      <p:ext uri="{BB962C8B-B14F-4D97-AF65-F5344CB8AC3E}">
+        <p14:creationId xmlns:p14="http://schemas.microsoft.com/office/powerpoint/2010/main" val="1024086991"/>
+      </p:ext>
+    </p:extLst>
+  </p:cSld>
+  <p:clrMapOvr>
+    <a:masterClrMapping/>
+  </p:clrMapOvr>
+</p:notes>
+</file>
+
+<file path=ppt/notesSlides/notesSlide34.xml><?xml version="1.0" encoding="utf-8"?>
+<p:notes xmlns:a="http://schemas.openxmlformats.org/drawingml/2006/main" xmlns:r="http://schemas.openxmlformats.org/officeDocument/2006/relationships" xmlns:p="http://schemas.openxmlformats.org/presentationml/2006/main">
+  <p:cSld>
+    <p:spTree>
+      <p:nvGrpSpPr>
+        <p:cNvPr id="1" name=""/>
+        <p:cNvGrpSpPr/>
+        <p:nvPr/>
+      </p:nvGrpSpPr>
+      <p:grpSpPr>
+        <a:xfrm>
+          <a:off x="0" y="0"/>
+          <a:ext cx="0" cy="0"/>
+          <a:chOff x="0" y="0"/>
+          <a:chExt cx="0" cy="0"/>
+        </a:xfrm>
+      </p:grpSpPr>
+      <p:sp>
+        <p:nvSpPr>
+          <p:cNvPr id="2" name="Slide Image Placeholder 1"/>
+          <p:cNvSpPr>
+            <a:spLocks noGrp="1" noRot="1" noChangeAspect="1"/>
+          </p:cNvSpPr>
+          <p:nvPr>
+            <p:ph type="sldImg"/>
+          </p:nvPr>
+        </p:nvSpPr>
+        <p:spPr/>
+      </p:sp>
+      <p:sp>
+        <p:nvSpPr>
+          <p:cNvPr id="3" name="Notes Placeholder 2"/>
+          <p:cNvSpPr>
+            <a:spLocks noGrp="1"/>
+          </p:cNvSpPr>
+          <p:nvPr>
+            <p:ph type="body" idx="1"/>
+          </p:nvPr>
+        </p:nvSpPr>
+        <p:spPr/>
+        <p:txBody>
+          <a:bodyPr/>
+          <a:lstStyle/>
+          <a:p>
+            <a:r>
+              <a:rPr lang="en-US" dirty="0"/>
+              <a:t/>
+            </a:r>
+            <a:endParaRPr lang="en-US" dirty="0"/>
+          </a:p>
+        </p:txBody>
+      </p:sp>
+      <p:sp>
+        <p:nvSpPr>
+          <p:cNvPr id="4" name="Slide Number Placeholder 3"/>
+          <p:cNvSpPr>
+            <a:spLocks noGrp="1"/>
+          </p:cNvSpPr>
+          <p:nvPr>
+            <p:ph type="sldNum" sz="quarter" idx="10"/>
+          </p:nvPr>
+        </p:nvSpPr>
+        <p:spPr/>
+        <p:txBody>
+          <a:bodyPr/>
+          <a:lstStyle/>
+          <a:p>
+            <a:fld id="{F7021451-1387-4CA6-816F-3879F97B5CBC}" type="slidenum">
+              <a:rPr lang="en-US"/>
+              <a:t>34</a:t>
+            </a:fld>
+            <a:endParaRPr lang="en-US"/>
+          </a:p>
+        </p:txBody>
+      </p:sp>
+    </p:spTree>
+    <p:extLst>
+      <p:ext uri="{BB962C8B-B14F-4D97-AF65-F5344CB8AC3E}">
+        <p14:creationId xmlns:p14="http://schemas.microsoft.com/office/powerpoint/2010/main" val="1024086991"/>
+      </p:ext>
+    </p:extLst>
+  </p:cSld>
+  <p:clrMapOvr>
+    <a:masterClrMapping/>
+  </p:clrMapOvr>
+</p:notes>
+</file>
+
+<file path=ppt/notesSlides/notesSlide35.xml><?xml version="1.0" encoding="utf-8"?>
+<p:notes xmlns:a="http://schemas.openxmlformats.org/drawingml/2006/main" xmlns:r="http://schemas.openxmlformats.org/officeDocument/2006/relationships" xmlns:p="http://schemas.openxmlformats.org/presentationml/2006/main">
+  <p:cSld>
+    <p:spTree>
+      <p:nvGrpSpPr>
+        <p:cNvPr id="1" name=""/>
+        <p:cNvGrpSpPr/>
+        <p:nvPr/>
+      </p:nvGrpSpPr>
+      <p:grpSpPr>
+        <a:xfrm>
+          <a:off x="0" y="0"/>
+          <a:ext cx="0" cy="0"/>
+          <a:chOff x="0" y="0"/>
+          <a:chExt cx="0" cy="0"/>
+        </a:xfrm>
+      </p:grpSpPr>
+      <p:sp>
+        <p:nvSpPr>
+          <p:cNvPr id="2" name="Slide Image Placeholder 1"/>
+          <p:cNvSpPr>
+            <a:spLocks noGrp="1" noRot="1" noChangeAspect="1"/>
+          </p:cNvSpPr>
+          <p:nvPr>
+            <p:ph type="sldImg"/>
+          </p:nvPr>
+        </p:nvSpPr>
+        <p:spPr/>
+      </p:sp>
+      <p:sp>
+        <p:nvSpPr>
+          <p:cNvPr id="3" name="Notes Placeholder 2"/>
+          <p:cNvSpPr>
+            <a:spLocks noGrp="1"/>
+          </p:cNvSpPr>
+          <p:nvPr>
+            <p:ph type="body" idx="1"/>
+          </p:nvPr>
+        </p:nvSpPr>
+        <p:spPr/>
+        <p:txBody>
+          <a:bodyPr/>
+          <a:lstStyle/>
+          <a:p>
+            <a:r>
+              <a:rPr lang="en-US" dirty="0"/>
+              <a:t/>
+            </a:r>
+            <a:endParaRPr lang="en-US" dirty="0"/>
+          </a:p>
+        </p:txBody>
+      </p:sp>
+      <p:sp>
+        <p:nvSpPr>
+          <p:cNvPr id="4" name="Slide Number Placeholder 3"/>
+          <p:cNvSpPr>
+            <a:spLocks noGrp="1"/>
+          </p:cNvSpPr>
+          <p:nvPr>
+            <p:ph type="sldNum" sz="quarter" idx="10"/>
+          </p:nvPr>
+        </p:nvSpPr>
+        <p:spPr/>
+        <p:txBody>
+          <a:bodyPr/>
+          <a:lstStyle/>
+          <a:p>
+            <a:fld id="{F7021451-1387-4CA6-816F-3879F97B5CBC}" type="slidenum">
+              <a:rPr lang="en-US"/>
+              <a:t>35</a:t>
+            </a:fld>
+            <a:endParaRPr lang="en-US"/>
+          </a:p>
+        </p:txBody>
+      </p:sp>
+    </p:spTree>
+    <p:extLst>
+      <p:ext uri="{BB962C8B-B14F-4D97-AF65-F5344CB8AC3E}">
+        <p14:creationId xmlns:p14="http://schemas.microsoft.com/office/powerpoint/2010/main" val="1024086991"/>
+      </p:ext>
+    </p:extLst>
+  </p:cSld>
+  <p:clrMapOvr>
+    <a:masterClrMapping/>
+  </p:clrMapOvr>
+</p:notes>
+</file>
+
+<file path=ppt/notesSlides/notesSlide36.xml><?xml version="1.0" encoding="utf-8"?>
+<p:notes xmlns:a="http://schemas.openxmlformats.org/drawingml/2006/main" xmlns:r="http://schemas.openxmlformats.org/officeDocument/2006/relationships" xmlns:p="http://schemas.openxmlformats.org/presentationml/2006/main">
+  <p:cSld>
+    <p:spTree>
+      <p:nvGrpSpPr>
+        <p:cNvPr id="1" name=""/>
+        <p:cNvGrpSpPr/>
+        <p:nvPr/>
+      </p:nvGrpSpPr>
+      <p:grpSpPr>
+        <a:xfrm>
+          <a:off x="0" y="0"/>
+          <a:ext cx="0" cy="0"/>
+          <a:chOff x="0" y="0"/>
+          <a:chExt cx="0" cy="0"/>
+        </a:xfrm>
+      </p:grpSpPr>
+      <p:sp>
+        <p:nvSpPr>
+          <p:cNvPr id="2" name="Slide Image Placeholder 1"/>
+          <p:cNvSpPr>
+            <a:spLocks noGrp="1" noRot="1" noChangeAspect="1"/>
+          </p:cNvSpPr>
+          <p:nvPr>
+            <p:ph type="sldImg"/>
+          </p:nvPr>
+        </p:nvSpPr>
+        <p:spPr/>
+      </p:sp>
+      <p:sp>
+        <p:nvSpPr>
+          <p:cNvPr id="3" name="Notes Placeholder 2"/>
+          <p:cNvSpPr>
+            <a:spLocks noGrp="1"/>
+          </p:cNvSpPr>
+          <p:nvPr>
+            <p:ph type="body" idx="1"/>
+          </p:nvPr>
+        </p:nvSpPr>
+        <p:spPr/>
+        <p:txBody>
+          <a:bodyPr/>
+          <a:lstStyle/>
+          <a:p>
+            <a:r>
+              <a:rPr lang="en-US" dirty="0"/>
+              <a:t/>
+            </a:r>
+            <a:endParaRPr lang="en-US" dirty="0"/>
+          </a:p>
+        </p:txBody>
+      </p:sp>
+      <p:sp>
+        <p:nvSpPr>
+          <p:cNvPr id="4" name="Slide Number Placeholder 3"/>
+          <p:cNvSpPr>
+            <a:spLocks noGrp="1"/>
+          </p:cNvSpPr>
+          <p:nvPr>
+            <p:ph type="sldNum" sz="quarter" idx="10"/>
+          </p:nvPr>
+        </p:nvSpPr>
+        <p:spPr/>
+        <p:txBody>
+          <a:bodyPr/>
+          <a:lstStyle/>
+          <a:p>
+            <a:fld id="{F7021451-1387-4CA6-816F-3879F97B5CBC}" type="slidenum">
+              <a:rPr lang="en-US"/>
+              <a:t>36</a:t>
+            </a:fld>
+            <a:endParaRPr lang="en-US"/>
+          </a:p>
+        </p:txBody>
+      </p:sp>
+    </p:spTree>
+    <p:extLst>
+      <p:ext uri="{BB962C8B-B14F-4D97-AF65-F5344CB8AC3E}">
+        <p14:creationId xmlns:p14="http://schemas.microsoft.com/office/powerpoint/2010/main" val="1024086991"/>
+      </p:ext>
+    </p:extLst>
+  </p:cSld>
+  <p:clrMapOvr>
+    <a:masterClrMapping/>
+  </p:clrMapOvr>
+</p:notes>
+</file>
+
 <file path=ppt/notesSlides/notesSlide4.xml><?xml version="1.0" encoding="utf-8"?>
 <p:notes xmlns:a="http://schemas.openxmlformats.org/drawingml/2006/main" xmlns:r="http://schemas.openxmlformats.org/officeDocument/2006/relationships" xmlns:p="http://schemas.openxmlformats.org/presentationml/2006/main">
   <p:cSld>
@@ -2745,9 +3190,9 @@
           <a:p>
             <a:r>
               <a:rPr lang="en-US" dirty="0"/>
-              <a:t>A cobrança é gerada de duas formas. Automaticamente: de hora em hora, uma rotina procura faturas aprovadas sem cobrança e gera as cobranças. Ou manualmente, com um clique na fatura, quando você quer adiantar. A plataforma impede gerar duas cobranças ativas para a mesma fatura. E, se uma fatura ficar aprovada sem cobrança por muito tempo, a varredura de saúde operacional avisa.
-Toda cobrança nasce como rascunho. Isso é proposital: é a sua chance de conferir antes de o cliente ver. Quando está tudo certo, você abre a cobrança para pagamento, e ela passa a aberta. Ao gerar o Pix ou o boleto, ela fica aguardando pagamento. Quando o pagamento é confirmado, vira paga. Se o vencimento passa sem pagamento, uma rotina que roda a cada dez minutos marca como vencida. E, se por algum motivo a cobrança não deve existir — por exemplo, a fatura era duplicada —, você cancela, informando o motivo. Rascunhos esquecidos também geram alerta: a varredura avisa sobre cobranças em rascunho há mais de dois dias.
-Uma decisão importante desta plataforma: o Pix ou o boleto não é gerado automaticamente. É sempre uma pessoa que clica para gerar, na tela da cobrança. O motivo é cuidado: emitir um boleto é um ato com efeito financeiro e de comunicação com o cliente, e a conferência humana evita mandar um valor errado. Para que isso não vire esquecimento, a plataforma alerta o consultor quando uma cobrança vai vencer em cinco dias sem pagamento gerado.</a:t>
+              <a:t>Ela é gerada sozinha, de hora em hora, ou com um clique. Nunca há duas cobranças ativas para a mesma fatura.
+Toda cobrança nasce em rascunho, a sua chance de conferir antes de o cliente ver. Depois ela é aberta, aguarda o pagamento e termina paga, vencida ou cancelada.
+O Pix ou boleto é sempre emitido por uma pessoa, por segurança. Para não virar esquecimento, a plataforma alerta sobre cobranças perto do vencimento sem pagamento gerado.</a:t>
             </a:r>
             <a:endParaRPr lang="en-US" dirty="0"/>
           </a:p>
@@ -2835,7 +3280,7 @@
           <a:p>
             <a:r>
               <a:rPr lang="en-US" dirty="0"/>
-              <a:t>Resumindo: a cobrança é o consumo injetado com o desconto, mais ou menos ajustes; nasce em rascunho, é aberta para pagamento, fica aguardando, e termina paga, vencida ou cancelada; e o Pix ou boleto é sempre emitido por uma pessoa. Na próxima aula, os ajustes.</a:t>
+              <a:t/>
             </a:r>
             <a:endParaRPr lang="en-US" dirty="0"/>
           </a:p>
@@ -3011,7 +3456,7 @@
           <a:p>
             <a:r>
               <a:rPr lang="en-US" dirty="0"/>
-              <a:t>O ajuste mais comum é o desconto manual. Use para uma cortesia — por exemplo, o primeiro crédito demorou um ciclo além do prometido e você quer compensar o cliente —, para corrigir um erro seu ou para uma negociação. O acréscimo manual é o contrário: por exemplo, no mês anterior uma fatura foi lida errado e você cobrou a menos; no mês seguinte, cobra a diferença. Em ambos, a plataforma pede o tipo, o valor e uma descrição. Escreva uma descrição que o cliente entenderia, porque ela pode ser questionada. E combine com o cliente antes de cobrar um acréscimo: surpresa na cobrança gera cancelamento.</a:t>
+              <a:t>Use desconto manual para cortesias e correções, e acréscimo para diferenças de meses anteriores. Sempre com descrição clara e combinado com o cliente.</a:t>
             </a:r>
             <a:endParaRPr lang="en-US" dirty="0"/>
           </a:p>
@@ -3099,7 +3544,7 @@
           <a:p>
             <a:r>
               <a:rPr lang="en-US" dirty="0"/>
-              <a:t>Se a fatura que originou a cobrança foi corrigida, ou se a regra de desconto do cliente mudou antes do pagamento, a cobrança pode ser recalculada, para refletir os novos números. Faça isso sempre antes de emitir o Pix ou o boleto. Se o pagamento já tiver sido gerado, o recálculo exige cancelar e emitir de novo — por isso, a conferência no status de rascunho é tão importante.</a:t>
+              <a:t>Se a fatura ou o desconto mudou, recalcule antes de emitir o pagamento.</a:t>
             </a:r>
             <a:endParaRPr lang="en-US" dirty="0"/>
           </a:p>
@@ -3187,7 +3632,7 @@
           <a:p>
             <a:r>
               <a:rPr lang="en-US" dirty="0"/>
-              <a:t>Outra situação frequente: o cliente pede para mudar o vencimento — por exemplo, a empresa recebe dos clientes dela no dia quinze e prefere pagar depois disso. Na tela da cobrança, use editar vencimento e informe a nova data. Se já existe um boleto ou Pix ativo, a plataforma cancela o anterior no Mercado Pago e emite um novo com a data nova — o mesmo acontece se o valor mudar. Isso evita que o cliente pague um boleto com a data ou o valor errados. Depois, envie o novo boleto ao cliente.</a:t>
+              <a:t>Mudou o vencimento ou o valor, o boleto ativo é cancelado e reemitido automaticamente.</a:t>
             </a:r>
             <a:endParaRPr lang="en-US" dirty="0"/>
           </a:p>
@@ -6278,7 +6723,7 @@
         <p:spPr>
           <a:xfrm>
             <a:off x="822960" y="2286000"/>
-            <a:ext cx="2965704" cy="3749040"/>
+            <a:ext cx="2965704" cy="2286000"/>
           </a:xfrm>
           <a:prstGeom prst="rect">
             <a:avLst/>
@@ -6300,7 +6745,7 @@
               <a:buChar char="●"/>
             </a:pPr>
             <a:r>
-              <a:rPr lang="en-US" sz="1700" dirty="0">
+              <a:rPr lang="en-US" sz="1200" dirty="0">
                 <a:solidFill>
                   <a:srgbClr val="1F2937"/>
                 </a:solidFill>
@@ -6310,7 +6755,7 @@
               </a:rPr>
               <a:t>Pix: copia e cola · confirmação em minutos · padrão da plataforma</a:t>
             </a:r>
-            <a:endParaRPr lang="en-US" sz="1700" dirty="0"/>
+            <a:endParaRPr lang="en-US" sz="1200" dirty="0"/>
           </a:p>
           <a:p>
             <a:pPr marL="342900" indent="-342900">
@@ -6321,7 +6766,7 @@
               <a:buChar char="●"/>
             </a:pPr>
             <a:r>
-              <a:rPr lang="en-US" sz="1700" dirty="0">
+              <a:rPr lang="en-US" sz="1200" dirty="0">
                 <a:solidFill>
                   <a:srgbClr val="1F2937"/>
                 </a:solidFill>
@@ -6331,7 +6776,7 @@
               </a:rPr>
               <a:t>Boleto: linha digitável e PDF com código de barras · compensação em até 3 dias úteis · exige endereço completo do pagador</a:t>
             </a:r>
-            <a:endParaRPr lang="en-US" sz="1700" dirty="0"/>
+            <a:endParaRPr lang="en-US" sz="1200" dirty="0"/>
           </a:p>
           <a:p>
             <a:pPr marL="342900" indent="-342900">
@@ -6342,7 +6787,7 @@
               <a:buChar char="●"/>
             </a:pPr>
             <a:r>
-              <a:rPr lang="en-US" sz="1700" dirty="0">
+              <a:rPr lang="en-US" sz="1200" dirty="0">
                 <a:solidFill>
                   <a:srgbClr val="1F2937"/>
                 </a:solidFill>
@@ -6352,13 +6797,72 @@
               </a:rPr>
               <a:t>Um pedido = um método (Pix OU boleto)</a:t>
             </a:r>
-            <a:endParaRPr lang="en-US" sz="1700" dirty="0"/>
+            <a:endParaRPr lang="en-US" sz="1200" dirty="0"/>
           </a:p>
         </p:txBody>
       </p:sp>
       <p:sp>
         <p:nvSpPr>
           <p:cNvPr id="13" name="Shape 10"/>
+          <p:cNvSpPr/>
+          <p:nvPr/>
+        </p:nvSpPr>
+        <p:spPr>
+          <a:xfrm>
+            <a:off x="822960" y="4663440"/>
+            <a:ext cx="2965704" cy="18288"/>
+          </a:xfrm>
+          <a:prstGeom prst="rect">
+            <a:avLst/>
+          </a:prstGeom>
+          <a:solidFill>
+            <a:srgbClr val="D8E0EC"/>
+          </a:solidFill>
+          <a:ln/>
+        </p:spPr>
+      </p:sp>
+      <p:sp>
+        <p:nvSpPr>
+          <p:cNvPr id="14" name="Text 11"/>
+          <p:cNvSpPr/>
+          <p:nvPr/>
+        </p:nvSpPr>
+        <p:spPr>
+          <a:xfrm>
+            <a:off x="822960" y="4754880"/>
+            <a:ext cx="2965704" cy="1371600"/>
+          </a:xfrm>
+          <a:prstGeom prst="rect">
+            <a:avLst/>
+          </a:prstGeom>
+          <a:noFill/>
+          <a:ln/>
+        </p:spPr>
+        <p:txBody>
+          <a:bodyPr wrap="square" rtlCol="0" anchor="t"/>
+          <a:lstStyle/>
+          <a:p>
+            <a:pPr indent="0" marL="0">
+              <a:buNone/>
+            </a:pPr>
+            <a:r>
+              <a:rPr lang="en-US" sz="1300" i="1" dirty="0">
+                <a:solidFill>
+                  <a:srgbClr val="64748B"/>
+                </a:solidFill>
+                <a:latin typeface="Arial" pitchFamily="34" charset="0"/>
+                <a:ea typeface="Arial" pitchFamily="34" charset="-122"/>
+                <a:cs typeface="Arial" pitchFamily="34" charset="-120"/>
+              </a:rPr>
+              <a:t>O Pix é o padrão: confirma em minutos. O boleto exige endereço completo e leva até três dias úteis. Cada emissão é um método só.</a:t>
+            </a:r>
+            <a:endParaRPr lang="en-US" sz="1300" dirty="0"/>
+          </a:p>
+        </p:txBody>
+      </p:sp>
+      <p:sp>
+        <p:nvSpPr>
+          <p:cNvPr id="15" name="Shape 12"/>
           <p:cNvSpPr/>
           <p:nvPr/>
         </p:nvSpPr>
@@ -6392,7 +6896,7 @@
       </p:sp>
       <p:sp>
         <p:nvSpPr>
-          <p:cNvPr id="14" name="Shape 11"/>
+          <p:cNvPr id="16" name="Shape 13"/>
           <p:cNvSpPr/>
           <p:nvPr/>
         </p:nvSpPr>
@@ -6412,7 +6916,7 @@
       </p:sp>
       <p:sp>
         <p:nvSpPr>
-          <p:cNvPr id="15" name="Text 12"/>
+          <p:cNvPr id="17" name="Text 14"/>
           <p:cNvSpPr/>
           <p:nvPr/>
         </p:nvSpPr>
@@ -6453,14 +6957,14 @@
       </p:sp>
       <p:sp>
         <p:nvSpPr>
-          <p:cNvPr id="16" name="Text 13"/>
+          <p:cNvPr id="18" name="Text 15"/>
           <p:cNvSpPr/>
           <p:nvPr/>
         </p:nvSpPr>
         <p:spPr>
           <a:xfrm>
             <a:off x="4611624" y="2286000"/>
-            <a:ext cx="2965704" cy="3749040"/>
+            <a:ext cx="2965704" cy="2286000"/>
           </a:xfrm>
           <a:prstGeom prst="rect">
             <a:avLst/>
@@ -6540,7 +7044,66 @@
       </p:sp>
       <p:sp>
         <p:nvSpPr>
-          <p:cNvPr id="17" name="Shape 14"/>
+          <p:cNvPr id="19" name="Shape 16"/>
+          <p:cNvSpPr/>
+          <p:nvPr/>
+        </p:nvSpPr>
+        <p:spPr>
+          <a:xfrm>
+            <a:off x="4611624" y="4663440"/>
+            <a:ext cx="2965704" cy="18288"/>
+          </a:xfrm>
+          <a:prstGeom prst="rect">
+            <a:avLst/>
+          </a:prstGeom>
+          <a:solidFill>
+            <a:srgbClr val="D8E0EC"/>
+          </a:solidFill>
+          <a:ln/>
+        </p:spPr>
+      </p:sp>
+      <p:sp>
+        <p:nvSpPr>
+          <p:cNvPr id="20" name="Text 17"/>
+          <p:cNvSpPr/>
+          <p:nvPr/>
+        </p:nvSpPr>
+        <p:spPr>
+          <a:xfrm>
+            <a:off x="4611624" y="4754880"/>
+            <a:ext cx="2965704" cy="1371600"/>
+          </a:xfrm>
+          <a:prstGeom prst="rect">
+            <a:avLst/>
+          </a:prstGeom>
+          <a:noFill/>
+          <a:ln/>
+        </p:spPr>
+        <p:txBody>
+          <a:bodyPr wrap="square" rtlCol="0" anchor="t"/>
+          <a:lstStyle/>
+          <a:p>
+            <a:pPr indent="0" marL="0">
+              <a:buNone/>
+            </a:pPr>
+            <a:r>
+              <a:rPr lang="en-US" sz="1300" i="1" dirty="0">
+                <a:solidFill>
+                  <a:srgbClr val="64748B"/>
+                </a:solidFill>
+                <a:latin typeface="Arial" pitchFamily="34" charset="0"/>
+                <a:ea typeface="Arial" pitchFamily="34" charset="-122"/>
+                <a:cs typeface="Arial" pitchFamily="34" charset="-120"/>
+              </a:rPr>
+              <a:t>O vencimento real é o lido do código de barras, porque o banco joga datas de fim de semana para o dia útil seguinte.</a:t>
+            </a:r>
+            <a:endParaRPr lang="en-US" sz="1300" dirty="0"/>
+          </a:p>
+        </p:txBody>
+      </p:sp>
+      <p:sp>
+        <p:nvSpPr>
+          <p:cNvPr id="21" name="Shape 18"/>
           <p:cNvSpPr/>
           <p:nvPr/>
         </p:nvSpPr>
@@ -6574,7 +7137,7 @@
       </p:sp>
       <p:sp>
         <p:nvSpPr>
-          <p:cNvPr id="18" name="Shape 15"/>
+          <p:cNvPr id="22" name="Shape 19"/>
           <p:cNvSpPr/>
           <p:nvPr/>
         </p:nvSpPr>
@@ -6594,7 +7157,7 @@
       </p:sp>
       <p:sp>
         <p:nvSpPr>
-          <p:cNvPr id="19" name="Text 16"/>
+          <p:cNvPr id="23" name="Text 20"/>
           <p:cNvSpPr/>
           <p:nvPr/>
         </p:nvSpPr>
@@ -6635,14 +7198,53 @@
       </p:sp>
       <p:sp>
         <p:nvSpPr>
-          <p:cNvPr id="20" name="Text 17"/>
+          <p:cNvPr id="24" name="Text 21"/>
+          <p:cNvSpPr/>
+          <p:nvPr/>
+        </p:nvSpPr>
+        <p:spPr>
+          <a:xfrm>
+            <a:off x="8400288" y="4023360"/>
+            <a:ext cx="2965704" cy="2103120"/>
+          </a:xfrm>
+          <a:prstGeom prst="rect">
+            <a:avLst/>
+          </a:prstGeom>
+          <a:noFill/>
+          <a:ln/>
+        </p:spPr>
+        <p:txBody>
+          <a:bodyPr wrap="square" rtlCol="0" anchor="t"/>
+          <a:lstStyle/>
+          <a:p>
+            <a:pPr indent="0" marL="0">
+              <a:buNone/>
+            </a:pPr>
+            <a:r>
+              <a:rPr lang="en-US" sz="1300" i="1" dirty="0">
+                <a:solidFill>
+                  <a:srgbClr val="64748B"/>
+                </a:solidFill>
+                <a:latin typeface="Arial" pitchFamily="34" charset="0"/>
+                <a:ea typeface="Arial" pitchFamily="34" charset="-122"/>
+                <a:cs typeface="Arial" pitchFamily="34" charset="-120"/>
+              </a:rPr>
+              <a:t>A baixa chega por dois caminhos: o aviso do Mercado Pago, conferido pela plataforma, e uma sincronização a cada cinco minutos. Ninguém precisa conferir extrato.</a:t>
+            </a:r>
+            <a:endParaRPr lang="en-US" sz="1300" dirty="0"/>
+          </a:p>
+        </p:txBody>
+      </p:sp>
+      <p:sp>
+        <p:nvSpPr>
+          <p:cNvPr id="25" name="Text 22"/>
           <p:cNvSpPr/>
           <p:nvPr/>
         </p:nvSpPr>
         <p:spPr>
           <a:xfrm>
             <a:off x="8400288" y="2286000"/>
-            <a:ext cx="2965704" cy="3749040"/>
+            <a:ext cx="2965704" cy="1645920"/>
           </a:xfrm>
           <a:prstGeom prst="rect">
             <a:avLst/>
@@ -7085,7 +7687,7 @@
         <p:spPr>
           <a:xfrm>
             <a:off x="822960" y="2286000"/>
-            <a:ext cx="4860036" cy="3749040"/>
+            <a:ext cx="4860036" cy="2286000"/>
           </a:xfrm>
           <a:prstGeom prst="rect">
             <a:avLst/>
@@ -7107,7 +7709,7 @@
               <a:buChar char="●"/>
             </a:pPr>
             <a:r>
-              <a:rPr lang="en-US" sz="1700" dirty="0">
+              <a:rPr lang="en-US" sz="1600" dirty="0">
                 <a:solidFill>
                   <a:srgbClr val="1F2937"/>
                 </a:solidFill>
@@ -7117,7 +7719,7 @@
               </a:rPr>
               <a:t>Boleto vencido → marcado como vencido às 06:00 · PDF bloqueado · alerta ao consultor para reemitir · acompanhado por 10 dias</a:t>
             </a:r>
-            <a:endParaRPr lang="en-US" sz="1700" dirty="0"/>
+            <a:endParaRPr lang="en-US" sz="1600" dirty="0"/>
           </a:p>
           <a:p>
             <a:pPr marL="342900" indent="-342900">
@@ -7128,7 +7730,7 @@
               <a:buChar char="●"/>
             </a:pPr>
             <a:r>
-              <a:rPr lang="en-US" sz="1700" dirty="0">
+              <a:rPr lang="en-US" sz="1600" dirty="0">
                 <a:solidFill>
                   <a:srgbClr val="1F2937"/>
                 </a:solidFill>
@@ -7138,7 +7740,7 @@
               </a:rPr>
               <a:t>Cobrança cancelada ou paga manualmente → boleto cancelado no Mercado Pago</a:t>
             </a:r>
-            <a:endParaRPr lang="en-US" sz="1700" dirty="0"/>
+            <a:endParaRPr lang="en-US" sz="1600" dirty="0"/>
           </a:p>
           <a:p>
             <a:pPr marL="342900" indent="-342900">
@@ -7149,7 +7751,7 @@
               <a:buChar char="●"/>
             </a:pPr>
             <a:r>
-              <a:rPr lang="en-US" sz="1700" dirty="0">
+              <a:rPr lang="en-US" sz="1600" dirty="0">
                 <a:solidFill>
                   <a:srgbClr val="1F2937"/>
                 </a:solidFill>
@@ -7159,13 +7761,72 @@
               </a:rPr>
               <a:t>Estorno → registrado; cobrança segue paga; caso vai para revisão humana</a:t>
             </a:r>
-            <a:endParaRPr lang="en-US" sz="1700" dirty="0"/>
+            <a:endParaRPr lang="en-US" sz="1600" dirty="0"/>
           </a:p>
         </p:txBody>
       </p:sp>
       <p:sp>
         <p:nvSpPr>
           <p:cNvPr id="13" name="Shape 10"/>
+          <p:cNvSpPr/>
+          <p:nvPr/>
+        </p:nvSpPr>
+        <p:spPr>
+          <a:xfrm>
+            <a:off x="822960" y="4663440"/>
+            <a:ext cx="4860036" cy="18288"/>
+          </a:xfrm>
+          <a:prstGeom prst="rect">
+            <a:avLst/>
+          </a:prstGeom>
+          <a:solidFill>
+            <a:srgbClr val="D8E0EC"/>
+          </a:solidFill>
+          <a:ln/>
+        </p:spPr>
+      </p:sp>
+      <p:sp>
+        <p:nvSpPr>
+          <p:cNvPr id="14" name="Text 11"/>
+          <p:cNvSpPr/>
+          <p:nvPr/>
+        </p:nvSpPr>
+        <p:spPr>
+          <a:xfrm>
+            <a:off x="822960" y="4754880"/>
+            <a:ext cx="4860036" cy="1371600"/>
+          </a:xfrm>
+          <a:prstGeom prst="rect">
+            <a:avLst/>
+          </a:prstGeom>
+          <a:noFill/>
+          <a:ln/>
+        </p:spPr>
+        <p:txBody>
+          <a:bodyPr wrap="square" rtlCol="0" anchor="t"/>
+          <a:lstStyle/>
+          <a:p>
+            <a:pPr indent="0" marL="0">
+              <a:buNone/>
+            </a:pPr>
+            <a:r>
+              <a:rPr lang="en-US" sz="1300" i="1" dirty="0">
+                <a:solidFill>
+                  <a:srgbClr val="64748B"/>
+                </a:solidFill>
+                <a:latin typeface="Arial" pitchFamily="34" charset="0"/>
+                <a:ea typeface="Arial" pitchFamily="34" charset="-122"/>
+                <a:cs typeface="Arial" pitchFamily="34" charset="-120"/>
+              </a:rPr>
+              <a:t>Boleto vencido tem o PDF bloqueado e gera alerta para reemitir, mas continua monitorado por dez dias, porque um pagamento do último dia pode compensar depois. Estornos ficam registrados para revisão.</a:t>
+            </a:r>
+            <a:endParaRPr lang="en-US" sz="1300" dirty="0"/>
+          </a:p>
+        </p:txBody>
+      </p:sp>
+      <p:sp>
+        <p:nvSpPr>
+          <p:cNvPr id="15" name="Shape 12"/>
           <p:cNvSpPr/>
           <p:nvPr/>
         </p:nvSpPr>
@@ -7199,7 +7860,7 @@
       </p:sp>
       <p:sp>
         <p:nvSpPr>
-          <p:cNvPr id="14" name="Shape 11"/>
+          <p:cNvPr id="16" name="Shape 13"/>
           <p:cNvSpPr/>
           <p:nvPr/>
         </p:nvSpPr>
@@ -7219,7 +7880,7 @@
       </p:sp>
       <p:sp>
         <p:nvSpPr>
-          <p:cNvPr id="15" name="Text 12"/>
+          <p:cNvPr id="17" name="Text 14"/>
           <p:cNvSpPr/>
           <p:nvPr/>
         </p:nvSpPr>
@@ -7260,14 +7921,14 @@
       </p:sp>
       <p:sp>
         <p:nvSpPr>
-          <p:cNvPr id="16" name="Text 13"/>
+          <p:cNvPr id="18" name="Text 15"/>
           <p:cNvSpPr/>
           <p:nvPr/>
         </p:nvSpPr>
         <p:spPr>
           <a:xfrm>
             <a:off x="6505956" y="2286000"/>
-            <a:ext cx="4860036" cy="3749040"/>
+            <a:ext cx="4860036" cy="2286000"/>
           </a:xfrm>
           <a:prstGeom prst="rect">
             <a:avLst/>
@@ -7342,6 +8003,65 @@
               <a:t>credenciais criptografadas</a:t>
             </a:r>
             <a:endParaRPr lang="en-US" sz="1700" dirty="0"/>
+          </a:p>
+        </p:txBody>
+      </p:sp>
+      <p:sp>
+        <p:nvSpPr>
+          <p:cNvPr id="19" name="Shape 16"/>
+          <p:cNvSpPr/>
+          <p:nvPr/>
+        </p:nvSpPr>
+        <p:spPr>
+          <a:xfrm>
+            <a:off x="6505956" y="4663440"/>
+            <a:ext cx="4860036" cy="18288"/>
+          </a:xfrm>
+          <a:prstGeom prst="rect">
+            <a:avLst/>
+          </a:prstGeom>
+          <a:solidFill>
+            <a:srgbClr val="D8E0EC"/>
+          </a:solidFill>
+          <a:ln/>
+        </p:spPr>
+      </p:sp>
+      <p:sp>
+        <p:nvSpPr>
+          <p:cNvPr id="20" name="Text 17"/>
+          <p:cNvSpPr/>
+          <p:nvPr/>
+        </p:nvSpPr>
+        <p:spPr>
+          <a:xfrm>
+            <a:off x="6505956" y="4754880"/>
+            <a:ext cx="4860036" cy="1371600"/>
+          </a:xfrm>
+          <a:prstGeom prst="rect">
+            <a:avLst/>
+          </a:prstGeom>
+          <a:noFill/>
+          <a:ln/>
+        </p:spPr>
+        <p:txBody>
+          <a:bodyPr wrap="square" rtlCol="0" anchor="t"/>
+          <a:lstStyle/>
+          <a:p>
+            <a:pPr indent="0" marL="0">
+              <a:buNone/>
+            </a:pPr>
+            <a:r>
+              <a:rPr lang="en-US" sz="1300" i="1" dirty="0">
+                <a:solidFill>
+                  <a:srgbClr val="64748B"/>
+                </a:solidFill>
+                <a:latin typeface="Arial" pitchFamily="34" charset="0"/>
+                <a:ea typeface="Arial" pitchFamily="34" charset="-122"/>
+                <a:cs typeface="Arial" pitchFamily="34" charset="-120"/>
+              </a:rPr>
+              <a:t>As tarifas do meio de pagamento entram no custo variável da sua conta.</a:t>
+            </a:r>
+            <a:endParaRPr lang="en-US" sz="1300" dirty="0"/>
           </a:p>
         </p:txBody>
       </p:sp>
@@ -8947,11 +9667,11 @@
         <p:spPr>
           <a:xfrm>
             <a:off x="548640" y="1325880"/>
-            <a:ext cx="3544824" cy="2331720"/>
+            <a:ext cx="3544824" cy="1874520"/>
           </a:xfrm>
           <a:prstGeom prst="roundRect">
             <a:avLst>
-              <a:gd name="adj" fmla="val 3137"/>
+              <a:gd name="adj" fmla="val 3902"/>
             </a:avLst>
           </a:prstGeom>
           <a:solidFill>
@@ -9040,7 +9760,7 @@
         <p:spPr>
           <a:xfrm>
             <a:off x="1325880" y="1435608"/>
-            <a:ext cx="2630424" cy="2112264"/>
+            <a:ext cx="2630424" cy="1655064"/>
           </a:xfrm>
           <a:prstGeom prst="rect">
             <a:avLst/>
@@ -9081,11 +9801,11 @@
         <p:spPr>
           <a:xfrm>
             <a:off x="4322064" y="1325880"/>
-            <a:ext cx="3544824" cy="2331720"/>
+            <a:ext cx="3544824" cy="1874520"/>
           </a:xfrm>
           <a:prstGeom prst="roundRect">
             <a:avLst>
-              <a:gd name="adj" fmla="val 3137"/>
+              <a:gd name="adj" fmla="val 3902"/>
             </a:avLst>
           </a:prstGeom>
           <a:solidFill>
@@ -9174,7 +9894,7 @@
         <p:spPr>
           <a:xfrm>
             <a:off x="5099304" y="1435608"/>
-            <a:ext cx="2630424" cy="2112264"/>
+            <a:ext cx="2630424" cy="1655064"/>
           </a:xfrm>
           <a:prstGeom prst="rect">
             <a:avLst/>
@@ -9215,11 +9935,11 @@
         <p:spPr>
           <a:xfrm>
             <a:off x="8095488" y="1325880"/>
-            <a:ext cx="3544824" cy="2331720"/>
+            <a:ext cx="3544824" cy="1874520"/>
           </a:xfrm>
           <a:prstGeom prst="roundRect">
             <a:avLst>
-              <a:gd name="adj" fmla="val 3137"/>
+              <a:gd name="adj" fmla="val 3902"/>
             </a:avLst>
           </a:prstGeom>
           <a:solidFill>
@@ -9308,7 +10028,7 @@
         <p:spPr>
           <a:xfrm>
             <a:off x="8872728" y="1435608"/>
-            <a:ext cx="2630424" cy="2112264"/>
+            <a:ext cx="2630424" cy="1655064"/>
           </a:xfrm>
           <a:prstGeom prst="rect">
             <a:avLst/>
@@ -9348,12 +10068,12 @@
         </p:nvSpPr>
         <p:spPr>
           <a:xfrm>
-            <a:off x="548640" y="3886200"/>
-            <a:ext cx="3544824" cy="2331720"/>
+            <a:off x="548640" y="3429000"/>
+            <a:ext cx="3544824" cy="1874520"/>
           </a:xfrm>
           <a:prstGeom prst="roundRect">
             <a:avLst>
-              <a:gd name="adj" fmla="val 3137"/>
+              <a:gd name="adj" fmla="val 3902"/>
             </a:avLst>
           </a:prstGeom>
           <a:solidFill>
@@ -9382,7 +10102,7 @@
         </p:nvSpPr>
         <p:spPr>
           <a:xfrm>
-            <a:off x="731520" y="4069080"/>
+            <a:off x="731520" y="3611880"/>
             <a:ext cx="457200" cy="457200"/>
           </a:xfrm>
           <a:prstGeom prst="ellipse">
@@ -9402,7 +10122,7 @@
         </p:nvSpPr>
         <p:spPr>
           <a:xfrm>
-            <a:off x="731520" y="4069080"/>
+            <a:off x="731520" y="3611880"/>
             <a:ext cx="457200" cy="457200"/>
           </a:xfrm>
           <a:prstGeom prst="rect">
@@ -9441,8 +10161,8 @@
         </p:nvSpPr>
         <p:spPr>
           <a:xfrm>
-            <a:off x="1325880" y="3995928"/>
-            <a:ext cx="2630424" cy="2112264"/>
+            <a:off x="1325880" y="3538728"/>
+            <a:ext cx="2630424" cy="1655064"/>
           </a:xfrm>
           <a:prstGeom prst="rect">
             <a:avLst/>
@@ -9482,12 +10202,12 @@
         </p:nvSpPr>
         <p:spPr>
           <a:xfrm>
-            <a:off x="4322064" y="3886200"/>
-            <a:ext cx="3544824" cy="2331720"/>
+            <a:off x="4322064" y="3429000"/>
+            <a:ext cx="3544824" cy="1874520"/>
           </a:xfrm>
           <a:prstGeom prst="roundRect">
             <a:avLst>
-              <a:gd name="adj" fmla="val 3137"/>
+              <a:gd name="adj" fmla="val 3902"/>
             </a:avLst>
           </a:prstGeom>
           <a:solidFill>
@@ -9516,7 +10236,7 @@
         </p:nvSpPr>
         <p:spPr>
           <a:xfrm>
-            <a:off x="4504944" y="4069080"/>
+            <a:off x="4504944" y="3611880"/>
             <a:ext cx="457200" cy="457200"/>
           </a:xfrm>
           <a:prstGeom prst="ellipse">
@@ -9536,7 +10256,7 @@
         </p:nvSpPr>
         <p:spPr>
           <a:xfrm>
-            <a:off x="4504944" y="4069080"/>
+            <a:off x="4504944" y="3611880"/>
             <a:ext cx="457200" cy="457200"/>
           </a:xfrm>
           <a:prstGeom prst="rect">
@@ -9575,8 +10295,8 @@
         </p:nvSpPr>
         <p:spPr>
           <a:xfrm>
-            <a:off x="5099304" y="3995928"/>
-            <a:ext cx="2630424" cy="2112264"/>
+            <a:off x="5099304" y="3538728"/>
+            <a:ext cx="2630424" cy="1655064"/>
           </a:xfrm>
           <a:prstGeom prst="rect">
             <a:avLst/>
@@ -9616,12 +10336,12 @@
         </p:nvSpPr>
         <p:spPr>
           <a:xfrm>
-            <a:off x="8095488" y="3886200"/>
-            <a:ext cx="3544824" cy="2331720"/>
+            <a:off x="8095488" y="3429000"/>
+            <a:ext cx="3544824" cy="1874520"/>
           </a:xfrm>
           <a:prstGeom prst="roundRect">
             <a:avLst>
-              <a:gd name="adj" fmla="val 3137"/>
+              <a:gd name="adj" fmla="val 3902"/>
             </a:avLst>
           </a:prstGeom>
           <a:solidFill>
@@ -9650,7 +10370,7 @@
         </p:nvSpPr>
         <p:spPr>
           <a:xfrm>
-            <a:off x="8278368" y="4069080"/>
+            <a:off x="8278368" y="3611880"/>
             <a:ext cx="457200" cy="457200"/>
           </a:xfrm>
           <a:prstGeom prst="ellipse">
@@ -9670,7 +10390,7 @@
         </p:nvSpPr>
         <p:spPr>
           <a:xfrm>
-            <a:off x="8278368" y="4069080"/>
+            <a:off x="8278368" y="3611880"/>
             <a:ext cx="457200" cy="457200"/>
           </a:xfrm>
           <a:prstGeom prst="rect">
@@ -9709,8 +10429,8 @@
         </p:nvSpPr>
         <p:spPr>
           <a:xfrm>
-            <a:off x="8872728" y="3995928"/>
-            <a:ext cx="2630424" cy="2112264"/>
+            <a:off x="8872728" y="3538728"/>
+            <a:ext cx="2630424" cy="1655064"/>
           </a:xfrm>
           <a:prstGeom prst="rect">
             <a:avLst/>
@@ -9739,6 +10459,92 @@
               <a:t>D+30: medidas contratuais (aviso formal, suspensão da participação)</a:t>
             </a:r>
             <a:endParaRPr lang="en-US" sz="1800" dirty="0"/>
+          </a:p>
+        </p:txBody>
+      </p:sp>
+      <p:sp>
+        <p:nvSpPr>
+          <p:cNvPr id="33" name="Shape 30"/>
+          <p:cNvSpPr/>
+          <p:nvPr/>
+        </p:nvSpPr>
+        <p:spPr>
+          <a:xfrm>
+            <a:off x="548640" y="5413248"/>
+            <a:ext cx="11091672" cy="868680"/>
+          </a:xfrm>
+          <a:prstGeom prst="roundRect">
+            <a:avLst>
+              <a:gd name="adj" fmla="val 8421"/>
+            </a:avLst>
+          </a:prstGeom>
+          <a:solidFill>
+            <a:srgbClr val="EEF3FA"/>
+          </a:solidFill>
+          <a:ln w="6350">
+            <a:solidFill>
+              <a:srgbClr val="D8E0EC"/>
+            </a:solidFill>
+            <a:prstDash val="solid"/>
+          </a:ln>
+        </p:spPr>
+      </p:sp>
+      <p:sp>
+        <p:nvSpPr>
+          <p:cNvPr id="34" name="Shape 31"/>
+          <p:cNvSpPr/>
+          <p:nvPr/>
+        </p:nvSpPr>
+        <p:spPr>
+          <a:xfrm>
+            <a:off x="548640" y="5413248"/>
+            <a:ext cx="91440" cy="868680"/>
+          </a:xfrm>
+          <a:prstGeom prst="rect">
+            <a:avLst/>
+          </a:prstGeom>
+          <a:solidFill>
+            <a:srgbClr val="F7A23B"/>
+          </a:solidFill>
+          <a:ln/>
+        </p:spPr>
+      </p:sp>
+      <p:sp>
+        <p:nvSpPr>
+          <p:cNvPr id="35" name="Text 32"/>
+          <p:cNvSpPr/>
+          <p:nvPr/>
+        </p:nvSpPr>
+        <p:spPr>
+          <a:xfrm>
+            <a:off x="777240" y="5458968"/>
+            <a:ext cx="10744200" cy="777240"/>
+          </a:xfrm>
+          <a:prstGeom prst="rect">
+            <a:avLst/>
+          </a:prstGeom>
+          <a:noFill/>
+          <a:ln/>
+        </p:spPr>
+        <p:txBody>
+          <a:bodyPr wrap="square" rtlCol="0" anchor="ctr"/>
+          <a:lstStyle/>
+          <a:p>
+            <a:pPr indent="0" marL="0">
+              <a:buNone/>
+            </a:pPr>
+            <a:r>
+              <a:rPr lang="en-US" sz="1500" dirty="0">
+                <a:solidFill>
+                  <a:srgbClr val="1F2937"/>
+                </a:solidFill>
+                <a:latin typeface="Arial" pitchFamily="34" charset="0"/>
+                <a:ea typeface="Arial" pitchFamily="34" charset="-122"/>
+                <a:cs typeface="Arial" pitchFamily="34" charset="-120"/>
+              </a:rPr>
+              <a:t>A régua combina automação e contato humano: lembrete três dias antes, marcação de vencida, alertas ao consultor a cada cinco dias, contato pessoal e, depois de trinta dias, as medidas do contrato.</a:t>
+            </a:r>
+            <a:endParaRPr lang="en-US" sz="1500" dirty="0"/>
           </a:p>
         </p:txBody>
       </p:sp>
@@ -10153,7 +10959,7 @@
         <p:spPr>
           <a:xfrm>
             <a:off x="822960" y="2286000"/>
-            <a:ext cx="4860036" cy="3749040"/>
+            <a:ext cx="4860036" cy="2286000"/>
           </a:xfrm>
           <a:prstGeom prst="rect">
             <a:avLst/>
@@ -10234,6 +11040,65 @@
       <p:sp>
         <p:nvSpPr>
           <p:cNvPr id="13" name="Shape 10"/>
+          <p:cNvSpPr/>
+          <p:nvPr/>
+        </p:nvSpPr>
+        <p:spPr>
+          <a:xfrm>
+            <a:off x="822960" y="4663440"/>
+            <a:ext cx="4860036" cy="18288"/>
+          </a:xfrm>
+          <a:prstGeom prst="rect">
+            <a:avLst/>
+          </a:prstGeom>
+          <a:solidFill>
+            <a:srgbClr val="D8E0EC"/>
+          </a:solidFill>
+          <a:ln/>
+        </p:spPr>
+      </p:sp>
+      <p:sp>
+        <p:nvSpPr>
+          <p:cNvPr id="14" name="Text 11"/>
+          <p:cNvSpPr/>
+          <p:nvPr/>
+        </p:nvSpPr>
+        <p:spPr>
+          <a:xfrm>
+            <a:off x="822960" y="4754880"/>
+            <a:ext cx="4860036" cy="1371600"/>
+          </a:xfrm>
+          <a:prstGeom prst="rect">
+            <a:avLst/>
+          </a:prstGeom>
+          <a:noFill/>
+          <a:ln/>
+        </p:spPr>
+        <p:txBody>
+          <a:bodyPr wrap="square" rtlCol="0" anchor="t"/>
+          <a:lstStyle/>
+          <a:p>
+            <a:pPr indent="0" marL="0">
+              <a:buNone/>
+            </a:pPr>
+            <a:r>
+              <a:rPr lang="en-US" sz="1300" i="1" dirty="0">
+                <a:solidFill>
+                  <a:srgbClr val="64748B"/>
+                </a:solidFill>
+                <a:latin typeface="Arial" pitchFamily="34" charset="0"/>
+                <a:ea typeface="Arial" pitchFamily="34" charset="-122"/>
+                <a:cs typeface="Arial" pitchFamily="34" charset="-120"/>
+              </a:rPr>
+              <a:t>O tom muda com o atraso. No atraso leve, pergunte em vez de acusar: muitas vezes o cliente não entendeu as duas contas.</a:t>
+            </a:r>
+            <a:endParaRPr lang="en-US" sz="1300" dirty="0"/>
+          </a:p>
+        </p:txBody>
+      </p:sp>
+      <p:sp>
+        <p:nvSpPr>
+          <p:cNvPr id="15" name="Shape 12"/>
           <p:cNvSpPr/>
           <p:nvPr/>
         </p:nvSpPr>
@@ -10267,7 +11132,7 @@
       </p:sp>
       <p:sp>
         <p:nvSpPr>
-          <p:cNvPr id="14" name="Shape 11"/>
+          <p:cNvPr id="16" name="Shape 13"/>
           <p:cNvSpPr/>
           <p:nvPr/>
         </p:nvSpPr>
@@ -10287,7 +11152,7 @@
       </p:sp>
       <p:sp>
         <p:nvSpPr>
-          <p:cNvPr id="15" name="Text 12"/>
+          <p:cNvPr id="17" name="Text 14"/>
           <p:cNvSpPr/>
           <p:nvPr/>
         </p:nvSpPr>
@@ -10328,14 +11193,14 @@
       </p:sp>
       <p:sp>
         <p:nvSpPr>
-          <p:cNvPr id="16" name="Text 13"/>
+          <p:cNvPr id="18" name="Text 15"/>
           <p:cNvSpPr/>
           <p:nvPr/>
         </p:nvSpPr>
         <p:spPr>
           <a:xfrm>
             <a:off x="6505956" y="2286000"/>
-            <a:ext cx="4860036" cy="3749040"/>
+            <a:ext cx="4860036" cy="2286000"/>
           </a:xfrm>
           <a:prstGeom prst="rect">
             <a:avLst/>
@@ -10410,6 +11275,65 @@
               <a:t>nunca 'perdoar' sem registro</a:t>
             </a:r>
             <a:endParaRPr lang="en-US" sz="1700" dirty="0"/>
+          </a:p>
+        </p:txBody>
+      </p:sp>
+      <p:sp>
+        <p:nvSpPr>
+          <p:cNvPr id="19" name="Shape 16"/>
+          <p:cNvSpPr/>
+          <p:nvPr/>
+        </p:nvSpPr>
+        <p:spPr>
+          <a:xfrm>
+            <a:off x="6505956" y="4663440"/>
+            <a:ext cx="4860036" cy="18288"/>
+          </a:xfrm>
+          <a:prstGeom prst="rect">
+            <a:avLst/>
+          </a:prstGeom>
+          <a:solidFill>
+            <a:srgbClr val="D8E0EC"/>
+          </a:solidFill>
+          <a:ln/>
+        </p:spPr>
+      </p:sp>
+      <p:sp>
+        <p:nvSpPr>
+          <p:cNvPr id="20" name="Text 17"/>
+          <p:cNvSpPr/>
+          <p:nvPr/>
+        </p:nvSpPr>
+        <p:spPr>
+          <a:xfrm>
+            <a:off x="6505956" y="4754880"/>
+            <a:ext cx="4860036" cy="1371600"/>
+          </a:xfrm>
+          <a:prstGeom prst="rect">
+            <a:avLst/>
+          </a:prstGeom>
+          <a:noFill/>
+          <a:ln/>
+        </p:spPr>
+        <p:txBody>
+          <a:bodyPr wrap="square" rtlCol="0" anchor="t"/>
+          <a:lstStyle/>
+          <a:p>
+            <a:pPr indent="0" marL="0">
+              <a:buNone/>
+            </a:pPr>
+            <a:r>
+              <a:rPr lang="en-US" sz="1300" i="1" dirty="0">
+                <a:solidFill>
+                  <a:srgbClr val="64748B"/>
+                </a:solidFill>
+                <a:latin typeface="Arial" pitchFamily="34" charset="0"/>
+                <a:ea typeface="Arial" pitchFamily="34" charset="-122"/>
+                <a:cs typeface="Arial" pitchFamily="34" charset="-120"/>
+              </a:rPr>
+              <a:t>Multa e juros só dentro da lei e do contrato. Acordos sempre registrados, nunca de boca.</a:t>
+            </a:r>
+            <a:endParaRPr lang="en-US" sz="1300" dirty="0"/>
           </a:p>
         </p:txBody>
       </p:sp>
@@ -10729,11 +11653,11 @@
         <p:spPr>
           <a:xfrm>
             <a:off x="548640" y="1325880"/>
-            <a:ext cx="3544824" cy="2331720"/>
+            <a:ext cx="3544824" cy="1874520"/>
           </a:xfrm>
           <a:prstGeom prst="roundRect">
             <a:avLst>
-              <a:gd name="adj" fmla="val 3137"/>
+              <a:gd name="adj" fmla="val 3902"/>
             </a:avLst>
           </a:prstGeom>
           <a:solidFill>
@@ -10822,7 +11746,7 @@
         <p:spPr>
           <a:xfrm>
             <a:off x="1325880" y="1435608"/>
-            <a:ext cx="2630424" cy="2112264"/>
+            <a:ext cx="2630424" cy="1655064"/>
           </a:xfrm>
           <a:prstGeom prst="rect">
             <a:avLst/>
@@ -10863,11 +11787,11 @@
         <p:spPr>
           <a:xfrm>
             <a:off x="4322064" y="1325880"/>
-            <a:ext cx="3544824" cy="2331720"/>
+            <a:ext cx="3544824" cy="1874520"/>
           </a:xfrm>
           <a:prstGeom prst="roundRect">
             <a:avLst>
-              <a:gd name="adj" fmla="val 3137"/>
+              <a:gd name="adj" fmla="val 3902"/>
             </a:avLst>
           </a:prstGeom>
           <a:solidFill>
@@ -10956,7 +11880,7 @@
         <p:spPr>
           <a:xfrm>
             <a:off x="5099304" y="1435608"/>
-            <a:ext cx="2630424" cy="2112264"/>
+            <a:ext cx="2630424" cy="1655064"/>
           </a:xfrm>
           <a:prstGeom prst="rect">
             <a:avLst/>
@@ -10997,11 +11921,11 @@
         <p:spPr>
           <a:xfrm>
             <a:off x="8095488" y="1325880"/>
-            <a:ext cx="3544824" cy="2331720"/>
+            <a:ext cx="3544824" cy="1874520"/>
           </a:xfrm>
           <a:prstGeom prst="roundRect">
             <a:avLst>
-              <a:gd name="adj" fmla="val 3137"/>
+              <a:gd name="adj" fmla="val 3902"/>
             </a:avLst>
           </a:prstGeom>
           <a:solidFill>
@@ -11090,7 +12014,7 @@
         <p:spPr>
           <a:xfrm>
             <a:off x="8872728" y="1435608"/>
-            <a:ext cx="2630424" cy="2112264"/>
+            <a:ext cx="2630424" cy="1655064"/>
           </a:xfrm>
           <a:prstGeom prst="rect">
             <a:avLst/>
@@ -11130,12 +12054,12 @@
         </p:nvSpPr>
         <p:spPr>
           <a:xfrm>
-            <a:off x="548640" y="3886200"/>
-            <a:ext cx="3544824" cy="2331720"/>
+            <a:off x="548640" y="3429000"/>
+            <a:ext cx="3544824" cy="1874520"/>
           </a:xfrm>
           <a:prstGeom prst="roundRect">
             <a:avLst>
-              <a:gd name="adj" fmla="val 3137"/>
+              <a:gd name="adj" fmla="val 3902"/>
             </a:avLst>
           </a:prstGeom>
           <a:solidFill>
@@ -11164,7 +12088,7 @@
         </p:nvSpPr>
         <p:spPr>
           <a:xfrm>
-            <a:off x="731520" y="4069080"/>
+            <a:off x="731520" y="3611880"/>
             <a:ext cx="457200" cy="457200"/>
           </a:xfrm>
           <a:prstGeom prst="ellipse">
@@ -11184,7 +12108,7 @@
         </p:nvSpPr>
         <p:spPr>
           <a:xfrm>
-            <a:off x="731520" y="4069080"/>
+            <a:off x="731520" y="3611880"/>
             <a:ext cx="457200" cy="457200"/>
           </a:xfrm>
           <a:prstGeom prst="rect">
@@ -11223,8 +12147,8 @@
         </p:nvSpPr>
         <p:spPr>
           <a:xfrm>
-            <a:off x="1325880" y="3995928"/>
-            <a:ext cx="2630424" cy="2112264"/>
+            <a:off x="1325880" y="3538728"/>
+            <a:ext cx="2630424" cy="1655064"/>
           </a:xfrm>
           <a:prstGeom prst="rect">
             <a:avLst/>
@@ -11264,12 +12188,12 @@
         </p:nvSpPr>
         <p:spPr>
           <a:xfrm>
-            <a:off x="4322064" y="3886200"/>
-            <a:ext cx="3544824" cy="2331720"/>
+            <a:off x="4322064" y="3429000"/>
+            <a:ext cx="3544824" cy="1874520"/>
           </a:xfrm>
           <a:prstGeom prst="roundRect">
             <a:avLst>
-              <a:gd name="adj" fmla="val 3137"/>
+              <a:gd name="adj" fmla="val 3902"/>
             </a:avLst>
           </a:prstGeom>
           <a:solidFill>
@@ -11298,7 +12222,7 @@
         </p:nvSpPr>
         <p:spPr>
           <a:xfrm>
-            <a:off x="4504944" y="4069080"/>
+            <a:off x="4504944" y="3611880"/>
             <a:ext cx="457200" cy="457200"/>
           </a:xfrm>
           <a:prstGeom prst="ellipse">
@@ -11318,7 +12242,7 @@
         </p:nvSpPr>
         <p:spPr>
           <a:xfrm>
-            <a:off x="4504944" y="4069080"/>
+            <a:off x="4504944" y="3611880"/>
             <a:ext cx="457200" cy="457200"/>
           </a:xfrm>
           <a:prstGeom prst="rect">
@@ -11357,8 +12281,8 @@
         </p:nvSpPr>
         <p:spPr>
           <a:xfrm>
-            <a:off x="5099304" y="3995928"/>
-            <a:ext cx="2630424" cy="2112264"/>
+            <a:off x="5099304" y="3538728"/>
+            <a:ext cx="2630424" cy="1655064"/>
           </a:xfrm>
           <a:prstGeom prst="rect">
             <a:avLst/>
@@ -11398,12 +12322,12 @@
         </p:nvSpPr>
         <p:spPr>
           <a:xfrm>
-            <a:off x="8095488" y="3886200"/>
-            <a:ext cx="3544824" cy="2331720"/>
+            <a:off x="8095488" y="3429000"/>
+            <a:ext cx="3544824" cy="1874520"/>
           </a:xfrm>
           <a:prstGeom prst="roundRect">
             <a:avLst>
-              <a:gd name="adj" fmla="val 3137"/>
+              <a:gd name="adj" fmla="val 3902"/>
             </a:avLst>
           </a:prstGeom>
           <a:solidFill>
@@ -11432,7 +12356,7 @@
         </p:nvSpPr>
         <p:spPr>
           <a:xfrm>
-            <a:off x="8278368" y="4069080"/>
+            <a:off x="8278368" y="3611880"/>
             <a:ext cx="457200" cy="457200"/>
           </a:xfrm>
           <a:prstGeom prst="ellipse">
@@ -11452,7 +12376,7 @@
         </p:nvSpPr>
         <p:spPr>
           <a:xfrm>
-            <a:off x="8278368" y="4069080"/>
+            <a:off x="8278368" y="3611880"/>
             <a:ext cx="457200" cy="457200"/>
           </a:xfrm>
           <a:prstGeom prst="rect">
@@ -11491,8 +12415,8 @@
         </p:nvSpPr>
         <p:spPr>
           <a:xfrm>
-            <a:off x="8872728" y="3995928"/>
-            <a:ext cx="2630424" cy="2112264"/>
+            <a:off x="8872728" y="3538728"/>
+            <a:ext cx="2630424" cy="1655064"/>
           </a:xfrm>
           <a:prstGeom prst="rect">
             <a:avLst/>
@@ -11521,6 +12445,92 @@
               <a:t>análise na entrada</a:t>
             </a:r>
             <a:endParaRPr lang="en-US" sz="1800" dirty="0"/>
+          </a:p>
+        </p:txBody>
+      </p:sp>
+      <p:sp>
+        <p:nvSpPr>
+          <p:cNvPr id="33" name="Shape 30"/>
+          <p:cNvSpPr/>
+          <p:nvPr/>
+        </p:nvSpPr>
+        <p:spPr>
+          <a:xfrm>
+            <a:off x="548640" y="5413248"/>
+            <a:ext cx="11091672" cy="868680"/>
+          </a:xfrm>
+          <a:prstGeom prst="roundRect">
+            <a:avLst>
+              <a:gd name="adj" fmla="val 8421"/>
+            </a:avLst>
+          </a:prstGeom>
+          <a:solidFill>
+            <a:srgbClr val="EEF3FA"/>
+          </a:solidFill>
+          <a:ln w="6350">
+            <a:solidFill>
+              <a:srgbClr val="D8E0EC"/>
+            </a:solidFill>
+            <a:prstDash val="solid"/>
+          </a:ln>
+        </p:spPr>
+      </p:sp>
+      <p:sp>
+        <p:nvSpPr>
+          <p:cNvPr id="34" name="Shape 31"/>
+          <p:cNvSpPr/>
+          <p:nvPr/>
+        </p:nvSpPr>
+        <p:spPr>
+          <a:xfrm>
+            <a:off x="548640" y="5413248"/>
+            <a:ext cx="91440" cy="868680"/>
+          </a:xfrm>
+          <a:prstGeom prst="rect">
+            <a:avLst/>
+          </a:prstGeom>
+          <a:solidFill>
+            <a:srgbClr val="F7A23B"/>
+          </a:solidFill>
+          <a:ln/>
+        </p:spPr>
+      </p:sp>
+      <p:sp>
+        <p:nvSpPr>
+          <p:cNvPr id="35" name="Text 32"/>
+          <p:cNvSpPr/>
+          <p:nvPr/>
+        </p:nvSpPr>
+        <p:spPr>
+          <a:xfrm>
+            <a:off x="777240" y="5458968"/>
+            <a:ext cx="10744200" cy="777240"/>
+          </a:xfrm>
+          <a:prstGeom prst="rect">
+            <a:avLst/>
+          </a:prstGeom>
+          <a:noFill/>
+          <a:ln/>
+        </p:spPr>
+        <p:txBody>
+          <a:bodyPr wrap="square" rtlCol="0" anchor="ctr"/>
+          <a:lstStyle/>
+          <a:p>
+            <a:pPr indent="0" marL="0">
+              <a:buNone/>
+            </a:pPr>
+            <a:r>
+              <a:rPr lang="en-US" sz="1500" dirty="0">
+                <a:solidFill>
+                  <a:srgbClr val="1F2937"/>
+                </a:solidFill>
+                <a:latin typeface="Arial" pitchFamily="34" charset="0"/>
+                <a:ea typeface="Arial" pitchFamily="34" charset="-122"/>
+                <a:cs typeface="Arial" pitchFamily="34" charset="-120"/>
+              </a:rPr>
+              <a:t>A melhor cobrança é a que não precisa acontecer. As práticas da tela reduzem muito a inadimplência.</a:t>
+            </a:r>
+            <a:endParaRPr lang="en-US" sz="1500" dirty="0"/>
           </a:p>
         </p:txBody>
       </p:sp>
@@ -12262,11 +13272,11 @@
         <p:spPr>
           <a:xfrm>
             <a:off x="548640" y="1325880"/>
-            <a:ext cx="3544824" cy="2331720"/>
+            <a:ext cx="3544824" cy="1874520"/>
           </a:xfrm>
           <a:prstGeom prst="roundRect">
             <a:avLst>
-              <a:gd name="adj" fmla="val 3137"/>
+              <a:gd name="adj" fmla="val 3902"/>
             </a:avLst>
           </a:prstGeom>
           <a:solidFill>
@@ -12355,7 +13365,7 @@
         <p:spPr>
           <a:xfrm>
             <a:off x="1325880" y="1435608"/>
-            <a:ext cx="2630424" cy="2112264"/>
+            <a:ext cx="2630424" cy="1655064"/>
           </a:xfrm>
           <a:prstGeom prst="rect">
             <a:avLst/>
@@ -12396,11 +13406,11 @@
         <p:spPr>
           <a:xfrm>
             <a:off x="4322064" y="1325880"/>
-            <a:ext cx="3544824" cy="2331720"/>
+            <a:ext cx="3544824" cy="1874520"/>
           </a:xfrm>
           <a:prstGeom prst="roundRect">
             <a:avLst>
-              <a:gd name="adj" fmla="val 3137"/>
+              <a:gd name="adj" fmla="val 3902"/>
             </a:avLst>
           </a:prstGeom>
           <a:solidFill>
@@ -12489,7 +13499,7 @@
         <p:spPr>
           <a:xfrm>
             <a:off x="5099304" y="1435608"/>
-            <a:ext cx="2630424" cy="2112264"/>
+            <a:ext cx="2630424" cy="1655064"/>
           </a:xfrm>
           <a:prstGeom prst="rect">
             <a:avLst/>
@@ -12530,11 +13540,11 @@
         <p:spPr>
           <a:xfrm>
             <a:off x="8095488" y="1325880"/>
-            <a:ext cx="3544824" cy="2331720"/>
+            <a:ext cx="3544824" cy="1874520"/>
           </a:xfrm>
           <a:prstGeom prst="roundRect">
             <a:avLst>
-              <a:gd name="adj" fmla="val 3137"/>
+              <a:gd name="adj" fmla="val 3902"/>
             </a:avLst>
           </a:prstGeom>
           <a:solidFill>
@@ -12623,7 +13633,7 @@
         <p:spPr>
           <a:xfrm>
             <a:off x="8872728" y="1435608"/>
-            <a:ext cx="2630424" cy="2112264"/>
+            <a:ext cx="2630424" cy="1655064"/>
           </a:xfrm>
           <a:prstGeom prst="rect">
             <a:avLst/>
@@ -12663,12 +13673,12 @@
         </p:nvSpPr>
         <p:spPr>
           <a:xfrm>
-            <a:off x="548640" y="3886200"/>
-            <a:ext cx="3544824" cy="2331720"/>
+            <a:off x="548640" y="3429000"/>
+            <a:ext cx="3544824" cy="1874520"/>
           </a:xfrm>
           <a:prstGeom prst="roundRect">
             <a:avLst>
-              <a:gd name="adj" fmla="val 3137"/>
+              <a:gd name="adj" fmla="val 3902"/>
             </a:avLst>
           </a:prstGeom>
           <a:solidFill>
@@ -12697,7 +13707,7 @@
         </p:nvSpPr>
         <p:spPr>
           <a:xfrm>
-            <a:off x="731520" y="4069080"/>
+            <a:off x="731520" y="3611880"/>
             <a:ext cx="457200" cy="457200"/>
           </a:xfrm>
           <a:prstGeom prst="ellipse">
@@ -12717,7 +13727,7 @@
         </p:nvSpPr>
         <p:spPr>
           <a:xfrm>
-            <a:off x="731520" y="4069080"/>
+            <a:off x="731520" y="3611880"/>
             <a:ext cx="457200" cy="457200"/>
           </a:xfrm>
           <a:prstGeom prst="rect">
@@ -12756,8 +13766,8 @@
         </p:nvSpPr>
         <p:spPr>
           <a:xfrm>
-            <a:off x="1325880" y="3995928"/>
-            <a:ext cx="2630424" cy="2112264"/>
+            <a:off x="1325880" y="3538728"/>
+            <a:ext cx="2630424" cy="1655064"/>
           </a:xfrm>
           <a:prstGeom prst="rect">
             <a:avLst/>
@@ -12797,12 +13807,12 @@
         </p:nvSpPr>
         <p:spPr>
           <a:xfrm>
-            <a:off x="4322064" y="3886200"/>
-            <a:ext cx="3544824" cy="2331720"/>
+            <a:off x="4322064" y="3429000"/>
+            <a:ext cx="3544824" cy="1874520"/>
           </a:xfrm>
           <a:prstGeom prst="roundRect">
             <a:avLst>
-              <a:gd name="adj" fmla="val 3137"/>
+              <a:gd name="adj" fmla="val 3902"/>
             </a:avLst>
           </a:prstGeom>
           <a:solidFill>
@@ -12831,7 +13841,7 @@
         </p:nvSpPr>
         <p:spPr>
           <a:xfrm>
-            <a:off x="4504944" y="4069080"/>
+            <a:off x="4504944" y="3611880"/>
             <a:ext cx="457200" cy="457200"/>
           </a:xfrm>
           <a:prstGeom prst="ellipse">
@@ -12851,7 +13861,7 @@
         </p:nvSpPr>
         <p:spPr>
           <a:xfrm>
-            <a:off x="4504944" y="4069080"/>
+            <a:off x="4504944" y="3611880"/>
             <a:ext cx="457200" cy="457200"/>
           </a:xfrm>
           <a:prstGeom prst="rect">
@@ -12890,8 +13900,8 @@
         </p:nvSpPr>
         <p:spPr>
           <a:xfrm>
-            <a:off x="5099304" y="3995928"/>
-            <a:ext cx="2630424" cy="2112264"/>
+            <a:off x="5099304" y="3538728"/>
+            <a:ext cx="2630424" cy="1655064"/>
           </a:xfrm>
           <a:prstGeom prst="rect">
             <a:avLst/>
@@ -12931,12 +13941,12 @@
         </p:nvSpPr>
         <p:spPr>
           <a:xfrm>
-            <a:off x="8095488" y="3886200"/>
-            <a:ext cx="3544824" cy="2331720"/>
+            <a:off x="8095488" y="3429000"/>
+            <a:ext cx="3544824" cy="1874520"/>
           </a:xfrm>
           <a:prstGeom prst="roundRect">
             <a:avLst>
-              <a:gd name="adj" fmla="val 3137"/>
+              <a:gd name="adj" fmla="val 3902"/>
             </a:avLst>
           </a:prstGeom>
           <a:solidFill>
@@ -12965,7 +13975,7 @@
         </p:nvSpPr>
         <p:spPr>
           <a:xfrm>
-            <a:off x="8278368" y="4069080"/>
+            <a:off x="8278368" y="3611880"/>
             <a:ext cx="457200" cy="457200"/>
           </a:xfrm>
           <a:prstGeom prst="ellipse">
@@ -12985,7 +13995,7 @@
         </p:nvSpPr>
         <p:spPr>
           <a:xfrm>
-            <a:off x="8278368" y="4069080"/>
+            <a:off x="8278368" y="3611880"/>
             <a:ext cx="457200" cy="457200"/>
           </a:xfrm>
           <a:prstGeom prst="rect">
@@ -13024,8 +14034,8 @@
         </p:nvSpPr>
         <p:spPr>
           <a:xfrm>
-            <a:off x="8872728" y="3995928"/>
-            <a:ext cx="2630424" cy="2112264"/>
+            <a:off x="8872728" y="3538728"/>
+            <a:ext cx="2630424" cy="1655064"/>
           </a:xfrm>
           <a:prstGeom prst="rect">
             <a:avLst/>
@@ -13054,6 +14064,92 @@
               <a:t>inadimplência por consultor</a:t>
             </a:r>
             <a:endParaRPr lang="en-US" sz="1800" dirty="0"/>
+          </a:p>
+        </p:txBody>
+      </p:sp>
+      <p:sp>
+        <p:nvSpPr>
+          <p:cNvPr id="33" name="Shape 30"/>
+          <p:cNvSpPr/>
+          <p:nvPr/>
+        </p:nvSpPr>
+        <p:spPr>
+          <a:xfrm>
+            <a:off x="548640" y="5413248"/>
+            <a:ext cx="11091672" cy="868680"/>
+          </a:xfrm>
+          <a:prstGeom prst="roundRect">
+            <a:avLst>
+              <a:gd name="adj" fmla="val 8421"/>
+            </a:avLst>
+          </a:prstGeom>
+          <a:solidFill>
+            <a:srgbClr val="EEF3FA"/>
+          </a:solidFill>
+          <a:ln w="6350">
+            <a:solidFill>
+              <a:srgbClr val="D8E0EC"/>
+            </a:solidFill>
+            <a:prstDash val="solid"/>
+          </a:ln>
+        </p:spPr>
+      </p:sp>
+      <p:sp>
+        <p:nvSpPr>
+          <p:cNvPr id="34" name="Shape 31"/>
+          <p:cNvSpPr/>
+          <p:nvPr/>
+        </p:nvSpPr>
+        <p:spPr>
+          <a:xfrm>
+            <a:off x="548640" y="5413248"/>
+            <a:ext cx="91440" cy="868680"/>
+          </a:xfrm>
+          <a:prstGeom prst="rect">
+            <a:avLst/>
+          </a:prstGeom>
+          <a:solidFill>
+            <a:srgbClr val="F7A23B"/>
+          </a:solidFill>
+          <a:ln/>
+        </p:spPr>
+      </p:sp>
+      <p:sp>
+        <p:nvSpPr>
+          <p:cNvPr id="35" name="Text 32"/>
+          <p:cNvSpPr/>
+          <p:nvPr/>
+        </p:nvSpPr>
+        <p:spPr>
+          <a:xfrm>
+            <a:off x="777240" y="5458968"/>
+            <a:ext cx="10744200" cy="777240"/>
+          </a:xfrm>
+          <a:prstGeom prst="rect">
+            <a:avLst/>
+          </a:prstGeom>
+          <a:noFill/>
+          <a:ln/>
+        </p:spPr>
+        <p:txBody>
+          <a:bodyPr wrap="square" rtlCol="0" anchor="ctr"/>
+          <a:lstStyle/>
+          <a:p>
+            <a:pPr indent="0" marL="0">
+              <a:buNone/>
+            </a:pPr>
+            <a:r>
+              <a:rPr lang="en-US" sz="1500" dirty="0">
+                <a:solidFill>
+                  <a:srgbClr val="1F2937"/>
+                </a:solidFill>
+                <a:latin typeface="Arial" pitchFamily="34" charset="0"/>
+                <a:ea typeface="Arial" pitchFamily="34" charset="-122"/>
+                <a:cs typeface="Arial" pitchFamily="34" charset="-120"/>
+              </a:rPr>
+              <a:t>Meça por faixa de atraso e por consultor.</a:t>
+            </a:r>
+            <a:endParaRPr lang="en-US" sz="1500" dirty="0"/>
           </a:p>
         </p:txBody>
       </p:sp>
@@ -15000,7 +16096,7 @@
                 <a:ea typeface="Arial" pitchFamily="34" charset="-122"/>
                 <a:cs typeface="Arial" pitchFamily="34" charset="-120"/>
               </a:rPr>
-              <a:t>Fatura aprovada → gerar cobrança → status Rascunho</a:t>
+              <a:t>Na fatura aprovada, gere a cobrança, ou aguarde a rotina. Ela aparece em Cobranças de Faturas como rascunho.</a:t>
             </a:r>
             <a:endParaRPr lang="en-US" sz="1500" dirty="0"/>
           </a:p>
@@ -15051,7 +16147,7 @@
                 <a:ea typeface="Arial" pitchFamily="34" charset="-122"/>
                 <a:cs typeface="Arial" pitchFamily="34" charset="-120"/>
               </a:rPr>
-              <a:t>Confira: referência · vencimento · consumo injetado · desconto · valor total</a:t>
+              <a:t>Confira referência, vencimento, consumo injetado, desconto e valor total.</a:t>
             </a:r>
             <a:endParaRPr lang="en-US" sz="1500" dirty="0"/>
           </a:p>
@@ -15102,7 +16198,7 @@
                 <a:ea typeface="Arial" pitchFamily="34" charset="-122"/>
                 <a:cs typeface="Arial" pitchFamily="34" charset="-120"/>
               </a:rPr>
-              <a:t>Ações Disponíveis → Abrir esta cobrança para pagamento</a:t>
+              <a:t>Em Ações Disponíveis, clique em Abrir esta cobrança para pagamento.</a:t>
             </a:r>
             <a:endParaRPr lang="en-US" sz="1500" dirty="0"/>
           </a:p>
@@ -15153,7 +16249,7 @@
                 <a:ea typeface="Arial" pitchFamily="34" charset="-122"/>
                 <a:cs typeface="Arial" pitchFamily="34" charset="-120"/>
               </a:rPr>
-              <a:t>Gerar pagamento → Pix · copia e cola · cliente recebe e-mail automaticamente</a:t>
+              <a:t>Gere o pagamento por Pix: o código aparece em Pagamentos Gerados e o cliente recebe o e-mail automaticamente.</a:t>
             </a:r>
             <a:endParaRPr lang="en-US" sz="1500" dirty="0"/>
           </a:p>
@@ -15632,7 +16728,7 @@
                 <a:ea typeface="Arial" pitchFamily="34" charset="-122"/>
                 <a:cs typeface="Arial" pitchFamily="34" charset="-120"/>
               </a:rPr>
-              <a:t>WhatsApp: mensagem pronta, envio com 1 clique · Boleto exige endereço completo</a:t>
+              <a:t>Envie pelo WhatsApp com um clique. Para boleto, o cliente precisa ter endereço completo.</a:t>
             </a:r>
             <a:endParaRPr lang="en-US" sz="1500" dirty="0"/>
           </a:p>
@@ -16470,7 +17566,7 @@
                 <a:ea typeface="Arial" pitchFamily="34" charset="-122"/>
                 <a:cs typeface="Arial" pitchFamily="34" charset="-120"/>
               </a:rPr>
-              <a:t>Portal do cliente: Minhas Cobranças → Pix copia e cola / boleto em PDF</a:t>
+              <a:t>Como Cliente, abra Minhas Cobranças: Pix copia e cola e boleto em PDF prontos para pagar.</a:t>
             </a:r>
             <a:endParaRPr lang="en-US" sz="1500" dirty="0"/>
           </a:p>
@@ -16521,7 +17617,7 @@
                 <a:ea typeface="Arial" pitchFamily="34" charset="-122"/>
                 <a:cs typeface="Arial" pitchFamily="34" charset="-120"/>
               </a:rPr>
-              <a:t>Pagamento confirmado → webhook/sincronização → cobrança Paga (sem ação manual)</a:t>
+              <a:t>Como Administrador, simule o pagamento: a cobrança fica paga sozinha, com o histórico registrado.</a:t>
             </a:r>
             <a:endParaRPr lang="en-US" sz="1500" dirty="0"/>
           </a:p>
@@ -16572,7 +17668,7 @@
                 <a:ea typeface="Arial" pitchFamily="34" charset="-122"/>
                 <a:cs typeface="Arial" pitchFamily="34" charset="-120"/>
               </a:rPr>
-              <a:t>Financeiro → Pagamentos: todos os Pix/boletos · sincronizar sob demanda</a:t>
+              <a:t>Em Financeiro, Pagamentos, acompanhe todos os Pix e boletos e sincronize sob demanda.</a:t>
             </a:r>
             <a:endParaRPr lang="en-US" sz="1500" dirty="0"/>
           </a:p>
@@ -16623,7 +17719,7 @@
                 <a:ea typeface="Arial" pitchFamily="34" charset="-122"/>
                 <a:cs typeface="Arial" pitchFamily="34" charset="-120"/>
               </a:rPr>
-              <a:t>Recebeu por fora? Confirmar Pagamento + observação · boleto ativo é cancelado</a:t>
+              <a:t>Recebeu por fora? Use Confirmar Pagamento com data e observação: o boleto ativo é cancelado.</a:t>
             </a:r>
             <a:endParaRPr lang="en-US" sz="1500" dirty="0"/>
           </a:p>
@@ -17826,7 +18922,7 @@
                 <a:ea typeface="Arial" pitchFamily="34" charset="-122"/>
                 <a:cs typeface="Arial" pitchFamily="34" charset="-120"/>
               </a:rPr>
-              <a:t>D−3: e-mail ao cliente + alerta ao consultor com WhatsApp pronto</a:t>
+              <a:t>Três dias antes: e-mail ao cliente e alerta ao consultor com a mensagem de WhatsApp pronta.</a:t>
             </a:r>
             <a:endParaRPr lang="en-US" sz="1500" dirty="0"/>
           </a:p>
@@ -17877,7 +18973,7 @@
                 <a:ea typeface="Arial" pitchFamily="34" charset="-122"/>
                 <a:cs typeface="Arial" pitchFamily="34" charset="-120"/>
               </a:rPr>
-              <a:t>D+1: marcada como vencida automaticamente</a:t>
+              <a:t>No dia seguinte ao vencimento, a cobrança é marcada como vencida sozinha.</a:t>
             </a:r>
             <a:endParaRPr lang="en-US" sz="1500" dirty="0"/>
           </a:p>
@@ -17928,7 +19024,7 @@
                 <a:ea typeface="Arial" pitchFamily="34" charset="-122"/>
                 <a:cs typeface="Arial" pitchFamily="34" charset="-120"/>
               </a:rPr>
-              <a:t>Boleto vencido: PDF bloqueado · alerta para reemitir · novo boleto · o antigo segue monitorado por 10 dias</a:t>
+              <a:t>Boleto vencido: PDF bloqueado e alerta para reemitir. Gere o novo boleto e envie.</a:t>
             </a:r>
             <a:endParaRPr lang="en-US" sz="1500" dirty="0"/>
           </a:p>
@@ -17979,7 +19075,7 @@
                 <a:ea typeface="Arial" pitchFamily="34" charset="-122"/>
                 <a:cs typeface="Arial" pitchFamily="34" charset="-120"/>
               </a:rPr>
-              <a:t>Editar vencimento → pagamento anterior cancelado → novo emitido → histórico</a:t>
+              <a:t>Use Editar vencimento: o pagamento anterior é cancelado, um novo é emitido e tudo fica no histórico.</a:t>
             </a:r>
             <a:endParaRPr lang="en-US" sz="1500" dirty="0"/>
           </a:p>
@@ -18301,11 +19397,11 @@
         <p:spPr>
           <a:xfrm>
             <a:off x="548640" y="1325880"/>
-            <a:ext cx="11091672" cy="4937760"/>
+            <a:ext cx="11091672" cy="3977640"/>
           </a:xfrm>
           <a:prstGeom prst="roundRect">
             <a:avLst>
-              <a:gd name="adj" fmla="val 1852"/>
+              <a:gd name="adj" fmla="val 2299"/>
             </a:avLst>
           </a:prstGeom>
           <a:solidFill>
@@ -18323,7 +19419,7 @@
         <p:spPr>
           <a:xfrm>
             <a:off x="914400" y="1554480"/>
-            <a:ext cx="10360152" cy="4480560"/>
+            <a:ext cx="10360152" cy="3520440"/>
           </a:xfrm>
           <a:prstGeom prst="rect">
             <a:avLst/>
@@ -18415,6 +19511,92 @@
               <a:t>Padaria: 2.119,00 − 423,80 = R$ 1.695,20</a:t>
             </a:r>
             <a:endParaRPr lang="en-US" sz="2400" dirty="0"/>
+          </a:p>
+        </p:txBody>
+      </p:sp>
+      <p:sp>
+        <p:nvSpPr>
+          <p:cNvPr id="11" name="Shape 8"/>
+          <p:cNvSpPr/>
+          <p:nvPr/>
+        </p:nvSpPr>
+        <p:spPr>
+          <a:xfrm>
+            <a:off x="548640" y="5413248"/>
+            <a:ext cx="11091672" cy="868680"/>
+          </a:xfrm>
+          <a:prstGeom prst="roundRect">
+            <a:avLst>
+              <a:gd name="adj" fmla="val 8421"/>
+            </a:avLst>
+          </a:prstGeom>
+          <a:solidFill>
+            <a:srgbClr val="EEF3FA"/>
+          </a:solidFill>
+          <a:ln w="6350">
+            <a:solidFill>
+              <a:srgbClr val="D8E0EC"/>
+            </a:solidFill>
+            <a:prstDash val="solid"/>
+          </a:ln>
+        </p:spPr>
+      </p:sp>
+      <p:sp>
+        <p:nvSpPr>
+          <p:cNvPr id="12" name="Shape 9"/>
+          <p:cNvSpPr/>
+          <p:nvPr/>
+        </p:nvSpPr>
+        <p:spPr>
+          <a:xfrm>
+            <a:off x="548640" y="5413248"/>
+            <a:ext cx="91440" cy="868680"/>
+          </a:xfrm>
+          <a:prstGeom prst="rect">
+            <a:avLst/>
+          </a:prstGeom>
+          <a:solidFill>
+            <a:srgbClr val="F7A23B"/>
+          </a:solidFill>
+          <a:ln/>
+        </p:spPr>
+      </p:sp>
+      <p:sp>
+        <p:nvSpPr>
+          <p:cNvPr id="13" name="Text 10"/>
+          <p:cNvSpPr/>
+          <p:nvPr/>
+        </p:nvSpPr>
+        <p:spPr>
+          <a:xfrm>
+            <a:off x="777240" y="5458968"/>
+            <a:ext cx="10744200" cy="777240"/>
+          </a:xfrm>
+          <a:prstGeom prst="rect">
+            <a:avLst/>
+          </a:prstGeom>
+          <a:noFill/>
+          <a:ln/>
+        </p:spPr>
+        <p:txBody>
+          <a:bodyPr wrap="square" rtlCol="0" anchor="ctr"/>
+          <a:lstStyle/>
+          <a:p>
+            <a:pPr indent="0" marL="0">
+              <a:buNone/>
+            </a:pPr>
+            <a:r>
+              <a:rPr lang="en-US" sz="1500" dirty="0">
+                <a:solidFill>
+                  <a:srgbClr val="1F2937"/>
+                </a:solidFill>
+                <a:latin typeface="Arial" pitchFamily="34" charset="0"/>
+                <a:ea typeface="Arial" pitchFamily="34" charset="-122"/>
+                <a:cs typeface="Arial" pitchFamily="34" charset="-120"/>
+              </a:rPr>
+              <a:t>A cobrança parte do consumo injetado da fatura, aplica o desconto do cliente e soma os ajustes. O vencimento acompanha o da fatura, para o cliente ter as duas contas na mesma data.</a:t>
+            </a:r>
+            <a:endParaRPr lang="en-US" sz="1500" dirty="0"/>
           </a:p>
         </p:txBody>
       </p:sp>
@@ -18891,7 +20073,7 @@
                 <a:ea typeface="Arial" pitchFamily="34" charset="-122"/>
                 <a:cs typeface="Arial" pitchFamily="34" charset="-120"/>
               </a:rPr>
-              <a:t>Cobrar via WhatsApp · Enviar Lembrete — o contato humano da régua</a:t>
+              <a:t>Nos contatos humanos, use Cobrar via WhatsApp e Enviar Lembrete.</a:t>
             </a:r>
             <a:endParaRPr lang="en-US" sz="1500" dirty="0"/>
           </a:p>
@@ -19098,7 +20280,7 @@
                 <a:ea typeface="Arial" pitchFamily="34" charset="-122"/>
                 <a:cs typeface="Arial" pitchFamily="34" charset="-120"/>
               </a:rPr>
-              <a:t>M8 · Fechamento</a:t>
+              <a:t>M8 · Teste rápido</a:t>
             </a:r>
             <a:endParaRPr lang="en-US" sz="900" dirty="0"/>
           </a:p>
@@ -19157,7 +20339,7 @@
                 <a:ea typeface="Arial" pitchFamily="34" charset="-122"/>
                 <a:cs typeface="Arial" pitchFamily="34" charset="-120"/>
               </a:rPr>
-              <a:t>FECHAMENTO DO MÓDULO</a:t>
+              <a:t>QUESTÕES 1–2 DE 7</a:t>
             </a:r>
             <a:endParaRPr lang="en-US" sz="1000" dirty="0"/>
           </a:p>
@@ -19198,7 +20380,7 @@
                 <a:ea typeface="Arial" pitchFamily="34" charset="-122"/>
                 <a:cs typeface="Arial" pitchFamily="34" charset="-120"/>
               </a:rPr>
-              <a:t>Pratique e entregue</a:t>
+              <a:t>Teste rápido</a:t>
             </a:r>
             <a:endParaRPr lang="en-US" sz="2600" dirty="0"/>
           </a:p>
@@ -19206,142 +20388,17 @@
       </p:sp>
       <p:sp>
         <p:nvSpPr>
-          <p:cNvPr id="9" name="Text 6"/>
+          <p:cNvPr id="9" name="Shape 6"/>
           <p:cNvSpPr/>
           <p:nvPr/>
         </p:nvSpPr>
         <p:spPr>
           <a:xfrm>
             <a:off x="548640" y="1325880"/>
-            <a:ext cx="5394960" cy="411480"/>
-          </a:xfrm>
-          <a:prstGeom prst="rect">
-            <a:avLst/>
-          </a:prstGeom>
-          <a:noFill/>
-          <a:ln/>
-        </p:spPr>
-        <p:txBody>
-          <a:bodyPr wrap="square" rtlCol="0" anchor="ctr"/>
-          <a:lstStyle/>
-          <a:p>
-            <a:pPr indent="0" marL="0">
-              <a:buNone/>
-            </a:pPr>
-            <a:r>
-              <a:rPr lang="en-US" sz="1600" b="1" dirty="0">
-                <a:solidFill>
-                  <a:srgbClr val="1B3A6B"/>
-                </a:solidFill>
-                <a:latin typeface="Arial" pitchFamily="34" charset="0"/>
-                <a:ea typeface="Arial" pitchFamily="34" charset="-122"/>
-                <a:cs typeface="Arial" pitchFamily="34" charset="-120"/>
-              </a:rPr>
-              <a:t>Exercícios</a:t>
-            </a:r>
-            <a:endParaRPr lang="en-US" sz="1600" dirty="0"/>
-          </a:p>
-        </p:txBody>
-      </p:sp>
-      <p:sp>
-        <p:nvSpPr>
-          <p:cNvPr id="10" name="Text 7"/>
-          <p:cNvSpPr/>
-          <p:nvPr/>
-        </p:nvSpPr>
-        <p:spPr>
-          <a:xfrm>
-            <a:off x="548640" y="1783080"/>
-            <a:ext cx="5394960" cy="4480560"/>
-          </a:xfrm>
-          <a:prstGeom prst="rect">
-            <a:avLst/>
-          </a:prstGeom>
-          <a:noFill/>
-          <a:ln/>
-        </p:spPr>
-        <p:txBody>
-          <a:bodyPr wrap="square" rtlCol="0" anchor="t">
-            <a:normAutofit/>
-          </a:bodyPr>
-          <a:lstStyle/>
-          <a:p>
-            <a:pPr indent="0" marL="0">
-              <a:spcAft>
-                <a:spcPts val="800"/>
-              </a:spcAft>
-              <a:buNone/>
-            </a:pPr>
-            <a:r>
-              <a:rPr lang="en-US" sz="1600" dirty="0">
-                <a:solidFill>
-                  <a:srgbClr val="1F2937"/>
-                </a:solidFill>
-                <a:latin typeface="Arial" pitchFamily="34" charset="0"/>
-                <a:ea typeface="Arial" pitchFamily="34" charset="-122"/>
-                <a:cs typeface="Arial" pitchFamily="34" charset="-120"/>
-              </a:rPr>
-              <a:t>1. Cobrança de R$ 1.695,20 com um desconto manual de R$ 50 (cortesia pela demora no primeiro crédito). Valor final?</a:t>
-            </a:r>
-            <a:endParaRPr lang="en-US" sz="1600" dirty="0"/>
-          </a:p>
-          <a:p>
-            <a:pPr indent="0" marL="0">
-              <a:spcAft>
-                <a:spcPts val="800"/>
-              </a:spcAft>
-              <a:buNone/>
-            </a:pPr>
-            <a:r>
-              <a:rPr lang="en-US" sz="1600" dirty="0">
-                <a:solidFill>
-                  <a:srgbClr val="1F2937"/>
-                </a:solidFill>
-                <a:latin typeface="Arial" pitchFamily="34" charset="0"/>
-                <a:ea typeface="Arial" pitchFamily="34" charset="-122"/>
-                <a:cs typeface="Arial" pitchFamily="34" charset="-120"/>
-              </a:rPr>
-              <a:t>2. Monte uma régua para uma cobrança com vencimento dia 10: o que acontece nos dias 7, 10, 11, 15, 20 e 30?</a:t>
-            </a:r>
-            <a:endParaRPr lang="en-US" sz="1600" dirty="0"/>
-          </a:p>
-          <a:p>
-            <a:pPr indent="0" marL="0">
-              <a:spcAft>
-                <a:spcPts val="800"/>
-              </a:spcAft>
-              <a:buNone/>
-            </a:pPr>
-            <a:r>
-              <a:rPr lang="en-US" sz="1600" dirty="0">
-                <a:solidFill>
-                  <a:srgbClr val="1F2937"/>
-                </a:solidFill>
-                <a:latin typeface="Arial" pitchFamily="34" charset="0"/>
-                <a:ea typeface="Arial" pitchFamily="34" charset="-122"/>
-                <a:cs typeface="Arial" pitchFamily="34" charset="-120"/>
-              </a:rPr>
-              <a:t>3. Por que a plataforma não cancela o boleto vencido no Mercado Pago imediatamente?</a:t>
-            </a:r>
-            <a:endParaRPr lang="en-US" sz="1600" dirty="0"/>
-          </a:p>
-        </p:txBody>
-      </p:sp>
-      <p:sp>
-        <p:nvSpPr>
-          <p:cNvPr id="11" name="Shape 8"/>
-          <p:cNvSpPr/>
-          <p:nvPr/>
-        </p:nvSpPr>
-        <p:spPr>
-          <a:xfrm>
-            <a:off x="6172200" y="1325880"/>
-            <a:ext cx="5468112" cy="4937760"/>
-          </a:xfrm>
-          <a:prstGeom prst="roundRect">
-            <a:avLst>
-              <a:gd name="adj" fmla="val 1852"/>
-            </a:avLst>
+            <a:ext cx="502920" cy="502920"/>
+          </a:xfrm>
+          <a:prstGeom prst="ellipse">
+            <a:avLst/>
           </a:prstGeom>
           <a:solidFill>
             <a:srgbClr val="1B3A6B"/>
@@ -19351,32 +20408,135 @@
       </p:sp>
       <p:sp>
         <p:nvSpPr>
-          <p:cNvPr id="12" name="Text 9"/>
-          <p:cNvSpPr/>
-          <p:nvPr/>
-        </p:nvSpPr>
-        <p:spPr>
-          <a:xfrm>
-            <a:off x="6492240" y="1554480"/>
-            <a:ext cx="4828032" cy="4480560"/>
-          </a:xfrm>
-          <a:prstGeom prst="rect">
-            <a:avLst/>
-          </a:prstGeom>
-          <a:noFill/>
-          <a:ln/>
-        </p:spPr>
-        <p:txBody>
-          <a:bodyPr wrap="square" rtlCol="0" anchor="t">
-            <a:normAutofit/>
-          </a:bodyPr>
-          <a:lstStyle/>
-          <a:p>
-            <a:pPr indent="0" marL="0">
-              <a:buNone/>
-            </a:pPr>
-            <a:r>
-              <a:rPr lang="en-US" sz="1300" b="1" spc="100" kern="0" dirty="0">
+          <p:cNvPr id="10" name="Text 7"/>
+          <p:cNvSpPr/>
+          <p:nvPr/>
+        </p:nvSpPr>
+        <p:spPr>
+          <a:xfrm>
+            <a:off x="548640" y="1325880"/>
+            <a:ext cx="502920" cy="502920"/>
+          </a:xfrm>
+          <a:prstGeom prst="rect">
+            <a:avLst/>
+          </a:prstGeom>
+          <a:noFill/>
+          <a:ln/>
+        </p:spPr>
+        <p:txBody>
+          <a:bodyPr wrap="square" rtlCol="0" anchor="ctr"/>
+          <a:lstStyle/>
+          <a:p>
+            <a:pPr algn="ctr" indent="0" marL="0">
+              <a:buNone/>
+            </a:pPr>
+            <a:r>
+              <a:rPr lang="en-US" sz="1600" b="1" dirty="0">
+                <a:solidFill>
+                  <a:srgbClr val="FFFFFF"/>
+                </a:solidFill>
+                <a:latin typeface="Arial" pitchFamily="34" charset="0"/>
+                <a:ea typeface="Arial" pitchFamily="34" charset="-122"/>
+                <a:cs typeface="Arial" pitchFamily="34" charset="-120"/>
+              </a:rPr>
+              <a:t>1</a:t>
+            </a:r>
+            <a:endParaRPr lang="en-US" sz="1600" dirty="0"/>
+          </a:p>
+        </p:txBody>
+      </p:sp>
+      <p:sp>
+        <p:nvSpPr>
+          <p:cNvPr id="11" name="Text 8"/>
+          <p:cNvSpPr/>
+          <p:nvPr/>
+        </p:nvSpPr>
+        <p:spPr>
+          <a:xfrm>
+            <a:off x="1234440" y="1280160"/>
+            <a:ext cx="10424160" cy="640080"/>
+          </a:xfrm>
+          <a:prstGeom prst="rect">
+            <a:avLst/>
+          </a:prstGeom>
+          <a:noFill/>
+          <a:ln/>
+        </p:spPr>
+        <p:txBody>
+          <a:bodyPr wrap="square" rtlCol="0" anchor="ctr"/>
+          <a:lstStyle/>
+          <a:p>
+            <a:pPr indent="0" marL="0">
+              <a:buNone/>
+            </a:pPr>
+            <a:r>
+              <a:rPr lang="en-US" sz="1800" b="1" dirty="0">
+                <a:solidFill>
+                  <a:srgbClr val="1B3A6B"/>
+                </a:solidFill>
+                <a:latin typeface="Arial" pitchFamily="34" charset="0"/>
+                <a:ea typeface="Arial" pitchFamily="34" charset="-122"/>
+                <a:cs typeface="Arial" pitchFamily="34" charset="-120"/>
+              </a:rPr>
+              <a:t>A cobrança nasce com status:</a:t>
+            </a:r>
+            <a:endParaRPr lang="en-US" sz="1800" dirty="0"/>
+          </a:p>
+        </p:txBody>
+      </p:sp>
+      <p:sp>
+        <p:nvSpPr>
+          <p:cNvPr id="12" name="Shape 9"/>
+          <p:cNvSpPr/>
+          <p:nvPr/>
+        </p:nvSpPr>
+        <p:spPr>
+          <a:xfrm>
+            <a:off x="548640" y="2057400"/>
+            <a:ext cx="2601468" cy="1463040"/>
+          </a:xfrm>
+          <a:prstGeom prst="roundRect">
+            <a:avLst>
+              <a:gd name="adj" fmla="val 5000"/>
+            </a:avLst>
+          </a:prstGeom>
+          <a:solidFill>
+            <a:srgbClr val="FFFFFF"/>
+          </a:solidFill>
+          <a:ln w="9525">
+            <a:solidFill>
+              <a:srgbClr val="D8E0EC"/>
+            </a:solidFill>
+            <a:prstDash val="solid"/>
+          </a:ln>
+        </p:spPr>
+      </p:sp>
+      <p:sp>
+        <p:nvSpPr>
+          <p:cNvPr id="13" name="Text 10"/>
+          <p:cNvSpPr/>
+          <p:nvPr/>
+        </p:nvSpPr>
+        <p:spPr>
+          <a:xfrm>
+            <a:off x="685800" y="2148840"/>
+            <a:ext cx="365760" cy="365760"/>
+          </a:xfrm>
+          <a:prstGeom prst="rect">
+            <a:avLst/>
+          </a:prstGeom>
+          <a:noFill/>
+          <a:ln/>
+        </p:spPr>
+        <p:txBody>
+          <a:bodyPr wrap="square" rtlCol="0" anchor="ctr"/>
+          <a:lstStyle/>
+          <a:p>
+            <a:pPr indent="0" marL="0">
+              <a:buNone/>
+            </a:pPr>
+            <a:r>
+              <a:rPr lang="en-US" sz="1400" b="1" dirty="0">
                 <a:solidFill>
                   <a:srgbClr val="F7A23B"/>
                 </a:solidFill>
@@ -19384,14 +20544,412 @@
                 <a:ea typeface="Arial" pitchFamily="34" charset="-122"/>
                 <a:cs typeface="Arial" pitchFamily="34" charset="-120"/>
               </a:rPr>
-              <a:t>ENTREGÁVEL DO MÓDULO
-</a:t>
-            </a:r>
-            <a:pPr indent="0" marL="0">
-              <a:buNone/>
-            </a:pPr>
-            <a:r>
-              <a:rPr lang="en-US" sz="1600" dirty="0">
+              <a:t>A</a:t>
+            </a:r>
+            <a:endParaRPr lang="en-US" sz="1400" dirty="0"/>
+          </a:p>
+        </p:txBody>
+      </p:sp>
+      <p:sp>
+        <p:nvSpPr>
+          <p:cNvPr id="14" name="Text 11"/>
+          <p:cNvSpPr/>
+          <p:nvPr/>
+        </p:nvSpPr>
+        <p:spPr>
+          <a:xfrm>
+            <a:off x="685800" y="2514600"/>
+            <a:ext cx="2327148" cy="914400"/>
+          </a:xfrm>
+          <a:prstGeom prst="rect">
+            <a:avLst/>
+          </a:prstGeom>
+          <a:noFill/>
+          <a:ln/>
+        </p:spPr>
+        <p:txBody>
+          <a:bodyPr wrap="square" rtlCol="0" anchor="t"/>
+          <a:lstStyle/>
+          <a:p>
+            <a:pPr indent="0" marL="0">
+              <a:buNone/>
+            </a:pPr>
+            <a:r>
+              <a:rPr lang="en-US" sz="1500" dirty="0">
+                <a:solidFill>
+                  <a:srgbClr val="1F2937"/>
+                </a:solidFill>
+                <a:latin typeface="Arial" pitchFamily="34" charset="0"/>
+                <a:ea typeface="Arial" pitchFamily="34" charset="-122"/>
+                <a:cs typeface="Arial" pitchFamily="34" charset="-120"/>
+              </a:rPr>
+              <a:t>rascunho</a:t>
+            </a:r>
+            <a:endParaRPr lang="en-US" sz="1500" dirty="0"/>
+          </a:p>
+        </p:txBody>
+      </p:sp>
+      <p:sp>
+        <p:nvSpPr>
+          <p:cNvPr id="15" name="Shape 12"/>
+          <p:cNvSpPr/>
+          <p:nvPr/>
+        </p:nvSpPr>
+        <p:spPr>
+          <a:xfrm>
+            <a:off x="3378708" y="2057400"/>
+            <a:ext cx="2601468" cy="1463040"/>
+          </a:xfrm>
+          <a:prstGeom prst="roundRect">
+            <a:avLst>
+              <a:gd name="adj" fmla="val 5000"/>
+            </a:avLst>
+          </a:prstGeom>
+          <a:solidFill>
+            <a:srgbClr val="FFFFFF"/>
+          </a:solidFill>
+          <a:ln w="9525">
+            <a:solidFill>
+              <a:srgbClr val="D8E0EC"/>
+            </a:solidFill>
+            <a:prstDash val="solid"/>
+          </a:ln>
+        </p:spPr>
+      </p:sp>
+      <p:sp>
+        <p:nvSpPr>
+          <p:cNvPr id="16" name="Text 13"/>
+          <p:cNvSpPr/>
+          <p:nvPr/>
+        </p:nvSpPr>
+        <p:spPr>
+          <a:xfrm>
+            <a:off x="3515868" y="2148840"/>
+            <a:ext cx="365760" cy="365760"/>
+          </a:xfrm>
+          <a:prstGeom prst="rect">
+            <a:avLst/>
+          </a:prstGeom>
+          <a:noFill/>
+          <a:ln/>
+        </p:spPr>
+        <p:txBody>
+          <a:bodyPr wrap="square" rtlCol="0" anchor="ctr"/>
+          <a:lstStyle/>
+          <a:p>
+            <a:pPr indent="0" marL="0">
+              <a:buNone/>
+            </a:pPr>
+            <a:r>
+              <a:rPr lang="en-US" sz="1400" b="1" dirty="0">
+                <a:solidFill>
+                  <a:srgbClr val="F7A23B"/>
+                </a:solidFill>
+                <a:latin typeface="Arial" pitchFamily="34" charset="0"/>
+                <a:ea typeface="Arial" pitchFamily="34" charset="-122"/>
+                <a:cs typeface="Arial" pitchFamily="34" charset="-120"/>
+              </a:rPr>
+              <a:t>B</a:t>
+            </a:r>
+            <a:endParaRPr lang="en-US" sz="1400" dirty="0"/>
+          </a:p>
+        </p:txBody>
+      </p:sp>
+      <p:sp>
+        <p:nvSpPr>
+          <p:cNvPr id="17" name="Text 14"/>
+          <p:cNvSpPr/>
+          <p:nvPr/>
+        </p:nvSpPr>
+        <p:spPr>
+          <a:xfrm>
+            <a:off x="3515868" y="2514600"/>
+            <a:ext cx="2327148" cy="914400"/>
+          </a:xfrm>
+          <a:prstGeom prst="rect">
+            <a:avLst/>
+          </a:prstGeom>
+          <a:noFill/>
+          <a:ln/>
+        </p:spPr>
+        <p:txBody>
+          <a:bodyPr wrap="square" rtlCol="0" anchor="t"/>
+          <a:lstStyle/>
+          <a:p>
+            <a:pPr indent="0" marL="0">
+              <a:buNone/>
+            </a:pPr>
+            <a:r>
+              <a:rPr lang="en-US" sz="1500" dirty="0">
+                <a:solidFill>
+                  <a:srgbClr val="1F2937"/>
+                </a:solidFill>
+                <a:latin typeface="Arial" pitchFamily="34" charset="0"/>
+                <a:ea typeface="Arial" pitchFamily="34" charset="-122"/>
+                <a:cs typeface="Arial" pitchFamily="34" charset="-120"/>
+              </a:rPr>
+              <a:t>paga</a:t>
+            </a:r>
+            <a:endParaRPr lang="en-US" sz="1500" dirty="0"/>
+          </a:p>
+        </p:txBody>
+      </p:sp>
+      <p:sp>
+        <p:nvSpPr>
+          <p:cNvPr id="18" name="Shape 15"/>
+          <p:cNvSpPr/>
+          <p:nvPr/>
+        </p:nvSpPr>
+        <p:spPr>
+          <a:xfrm>
+            <a:off x="6208776" y="2057400"/>
+            <a:ext cx="2601468" cy="1463040"/>
+          </a:xfrm>
+          <a:prstGeom prst="roundRect">
+            <a:avLst>
+              <a:gd name="adj" fmla="val 5000"/>
+            </a:avLst>
+          </a:prstGeom>
+          <a:solidFill>
+            <a:srgbClr val="FFFFFF"/>
+          </a:solidFill>
+          <a:ln w="9525">
+            <a:solidFill>
+              <a:srgbClr val="D8E0EC"/>
+            </a:solidFill>
+            <a:prstDash val="solid"/>
+          </a:ln>
+        </p:spPr>
+      </p:sp>
+      <p:sp>
+        <p:nvSpPr>
+          <p:cNvPr id="19" name="Text 16"/>
+          <p:cNvSpPr/>
+          <p:nvPr/>
+        </p:nvSpPr>
+        <p:spPr>
+          <a:xfrm>
+            <a:off x="6345936" y="2148840"/>
+            <a:ext cx="365760" cy="365760"/>
+          </a:xfrm>
+          <a:prstGeom prst="rect">
+            <a:avLst/>
+          </a:prstGeom>
+          <a:noFill/>
+          <a:ln/>
+        </p:spPr>
+        <p:txBody>
+          <a:bodyPr wrap="square" rtlCol="0" anchor="ctr"/>
+          <a:lstStyle/>
+          <a:p>
+            <a:pPr indent="0" marL="0">
+              <a:buNone/>
+            </a:pPr>
+            <a:r>
+              <a:rPr lang="en-US" sz="1400" b="1" dirty="0">
+                <a:solidFill>
+                  <a:srgbClr val="F7A23B"/>
+                </a:solidFill>
+                <a:latin typeface="Arial" pitchFamily="34" charset="0"/>
+                <a:ea typeface="Arial" pitchFamily="34" charset="-122"/>
+                <a:cs typeface="Arial" pitchFamily="34" charset="-120"/>
+              </a:rPr>
+              <a:t>C</a:t>
+            </a:r>
+            <a:endParaRPr lang="en-US" sz="1400" dirty="0"/>
+          </a:p>
+        </p:txBody>
+      </p:sp>
+      <p:sp>
+        <p:nvSpPr>
+          <p:cNvPr id="20" name="Text 17"/>
+          <p:cNvSpPr/>
+          <p:nvPr/>
+        </p:nvSpPr>
+        <p:spPr>
+          <a:xfrm>
+            <a:off x="6345936" y="2514600"/>
+            <a:ext cx="2327148" cy="914400"/>
+          </a:xfrm>
+          <a:prstGeom prst="rect">
+            <a:avLst/>
+          </a:prstGeom>
+          <a:noFill/>
+          <a:ln/>
+        </p:spPr>
+        <p:txBody>
+          <a:bodyPr wrap="square" rtlCol="0" anchor="t"/>
+          <a:lstStyle/>
+          <a:p>
+            <a:pPr indent="0" marL="0">
+              <a:buNone/>
+            </a:pPr>
+            <a:r>
+              <a:rPr lang="en-US" sz="1500" dirty="0">
+                <a:solidFill>
+                  <a:srgbClr val="1F2937"/>
+                </a:solidFill>
+                <a:latin typeface="Arial" pitchFamily="34" charset="0"/>
+                <a:ea typeface="Arial" pitchFamily="34" charset="-122"/>
+                <a:cs typeface="Arial" pitchFamily="34" charset="-120"/>
+              </a:rPr>
+              <a:t>vencida</a:t>
+            </a:r>
+            <a:endParaRPr lang="en-US" sz="1500" dirty="0"/>
+          </a:p>
+        </p:txBody>
+      </p:sp>
+      <p:sp>
+        <p:nvSpPr>
+          <p:cNvPr id="21" name="Shape 18"/>
+          <p:cNvSpPr/>
+          <p:nvPr/>
+        </p:nvSpPr>
+        <p:spPr>
+          <a:xfrm>
+            <a:off x="9038844" y="2057400"/>
+            <a:ext cx="2601468" cy="1463040"/>
+          </a:xfrm>
+          <a:prstGeom prst="roundRect">
+            <a:avLst>
+              <a:gd name="adj" fmla="val 5000"/>
+            </a:avLst>
+          </a:prstGeom>
+          <a:solidFill>
+            <a:srgbClr val="FFFFFF"/>
+          </a:solidFill>
+          <a:ln w="9525">
+            <a:solidFill>
+              <a:srgbClr val="D8E0EC"/>
+            </a:solidFill>
+            <a:prstDash val="solid"/>
+          </a:ln>
+        </p:spPr>
+      </p:sp>
+      <p:sp>
+        <p:nvSpPr>
+          <p:cNvPr id="22" name="Text 19"/>
+          <p:cNvSpPr/>
+          <p:nvPr/>
+        </p:nvSpPr>
+        <p:spPr>
+          <a:xfrm>
+            <a:off x="9176004" y="2148840"/>
+            <a:ext cx="365760" cy="365760"/>
+          </a:xfrm>
+          <a:prstGeom prst="rect">
+            <a:avLst/>
+          </a:prstGeom>
+          <a:noFill/>
+          <a:ln/>
+        </p:spPr>
+        <p:txBody>
+          <a:bodyPr wrap="square" rtlCol="0" anchor="ctr"/>
+          <a:lstStyle/>
+          <a:p>
+            <a:pPr indent="0" marL="0">
+              <a:buNone/>
+            </a:pPr>
+            <a:r>
+              <a:rPr lang="en-US" sz="1400" b="1" dirty="0">
+                <a:solidFill>
+                  <a:srgbClr val="F7A23B"/>
+                </a:solidFill>
+                <a:latin typeface="Arial" pitchFamily="34" charset="0"/>
+                <a:ea typeface="Arial" pitchFamily="34" charset="-122"/>
+                <a:cs typeface="Arial" pitchFamily="34" charset="-120"/>
+              </a:rPr>
+              <a:t>D</a:t>
+            </a:r>
+            <a:endParaRPr lang="en-US" sz="1400" dirty="0"/>
+          </a:p>
+        </p:txBody>
+      </p:sp>
+      <p:sp>
+        <p:nvSpPr>
+          <p:cNvPr id="23" name="Text 20"/>
+          <p:cNvSpPr/>
+          <p:nvPr/>
+        </p:nvSpPr>
+        <p:spPr>
+          <a:xfrm>
+            <a:off x="9176004" y="2514600"/>
+            <a:ext cx="2327148" cy="914400"/>
+          </a:xfrm>
+          <a:prstGeom prst="rect">
+            <a:avLst/>
+          </a:prstGeom>
+          <a:noFill/>
+          <a:ln/>
+        </p:spPr>
+        <p:txBody>
+          <a:bodyPr wrap="square" rtlCol="0" anchor="t"/>
+          <a:lstStyle/>
+          <a:p>
+            <a:pPr indent="0" marL="0">
+              <a:buNone/>
+            </a:pPr>
+            <a:r>
+              <a:rPr lang="en-US" sz="1500" dirty="0">
+                <a:solidFill>
+                  <a:srgbClr val="1F2937"/>
+                </a:solidFill>
+                <a:latin typeface="Arial" pitchFamily="34" charset="0"/>
+                <a:ea typeface="Arial" pitchFamily="34" charset="-122"/>
+                <a:cs typeface="Arial" pitchFamily="34" charset="-120"/>
+              </a:rPr>
+              <a:t>aberta</a:t>
+            </a:r>
+            <a:endParaRPr lang="en-US" sz="1500" dirty="0"/>
+          </a:p>
+        </p:txBody>
+      </p:sp>
+      <p:sp>
+        <p:nvSpPr>
+          <p:cNvPr id="24" name="Shape 21"/>
+          <p:cNvSpPr/>
+          <p:nvPr/>
+        </p:nvSpPr>
+        <p:spPr>
+          <a:xfrm>
+            <a:off x="548640" y="3840480"/>
+            <a:ext cx="502920" cy="502920"/>
+          </a:xfrm>
+          <a:prstGeom prst="ellipse">
+            <a:avLst/>
+          </a:prstGeom>
+          <a:solidFill>
+            <a:srgbClr val="1B3A6B"/>
+          </a:solidFill>
+          <a:ln/>
+        </p:spPr>
+      </p:sp>
+      <p:sp>
+        <p:nvSpPr>
+          <p:cNvPr id="25" name="Text 22"/>
+          <p:cNvSpPr/>
+          <p:nvPr/>
+        </p:nvSpPr>
+        <p:spPr>
+          <a:xfrm>
+            <a:off x="548640" y="3840480"/>
+            <a:ext cx="502920" cy="502920"/>
+          </a:xfrm>
+          <a:prstGeom prst="rect">
+            <a:avLst/>
+          </a:prstGeom>
+          <a:noFill/>
+          <a:ln/>
+        </p:spPr>
+        <p:txBody>
+          <a:bodyPr wrap="square" rtlCol="0" anchor="ctr"/>
+          <a:lstStyle/>
+          <a:p>
+            <a:pPr algn="ctr" indent="0" marL="0">
+              <a:buNone/>
+            </a:pPr>
+            <a:r>
+              <a:rPr lang="en-US" sz="1600" b="1" dirty="0">
                 <a:solidFill>
                   <a:srgbClr val="FFFFFF"/>
                 </a:solidFill>
@@ -19399,9 +20957,468 @@
                 <a:ea typeface="Arial" pitchFamily="34" charset="-122"/>
                 <a:cs typeface="Arial" pitchFamily="34" charset="-120"/>
               </a:rPr>
-              <a:t>Primeiro faturamento: cobranças do mês 1 geradas e abertas para os 15 clientes; Pix ou boleto emitido para todos; pelo menos 10 pagos (simulados), 1 com ajuste justificado, 1 com vencimento alterado e 1 vencida tratada (boleto reemitido); e a régua de cobrança da sua empresa em uma página.</a:t>
-            </a:r>
-            <a:endParaRPr lang="en-US" sz="1300" dirty="0"/>
+              <a:t>2</a:t>
+            </a:r>
+            <a:endParaRPr lang="en-US" sz="1600" dirty="0"/>
+          </a:p>
+        </p:txBody>
+      </p:sp>
+      <p:sp>
+        <p:nvSpPr>
+          <p:cNvPr id="26" name="Text 23"/>
+          <p:cNvSpPr/>
+          <p:nvPr/>
+        </p:nvSpPr>
+        <p:spPr>
+          <a:xfrm>
+            <a:off x="1234440" y="3794760"/>
+            <a:ext cx="10424160" cy="640080"/>
+          </a:xfrm>
+          <a:prstGeom prst="rect">
+            <a:avLst/>
+          </a:prstGeom>
+          <a:noFill/>
+          <a:ln/>
+        </p:spPr>
+        <p:txBody>
+          <a:bodyPr wrap="square" rtlCol="0" anchor="ctr"/>
+          <a:lstStyle/>
+          <a:p>
+            <a:pPr indent="0" marL="0">
+              <a:buNone/>
+            </a:pPr>
+            <a:r>
+              <a:rPr lang="en-US" sz="1800" b="1" dirty="0">
+                <a:solidFill>
+                  <a:srgbClr val="1B3A6B"/>
+                </a:solidFill>
+                <a:latin typeface="Arial" pitchFamily="34" charset="0"/>
+                <a:ea typeface="Arial" pitchFamily="34" charset="-122"/>
+                <a:cs typeface="Arial" pitchFamily="34" charset="-120"/>
+              </a:rPr>
+              <a:t>O Pix ou boleto é gerado:</a:t>
+            </a:r>
+            <a:endParaRPr lang="en-US" sz="1800" dirty="0"/>
+          </a:p>
+        </p:txBody>
+      </p:sp>
+      <p:sp>
+        <p:nvSpPr>
+          <p:cNvPr id="27" name="Shape 24"/>
+          <p:cNvSpPr/>
+          <p:nvPr/>
+        </p:nvSpPr>
+        <p:spPr>
+          <a:xfrm>
+            <a:off x="548640" y="4572000"/>
+            <a:ext cx="2601468" cy="1463040"/>
+          </a:xfrm>
+          <a:prstGeom prst="roundRect">
+            <a:avLst>
+              <a:gd name="adj" fmla="val 5000"/>
+            </a:avLst>
+          </a:prstGeom>
+          <a:solidFill>
+            <a:srgbClr val="FFFFFF"/>
+          </a:solidFill>
+          <a:ln w="9525">
+            <a:solidFill>
+              <a:srgbClr val="D8E0EC"/>
+            </a:solidFill>
+            <a:prstDash val="solid"/>
+          </a:ln>
+        </p:spPr>
+      </p:sp>
+      <p:sp>
+        <p:nvSpPr>
+          <p:cNvPr id="28" name="Text 25"/>
+          <p:cNvSpPr/>
+          <p:nvPr/>
+        </p:nvSpPr>
+        <p:spPr>
+          <a:xfrm>
+            <a:off x="685800" y="4663440"/>
+            <a:ext cx="365760" cy="365760"/>
+          </a:xfrm>
+          <a:prstGeom prst="rect">
+            <a:avLst/>
+          </a:prstGeom>
+          <a:noFill/>
+          <a:ln/>
+        </p:spPr>
+        <p:txBody>
+          <a:bodyPr wrap="square" rtlCol="0" anchor="ctr"/>
+          <a:lstStyle/>
+          <a:p>
+            <a:pPr indent="0" marL="0">
+              <a:buNone/>
+            </a:pPr>
+            <a:r>
+              <a:rPr lang="en-US" sz="1400" b="1" dirty="0">
+                <a:solidFill>
+                  <a:srgbClr val="F7A23B"/>
+                </a:solidFill>
+                <a:latin typeface="Arial" pitchFamily="34" charset="0"/>
+                <a:ea typeface="Arial" pitchFamily="34" charset="-122"/>
+                <a:cs typeface="Arial" pitchFamily="34" charset="-120"/>
+              </a:rPr>
+              <a:t>A</a:t>
+            </a:r>
+            <a:endParaRPr lang="en-US" sz="1400" dirty="0"/>
+          </a:p>
+        </p:txBody>
+      </p:sp>
+      <p:sp>
+        <p:nvSpPr>
+          <p:cNvPr id="29" name="Text 26"/>
+          <p:cNvSpPr/>
+          <p:nvPr/>
+        </p:nvSpPr>
+        <p:spPr>
+          <a:xfrm>
+            <a:off x="685800" y="5029200"/>
+            <a:ext cx="2327148" cy="914400"/>
+          </a:xfrm>
+          <a:prstGeom prst="rect">
+            <a:avLst/>
+          </a:prstGeom>
+          <a:noFill/>
+          <a:ln/>
+        </p:spPr>
+        <p:txBody>
+          <a:bodyPr wrap="square" rtlCol="0" anchor="t"/>
+          <a:lstStyle/>
+          <a:p>
+            <a:pPr indent="0" marL="0">
+              <a:buNone/>
+            </a:pPr>
+            <a:r>
+              <a:rPr lang="en-US" sz="1500" dirty="0">
+                <a:solidFill>
+                  <a:srgbClr val="1F2937"/>
+                </a:solidFill>
+                <a:latin typeface="Arial" pitchFamily="34" charset="0"/>
+                <a:ea typeface="Arial" pitchFamily="34" charset="-122"/>
+                <a:cs typeface="Arial" pitchFamily="34" charset="-120"/>
+              </a:rPr>
+              <a:t>automaticamente ao aprovar a fatura</a:t>
+            </a:r>
+            <a:endParaRPr lang="en-US" sz="1500" dirty="0"/>
+          </a:p>
+        </p:txBody>
+      </p:sp>
+      <p:sp>
+        <p:nvSpPr>
+          <p:cNvPr id="30" name="Shape 27"/>
+          <p:cNvSpPr/>
+          <p:nvPr/>
+        </p:nvSpPr>
+        <p:spPr>
+          <a:xfrm>
+            <a:off x="3378708" y="4572000"/>
+            <a:ext cx="2601468" cy="1463040"/>
+          </a:xfrm>
+          <a:prstGeom prst="roundRect">
+            <a:avLst>
+              <a:gd name="adj" fmla="val 5000"/>
+            </a:avLst>
+          </a:prstGeom>
+          <a:solidFill>
+            <a:srgbClr val="FFFFFF"/>
+          </a:solidFill>
+          <a:ln w="9525">
+            <a:solidFill>
+              <a:srgbClr val="D8E0EC"/>
+            </a:solidFill>
+            <a:prstDash val="solid"/>
+          </a:ln>
+        </p:spPr>
+      </p:sp>
+      <p:sp>
+        <p:nvSpPr>
+          <p:cNvPr id="31" name="Text 28"/>
+          <p:cNvSpPr/>
+          <p:nvPr/>
+        </p:nvSpPr>
+        <p:spPr>
+          <a:xfrm>
+            <a:off x="3515868" y="4663440"/>
+            <a:ext cx="365760" cy="365760"/>
+          </a:xfrm>
+          <a:prstGeom prst="rect">
+            <a:avLst/>
+          </a:prstGeom>
+          <a:noFill/>
+          <a:ln/>
+        </p:spPr>
+        <p:txBody>
+          <a:bodyPr wrap="square" rtlCol="0" anchor="ctr"/>
+          <a:lstStyle/>
+          <a:p>
+            <a:pPr indent="0" marL="0">
+              <a:buNone/>
+            </a:pPr>
+            <a:r>
+              <a:rPr lang="en-US" sz="1400" b="1" dirty="0">
+                <a:solidFill>
+                  <a:srgbClr val="F7A23B"/>
+                </a:solidFill>
+                <a:latin typeface="Arial" pitchFamily="34" charset="0"/>
+                <a:ea typeface="Arial" pitchFamily="34" charset="-122"/>
+                <a:cs typeface="Arial" pitchFamily="34" charset="-120"/>
+              </a:rPr>
+              <a:t>B</a:t>
+            </a:r>
+            <a:endParaRPr lang="en-US" sz="1400" dirty="0"/>
+          </a:p>
+        </p:txBody>
+      </p:sp>
+      <p:sp>
+        <p:nvSpPr>
+          <p:cNvPr id="32" name="Text 29"/>
+          <p:cNvSpPr/>
+          <p:nvPr/>
+        </p:nvSpPr>
+        <p:spPr>
+          <a:xfrm>
+            <a:off x="3515868" y="5029200"/>
+            <a:ext cx="2327148" cy="914400"/>
+          </a:xfrm>
+          <a:prstGeom prst="rect">
+            <a:avLst/>
+          </a:prstGeom>
+          <a:noFill/>
+          <a:ln/>
+        </p:spPr>
+        <p:txBody>
+          <a:bodyPr wrap="square" rtlCol="0" anchor="t"/>
+          <a:lstStyle/>
+          <a:p>
+            <a:pPr indent="0" marL="0">
+              <a:buNone/>
+            </a:pPr>
+            <a:r>
+              <a:rPr lang="en-US" sz="1500" dirty="0">
+                <a:solidFill>
+                  <a:srgbClr val="1F2937"/>
+                </a:solidFill>
+                <a:latin typeface="Arial" pitchFamily="34" charset="0"/>
+                <a:ea typeface="Arial" pitchFamily="34" charset="-122"/>
+                <a:cs typeface="Arial" pitchFamily="34" charset="-120"/>
+              </a:rPr>
+              <a:t>manualmente na tela da cobrança</a:t>
+            </a:r>
+            <a:endParaRPr lang="en-US" sz="1500" dirty="0"/>
+          </a:p>
+        </p:txBody>
+      </p:sp>
+      <p:sp>
+        <p:nvSpPr>
+          <p:cNvPr id="33" name="Shape 30"/>
+          <p:cNvSpPr/>
+          <p:nvPr/>
+        </p:nvSpPr>
+        <p:spPr>
+          <a:xfrm>
+            <a:off x="6208776" y="4572000"/>
+            <a:ext cx="2601468" cy="1463040"/>
+          </a:xfrm>
+          <a:prstGeom prst="roundRect">
+            <a:avLst>
+              <a:gd name="adj" fmla="val 5000"/>
+            </a:avLst>
+          </a:prstGeom>
+          <a:solidFill>
+            <a:srgbClr val="FFFFFF"/>
+          </a:solidFill>
+          <a:ln w="9525">
+            <a:solidFill>
+              <a:srgbClr val="D8E0EC"/>
+            </a:solidFill>
+            <a:prstDash val="solid"/>
+          </a:ln>
+        </p:spPr>
+      </p:sp>
+      <p:sp>
+        <p:nvSpPr>
+          <p:cNvPr id="34" name="Text 31"/>
+          <p:cNvSpPr/>
+          <p:nvPr/>
+        </p:nvSpPr>
+        <p:spPr>
+          <a:xfrm>
+            <a:off x="6345936" y="4663440"/>
+            <a:ext cx="365760" cy="365760"/>
+          </a:xfrm>
+          <a:prstGeom prst="rect">
+            <a:avLst/>
+          </a:prstGeom>
+          <a:noFill/>
+          <a:ln/>
+        </p:spPr>
+        <p:txBody>
+          <a:bodyPr wrap="square" rtlCol="0" anchor="ctr"/>
+          <a:lstStyle/>
+          <a:p>
+            <a:pPr indent="0" marL="0">
+              <a:buNone/>
+            </a:pPr>
+            <a:r>
+              <a:rPr lang="en-US" sz="1400" b="1" dirty="0">
+                <a:solidFill>
+                  <a:srgbClr val="F7A23B"/>
+                </a:solidFill>
+                <a:latin typeface="Arial" pitchFamily="34" charset="0"/>
+                <a:ea typeface="Arial" pitchFamily="34" charset="-122"/>
+                <a:cs typeface="Arial" pitchFamily="34" charset="-120"/>
+              </a:rPr>
+              <a:t>C</a:t>
+            </a:r>
+            <a:endParaRPr lang="en-US" sz="1400" dirty="0"/>
+          </a:p>
+        </p:txBody>
+      </p:sp>
+      <p:sp>
+        <p:nvSpPr>
+          <p:cNvPr id="35" name="Text 32"/>
+          <p:cNvSpPr/>
+          <p:nvPr/>
+        </p:nvSpPr>
+        <p:spPr>
+          <a:xfrm>
+            <a:off x="6345936" y="5029200"/>
+            <a:ext cx="2327148" cy="914400"/>
+          </a:xfrm>
+          <a:prstGeom prst="rect">
+            <a:avLst/>
+          </a:prstGeom>
+          <a:noFill/>
+          <a:ln/>
+        </p:spPr>
+        <p:txBody>
+          <a:bodyPr wrap="square" rtlCol="0" anchor="t"/>
+          <a:lstStyle/>
+          <a:p>
+            <a:pPr indent="0" marL="0">
+              <a:buNone/>
+            </a:pPr>
+            <a:r>
+              <a:rPr lang="en-US" sz="1500" dirty="0">
+                <a:solidFill>
+                  <a:srgbClr val="1F2937"/>
+                </a:solidFill>
+                <a:latin typeface="Arial" pitchFamily="34" charset="0"/>
+                <a:ea typeface="Arial" pitchFamily="34" charset="-122"/>
+                <a:cs typeface="Arial" pitchFamily="34" charset="-120"/>
+              </a:rPr>
+              <a:t>pelo cliente</a:t>
+            </a:r>
+            <a:endParaRPr lang="en-US" sz="1500" dirty="0"/>
+          </a:p>
+        </p:txBody>
+      </p:sp>
+      <p:sp>
+        <p:nvSpPr>
+          <p:cNvPr id="36" name="Shape 33"/>
+          <p:cNvSpPr/>
+          <p:nvPr/>
+        </p:nvSpPr>
+        <p:spPr>
+          <a:xfrm>
+            <a:off x="9038844" y="4572000"/>
+            <a:ext cx="2601468" cy="1463040"/>
+          </a:xfrm>
+          <a:prstGeom prst="roundRect">
+            <a:avLst>
+              <a:gd name="adj" fmla="val 5000"/>
+            </a:avLst>
+          </a:prstGeom>
+          <a:solidFill>
+            <a:srgbClr val="FFFFFF"/>
+          </a:solidFill>
+          <a:ln w="9525">
+            <a:solidFill>
+              <a:srgbClr val="D8E0EC"/>
+            </a:solidFill>
+            <a:prstDash val="solid"/>
+          </a:ln>
+        </p:spPr>
+      </p:sp>
+      <p:sp>
+        <p:nvSpPr>
+          <p:cNvPr id="37" name="Text 34"/>
+          <p:cNvSpPr/>
+          <p:nvPr/>
+        </p:nvSpPr>
+        <p:spPr>
+          <a:xfrm>
+            <a:off x="9176004" y="4663440"/>
+            <a:ext cx="365760" cy="365760"/>
+          </a:xfrm>
+          <a:prstGeom prst="rect">
+            <a:avLst/>
+          </a:prstGeom>
+          <a:noFill/>
+          <a:ln/>
+        </p:spPr>
+        <p:txBody>
+          <a:bodyPr wrap="square" rtlCol="0" anchor="ctr"/>
+          <a:lstStyle/>
+          <a:p>
+            <a:pPr indent="0" marL="0">
+              <a:buNone/>
+            </a:pPr>
+            <a:r>
+              <a:rPr lang="en-US" sz="1400" b="1" dirty="0">
+                <a:solidFill>
+                  <a:srgbClr val="F7A23B"/>
+                </a:solidFill>
+                <a:latin typeface="Arial" pitchFamily="34" charset="0"/>
+                <a:ea typeface="Arial" pitchFamily="34" charset="-122"/>
+                <a:cs typeface="Arial" pitchFamily="34" charset="-120"/>
+              </a:rPr>
+              <a:t>D</a:t>
+            </a:r>
+            <a:endParaRPr lang="en-US" sz="1400" dirty="0"/>
+          </a:p>
+        </p:txBody>
+      </p:sp>
+      <p:sp>
+        <p:nvSpPr>
+          <p:cNvPr id="38" name="Text 35"/>
+          <p:cNvSpPr/>
+          <p:nvPr/>
+        </p:nvSpPr>
+        <p:spPr>
+          <a:xfrm>
+            <a:off x="9176004" y="5029200"/>
+            <a:ext cx="2327148" cy="914400"/>
+          </a:xfrm>
+          <a:prstGeom prst="rect">
+            <a:avLst/>
+          </a:prstGeom>
+          <a:noFill/>
+          <a:ln/>
+        </p:spPr>
+        <p:txBody>
+          <a:bodyPr wrap="square" rtlCol="0" anchor="t"/>
+          <a:lstStyle/>
+          <a:p>
+            <a:pPr indent="0" marL="0">
+              <a:buNone/>
+            </a:pPr>
+            <a:r>
+              <a:rPr lang="en-US" sz="1500" dirty="0">
+                <a:solidFill>
+                  <a:srgbClr val="1F2937"/>
+                </a:solidFill>
+                <a:latin typeface="Arial" pitchFamily="34" charset="0"/>
+                <a:ea typeface="Arial" pitchFamily="34" charset="-122"/>
+                <a:cs typeface="Arial" pitchFamily="34" charset="-120"/>
+              </a:rPr>
+              <a:t>pela distribuidora</a:t>
+            </a:r>
+            <a:endParaRPr lang="en-US" sz="1500" dirty="0"/>
           </a:p>
         </p:txBody>
       </p:sp>
@@ -19448,6 +21465,5270 @@
             <a:fld id="{F7021451-1387-4CA6-816F-3879F97B5CBC}" type="slidenum">
               <a:rPr b="1" lang="en-US"/>
               <a:t>31</a:t>
+            </a:fld>
+            <a:endParaRPr lang="en-US"/>
+          </a:p>
+        </p:txBody>
+      </p:sp>
+    </p:spTree>
+  </p:cSld>
+  <p:clrMapOvr>
+    <a:masterClrMapping/>
+  </p:clrMapOvr>
+</p:sld>
+</file>
+
+<file path=ppt/slides/slide32.xml><?xml version="1.0" encoding="utf-8"?>
+<p:sld xmlns:a="http://schemas.openxmlformats.org/drawingml/2006/main" xmlns:r="http://schemas.openxmlformats.org/officeDocument/2006/relationships" xmlns:p="http://schemas.openxmlformats.org/presentationml/2006/main">
+  <p:cSld name="Slide 32">
+    <p:bg>
+      <p:bgPr>
+        <a:solidFill>
+          <a:srgbClr val="F6F8FB"/>
+        </a:solidFill>
+      </p:bgPr>
+    </p:bg>
+    <p:spTree>
+      <p:nvGrpSpPr>
+        <p:cNvPr id="1" name=""/>
+        <p:cNvGrpSpPr/>
+        <p:nvPr/>
+      </p:nvGrpSpPr>
+      <p:grpSpPr>
+        <a:xfrm>
+          <a:off x="0" y="0"/>
+          <a:ext cx="0" cy="0"/>
+          <a:chOff x="0" y="0"/>
+          <a:chExt cx="0" cy="0"/>
+        </a:xfrm>
+      </p:grpSpPr>
+      <p:sp>
+        <p:nvSpPr>
+          <p:cNvPr id="2" name="Shape 0"/>
+          <p:cNvSpPr/>
+          <p:nvPr/>
+        </p:nvSpPr>
+        <p:spPr>
+          <a:xfrm>
+            <a:off x="0" y="6510528"/>
+            <a:ext cx="12191695" cy="347472"/>
+          </a:xfrm>
+          <a:prstGeom prst="rect">
+            <a:avLst/>
+          </a:prstGeom>
+          <a:solidFill>
+            <a:srgbClr val="FFFFFF"/>
+          </a:solidFill>
+          <a:ln w="6350">
+            <a:solidFill>
+              <a:srgbClr val="D8E0EC"/>
+            </a:solidFill>
+            <a:prstDash val="solid"/>
+          </a:ln>
+        </p:spPr>
+      </p:sp>
+      <p:pic>
+        <p:nvPicPr>
+          <p:cNvPr id="3" name="Image 0" descr="/www/wwwroot/rexar/gdsolar/docs/curso/slides/assets/logo-gdsolar.png">    </p:cNvPr>
+          <p:cNvPicPr>
+            <a:picLocks noChangeAspect="1"/>
+          </p:cNvPicPr>
+          <p:nvPr/>
+        </p:nvPicPr>
+        <p:blipFill>
+          <a:blip r:embed="rId1"/>
+          <a:stretch>
+            <a:fillRect/>
+          </a:stretch>
+        </p:blipFill>
+        <p:spPr>
+          <a:xfrm>
+            <a:off x="548640" y="6547104"/>
+            <a:ext cx="274320" cy="274320"/>
+          </a:xfrm>
+          <a:prstGeom prst="rect">
+            <a:avLst/>
+          </a:prstGeom>
+        </p:spPr>
+      </p:pic>
+      <p:sp>
+        <p:nvSpPr>
+          <p:cNvPr id="4" name="Text 1"/>
+          <p:cNvSpPr/>
+          <p:nvPr/>
+        </p:nvSpPr>
+        <p:spPr>
+          <a:xfrm>
+            <a:off x="886968" y="6528816"/>
+            <a:ext cx="6400800" cy="310896"/>
+          </a:xfrm>
+          <a:prstGeom prst="rect">
+            <a:avLst/>
+          </a:prstGeom>
+          <a:noFill/>
+          <a:ln/>
+        </p:spPr>
+        <p:txBody>
+          <a:bodyPr wrap="square" rtlCol="0" anchor="ctr"/>
+          <a:lstStyle/>
+          <a:p>
+            <a:pPr indent="0" marL="0">
+              <a:buNone/>
+            </a:pPr>
+            <a:r>
+              <a:rPr lang="en-US" sz="900" b="1" dirty="0">
+                <a:solidFill>
+                  <a:srgbClr val="64748B"/>
+                </a:solidFill>
+                <a:latin typeface="Arial" pitchFamily="34" charset="0"/>
+                <a:ea typeface="Arial" pitchFamily="34" charset="-122"/>
+                <a:cs typeface="Arial" pitchFamily="34" charset="-120"/>
+              </a:rPr>
+              <a:t>GD Solar  ·  Formação em Energia por Assinatura</a:t>
+            </a:r>
+            <a:endParaRPr lang="en-US" sz="900" dirty="0"/>
+          </a:p>
+        </p:txBody>
+      </p:sp>
+      <p:sp>
+        <p:nvSpPr>
+          <p:cNvPr id="5" name="Text 2"/>
+          <p:cNvSpPr/>
+          <p:nvPr/>
+        </p:nvSpPr>
+        <p:spPr>
+          <a:xfrm>
+            <a:off x="7132320" y="6528816"/>
+            <a:ext cx="4023360" cy="310896"/>
+          </a:xfrm>
+          <a:prstGeom prst="rect">
+            <a:avLst/>
+          </a:prstGeom>
+          <a:noFill/>
+          <a:ln/>
+        </p:spPr>
+        <p:txBody>
+          <a:bodyPr wrap="square" rtlCol="0" anchor="ctr"/>
+          <a:lstStyle/>
+          <a:p>
+            <a:pPr algn="r" indent="0" marL="0">
+              <a:buNone/>
+            </a:pPr>
+            <a:r>
+              <a:rPr lang="en-US" sz="900" dirty="0">
+                <a:solidFill>
+                  <a:srgbClr val="64748B"/>
+                </a:solidFill>
+                <a:latin typeface="Arial" pitchFamily="34" charset="0"/>
+                <a:ea typeface="Arial" pitchFamily="34" charset="-122"/>
+                <a:cs typeface="Arial" pitchFamily="34" charset="-120"/>
+              </a:rPr>
+              <a:t>M8 · Teste rápido</a:t>
+            </a:r>
+            <a:endParaRPr lang="en-US" sz="900" dirty="0"/>
+          </a:p>
+        </p:txBody>
+      </p:sp>
+      <p:sp>
+        <p:nvSpPr>
+          <p:cNvPr id="6" name="Shape 3"/>
+          <p:cNvSpPr/>
+          <p:nvPr/>
+        </p:nvSpPr>
+        <p:spPr>
+          <a:xfrm>
+            <a:off x="548640" y="384048"/>
+            <a:ext cx="82296" cy="658368"/>
+          </a:xfrm>
+          <a:prstGeom prst="rect">
+            <a:avLst/>
+          </a:prstGeom>
+          <a:solidFill>
+            <a:srgbClr val="F7A23B"/>
+          </a:solidFill>
+          <a:ln/>
+        </p:spPr>
+      </p:sp>
+      <p:sp>
+        <p:nvSpPr>
+          <p:cNvPr id="7" name="Text 4"/>
+          <p:cNvSpPr/>
+          <p:nvPr/>
+        </p:nvSpPr>
+        <p:spPr>
+          <a:xfrm>
+            <a:off x="777240" y="292608"/>
+            <a:ext cx="10972800" cy="274320"/>
+          </a:xfrm>
+          <a:prstGeom prst="rect">
+            <a:avLst/>
+          </a:prstGeom>
+          <a:noFill/>
+          <a:ln/>
+        </p:spPr>
+        <p:txBody>
+          <a:bodyPr wrap="square" rtlCol="0" anchor="ctr"/>
+          <a:lstStyle/>
+          <a:p>
+            <a:pPr indent="0" marL="0">
+              <a:buNone/>
+            </a:pPr>
+            <a:r>
+              <a:rPr lang="en-US" sz="1000" b="1" spc="100" kern="0" dirty="0">
+                <a:solidFill>
+                  <a:srgbClr val="F7A23B"/>
+                </a:solidFill>
+                <a:latin typeface="Arial" pitchFamily="34" charset="0"/>
+                <a:ea typeface="Arial" pitchFamily="34" charset="-122"/>
+                <a:cs typeface="Arial" pitchFamily="34" charset="-120"/>
+              </a:rPr>
+              <a:t>QUESTÕES 3–4 DE 7</a:t>
+            </a:r>
+            <a:endParaRPr lang="en-US" sz="1000" dirty="0"/>
+          </a:p>
+        </p:txBody>
+      </p:sp>
+      <p:sp>
+        <p:nvSpPr>
+          <p:cNvPr id="8" name="Text 5"/>
+          <p:cNvSpPr/>
+          <p:nvPr/>
+        </p:nvSpPr>
+        <p:spPr>
+          <a:xfrm>
+            <a:off x="777240" y="530352"/>
+            <a:ext cx="10881360" cy="566928"/>
+          </a:xfrm>
+          <a:prstGeom prst="rect">
+            <a:avLst/>
+          </a:prstGeom>
+          <a:noFill/>
+          <a:ln/>
+        </p:spPr>
+        <p:txBody>
+          <a:bodyPr wrap="square" rtlCol="0" anchor="ctr">
+            <a:normAutofit/>
+          </a:bodyPr>
+          <a:lstStyle/>
+          <a:p>
+            <a:pPr indent="0" marL="0">
+              <a:buNone/>
+            </a:pPr>
+            <a:r>
+              <a:rPr lang="en-US" sz="2600" b="1" dirty="0">
+                <a:solidFill>
+                  <a:srgbClr val="1B3A6B"/>
+                </a:solidFill>
+                <a:latin typeface="Arial" pitchFamily="34" charset="0"/>
+                <a:ea typeface="Arial" pitchFamily="34" charset="-122"/>
+                <a:cs typeface="Arial" pitchFamily="34" charset="-120"/>
+              </a:rPr>
+              <a:t>Teste rápido</a:t>
+            </a:r>
+            <a:endParaRPr lang="en-US" sz="2600" dirty="0"/>
+          </a:p>
+        </p:txBody>
+      </p:sp>
+      <p:sp>
+        <p:nvSpPr>
+          <p:cNvPr id="9" name="Shape 6"/>
+          <p:cNvSpPr/>
+          <p:nvPr/>
+        </p:nvSpPr>
+        <p:spPr>
+          <a:xfrm>
+            <a:off x="548640" y="1325880"/>
+            <a:ext cx="502920" cy="502920"/>
+          </a:xfrm>
+          <a:prstGeom prst="ellipse">
+            <a:avLst/>
+          </a:prstGeom>
+          <a:solidFill>
+            <a:srgbClr val="1B3A6B"/>
+          </a:solidFill>
+          <a:ln/>
+        </p:spPr>
+      </p:sp>
+      <p:sp>
+        <p:nvSpPr>
+          <p:cNvPr id="10" name="Text 7"/>
+          <p:cNvSpPr/>
+          <p:nvPr/>
+        </p:nvSpPr>
+        <p:spPr>
+          <a:xfrm>
+            <a:off x="548640" y="1325880"/>
+            <a:ext cx="502920" cy="502920"/>
+          </a:xfrm>
+          <a:prstGeom prst="rect">
+            <a:avLst/>
+          </a:prstGeom>
+          <a:noFill/>
+          <a:ln/>
+        </p:spPr>
+        <p:txBody>
+          <a:bodyPr wrap="square" rtlCol="0" anchor="ctr"/>
+          <a:lstStyle/>
+          <a:p>
+            <a:pPr algn="ctr" indent="0" marL="0">
+              <a:buNone/>
+            </a:pPr>
+            <a:r>
+              <a:rPr lang="en-US" sz="1600" b="1" dirty="0">
+                <a:solidFill>
+                  <a:srgbClr val="FFFFFF"/>
+                </a:solidFill>
+                <a:latin typeface="Arial" pitchFamily="34" charset="0"/>
+                <a:ea typeface="Arial" pitchFamily="34" charset="-122"/>
+                <a:cs typeface="Arial" pitchFamily="34" charset="-120"/>
+              </a:rPr>
+              <a:t>3</a:t>
+            </a:r>
+            <a:endParaRPr lang="en-US" sz="1600" dirty="0"/>
+          </a:p>
+        </p:txBody>
+      </p:sp>
+      <p:sp>
+        <p:nvSpPr>
+          <p:cNvPr id="11" name="Text 8"/>
+          <p:cNvSpPr/>
+          <p:nvPr/>
+        </p:nvSpPr>
+        <p:spPr>
+          <a:xfrm>
+            <a:off x="1234440" y="1280160"/>
+            <a:ext cx="10424160" cy="640080"/>
+          </a:xfrm>
+          <a:prstGeom prst="rect">
+            <a:avLst/>
+          </a:prstGeom>
+          <a:noFill/>
+          <a:ln/>
+        </p:spPr>
+        <p:txBody>
+          <a:bodyPr wrap="square" rtlCol="0" anchor="ctr"/>
+          <a:lstStyle/>
+          <a:p>
+            <a:pPr indent="0" marL="0">
+              <a:buNone/>
+            </a:pPr>
+            <a:r>
+              <a:rPr lang="en-US" sz="1800" b="1" dirty="0">
+                <a:solidFill>
+                  <a:srgbClr val="1B3A6B"/>
+                </a:solidFill>
+                <a:latin typeface="Arial" pitchFamily="34" charset="0"/>
+                <a:ea typeface="Arial" pitchFamily="34" charset="-122"/>
+                <a:cs typeface="Arial" pitchFamily="34" charset="-120"/>
+              </a:rPr>
+              <a:t>Para emitir boleto pelo Mercado Pago, é obrigatório:</a:t>
+            </a:r>
+            <a:endParaRPr lang="en-US" sz="1800" dirty="0"/>
+          </a:p>
+        </p:txBody>
+      </p:sp>
+      <p:sp>
+        <p:nvSpPr>
+          <p:cNvPr id="12" name="Shape 9"/>
+          <p:cNvSpPr/>
+          <p:nvPr/>
+        </p:nvSpPr>
+        <p:spPr>
+          <a:xfrm>
+            <a:off x="548640" y="2057400"/>
+            <a:ext cx="2601468" cy="1463040"/>
+          </a:xfrm>
+          <a:prstGeom prst="roundRect">
+            <a:avLst>
+              <a:gd name="adj" fmla="val 5000"/>
+            </a:avLst>
+          </a:prstGeom>
+          <a:solidFill>
+            <a:srgbClr val="FFFFFF"/>
+          </a:solidFill>
+          <a:ln w="9525">
+            <a:solidFill>
+              <a:srgbClr val="D8E0EC"/>
+            </a:solidFill>
+            <a:prstDash val="solid"/>
+          </a:ln>
+        </p:spPr>
+      </p:sp>
+      <p:sp>
+        <p:nvSpPr>
+          <p:cNvPr id="13" name="Text 10"/>
+          <p:cNvSpPr/>
+          <p:nvPr/>
+        </p:nvSpPr>
+        <p:spPr>
+          <a:xfrm>
+            <a:off x="685800" y="2148840"/>
+            <a:ext cx="365760" cy="365760"/>
+          </a:xfrm>
+          <a:prstGeom prst="rect">
+            <a:avLst/>
+          </a:prstGeom>
+          <a:noFill/>
+          <a:ln/>
+        </p:spPr>
+        <p:txBody>
+          <a:bodyPr wrap="square" rtlCol="0" anchor="ctr"/>
+          <a:lstStyle/>
+          <a:p>
+            <a:pPr indent="0" marL="0">
+              <a:buNone/>
+            </a:pPr>
+            <a:r>
+              <a:rPr lang="en-US" sz="1400" b="1" dirty="0">
+                <a:solidFill>
+                  <a:srgbClr val="F7A23B"/>
+                </a:solidFill>
+                <a:latin typeface="Arial" pitchFamily="34" charset="0"/>
+                <a:ea typeface="Arial" pitchFamily="34" charset="-122"/>
+                <a:cs typeface="Arial" pitchFamily="34" charset="-120"/>
+              </a:rPr>
+              <a:t>A</a:t>
+            </a:r>
+            <a:endParaRPr lang="en-US" sz="1400" dirty="0"/>
+          </a:p>
+        </p:txBody>
+      </p:sp>
+      <p:sp>
+        <p:nvSpPr>
+          <p:cNvPr id="14" name="Text 11"/>
+          <p:cNvSpPr/>
+          <p:nvPr/>
+        </p:nvSpPr>
+        <p:spPr>
+          <a:xfrm>
+            <a:off x="685800" y="2514600"/>
+            <a:ext cx="2327148" cy="914400"/>
+          </a:xfrm>
+          <a:prstGeom prst="rect">
+            <a:avLst/>
+          </a:prstGeom>
+          <a:noFill/>
+          <a:ln/>
+        </p:spPr>
+        <p:txBody>
+          <a:bodyPr wrap="square" rtlCol="0" anchor="t"/>
+          <a:lstStyle/>
+          <a:p>
+            <a:pPr indent="0" marL="0">
+              <a:buNone/>
+            </a:pPr>
+            <a:r>
+              <a:rPr lang="en-US" sz="1500" dirty="0">
+                <a:solidFill>
+                  <a:srgbClr val="1F2937"/>
+                </a:solidFill>
+                <a:latin typeface="Arial" pitchFamily="34" charset="0"/>
+                <a:ea typeface="Arial" pitchFamily="34" charset="-122"/>
+                <a:cs typeface="Arial" pitchFamily="34" charset="-120"/>
+              </a:rPr>
+              <a:t>CPF do consultor</a:t>
+            </a:r>
+            <a:endParaRPr lang="en-US" sz="1500" dirty="0"/>
+          </a:p>
+        </p:txBody>
+      </p:sp>
+      <p:sp>
+        <p:nvSpPr>
+          <p:cNvPr id="15" name="Shape 12"/>
+          <p:cNvSpPr/>
+          <p:nvPr/>
+        </p:nvSpPr>
+        <p:spPr>
+          <a:xfrm>
+            <a:off x="3378708" y="2057400"/>
+            <a:ext cx="2601468" cy="1463040"/>
+          </a:xfrm>
+          <a:prstGeom prst="roundRect">
+            <a:avLst>
+              <a:gd name="adj" fmla="val 5000"/>
+            </a:avLst>
+          </a:prstGeom>
+          <a:solidFill>
+            <a:srgbClr val="FFFFFF"/>
+          </a:solidFill>
+          <a:ln w="9525">
+            <a:solidFill>
+              <a:srgbClr val="D8E0EC"/>
+            </a:solidFill>
+            <a:prstDash val="solid"/>
+          </a:ln>
+        </p:spPr>
+      </p:sp>
+      <p:sp>
+        <p:nvSpPr>
+          <p:cNvPr id="16" name="Text 13"/>
+          <p:cNvSpPr/>
+          <p:nvPr/>
+        </p:nvSpPr>
+        <p:spPr>
+          <a:xfrm>
+            <a:off x="3515868" y="2148840"/>
+            <a:ext cx="365760" cy="365760"/>
+          </a:xfrm>
+          <a:prstGeom prst="rect">
+            <a:avLst/>
+          </a:prstGeom>
+          <a:noFill/>
+          <a:ln/>
+        </p:spPr>
+        <p:txBody>
+          <a:bodyPr wrap="square" rtlCol="0" anchor="ctr"/>
+          <a:lstStyle/>
+          <a:p>
+            <a:pPr indent="0" marL="0">
+              <a:buNone/>
+            </a:pPr>
+            <a:r>
+              <a:rPr lang="en-US" sz="1400" b="1" dirty="0">
+                <a:solidFill>
+                  <a:srgbClr val="F7A23B"/>
+                </a:solidFill>
+                <a:latin typeface="Arial" pitchFamily="34" charset="0"/>
+                <a:ea typeface="Arial" pitchFamily="34" charset="-122"/>
+                <a:cs typeface="Arial" pitchFamily="34" charset="-120"/>
+              </a:rPr>
+              <a:t>B</a:t>
+            </a:r>
+            <a:endParaRPr lang="en-US" sz="1400" dirty="0"/>
+          </a:p>
+        </p:txBody>
+      </p:sp>
+      <p:sp>
+        <p:nvSpPr>
+          <p:cNvPr id="17" name="Text 14"/>
+          <p:cNvSpPr/>
+          <p:nvPr/>
+        </p:nvSpPr>
+        <p:spPr>
+          <a:xfrm>
+            <a:off x="3515868" y="2514600"/>
+            <a:ext cx="2327148" cy="914400"/>
+          </a:xfrm>
+          <a:prstGeom prst="rect">
+            <a:avLst/>
+          </a:prstGeom>
+          <a:noFill/>
+          <a:ln/>
+        </p:spPr>
+        <p:txBody>
+          <a:bodyPr wrap="square" rtlCol="0" anchor="t"/>
+          <a:lstStyle/>
+          <a:p>
+            <a:pPr indent="0" marL="0">
+              <a:buNone/>
+            </a:pPr>
+            <a:r>
+              <a:rPr lang="en-US" sz="1500" dirty="0">
+                <a:solidFill>
+                  <a:srgbClr val="1F2937"/>
+                </a:solidFill>
+                <a:latin typeface="Arial" pitchFamily="34" charset="0"/>
+                <a:ea typeface="Arial" pitchFamily="34" charset="-122"/>
+                <a:cs typeface="Arial" pitchFamily="34" charset="-120"/>
+              </a:rPr>
+              <a:t>endereço completo do pagador</a:t>
+            </a:r>
+            <a:endParaRPr lang="en-US" sz="1500" dirty="0"/>
+          </a:p>
+        </p:txBody>
+      </p:sp>
+      <p:sp>
+        <p:nvSpPr>
+          <p:cNvPr id="18" name="Shape 15"/>
+          <p:cNvSpPr/>
+          <p:nvPr/>
+        </p:nvSpPr>
+        <p:spPr>
+          <a:xfrm>
+            <a:off x="6208776" y="2057400"/>
+            <a:ext cx="2601468" cy="1463040"/>
+          </a:xfrm>
+          <a:prstGeom prst="roundRect">
+            <a:avLst>
+              <a:gd name="adj" fmla="val 5000"/>
+            </a:avLst>
+          </a:prstGeom>
+          <a:solidFill>
+            <a:srgbClr val="FFFFFF"/>
+          </a:solidFill>
+          <a:ln w="9525">
+            <a:solidFill>
+              <a:srgbClr val="D8E0EC"/>
+            </a:solidFill>
+            <a:prstDash val="solid"/>
+          </a:ln>
+        </p:spPr>
+      </p:sp>
+      <p:sp>
+        <p:nvSpPr>
+          <p:cNvPr id="19" name="Text 16"/>
+          <p:cNvSpPr/>
+          <p:nvPr/>
+        </p:nvSpPr>
+        <p:spPr>
+          <a:xfrm>
+            <a:off x="6345936" y="2148840"/>
+            <a:ext cx="365760" cy="365760"/>
+          </a:xfrm>
+          <a:prstGeom prst="rect">
+            <a:avLst/>
+          </a:prstGeom>
+          <a:noFill/>
+          <a:ln/>
+        </p:spPr>
+        <p:txBody>
+          <a:bodyPr wrap="square" rtlCol="0" anchor="ctr"/>
+          <a:lstStyle/>
+          <a:p>
+            <a:pPr indent="0" marL="0">
+              <a:buNone/>
+            </a:pPr>
+            <a:r>
+              <a:rPr lang="en-US" sz="1400" b="1" dirty="0">
+                <a:solidFill>
+                  <a:srgbClr val="F7A23B"/>
+                </a:solidFill>
+                <a:latin typeface="Arial" pitchFamily="34" charset="0"/>
+                <a:ea typeface="Arial" pitchFamily="34" charset="-122"/>
+                <a:cs typeface="Arial" pitchFamily="34" charset="-120"/>
+              </a:rPr>
+              <a:t>C</a:t>
+            </a:r>
+            <a:endParaRPr lang="en-US" sz="1400" dirty="0"/>
+          </a:p>
+        </p:txBody>
+      </p:sp>
+      <p:sp>
+        <p:nvSpPr>
+          <p:cNvPr id="20" name="Text 17"/>
+          <p:cNvSpPr/>
+          <p:nvPr/>
+        </p:nvSpPr>
+        <p:spPr>
+          <a:xfrm>
+            <a:off x="6345936" y="2514600"/>
+            <a:ext cx="2327148" cy="914400"/>
+          </a:xfrm>
+          <a:prstGeom prst="rect">
+            <a:avLst/>
+          </a:prstGeom>
+          <a:noFill/>
+          <a:ln/>
+        </p:spPr>
+        <p:txBody>
+          <a:bodyPr wrap="square" rtlCol="0" anchor="t"/>
+          <a:lstStyle/>
+          <a:p>
+            <a:pPr indent="0" marL="0">
+              <a:buNone/>
+            </a:pPr>
+            <a:r>
+              <a:rPr lang="en-US" sz="1500" dirty="0">
+                <a:solidFill>
+                  <a:srgbClr val="1F2937"/>
+                </a:solidFill>
+                <a:latin typeface="Arial" pitchFamily="34" charset="0"/>
+                <a:ea typeface="Arial" pitchFamily="34" charset="-122"/>
+                <a:cs typeface="Arial" pitchFamily="34" charset="-120"/>
+              </a:rPr>
+              <a:t>foto do cliente</a:t>
+            </a:r>
+            <a:endParaRPr lang="en-US" sz="1500" dirty="0"/>
+          </a:p>
+        </p:txBody>
+      </p:sp>
+      <p:sp>
+        <p:nvSpPr>
+          <p:cNvPr id="21" name="Shape 18"/>
+          <p:cNvSpPr/>
+          <p:nvPr/>
+        </p:nvSpPr>
+        <p:spPr>
+          <a:xfrm>
+            <a:off x="9038844" y="2057400"/>
+            <a:ext cx="2601468" cy="1463040"/>
+          </a:xfrm>
+          <a:prstGeom prst="roundRect">
+            <a:avLst>
+              <a:gd name="adj" fmla="val 5000"/>
+            </a:avLst>
+          </a:prstGeom>
+          <a:solidFill>
+            <a:srgbClr val="FFFFFF"/>
+          </a:solidFill>
+          <a:ln w="9525">
+            <a:solidFill>
+              <a:srgbClr val="D8E0EC"/>
+            </a:solidFill>
+            <a:prstDash val="solid"/>
+          </a:ln>
+        </p:spPr>
+      </p:sp>
+      <p:sp>
+        <p:nvSpPr>
+          <p:cNvPr id="22" name="Text 19"/>
+          <p:cNvSpPr/>
+          <p:nvPr/>
+        </p:nvSpPr>
+        <p:spPr>
+          <a:xfrm>
+            <a:off x="9176004" y="2148840"/>
+            <a:ext cx="365760" cy="365760"/>
+          </a:xfrm>
+          <a:prstGeom prst="rect">
+            <a:avLst/>
+          </a:prstGeom>
+          <a:noFill/>
+          <a:ln/>
+        </p:spPr>
+        <p:txBody>
+          <a:bodyPr wrap="square" rtlCol="0" anchor="ctr"/>
+          <a:lstStyle/>
+          <a:p>
+            <a:pPr indent="0" marL="0">
+              <a:buNone/>
+            </a:pPr>
+            <a:r>
+              <a:rPr lang="en-US" sz="1400" b="1" dirty="0">
+                <a:solidFill>
+                  <a:srgbClr val="F7A23B"/>
+                </a:solidFill>
+                <a:latin typeface="Arial" pitchFamily="34" charset="0"/>
+                <a:ea typeface="Arial" pitchFamily="34" charset="-122"/>
+                <a:cs typeface="Arial" pitchFamily="34" charset="-120"/>
+              </a:rPr>
+              <a:t>D</a:t>
+            </a:r>
+            <a:endParaRPr lang="en-US" sz="1400" dirty="0"/>
+          </a:p>
+        </p:txBody>
+      </p:sp>
+      <p:sp>
+        <p:nvSpPr>
+          <p:cNvPr id="23" name="Text 20"/>
+          <p:cNvSpPr/>
+          <p:nvPr/>
+        </p:nvSpPr>
+        <p:spPr>
+          <a:xfrm>
+            <a:off x="9176004" y="2514600"/>
+            <a:ext cx="2327148" cy="914400"/>
+          </a:xfrm>
+          <a:prstGeom prst="rect">
+            <a:avLst/>
+          </a:prstGeom>
+          <a:noFill/>
+          <a:ln/>
+        </p:spPr>
+        <p:txBody>
+          <a:bodyPr wrap="square" rtlCol="0" anchor="t"/>
+          <a:lstStyle/>
+          <a:p>
+            <a:pPr indent="0" marL="0">
+              <a:buNone/>
+            </a:pPr>
+            <a:r>
+              <a:rPr lang="en-US" sz="1500" dirty="0">
+                <a:solidFill>
+                  <a:srgbClr val="1F2937"/>
+                </a:solidFill>
+                <a:latin typeface="Arial" pitchFamily="34" charset="0"/>
+                <a:ea typeface="Arial" pitchFamily="34" charset="-122"/>
+                <a:cs typeface="Arial" pitchFamily="34" charset="-120"/>
+              </a:rPr>
+              <a:t>nada</a:t>
+            </a:r>
+            <a:endParaRPr lang="en-US" sz="1500" dirty="0"/>
+          </a:p>
+        </p:txBody>
+      </p:sp>
+      <p:sp>
+        <p:nvSpPr>
+          <p:cNvPr id="24" name="Shape 21"/>
+          <p:cNvSpPr/>
+          <p:nvPr/>
+        </p:nvSpPr>
+        <p:spPr>
+          <a:xfrm>
+            <a:off x="548640" y="3840480"/>
+            <a:ext cx="502920" cy="502920"/>
+          </a:xfrm>
+          <a:prstGeom prst="ellipse">
+            <a:avLst/>
+          </a:prstGeom>
+          <a:solidFill>
+            <a:srgbClr val="1B3A6B"/>
+          </a:solidFill>
+          <a:ln/>
+        </p:spPr>
+      </p:sp>
+      <p:sp>
+        <p:nvSpPr>
+          <p:cNvPr id="25" name="Text 22"/>
+          <p:cNvSpPr/>
+          <p:nvPr/>
+        </p:nvSpPr>
+        <p:spPr>
+          <a:xfrm>
+            <a:off x="548640" y="3840480"/>
+            <a:ext cx="502920" cy="502920"/>
+          </a:xfrm>
+          <a:prstGeom prst="rect">
+            <a:avLst/>
+          </a:prstGeom>
+          <a:noFill/>
+          <a:ln/>
+        </p:spPr>
+        <p:txBody>
+          <a:bodyPr wrap="square" rtlCol="0" anchor="ctr"/>
+          <a:lstStyle/>
+          <a:p>
+            <a:pPr algn="ctr" indent="0" marL="0">
+              <a:buNone/>
+            </a:pPr>
+            <a:r>
+              <a:rPr lang="en-US" sz="1600" b="1" dirty="0">
+                <a:solidFill>
+                  <a:srgbClr val="FFFFFF"/>
+                </a:solidFill>
+                <a:latin typeface="Arial" pitchFamily="34" charset="0"/>
+                <a:ea typeface="Arial" pitchFamily="34" charset="-122"/>
+                <a:cs typeface="Arial" pitchFamily="34" charset="-120"/>
+              </a:rPr>
+              <a:t>4</a:t>
+            </a:r>
+            <a:endParaRPr lang="en-US" sz="1600" dirty="0"/>
+          </a:p>
+        </p:txBody>
+      </p:sp>
+      <p:sp>
+        <p:nvSpPr>
+          <p:cNvPr id="26" name="Text 23"/>
+          <p:cNvSpPr/>
+          <p:nvPr/>
+        </p:nvSpPr>
+        <p:spPr>
+          <a:xfrm>
+            <a:off x="1234440" y="3794760"/>
+            <a:ext cx="10424160" cy="640080"/>
+          </a:xfrm>
+          <a:prstGeom prst="rect">
+            <a:avLst/>
+          </a:prstGeom>
+          <a:noFill/>
+          <a:ln/>
+        </p:spPr>
+        <p:txBody>
+          <a:bodyPr wrap="square" rtlCol="0" anchor="ctr"/>
+          <a:lstStyle/>
+          <a:p>
+            <a:pPr indent="0" marL="0">
+              <a:buNone/>
+            </a:pPr>
+            <a:r>
+              <a:rPr lang="en-US" sz="1800" b="1" dirty="0">
+                <a:solidFill>
+                  <a:srgbClr val="1B3A6B"/>
+                </a:solidFill>
+                <a:latin typeface="Arial" pitchFamily="34" charset="0"/>
+                <a:ea typeface="Arial" pitchFamily="34" charset="-122"/>
+                <a:cs typeface="Arial" pitchFamily="34" charset="-120"/>
+              </a:rPr>
+              <a:t>A baixa do pagamento acontece por:</a:t>
+            </a:r>
+            <a:endParaRPr lang="en-US" sz="1800" dirty="0"/>
+          </a:p>
+        </p:txBody>
+      </p:sp>
+      <p:sp>
+        <p:nvSpPr>
+          <p:cNvPr id="27" name="Shape 24"/>
+          <p:cNvSpPr/>
+          <p:nvPr/>
+        </p:nvSpPr>
+        <p:spPr>
+          <a:xfrm>
+            <a:off x="548640" y="4572000"/>
+            <a:ext cx="2601468" cy="1463040"/>
+          </a:xfrm>
+          <a:prstGeom prst="roundRect">
+            <a:avLst>
+              <a:gd name="adj" fmla="val 5000"/>
+            </a:avLst>
+          </a:prstGeom>
+          <a:solidFill>
+            <a:srgbClr val="FFFFFF"/>
+          </a:solidFill>
+          <a:ln w="9525">
+            <a:solidFill>
+              <a:srgbClr val="D8E0EC"/>
+            </a:solidFill>
+            <a:prstDash val="solid"/>
+          </a:ln>
+        </p:spPr>
+      </p:sp>
+      <p:sp>
+        <p:nvSpPr>
+          <p:cNvPr id="28" name="Text 25"/>
+          <p:cNvSpPr/>
+          <p:nvPr/>
+        </p:nvSpPr>
+        <p:spPr>
+          <a:xfrm>
+            <a:off x="685800" y="4663440"/>
+            <a:ext cx="365760" cy="365760"/>
+          </a:xfrm>
+          <a:prstGeom prst="rect">
+            <a:avLst/>
+          </a:prstGeom>
+          <a:noFill/>
+          <a:ln/>
+        </p:spPr>
+        <p:txBody>
+          <a:bodyPr wrap="square" rtlCol="0" anchor="ctr"/>
+          <a:lstStyle/>
+          <a:p>
+            <a:pPr indent="0" marL="0">
+              <a:buNone/>
+            </a:pPr>
+            <a:r>
+              <a:rPr lang="en-US" sz="1400" b="1" dirty="0">
+                <a:solidFill>
+                  <a:srgbClr val="F7A23B"/>
+                </a:solidFill>
+                <a:latin typeface="Arial" pitchFamily="34" charset="0"/>
+                <a:ea typeface="Arial" pitchFamily="34" charset="-122"/>
+                <a:cs typeface="Arial" pitchFamily="34" charset="-120"/>
+              </a:rPr>
+              <a:t>A</a:t>
+            </a:r>
+            <a:endParaRPr lang="en-US" sz="1400" dirty="0"/>
+          </a:p>
+        </p:txBody>
+      </p:sp>
+      <p:sp>
+        <p:nvSpPr>
+          <p:cNvPr id="29" name="Text 26"/>
+          <p:cNvSpPr/>
+          <p:nvPr/>
+        </p:nvSpPr>
+        <p:spPr>
+          <a:xfrm>
+            <a:off x="685800" y="5029200"/>
+            <a:ext cx="2327148" cy="914400"/>
+          </a:xfrm>
+          <a:prstGeom prst="rect">
+            <a:avLst/>
+          </a:prstGeom>
+          <a:noFill/>
+          <a:ln/>
+        </p:spPr>
+        <p:txBody>
+          <a:bodyPr wrap="square" rtlCol="0" anchor="t"/>
+          <a:lstStyle/>
+          <a:p>
+            <a:pPr indent="0" marL="0">
+              <a:buNone/>
+            </a:pPr>
+            <a:r>
+              <a:rPr lang="en-US" sz="1500" dirty="0">
+                <a:solidFill>
+                  <a:srgbClr val="1F2937"/>
+                </a:solidFill>
+                <a:latin typeface="Arial" pitchFamily="34" charset="0"/>
+                <a:ea typeface="Arial" pitchFamily="34" charset="-122"/>
+                <a:cs typeface="Arial" pitchFamily="34" charset="-120"/>
+              </a:rPr>
+              <a:t>webhook do Mercado Pago e sincronização periódica</a:t>
+            </a:r>
+            <a:endParaRPr lang="en-US" sz="1500" dirty="0"/>
+          </a:p>
+        </p:txBody>
+      </p:sp>
+      <p:sp>
+        <p:nvSpPr>
+          <p:cNvPr id="30" name="Shape 27"/>
+          <p:cNvSpPr/>
+          <p:nvPr/>
+        </p:nvSpPr>
+        <p:spPr>
+          <a:xfrm>
+            <a:off x="3378708" y="4572000"/>
+            <a:ext cx="2601468" cy="1463040"/>
+          </a:xfrm>
+          <a:prstGeom prst="roundRect">
+            <a:avLst>
+              <a:gd name="adj" fmla="val 5000"/>
+            </a:avLst>
+          </a:prstGeom>
+          <a:solidFill>
+            <a:srgbClr val="FFFFFF"/>
+          </a:solidFill>
+          <a:ln w="9525">
+            <a:solidFill>
+              <a:srgbClr val="D8E0EC"/>
+            </a:solidFill>
+            <a:prstDash val="solid"/>
+          </a:ln>
+        </p:spPr>
+      </p:sp>
+      <p:sp>
+        <p:nvSpPr>
+          <p:cNvPr id="31" name="Text 28"/>
+          <p:cNvSpPr/>
+          <p:nvPr/>
+        </p:nvSpPr>
+        <p:spPr>
+          <a:xfrm>
+            <a:off x="3515868" y="4663440"/>
+            <a:ext cx="365760" cy="365760"/>
+          </a:xfrm>
+          <a:prstGeom prst="rect">
+            <a:avLst/>
+          </a:prstGeom>
+          <a:noFill/>
+          <a:ln/>
+        </p:spPr>
+        <p:txBody>
+          <a:bodyPr wrap="square" rtlCol="0" anchor="ctr"/>
+          <a:lstStyle/>
+          <a:p>
+            <a:pPr indent="0" marL="0">
+              <a:buNone/>
+            </a:pPr>
+            <a:r>
+              <a:rPr lang="en-US" sz="1400" b="1" dirty="0">
+                <a:solidFill>
+                  <a:srgbClr val="F7A23B"/>
+                </a:solidFill>
+                <a:latin typeface="Arial" pitchFamily="34" charset="0"/>
+                <a:ea typeface="Arial" pitchFamily="34" charset="-122"/>
+                <a:cs typeface="Arial" pitchFamily="34" charset="-120"/>
+              </a:rPr>
+              <a:t>B</a:t>
+            </a:r>
+            <a:endParaRPr lang="en-US" sz="1400" dirty="0"/>
+          </a:p>
+        </p:txBody>
+      </p:sp>
+      <p:sp>
+        <p:nvSpPr>
+          <p:cNvPr id="32" name="Text 29"/>
+          <p:cNvSpPr/>
+          <p:nvPr/>
+        </p:nvSpPr>
+        <p:spPr>
+          <a:xfrm>
+            <a:off x="3515868" y="5029200"/>
+            <a:ext cx="2327148" cy="914400"/>
+          </a:xfrm>
+          <a:prstGeom prst="rect">
+            <a:avLst/>
+          </a:prstGeom>
+          <a:noFill/>
+          <a:ln/>
+        </p:spPr>
+        <p:txBody>
+          <a:bodyPr wrap="square" rtlCol="0" anchor="t"/>
+          <a:lstStyle/>
+          <a:p>
+            <a:pPr indent="0" marL="0">
+              <a:buNone/>
+            </a:pPr>
+            <a:r>
+              <a:rPr lang="en-US" sz="1500" dirty="0">
+                <a:solidFill>
+                  <a:srgbClr val="1F2937"/>
+                </a:solidFill>
+                <a:latin typeface="Arial" pitchFamily="34" charset="0"/>
+                <a:ea typeface="Arial" pitchFamily="34" charset="-122"/>
+                <a:cs typeface="Arial" pitchFamily="34" charset="-120"/>
+              </a:rPr>
+              <a:t>só manual</a:t>
+            </a:r>
+            <a:endParaRPr lang="en-US" sz="1500" dirty="0"/>
+          </a:p>
+        </p:txBody>
+      </p:sp>
+      <p:sp>
+        <p:nvSpPr>
+          <p:cNvPr id="33" name="Shape 30"/>
+          <p:cNvSpPr/>
+          <p:nvPr/>
+        </p:nvSpPr>
+        <p:spPr>
+          <a:xfrm>
+            <a:off x="6208776" y="4572000"/>
+            <a:ext cx="2601468" cy="1463040"/>
+          </a:xfrm>
+          <a:prstGeom prst="roundRect">
+            <a:avLst>
+              <a:gd name="adj" fmla="val 5000"/>
+            </a:avLst>
+          </a:prstGeom>
+          <a:solidFill>
+            <a:srgbClr val="FFFFFF"/>
+          </a:solidFill>
+          <a:ln w="9525">
+            <a:solidFill>
+              <a:srgbClr val="D8E0EC"/>
+            </a:solidFill>
+            <a:prstDash val="solid"/>
+          </a:ln>
+        </p:spPr>
+      </p:sp>
+      <p:sp>
+        <p:nvSpPr>
+          <p:cNvPr id="34" name="Text 31"/>
+          <p:cNvSpPr/>
+          <p:nvPr/>
+        </p:nvSpPr>
+        <p:spPr>
+          <a:xfrm>
+            <a:off x="6345936" y="4663440"/>
+            <a:ext cx="365760" cy="365760"/>
+          </a:xfrm>
+          <a:prstGeom prst="rect">
+            <a:avLst/>
+          </a:prstGeom>
+          <a:noFill/>
+          <a:ln/>
+        </p:spPr>
+        <p:txBody>
+          <a:bodyPr wrap="square" rtlCol="0" anchor="ctr"/>
+          <a:lstStyle/>
+          <a:p>
+            <a:pPr indent="0" marL="0">
+              <a:buNone/>
+            </a:pPr>
+            <a:r>
+              <a:rPr lang="en-US" sz="1400" b="1" dirty="0">
+                <a:solidFill>
+                  <a:srgbClr val="F7A23B"/>
+                </a:solidFill>
+                <a:latin typeface="Arial" pitchFamily="34" charset="0"/>
+                <a:ea typeface="Arial" pitchFamily="34" charset="-122"/>
+                <a:cs typeface="Arial" pitchFamily="34" charset="-120"/>
+              </a:rPr>
+              <a:t>C</a:t>
+            </a:r>
+            <a:endParaRPr lang="en-US" sz="1400" dirty="0"/>
+          </a:p>
+        </p:txBody>
+      </p:sp>
+      <p:sp>
+        <p:nvSpPr>
+          <p:cNvPr id="35" name="Text 32"/>
+          <p:cNvSpPr/>
+          <p:nvPr/>
+        </p:nvSpPr>
+        <p:spPr>
+          <a:xfrm>
+            <a:off x="6345936" y="5029200"/>
+            <a:ext cx="2327148" cy="914400"/>
+          </a:xfrm>
+          <a:prstGeom prst="rect">
+            <a:avLst/>
+          </a:prstGeom>
+          <a:noFill/>
+          <a:ln/>
+        </p:spPr>
+        <p:txBody>
+          <a:bodyPr wrap="square" rtlCol="0" anchor="t"/>
+          <a:lstStyle/>
+          <a:p>
+            <a:pPr indent="0" marL="0">
+              <a:buNone/>
+            </a:pPr>
+            <a:r>
+              <a:rPr lang="en-US" sz="1500" dirty="0">
+                <a:solidFill>
+                  <a:srgbClr val="1F2937"/>
+                </a:solidFill>
+                <a:latin typeface="Arial" pitchFamily="34" charset="0"/>
+                <a:ea typeface="Arial" pitchFamily="34" charset="-122"/>
+                <a:cs typeface="Arial" pitchFamily="34" charset="-120"/>
+              </a:rPr>
+              <a:t>só no fim do mês</a:t>
+            </a:r>
+            <a:endParaRPr lang="en-US" sz="1500" dirty="0"/>
+          </a:p>
+        </p:txBody>
+      </p:sp>
+      <p:sp>
+        <p:nvSpPr>
+          <p:cNvPr id="36" name="Shape 33"/>
+          <p:cNvSpPr/>
+          <p:nvPr/>
+        </p:nvSpPr>
+        <p:spPr>
+          <a:xfrm>
+            <a:off x="9038844" y="4572000"/>
+            <a:ext cx="2601468" cy="1463040"/>
+          </a:xfrm>
+          <a:prstGeom prst="roundRect">
+            <a:avLst>
+              <a:gd name="adj" fmla="val 5000"/>
+            </a:avLst>
+          </a:prstGeom>
+          <a:solidFill>
+            <a:srgbClr val="FFFFFF"/>
+          </a:solidFill>
+          <a:ln w="9525">
+            <a:solidFill>
+              <a:srgbClr val="D8E0EC"/>
+            </a:solidFill>
+            <a:prstDash val="solid"/>
+          </a:ln>
+        </p:spPr>
+      </p:sp>
+      <p:sp>
+        <p:nvSpPr>
+          <p:cNvPr id="37" name="Text 34"/>
+          <p:cNvSpPr/>
+          <p:nvPr/>
+        </p:nvSpPr>
+        <p:spPr>
+          <a:xfrm>
+            <a:off x="9176004" y="4663440"/>
+            <a:ext cx="365760" cy="365760"/>
+          </a:xfrm>
+          <a:prstGeom prst="rect">
+            <a:avLst/>
+          </a:prstGeom>
+          <a:noFill/>
+          <a:ln/>
+        </p:spPr>
+        <p:txBody>
+          <a:bodyPr wrap="square" rtlCol="0" anchor="ctr"/>
+          <a:lstStyle/>
+          <a:p>
+            <a:pPr indent="0" marL="0">
+              <a:buNone/>
+            </a:pPr>
+            <a:r>
+              <a:rPr lang="en-US" sz="1400" b="1" dirty="0">
+                <a:solidFill>
+                  <a:srgbClr val="F7A23B"/>
+                </a:solidFill>
+                <a:latin typeface="Arial" pitchFamily="34" charset="0"/>
+                <a:ea typeface="Arial" pitchFamily="34" charset="-122"/>
+                <a:cs typeface="Arial" pitchFamily="34" charset="-120"/>
+              </a:rPr>
+              <a:t>D</a:t>
+            </a:r>
+            <a:endParaRPr lang="en-US" sz="1400" dirty="0"/>
+          </a:p>
+        </p:txBody>
+      </p:sp>
+      <p:sp>
+        <p:nvSpPr>
+          <p:cNvPr id="38" name="Text 35"/>
+          <p:cNvSpPr/>
+          <p:nvPr/>
+        </p:nvSpPr>
+        <p:spPr>
+          <a:xfrm>
+            <a:off x="9176004" y="5029200"/>
+            <a:ext cx="2327148" cy="914400"/>
+          </a:xfrm>
+          <a:prstGeom prst="rect">
+            <a:avLst/>
+          </a:prstGeom>
+          <a:noFill/>
+          <a:ln/>
+        </p:spPr>
+        <p:txBody>
+          <a:bodyPr wrap="square" rtlCol="0" anchor="t"/>
+          <a:lstStyle/>
+          <a:p>
+            <a:pPr indent="0" marL="0">
+              <a:buNone/>
+            </a:pPr>
+            <a:r>
+              <a:rPr lang="en-US" sz="1500" dirty="0">
+                <a:solidFill>
+                  <a:srgbClr val="1F2937"/>
+                </a:solidFill>
+                <a:latin typeface="Arial" pitchFamily="34" charset="0"/>
+                <a:ea typeface="Arial" pitchFamily="34" charset="-122"/>
+                <a:cs typeface="Arial" pitchFamily="34" charset="-120"/>
+              </a:rPr>
+              <a:t>e-mail do cliente</a:t>
+            </a:r>
+            <a:endParaRPr lang="en-US" sz="1500" dirty="0"/>
+          </a:p>
+        </p:txBody>
+      </p:sp>
+      <p:sp>
+        <p:nvSpPr>
+          <p:cNvPr id="25" name="Slide Number Placeholder 0"/>
+          <p:cNvSpPr>
+            <a:spLocks noGrp="1"/>
+          </p:cNvSpPr>
+          <p:nvPr>
+            <p:ph type="sldNum" sz="quarter" idx="4294967295"/>
+          </p:nvPr>
+        </p:nvSpPr>
+        <p:spPr>
+          <a:xfrm>
+            <a:off x="11292840" y="6556248"/>
+            <a:ext cx="548640" cy="256032"/>
+          </a:xfrm>
+          <a:prstGeom prst="rect">
+            <a:avLst/>
+          </a:prstGeom>
+          <a:extLst>
+            <a:ext uri="{C572A759-6A51-4108-AA02-DFA0A04FC94B}">
+              <ma14:wrappingTextBoxFlag xmlns:ma14="http://schemas.microsoft.com/office/mac/drawingml/2011/main" val="0"/>
+            </a:ext>
+          </a:extLst>
+        </p:spPr>
+        <p:txBody>
+          <a:bodyPr/>
+          <a:lstStyle>
+            <a:lvl1pPr>
+              <a:defRPr sz="900">
+                <a:solidFill>
+                  <a:srgbClr val="1B3A6B"/>
+                </a:solidFill>
+                <a:latin typeface="Arial"/>
+                <a:ea typeface="Arial"/>
+                <a:cs typeface="Arial"/>
+              </a:defRPr>
+            </a:lvl1pPr>
+          </a:lstStyle>
+          <a:p>
+            <a:pPr algn="r"/>
+            <a:fld id="{F7021451-1387-4CA6-816F-3879F97B5CBC}" type="slidenum">
+              <a:rPr b="1" lang="en-US"/>
+              <a:t>32</a:t>
+            </a:fld>
+            <a:endParaRPr lang="en-US"/>
+          </a:p>
+        </p:txBody>
+      </p:sp>
+    </p:spTree>
+  </p:cSld>
+  <p:clrMapOvr>
+    <a:masterClrMapping/>
+  </p:clrMapOvr>
+</p:sld>
+</file>
+
+<file path=ppt/slides/slide33.xml><?xml version="1.0" encoding="utf-8"?>
+<p:sld xmlns:a="http://schemas.openxmlformats.org/drawingml/2006/main" xmlns:r="http://schemas.openxmlformats.org/officeDocument/2006/relationships" xmlns:p="http://schemas.openxmlformats.org/presentationml/2006/main">
+  <p:cSld name="Slide 33">
+    <p:bg>
+      <p:bgPr>
+        <a:solidFill>
+          <a:srgbClr val="F6F8FB"/>
+        </a:solidFill>
+      </p:bgPr>
+    </p:bg>
+    <p:spTree>
+      <p:nvGrpSpPr>
+        <p:cNvPr id="1" name=""/>
+        <p:cNvGrpSpPr/>
+        <p:nvPr/>
+      </p:nvGrpSpPr>
+      <p:grpSpPr>
+        <a:xfrm>
+          <a:off x="0" y="0"/>
+          <a:ext cx="0" cy="0"/>
+          <a:chOff x="0" y="0"/>
+          <a:chExt cx="0" cy="0"/>
+        </a:xfrm>
+      </p:grpSpPr>
+      <p:sp>
+        <p:nvSpPr>
+          <p:cNvPr id="2" name="Shape 0"/>
+          <p:cNvSpPr/>
+          <p:nvPr/>
+        </p:nvSpPr>
+        <p:spPr>
+          <a:xfrm>
+            <a:off x="0" y="6510528"/>
+            <a:ext cx="12191695" cy="347472"/>
+          </a:xfrm>
+          <a:prstGeom prst="rect">
+            <a:avLst/>
+          </a:prstGeom>
+          <a:solidFill>
+            <a:srgbClr val="FFFFFF"/>
+          </a:solidFill>
+          <a:ln w="6350">
+            <a:solidFill>
+              <a:srgbClr val="D8E0EC"/>
+            </a:solidFill>
+            <a:prstDash val="solid"/>
+          </a:ln>
+        </p:spPr>
+      </p:sp>
+      <p:pic>
+        <p:nvPicPr>
+          <p:cNvPr id="3" name="Image 0" descr="/www/wwwroot/rexar/gdsolar/docs/curso/slides/assets/logo-gdsolar.png">    </p:cNvPr>
+          <p:cNvPicPr>
+            <a:picLocks noChangeAspect="1"/>
+          </p:cNvPicPr>
+          <p:nvPr/>
+        </p:nvPicPr>
+        <p:blipFill>
+          <a:blip r:embed="rId1"/>
+          <a:stretch>
+            <a:fillRect/>
+          </a:stretch>
+        </p:blipFill>
+        <p:spPr>
+          <a:xfrm>
+            <a:off x="548640" y="6547104"/>
+            <a:ext cx="274320" cy="274320"/>
+          </a:xfrm>
+          <a:prstGeom prst="rect">
+            <a:avLst/>
+          </a:prstGeom>
+        </p:spPr>
+      </p:pic>
+      <p:sp>
+        <p:nvSpPr>
+          <p:cNvPr id="4" name="Text 1"/>
+          <p:cNvSpPr/>
+          <p:nvPr/>
+        </p:nvSpPr>
+        <p:spPr>
+          <a:xfrm>
+            <a:off x="886968" y="6528816"/>
+            <a:ext cx="6400800" cy="310896"/>
+          </a:xfrm>
+          <a:prstGeom prst="rect">
+            <a:avLst/>
+          </a:prstGeom>
+          <a:noFill/>
+          <a:ln/>
+        </p:spPr>
+        <p:txBody>
+          <a:bodyPr wrap="square" rtlCol="0" anchor="ctr"/>
+          <a:lstStyle/>
+          <a:p>
+            <a:pPr indent="0" marL="0">
+              <a:buNone/>
+            </a:pPr>
+            <a:r>
+              <a:rPr lang="en-US" sz="900" b="1" dirty="0">
+                <a:solidFill>
+                  <a:srgbClr val="64748B"/>
+                </a:solidFill>
+                <a:latin typeface="Arial" pitchFamily="34" charset="0"/>
+                <a:ea typeface="Arial" pitchFamily="34" charset="-122"/>
+                <a:cs typeface="Arial" pitchFamily="34" charset="-120"/>
+              </a:rPr>
+              <a:t>GD Solar  ·  Formação em Energia por Assinatura</a:t>
+            </a:r>
+            <a:endParaRPr lang="en-US" sz="900" dirty="0"/>
+          </a:p>
+        </p:txBody>
+      </p:sp>
+      <p:sp>
+        <p:nvSpPr>
+          <p:cNvPr id="5" name="Text 2"/>
+          <p:cNvSpPr/>
+          <p:nvPr/>
+        </p:nvSpPr>
+        <p:spPr>
+          <a:xfrm>
+            <a:off x="7132320" y="6528816"/>
+            <a:ext cx="4023360" cy="310896"/>
+          </a:xfrm>
+          <a:prstGeom prst="rect">
+            <a:avLst/>
+          </a:prstGeom>
+          <a:noFill/>
+          <a:ln/>
+        </p:spPr>
+        <p:txBody>
+          <a:bodyPr wrap="square" rtlCol="0" anchor="ctr"/>
+          <a:lstStyle/>
+          <a:p>
+            <a:pPr algn="r" indent="0" marL="0">
+              <a:buNone/>
+            </a:pPr>
+            <a:r>
+              <a:rPr lang="en-US" sz="900" dirty="0">
+                <a:solidFill>
+                  <a:srgbClr val="64748B"/>
+                </a:solidFill>
+                <a:latin typeface="Arial" pitchFamily="34" charset="0"/>
+                <a:ea typeface="Arial" pitchFamily="34" charset="-122"/>
+                <a:cs typeface="Arial" pitchFamily="34" charset="-120"/>
+              </a:rPr>
+              <a:t>M8 · Teste rápido</a:t>
+            </a:r>
+            <a:endParaRPr lang="en-US" sz="900" dirty="0"/>
+          </a:p>
+        </p:txBody>
+      </p:sp>
+      <p:sp>
+        <p:nvSpPr>
+          <p:cNvPr id="6" name="Shape 3"/>
+          <p:cNvSpPr/>
+          <p:nvPr/>
+        </p:nvSpPr>
+        <p:spPr>
+          <a:xfrm>
+            <a:off x="548640" y="384048"/>
+            <a:ext cx="82296" cy="658368"/>
+          </a:xfrm>
+          <a:prstGeom prst="rect">
+            <a:avLst/>
+          </a:prstGeom>
+          <a:solidFill>
+            <a:srgbClr val="F7A23B"/>
+          </a:solidFill>
+          <a:ln/>
+        </p:spPr>
+      </p:sp>
+      <p:sp>
+        <p:nvSpPr>
+          <p:cNvPr id="7" name="Text 4"/>
+          <p:cNvSpPr/>
+          <p:nvPr/>
+        </p:nvSpPr>
+        <p:spPr>
+          <a:xfrm>
+            <a:off x="777240" y="292608"/>
+            <a:ext cx="10972800" cy="274320"/>
+          </a:xfrm>
+          <a:prstGeom prst="rect">
+            <a:avLst/>
+          </a:prstGeom>
+          <a:noFill/>
+          <a:ln/>
+        </p:spPr>
+        <p:txBody>
+          <a:bodyPr wrap="square" rtlCol="0" anchor="ctr"/>
+          <a:lstStyle/>
+          <a:p>
+            <a:pPr indent="0" marL="0">
+              <a:buNone/>
+            </a:pPr>
+            <a:r>
+              <a:rPr lang="en-US" sz="1000" b="1" spc="100" kern="0" dirty="0">
+                <a:solidFill>
+                  <a:srgbClr val="F7A23B"/>
+                </a:solidFill>
+                <a:latin typeface="Arial" pitchFamily="34" charset="0"/>
+                <a:ea typeface="Arial" pitchFamily="34" charset="-122"/>
+                <a:cs typeface="Arial" pitchFamily="34" charset="-120"/>
+              </a:rPr>
+              <a:t>QUESTÕES 5–6 DE 7</a:t>
+            </a:r>
+            <a:endParaRPr lang="en-US" sz="1000" dirty="0"/>
+          </a:p>
+        </p:txBody>
+      </p:sp>
+      <p:sp>
+        <p:nvSpPr>
+          <p:cNvPr id="8" name="Text 5"/>
+          <p:cNvSpPr/>
+          <p:nvPr/>
+        </p:nvSpPr>
+        <p:spPr>
+          <a:xfrm>
+            <a:off x="777240" y="530352"/>
+            <a:ext cx="10881360" cy="566928"/>
+          </a:xfrm>
+          <a:prstGeom prst="rect">
+            <a:avLst/>
+          </a:prstGeom>
+          <a:noFill/>
+          <a:ln/>
+        </p:spPr>
+        <p:txBody>
+          <a:bodyPr wrap="square" rtlCol="0" anchor="ctr">
+            <a:normAutofit/>
+          </a:bodyPr>
+          <a:lstStyle/>
+          <a:p>
+            <a:pPr indent="0" marL="0">
+              <a:buNone/>
+            </a:pPr>
+            <a:r>
+              <a:rPr lang="en-US" sz="2600" b="1" dirty="0">
+                <a:solidFill>
+                  <a:srgbClr val="1B3A6B"/>
+                </a:solidFill>
+                <a:latin typeface="Arial" pitchFamily="34" charset="0"/>
+                <a:ea typeface="Arial" pitchFamily="34" charset="-122"/>
+                <a:cs typeface="Arial" pitchFamily="34" charset="-120"/>
+              </a:rPr>
+              <a:t>Teste rápido</a:t>
+            </a:r>
+            <a:endParaRPr lang="en-US" sz="2600" dirty="0"/>
+          </a:p>
+        </p:txBody>
+      </p:sp>
+      <p:sp>
+        <p:nvSpPr>
+          <p:cNvPr id="9" name="Shape 6"/>
+          <p:cNvSpPr/>
+          <p:nvPr/>
+        </p:nvSpPr>
+        <p:spPr>
+          <a:xfrm>
+            <a:off x="548640" y="1325880"/>
+            <a:ext cx="502920" cy="502920"/>
+          </a:xfrm>
+          <a:prstGeom prst="ellipse">
+            <a:avLst/>
+          </a:prstGeom>
+          <a:solidFill>
+            <a:srgbClr val="1B3A6B"/>
+          </a:solidFill>
+          <a:ln/>
+        </p:spPr>
+      </p:sp>
+      <p:sp>
+        <p:nvSpPr>
+          <p:cNvPr id="10" name="Text 7"/>
+          <p:cNvSpPr/>
+          <p:nvPr/>
+        </p:nvSpPr>
+        <p:spPr>
+          <a:xfrm>
+            <a:off x="548640" y="1325880"/>
+            <a:ext cx="502920" cy="502920"/>
+          </a:xfrm>
+          <a:prstGeom prst="rect">
+            <a:avLst/>
+          </a:prstGeom>
+          <a:noFill/>
+          <a:ln/>
+        </p:spPr>
+        <p:txBody>
+          <a:bodyPr wrap="square" rtlCol="0" anchor="ctr"/>
+          <a:lstStyle/>
+          <a:p>
+            <a:pPr algn="ctr" indent="0" marL="0">
+              <a:buNone/>
+            </a:pPr>
+            <a:r>
+              <a:rPr lang="en-US" sz="1600" b="1" dirty="0">
+                <a:solidFill>
+                  <a:srgbClr val="FFFFFF"/>
+                </a:solidFill>
+                <a:latin typeface="Arial" pitchFamily="34" charset="0"/>
+                <a:ea typeface="Arial" pitchFamily="34" charset="-122"/>
+                <a:cs typeface="Arial" pitchFamily="34" charset="-120"/>
+              </a:rPr>
+              <a:t>5</a:t>
+            </a:r>
+            <a:endParaRPr lang="en-US" sz="1600" dirty="0"/>
+          </a:p>
+        </p:txBody>
+      </p:sp>
+      <p:sp>
+        <p:nvSpPr>
+          <p:cNvPr id="11" name="Text 8"/>
+          <p:cNvSpPr/>
+          <p:nvPr/>
+        </p:nvSpPr>
+        <p:spPr>
+          <a:xfrm>
+            <a:off x="1234440" y="1280160"/>
+            <a:ext cx="10424160" cy="640080"/>
+          </a:xfrm>
+          <a:prstGeom prst="rect">
+            <a:avLst/>
+          </a:prstGeom>
+          <a:noFill/>
+          <a:ln/>
+        </p:spPr>
+        <p:txBody>
+          <a:bodyPr wrap="square" rtlCol="0" anchor="ctr"/>
+          <a:lstStyle/>
+          <a:p>
+            <a:pPr indent="0" marL="0">
+              <a:buNone/>
+            </a:pPr>
+            <a:r>
+              <a:rPr lang="en-US" sz="1800" b="1" dirty="0">
+                <a:solidFill>
+                  <a:srgbClr val="1B3A6B"/>
+                </a:solidFill>
+                <a:latin typeface="Arial" pitchFamily="34" charset="0"/>
+                <a:ea typeface="Arial" pitchFamily="34" charset="-122"/>
+                <a:cs typeface="Arial" pitchFamily="34" charset="-120"/>
+              </a:rPr>
+              <a:t>Alterar o vencimento de uma cobrança com boleto ativo:</a:t>
+            </a:r>
+            <a:endParaRPr lang="en-US" sz="1800" dirty="0"/>
+          </a:p>
+        </p:txBody>
+      </p:sp>
+      <p:sp>
+        <p:nvSpPr>
+          <p:cNvPr id="12" name="Shape 9"/>
+          <p:cNvSpPr/>
+          <p:nvPr/>
+        </p:nvSpPr>
+        <p:spPr>
+          <a:xfrm>
+            <a:off x="548640" y="2057400"/>
+            <a:ext cx="2601468" cy="1463040"/>
+          </a:xfrm>
+          <a:prstGeom prst="roundRect">
+            <a:avLst>
+              <a:gd name="adj" fmla="val 5000"/>
+            </a:avLst>
+          </a:prstGeom>
+          <a:solidFill>
+            <a:srgbClr val="FFFFFF"/>
+          </a:solidFill>
+          <a:ln w="9525">
+            <a:solidFill>
+              <a:srgbClr val="D8E0EC"/>
+            </a:solidFill>
+            <a:prstDash val="solid"/>
+          </a:ln>
+        </p:spPr>
+      </p:sp>
+      <p:sp>
+        <p:nvSpPr>
+          <p:cNvPr id="13" name="Text 10"/>
+          <p:cNvSpPr/>
+          <p:nvPr/>
+        </p:nvSpPr>
+        <p:spPr>
+          <a:xfrm>
+            <a:off x="685800" y="2148840"/>
+            <a:ext cx="365760" cy="365760"/>
+          </a:xfrm>
+          <a:prstGeom prst="rect">
+            <a:avLst/>
+          </a:prstGeom>
+          <a:noFill/>
+          <a:ln/>
+        </p:spPr>
+        <p:txBody>
+          <a:bodyPr wrap="square" rtlCol="0" anchor="ctr"/>
+          <a:lstStyle/>
+          <a:p>
+            <a:pPr indent="0" marL="0">
+              <a:buNone/>
+            </a:pPr>
+            <a:r>
+              <a:rPr lang="en-US" sz="1400" b="1" dirty="0">
+                <a:solidFill>
+                  <a:srgbClr val="F7A23B"/>
+                </a:solidFill>
+                <a:latin typeface="Arial" pitchFamily="34" charset="0"/>
+                <a:ea typeface="Arial" pitchFamily="34" charset="-122"/>
+                <a:cs typeface="Arial" pitchFamily="34" charset="-120"/>
+              </a:rPr>
+              <a:t>A</a:t>
+            </a:r>
+            <a:endParaRPr lang="en-US" sz="1400" dirty="0"/>
+          </a:p>
+        </p:txBody>
+      </p:sp>
+      <p:sp>
+        <p:nvSpPr>
+          <p:cNvPr id="14" name="Text 11"/>
+          <p:cNvSpPr/>
+          <p:nvPr/>
+        </p:nvSpPr>
+        <p:spPr>
+          <a:xfrm>
+            <a:off x="685800" y="2514600"/>
+            <a:ext cx="2327148" cy="914400"/>
+          </a:xfrm>
+          <a:prstGeom prst="rect">
+            <a:avLst/>
+          </a:prstGeom>
+          <a:noFill/>
+          <a:ln/>
+        </p:spPr>
+        <p:txBody>
+          <a:bodyPr wrap="square" rtlCol="0" anchor="t"/>
+          <a:lstStyle/>
+          <a:p>
+            <a:pPr indent="0" marL="0">
+              <a:buNone/>
+            </a:pPr>
+            <a:r>
+              <a:rPr lang="en-US" sz="1500" dirty="0">
+                <a:solidFill>
+                  <a:srgbClr val="1F2937"/>
+                </a:solidFill>
+                <a:latin typeface="Arial" pitchFamily="34" charset="0"/>
+                <a:ea typeface="Arial" pitchFamily="34" charset="-122"/>
+                <a:cs typeface="Arial" pitchFamily="34" charset="-120"/>
+              </a:rPr>
+              <a:t>cancela e reemite o boleto com a nova data</a:t>
+            </a:r>
+            <a:endParaRPr lang="en-US" sz="1500" dirty="0"/>
+          </a:p>
+        </p:txBody>
+      </p:sp>
+      <p:sp>
+        <p:nvSpPr>
+          <p:cNvPr id="15" name="Shape 12"/>
+          <p:cNvSpPr/>
+          <p:nvPr/>
+        </p:nvSpPr>
+        <p:spPr>
+          <a:xfrm>
+            <a:off x="3378708" y="2057400"/>
+            <a:ext cx="2601468" cy="1463040"/>
+          </a:xfrm>
+          <a:prstGeom prst="roundRect">
+            <a:avLst>
+              <a:gd name="adj" fmla="val 5000"/>
+            </a:avLst>
+          </a:prstGeom>
+          <a:solidFill>
+            <a:srgbClr val="FFFFFF"/>
+          </a:solidFill>
+          <a:ln w="9525">
+            <a:solidFill>
+              <a:srgbClr val="D8E0EC"/>
+            </a:solidFill>
+            <a:prstDash val="solid"/>
+          </a:ln>
+        </p:spPr>
+      </p:sp>
+      <p:sp>
+        <p:nvSpPr>
+          <p:cNvPr id="16" name="Text 13"/>
+          <p:cNvSpPr/>
+          <p:nvPr/>
+        </p:nvSpPr>
+        <p:spPr>
+          <a:xfrm>
+            <a:off x="3515868" y="2148840"/>
+            <a:ext cx="365760" cy="365760"/>
+          </a:xfrm>
+          <a:prstGeom prst="rect">
+            <a:avLst/>
+          </a:prstGeom>
+          <a:noFill/>
+          <a:ln/>
+        </p:spPr>
+        <p:txBody>
+          <a:bodyPr wrap="square" rtlCol="0" anchor="ctr"/>
+          <a:lstStyle/>
+          <a:p>
+            <a:pPr indent="0" marL="0">
+              <a:buNone/>
+            </a:pPr>
+            <a:r>
+              <a:rPr lang="en-US" sz="1400" b="1" dirty="0">
+                <a:solidFill>
+                  <a:srgbClr val="F7A23B"/>
+                </a:solidFill>
+                <a:latin typeface="Arial" pitchFamily="34" charset="0"/>
+                <a:ea typeface="Arial" pitchFamily="34" charset="-122"/>
+                <a:cs typeface="Arial" pitchFamily="34" charset="-120"/>
+              </a:rPr>
+              <a:t>B</a:t>
+            </a:r>
+            <a:endParaRPr lang="en-US" sz="1400" dirty="0"/>
+          </a:p>
+        </p:txBody>
+      </p:sp>
+      <p:sp>
+        <p:nvSpPr>
+          <p:cNvPr id="17" name="Text 14"/>
+          <p:cNvSpPr/>
+          <p:nvPr/>
+        </p:nvSpPr>
+        <p:spPr>
+          <a:xfrm>
+            <a:off x="3515868" y="2514600"/>
+            <a:ext cx="2327148" cy="914400"/>
+          </a:xfrm>
+          <a:prstGeom prst="rect">
+            <a:avLst/>
+          </a:prstGeom>
+          <a:noFill/>
+          <a:ln/>
+        </p:spPr>
+        <p:txBody>
+          <a:bodyPr wrap="square" rtlCol="0" anchor="t"/>
+          <a:lstStyle/>
+          <a:p>
+            <a:pPr indent="0" marL="0">
+              <a:buNone/>
+            </a:pPr>
+            <a:r>
+              <a:rPr lang="en-US" sz="1500" dirty="0">
+                <a:solidFill>
+                  <a:srgbClr val="1F2937"/>
+                </a:solidFill>
+                <a:latin typeface="Arial" pitchFamily="34" charset="0"/>
+                <a:ea typeface="Arial" pitchFamily="34" charset="-122"/>
+                <a:cs typeface="Arial" pitchFamily="34" charset="-120"/>
+              </a:rPr>
+              <a:t>não é permitido</a:t>
+            </a:r>
+            <a:endParaRPr lang="en-US" sz="1500" dirty="0"/>
+          </a:p>
+        </p:txBody>
+      </p:sp>
+      <p:sp>
+        <p:nvSpPr>
+          <p:cNvPr id="18" name="Shape 15"/>
+          <p:cNvSpPr/>
+          <p:nvPr/>
+        </p:nvSpPr>
+        <p:spPr>
+          <a:xfrm>
+            <a:off x="6208776" y="2057400"/>
+            <a:ext cx="2601468" cy="1463040"/>
+          </a:xfrm>
+          <a:prstGeom prst="roundRect">
+            <a:avLst>
+              <a:gd name="adj" fmla="val 5000"/>
+            </a:avLst>
+          </a:prstGeom>
+          <a:solidFill>
+            <a:srgbClr val="FFFFFF"/>
+          </a:solidFill>
+          <a:ln w="9525">
+            <a:solidFill>
+              <a:srgbClr val="D8E0EC"/>
+            </a:solidFill>
+            <a:prstDash val="solid"/>
+          </a:ln>
+        </p:spPr>
+      </p:sp>
+      <p:sp>
+        <p:nvSpPr>
+          <p:cNvPr id="19" name="Text 16"/>
+          <p:cNvSpPr/>
+          <p:nvPr/>
+        </p:nvSpPr>
+        <p:spPr>
+          <a:xfrm>
+            <a:off x="6345936" y="2148840"/>
+            <a:ext cx="365760" cy="365760"/>
+          </a:xfrm>
+          <a:prstGeom prst="rect">
+            <a:avLst/>
+          </a:prstGeom>
+          <a:noFill/>
+          <a:ln/>
+        </p:spPr>
+        <p:txBody>
+          <a:bodyPr wrap="square" rtlCol="0" anchor="ctr"/>
+          <a:lstStyle/>
+          <a:p>
+            <a:pPr indent="0" marL="0">
+              <a:buNone/>
+            </a:pPr>
+            <a:r>
+              <a:rPr lang="en-US" sz="1400" b="1" dirty="0">
+                <a:solidFill>
+                  <a:srgbClr val="F7A23B"/>
+                </a:solidFill>
+                <a:latin typeface="Arial" pitchFamily="34" charset="0"/>
+                <a:ea typeface="Arial" pitchFamily="34" charset="-122"/>
+                <a:cs typeface="Arial" pitchFamily="34" charset="-120"/>
+              </a:rPr>
+              <a:t>C</a:t>
+            </a:r>
+            <a:endParaRPr lang="en-US" sz="1400" dirty="0"/>
+          </a:p>
+        </p:txBody>
+      </p:sp>
+      <p:sp>
+        <p:nvSpPr>
+          <p:cNvPr id="20" name="Text 17"/>
+          <p:cNvSpPr/>
+          <p:nvPr/>
+        </p:nvSpPr>
+        <p:spPr>
+          <a:xfrm>
+            <a:off x="6345936" y="2514600"/>
+            <a:ext cx="2327148" cy="914400"/>
+          </a:xfrm>
+          <a:prstGeom prst="rect">
+            <a:avLst/>
+          </a:prstGeom>
+          <a:noFill/>
+          <a:ln/>
+        </p:spPr>
+        <p:txBody>
+          <a:bodyPr wrap="square" rtlCol="0" anchor="t"/>
+          <a:lstStyle/>
+          <a:p>
+            <a:pPr indent="0" marL="0">
+              <a:buNone/>
+            </a:pPr>
+            <a:r>
+              <a:rPr lang="en-US" sz="1500" dirty="0">
+                <a:solidFill>
+                  <a:srgbClr val="1F2937"/>
+                </a:solidFill>
+                <a:latin typeface="Arial" pitchFamily="34" charset="0"/>
+                <a:ea typeface="Arial" pitchFamily="34" charset="-122"/>
+                <a:cs typeface="Arial" pitchFamily="34" charset="-120"/>
+              </a:rPr>
+              <a:t>muda só na tela</a:t>
+            </a:r>
+            <a:endParaRPr lang="en-US" sz="1500" dirty="0"/>
+          </a:p>
+        </p:txBody>
+      </p:sp>
+      <p:sp>
+        <p:nvSpPr>
+          <p:cNvPr id="21" name="Shape 18"/>
+          <p:cNvSpPr/>
+          <p:nvPr/>
+        </p:nvSpPr>
+        <p:spPr>
+          <a:xfrm>
+            <a:off x="9038844" y="2057400"/>
+            <a:ext cx="2601468" cy="1463040"/>
+          </a:xfrm>
+          <a:prstGeom prst="roundRect">
+            <a:avLst>
+              <a:gd name="adj" fmla="val 5000"/>
+            </a:avLst>
+          </a:prstGeom>
+          <a:solidFill>
+            <a:srgbClr val="FFFFFF"/>
+          </a:solidFill>
+          <a:ln w="9525">
+            <a:solidFill>
+              <a:srgbClr val="D8E0EC"/>
+            </a:solidFill>
+            <a:prstDash val="solid"/>
+          </a:ln>
+        </p:spPr>
+      </p:sp>
+      <p:sp>
+        <p:nvSpPr>
+          <p:cNvPr id="22" name="Text 19"/>
+          <p:cNvSpPr/>
+          <p:nvPr/>
+        </p:nvSpPr>
+        <p:spPr>
+          <a:xfrm>
+            <a:off x="9176004" y="2148840"/>
+            <a:ext cx="365760" cy="365760"/>
+          </a:xfrm>
+          <a:prstGeom prst="rect">
+            <a:avLst/>
+          </a:prstGeom>
+          <a:noFill/>
+          <a:ln/>
+        </p:spPr>
+        <p:txBody>
+          <a:bodyPr wrap="square" rtlCol="0" anchor="ctr"/>
+          <a:lstStyle/>
+          <a:p>
+            <a:pPr indent="0" marL="0">
+              <a:buNone/>
+            </a:pPr>
+            <a:r>
+              <a:rPr lang="en-US" sz="1400" b="1" dirty="0">
+                <a:solidFill>
+                  <a:srgbClr val="F7A23B"/>
+                </a:solidFill>
+                <a:latin typeface="Arial" pitchFamily="34" charset="0"/>
+                <a:ea typeface="Arial" pitchFamily="34" charset="-122"/>
+                <a:cs typeface="Arial" pitchFamily="34" charset="-120"/>
+              </a:rPr>
+              <a:t>D</a:t>
+            </a:r>
+            <a:endParaRPr lang="en-US" sz="1400" dirty="0"/>
+          </a:p>
+        </p:txBody>
+      </p:sp>
+      <p:sp>
+        <p:nvSpPr>
+          <p:cNvPr id="23" name="Text 20"/>
+          <p:cNvSpPr/>
+          <p:nvPr/>
+        </p:nvSpPr>
+        <p:spPr>
+          <a:xfrm>
+            <a:off x="9176004" y="2514600"/>
+            <a:ext cx="2327148" cy="914400"/>
+          </a:xfrm>
+          <a:prstGeom prst="rect">
+            <a:avLst/>
+          </a:prstGeom>
+          <a:noFill/>
+          <a:ln/>
+        </p:spPr>
+        <p:txBody>
+          <a:bodyPr wrap="square" rtlCol="0" anchor="t"/>
+          <a:lstStyle/>
+          <a:p>
+            <a:pPr indent="0" marL="0">
+              <a:buNone/>
+            </a:pPr>
+            <a:r>
+              <a:rPr lang="en-US" sz="1500" dirty="0">
+                <a:solidFill>
+                  <a:srgbClr val="1F2937"/>
+                </a:solidFill>
+                <a:latin typeface="Arial" pitchFamily="34" charset="0"/>
+                <a:ea typeface="Arial" pitchFamily="34" charset="-122"/>
+                <a:cs typeface="Arial" pitchFamily="34" charset="-120"/>
+              </a:rPr>
+              <a:t>gera multa</a:t>
+            </a:r>
+            <a:endParaRPr lang="en-US" sz="1500" dirty="0"/>
+          </a:p>
+        </p:txBody>
+      </p:sp>
+      <p:sp>
+        <p:nvSpPr>
+          <p:cNvPr id="24" name="Shape 21"/>
+          <p:cNvSpPr/>
+          <p:nvPr/>
+        </p:nvSpPr>
+        <p:spPr>
+          <a:xfrm>
+            <a:off x="548640" y="3840480"/>
+            <a:ext cx="502920" cy="502920"/>
+          </a:xfrm>
+          <a:prstGeom prst="ellipse">
+            <a:avLst/>
+          </a:prstGeom>
+          <a:solidFill>
+            <a:srgbClr val="1B3A6B"/>
+          </a:solidFill>
+          <a:ln/>
+        </p:spPr>
+      </p:sp>
+      <p:sp>
+        <p:nvSpPr>
+          <p:cNvPr id="25" name="Text 22"/>
+          <p:cNvSpPr/>
+          <p:nvPr/>
+        </p:nvSpPr>
+        <p:spPr>
+          <a:xfrm>
+            <a:off x="548640" y="3840480"/>
+            <a:ext cx="502920" cy="502920"/>
+          </a:xfrm>
+          <a:prstGeom prst="rect">
+            <a:avLst/>
+          </a:prstGeom>
+          <a:noFill/>
+          <a:ln/>
+        </p:spPr>
+        <p:txBody>
+          <a:bodyPr wrap="square" rtlCol="0" anchor="ctr"/>
+          <a:lstStyle/>
+          <a:p>
+            <a:pPr algn="ctr" indent="0" marL="0">
+              <a:buNone/>
+            </a:pPr>
+            <a:r>
+              <a:rPr lang="en-US" sz="1600" b="1" dirty="0">
+                <a:solidFill>
+                  <a:srgbClr val="FFFFFF"/>
+                </a:solidFill>
+                <a:latin typeface="Arial" pitchFamily="34" charset="0"/>
+                <a:ea typeface="Arial" pitchFamily="34" charset="-122"/>
+                <a:cs typeface="Arial" pitchFamily="34" charset="-120"/>
+              </a:rPr>
+              <a:t>6</a:t>
+            </a:r>
+            <a:endParaRPr lang="en-US" sz="1600" dirty="0"/>
+          </a:p>
+        </p:txBody>
+      </p:sp>
+      <p:sp>
+        <p:nvSpPr>
+          <p:cNvPr id="26" name="Text 23"/>
+          <p:cNvSpPr/>
+          <p:nvPr/>
+        </p:nvSpPr>
+        <p:spPr>
+          <a:xfrm>
+            <a:off x="1234440" y="3794760"/>
+            <a:ext cx="10424160" cy="640080"/>
+          </a:xfrm>
+          <a:prstGeom prst="rect">
+            <a:avLst/>
+          </a:prstGeom>
+          <a:noFill/>
+          <a:ln/>
+        </p:spPr>
+        <p:txBody>
+          <a:bodyPr wrap="square" rtlCol="0" anchor="ctr"/>
+          <a:lstStyle/>
+          <a:p>
+            <a:pPr indent="0" marL="0">
+              <a:buNone/>
+            </a:pPr>
+            <a:r>
+              <a:rPr lang="en-US" sz="1800" b="1" dirty="0">
+                <a:solidFill>
+                  <a:srgbClr val="1B3A6B"/>
+                </a:solidFill>
+                <a:latin typeface="Arial" pitchFamily="34" charset="0"/>
+                <a:ea typeface="Arial" pitchFamily="34" charset="-122"/>
+                <a:cs typeface="Arial" pitchFamily="34" charset="-120"/>
+              </a:rPr>
+              <a:t>O lembrete por e-mail ao cliente é enviado:</a:t>
+            </a:r>
+            <a:endParaRPr lang="en-US" sz="1800" dirty="0"/>
+          </a:p>
+        </p:txBody>
+      </p:sp>
+      <p:sp>
+        <p:nvSpPr>
+          <p:cNvPr id="27" name="Shape 24"/>
+          <p:cNvSpPr/>
+          <p:nvPr/>
+        </p:nvSpPr>
+        <p:spPr>
+          <a:xfrm>
+            <a:off x="548640" y="4572000"/>
+            <a:ext cx="2601468" cy="1463040"/>
+          </a:xfrm>
+          <a:prstGeom prst="roundRect">
+            <a:avLst>
+              <a:gd name="adj" fmla="val 5000"/>
+            </a:avLst>
+          </a:prstGeom>
+          <a:solidFill>
+            <a:srgbClr val="FFFFFF"/>
+          </a:solidFill>
+          <a:ln w="9525">
+            <a:solidFill>
+              <a:srgbClr val="D8E0EC"/>
+            </a:solidFill>
+            <a:prstDash val="solid"/>
+          </a:ln>
+        </p:spPr>
+      </p:sp>
+      <p:sp>
+        <p:nvSpPr>
+          <p:cNvPr id="28" name="Text 25"/>
+          <p:cNvSpPr/>
+          <p:nvPr/>
+        </p:nvSpPr>
+        <p:spPr>
+          <a:xfrm>
+            <a:off x="685800" y="4663440"/>
+            <a:ext cx="365760" cy="365760"/>
+          </a:xfrm>
+          <a:prstGeom prst="rect">
+            <a:avLst/>
+          </a:prstGeom>
+          <a:noFill/>
+          <a:ln/>
+        </p:spPr>
+        <p:txBody>
+          <a:bodyPr wrap="square" rtlCol="0" anchor="ctr"/>
+          <a:lstStyle/>
+          <a:p>
+            <a:pPr indent="0" marL="0">
+              <a:buNone/>
+            </a:pPr>
+            <a:r>
+              <a:rPr lang="en-US" sz="1400" b="1" dirty="0">
+                <a:solidFill>
+                  <a:srgbClr val="F7A23B"/>
+                </a:solidFill>
+                <a:latin typeface="Arial" pitchFamily="34" charset="0"/>
+                <a:ea typeface="Arial" pitchFamily="34" charset="-122"/>
+                <a:cs typeface="Arial" pitchFamily="34" charset="-120"/>
+              </a:rPr>
+              <a:t>A</a:t>
+            </a:r>
+            <a:endParaRPr lang="en-US" sz="1400" dirty="0"/>
+          </a:p>
+        </p:txBody>
+      </p:sp>
+      <p:sp>
+        <p:nvSpPr>
+          <p:cNvPr id="29" name="Text 26"/>
+          <p:cNvSpPr/>
+          <p:nvPr/>
+        </p:nvSpPr>
+        <p:spPr>
+          <a:xfrm>
+            <a:off x="685800" y="5029200"/>
+            <a:ext cx="2327148" cy="914400"/>
+          </a:xfrm>
+          <a:prstGeom prst="rect">
+            <a:avLst/>
+          </a:prstGeom>
+          <a:noFill/>
+          <a:ln/>
+        </p:spPr>
+        <p:txBody>
+          <a:bodyPr wrap="square" rtlCol="0" anchor="t"/>
+          <a:lstStyle/>
+          <a:p>
+            <a:pPr indent="0" marL="0">
+              <a:buNone/>
+            </a:pPr>
+            <a:r>
+              <a:rPr lang="en-US" sz="1500" dirty="0">
+                <a:solidFill>
+                  <a:srgbClr val="1F2937"/>
+                </a:solidFill>
+                <a:latin typeface="Arial" pitchFamily="34" charset="0"/>
+                <a:ea typeface="Arial" pitchFamily="34" charset="-122"/>
+                <a:cs typeface="Arial" pitchFamily="34" charset="-120"/>
+              </a:rPr>
+              <a:t>3 dias antes do vencimento, se houver boleto/Pix pagável</a:t>
+            </a:r>
+            <a:endParaRPr lang="en-US" sz="1500" dirty="0"/>
+          </a:p>
+        </p:txBody>
+      </p:sp>
+      <p:sp>
+        <p:nvSpPr>
+          <p:cNvPr id="30" name="Shape 27"/>
+          <p:cNvSpPr/>
+          <p:nvPr/>
+        </p:nvSpPr>
+        <p:spPr>
+          <a:xfrm>
+            <a:off x="3378708" y="4572000"/>
+            <a:ext cx="2601468" cy="1463040"/>
+          </a:xfrm>
+          <a:prstGeom prst="roundRect">
+            <a:avLst>
+              <a:gd name="adj" fmla="val 5000"/>
+            </a:avLst>
+          </a:prstGeom>
+          <a:solidFill>
+            <a:srgbClr val="FFFFFF"/>
+          </a:solidFill>
+          <a:ln w="9525">
+            <a:solidFill>
+              <a:srgbClr val="D8E0EC"/>
+            </a:solidFill>
+            <a:prstDash val="solid"/>
+          </a:ln>
+        </p:spPr>
+      </p:sp>
+      <p:sp>
+        <p:nvSpPr>
+          <p:cNvPr id="31" name="Text 28"/>
+          <p:cNvSpPr/>
+          <p:nvPr/>
+        </p:nvSpPr>
+        <p:spPr>
+          <a:xfrm>
+            <a:off x="3515868" y="4663440"/>
+            <a:ext cx="365760" cy="365760"/>
+          </a:xfrm>
+          <a:prstGeom prst="rect">
+            <a:avLst/>
+          </a:prstGeom>
+          <a:noFill/>
+          <a:ln/>
+        </p:spPr>
+        <p:txBody>
+          <a:bodyPr wrap="square" rtlCol="0" anchor="ctr"/>
+          <a:lstStyle/>
+          <a:p>
+            <a:pPr indent="0" marL="0">
+              <a:buNone/>
+            </a:pPr>
+            <a:r>
+              <a:rPr lang="en-US" sz="1400" b="1" dirty="0">
+                <a:solidFill>
+                  <a:srgbClr val="F7A23B"/>
+                </a:solidFill>
+                <a:latin typeface="Arial" pitchFamily="34" charset="0"/>
+                <a:ea typeface="Arial" pitchFamily="34" charset="-122"/>
+                <a:cs typeface="Arial" pitchFamily="34" charset="-120"/>
+              </a:rPr>
+              <a:t>B</a:t>
+            </a:r>
+            <a:endParaRPr lang="en-US" sz="1400" dirty="0"/>
+          </a:p>
+        </p:txBody>
+      </p:sp>
+      <p:sp>
+        <p:nvSpPr>
+          <p:cNvPr id="32" name="Text 29"/>
+          <p:cNvSpPr/>
+          <p:nvPr/>
+        </p:nvSpPr>
+        <p:spPr>
+          <a:xfrm>
+            <a:off x="3515868" y="5029200"/>
+            <a:ext cx="2327148" cy="914400"/>
+          </a:xfrm>
+          <a:prstGeom prst="rect">
+            <a:avLst/>
+          </a:prstGeom>
+          <a:noFill/>
+          <a:ln/>
+        </p:spPr>
+        <p:txBody>
+          <a:bodyPr wrap="square" rtlCol="0" anchor="t"/>
+          <a:lstStyle/>
+          <a:p>
+            <a:pPr indent="0" marL="0">
+              <a:buNone/>
+            </a:pPr>
+            <a:r>
+              <a:rPr lang="en-US" sz="1500" dirty="0">
+                <a:solidFill>
+                  <a:srgbClr val="1F2937"/>
+                </a:solidFill>
+                <a:latin typeface="Arial" pitchFamily="34" charset="0"/>
+                <a:ea typeface="Arial" pitchFamily="34" charset="-122"/>
+                <a:cs typeface="Arial" pitchFamily="34" charset="-120"/>
+              </a:rPr>
+              <a:t>todo dia</a:t>
+            </a:r>
+            <a:endParaRPr lang="en-US" sz="1500" dirty="0"/>
+          </a:p>
+        </p:txBody>
+      </p:sp>
+      <p:sp>
+        <p:nvSpPr>
+          <p:cNvPr id="33" name="Shape 30"/>
+          <p:cNvSpPr/>
+          <p:nvPr/>
+        </p:nvSpPr>
+        <p:spPr>
+          <a:xfrm>
+            <a:off x="6208776" y="4572000"/>
+            <a:ext cx="2601468" cy="1463040"/>
+          </a:xfrm>
+          <a:prstGeom prst="roundRect">
+            <a:avLst>
+              <a:gd name="adj" fmla="val 5000"/>
+            </a:avLst>
+          </a:prstGeom>
+          <a:solidFill>
+            <a:srgbClr val="FFFFFF"/>
+          </a:solidFill>
+          <a:ln w="9525">
+            <a:solidFill>
+              <a:srgbClr val="D8E0EC"/>
+            </a:solidFill>
+            <a:prstDash val="solid"/>
+          </a:ln>
+        </p:spPr>
+      </p:sp>
+      <p:sp>
+        <p:nvSpPr>
+          <p:cNvPr id="34" name="Text 31"/>
+          <p:cNvSpPr/>
+          <p:nvPr/>
+        </p:nvSpPr>
+        <p:spPr>
+          <a:xfrm>
+            <a:off x="6345936" y="4663440"/>
+            <a:ext cx="365760" cy="365760"/>
+          </a:xfrm>
+          <a:prstGeom prst="rect">
+            <a:avLst/>
+          </a:prstGeom>
+          <a:noFill/>
+          <a:ln/>
+        </p:spPr>
+        <p:txBody>
+          <a:bodyPr wrap="square" rtlCol="0" anchor="ctr"/>
+          <a:lstStyle/>
+          <a:p>
+            <a:pPr indent="0" marL="0">
+              <a:buNone/>
+            </a:pPr>
+            <a:r>
+              <a:rPr lang="en-US" sz="1400" b="1" dirty="0">
+                <a:solidFill>
+                  <a:srgbClr val="F7A23B"/>
+                </a:solidFill>
+                <a:latin typeface="Arial" pitchFamily="34" charset="0"/>
+                <a:ea typeface="Arial" pitchFamily="34" charset="-122"/>
+                <a:cs typeface="Arial" pitchFamily="34" charset="-120"/>
+              </a:rPr>
+              <a:t>C</a:t>
+            </a:r>
+            <a:endParaRPr lang="en-US" sz="1400" dirty="0"/>
+          </a:p>
+        </p:txBody>
+      </p:sp>
+      <p:sp>
+        <p:nvSpPr>
+          <p:cNvPr id="35" name="Text 32"/>
+          <p:cNvSpPr/>
+          <p:nvPr/>
+        </p:nvSpPr>
+        <p:spPr>
+          <a:xfrm>
+            <a:off x="6345936" y="5029200"/>
+            <a:ext cx="2327148" cy="914400"/>
+          </a:xfrm>
+          <a:prstGeom prst="rect">
+            <a:avLst/>
+          </a:prstGeom>
+          <a:noFill/>
+          <a:ln/>
+        </p:spPr>
+        <p:txBody>
+          <a:bodyPr wrap="square" rtlCol="0" anchor="t"/>
+          <a:lstStyle/>
+          <a:p>
+            <a:pPr indent="0" marL="0">
+              <a:buNone/>
+            </a:pPr>
+            <a:r>
+              <a:rPr lang="en-US" sz="1500" dirty="0">
+                <a:solidFill>
+                  <a:srgbClr val="1F2937"/>
+                </a:solidFill>
+                <a:latin typeface="Arial" pitchFamily="34" charset="0"/>
+                <a:ea typeface="Arial" pitchFamily="34" charset="-122"/>
+                <a:cs typeface="Arial" pitchFamily="34" charset="-120"/>
+              </a:rPr>
+              <a:t>só depois de vencer</a:t>
+            </a:r>
+            <a:endParaRPr lang="en-US" sz="1500" dirty="0"/>
+          </a:p>
+        </p:txBody>
+      </p:sp>
+      <p:sp>
+        <p:nvSpPr>
+          <p:cNvPr id="36" name="Shape 33"/>
+          <p:cNvSpPr/>
+          <p:nvPr/>
+        </p:nvSpPr>
+        <p:spPr>
+          <a:xfrm>
+            <a:off x="9038844" y="4572000"/>
+            <a:ext cx="2601468" cy="1463040"/>
+          </a:xfrm>
+          <a:prstGeom prst="roundRect">
+            <a:avLst>
+              <a:gd name="adj" fmla="val 5000"/>
+            </a:avLst>
+          </a:prstGeom>
+          <a:solidFill>
+            <a:srgbClr val="FFFFFF"/>
+          </a:solidFill>
+          <a:ln w="9525">
+            <a:solidFill>
+              <a:srgbClr val="D8E0EC"/>
+            </a:solidFill>
+            <a:prstDash val="solid"/>
+          </a:ln>
+        </p:spPr>
+      </p:sp>
+      <p:sp>
+        <p:nvSpPr>
+          <p:cNvPr id="37" name="Text 34"/>
+          <p:cNvSpPr/>
+          <p:nvPr/>
+        </p:nvSpPr>
+        <p:spPr>
+          <a:xfrm>
+            <a:off x="9176004" y="4663440"/>
+            <a:ext cx="365760" cy="365760"/>
+          </a:xfrm>
+          <a:prstGeom prst="rect">
+            <a:avLst/>
+          </a:prstGeom>
+          <a:noFill/>
+          <a:ln/>
+        </p:spPr>
+        <p:txBody>
+          <a:bodyPr wrap="square" rtlCol="0" anchor="ctr"/>
+          <a:lstStyle/>
+          <a:p>
+            <a:pPr indent="0" marL="0">
+              <a:buNone/>
+            </a:pPr>
+            <a:r>
+              <a:rPr lang="en-US" sz="1400" b="1" dirty="0">
+                <a:solidFill>
+                  <a:srgbClr val="F7A23B"/>
+                </a:solidFill>
+                <a:latin typeface="Arial" pitchFamily="34" charset="0"/>
+                <a:ea typeface="Arial" pitchFamily="34" charset="-122"/>
+                <a:cs typeface="Arial" pitchFamily="34" charset="-120"/>
+              </a:rPr>
+              <a:t>D</a:t>
+            </a:r>
+            <a:endParaRPr lang="en-US" sz="1400" dirty="0"/>
+          </a:p>
+        </p:txBody>
+      </p:sp>
+      <p:sp>
+        <p:nvSpPr>
+          <p:cNvPr id="38" name="Text 35"/>
+          <p:cNvSpPr/>
+          <p:nvPr/>
+        </p:nvSpPr>
+        <p:spPr>
+          <a:xfrm>
+            <a:off x="9176004" y="5029200"/>
+            <a:ext cx="2327148" cy="914400"/>
+          </a:xfrm>
+          <a:prstGeom prst="rect">
+            <a:avLst/>
+          </a:prstGeom>
+          <a:noFill/>
+          <a:ln/>
+        </p:spPr>
+        <p:txBody>
+          <a:bodyPr wrap="square" rtlCol="0" anchor="t"/>
+          <a:lstStyle/>
+          <a:p>
+            <a:pPr indent="0" marL="0">
+              <a:buNone/>
+            </a:pPr>
+            <a:r>
+              <a:rPr lang="en-US" sz="1500" dirty="0">
+                <a:solidFill>
+                  <a:srgbClr val="1F2937"/>
+                </a:solidFill>
+                <a:latin typeface="Arial" pitchFamily="34" charset="0"/>
+                <a:ea typeface="Arial" pitchFamily="34" charset="-122"/>
+                <a:cs typeface="Arial" pitchFamily="34" charset="-120"/>
+              </a:rPr>
+              <a:t>nunca</a:t>
+            </a:r>
+            <a:endParaRPr lang="en-US" sz="1500" dirty="0"/>
+          </a:p>
+        </p:txBody>
+      </p:sp>
+      <p:sp>
+        <p:nvSpPr>
+          <p:cNvPr id="25" name="Slide Number Placeholder 0"/>
+          <p:cNvSpPr>
+            <a:spLocks noGrp="1"/>
+          </p:cNvSpPr>
+          <p:nvPr>
+            <p:ph type="sldNum" sz="quarter" idx="4294967295"/>
+          </p:nvPr>
+        </p:nvSpPr>
+        <p:spPr>
+          <a:xfrm>
+            <a:off x="11292840" y="6556248"/>
+            <a:ext cx="548640" cy="256032"/>
+          </a:xfrm>
+          <a:prstGeom prst="rect">
+            <a:avLst/>
+          </a:prstGeom>
+          <a:extLst>
+            <a:ext uri="{C572A759-6A51-4108-AA02-DFA0A04FC94B}">
+              <ma14:wrappingTextBoxFlag xmlns:ma14="http://schemas.microsoft.com/office/mac/drawingml/2011/main" val="0"/>
+            </a:ext>
+          </a:extLst>
+        </p:spPr>
+        <p:txBody>
+          <a:bodyPr/>
+          <a:lstStyle>
+            <a:lvl1pPr>
+              <a:defRPr sz="900">
+                <a:solidFill>
+                  <a:srgbClr val="1B3A6B"/>
+                </a:solidFill>
+                <a:latin typeface="Arial"/>
+                <a:ea typeface="Arial"/>
+                <a:cs typeface="Arial"/>
+              </a:defRPr>
+            </a:lvl1pPr>
+          </a:lstStyle>
+          <a:p>
+            <a:pPr algn="r"/>
+            <a:fld id="{F7021451-1387-4CA6-816F-3879F97B5CBC}" type="slidenum">
+              <a:rPr b="1" lang="en-US"/>
+              <a:t>33</a:t>
+            </a:fld>
+            <a:endParaRPr lang="en-US"/>
+          </a:p>
+        </p:txBody>
+      </p:sp>
+    </p:spTree>
+  </p:cSld>
+  <p:clrMapOvr>
+    <a:masterClrMapping/>
+  </p:clrMapOvr>
+</p:sld>
+</file>
+
+<file path=ppt/slides/slide34.xml><?xml version="1.0" encoding="utf-8"?>
+<p:sld xmlns:a="http://schemas.openxmlformats.org/drawingml/2006/main" xmlns:r="http://schemas.openxmlformats.org/officeDocument/2006/relationships" xmlns:p="http://schemas.openxmlformats.org/presentationml/2006/main">
+  <p:cSld name="Slide 34">
+    <p:bg>
+      <p:bgPr>
+        <a:solidFill>
+          <a:srgbClr val="F6F8FB"/>
+        </a:solidFill>
+      </p:bgPr>
+    </p:bg>
+    <p:spTree>
+      <p:nvGrpSpPr>
+        <p:cNvPr id="1" name=""/>
+        <p:cNvGrpSpPr/>
+        <p:nvPr/>
+      </p:nvGrpSpPr>
+      <p:grpSpPr>
+        <a:xfrm>
+          <a:off x="0" y="0"/>
+          <a:ext cx="0" cy="0"/>
+          <a:chOff x="0" y="0"/>
+          <a:chExt cx="0" cy="0"/>
+        </a:xfrm>
+      </p:grpSpPr>
+      <p:sp>
+        <p:nvSpPr>
+          <p:cNvPr id="2" name="Shape 0"/>
+          <p:cNvSpPr/>
+          <p:nvPr/>
+        </p:nvSpPr>
+        <p:spPr>
+          <a:xfrm>
+            <a:off x="0" y="6510528"/>
+            <a:ext cx="12191695" cy="347472"/>
+          </a:xfrm>
+          <a:prstGeom prst="rect">
+            <a:avLst/>
+          </a:prstGeom>
+          <a:solidFill>
+            <a:srgbClr val="FFFFFF"/>
+          </a:solidFill>
+          <a:ln w="6350">
+            <a:solidFill>
+              <a:srgbClr val="D8E0EC"/>
+            </a:solidFill>
+            <a:prstDash val="solid"/>
+          </a:ln>
+        </p:spPr>
+      </p:sp>
+      <p:pic>
+        <p:nvPicPr>
+          <p:cNvPr id="3" name="Image 0" descr="/www/wwwroot/rexar/gdsolar/docs/curso/slides/assets/logo-gdsolar.png">    </p:cNvPr>
+          <p:cNvPicPr>
+            <a:picLocks noChangeAspect="1"/>
+          </p:cNvPicPr>
+          <p:nvPr/>
+        </p:nvPicPr>
+        <p:blipFill>
+          <a:blip r:embed="rId1"/>
+          <a:stretch>
+            <a:fillRect/>
+          </a:stretch>
+        </p:blipFill>
+        <p:spPr>
+          <a:xfrm>
+            <a:off x="548640" y="6547104"/>
+            <a:ext cx="274320" cy="274320"/>
+          </a:xfrm>
+          <a:prstGeom prst="rect">
+            <a:avLst/>
+          </a:prstGeom>
+        </p:spPr>
+      </p:pic>
+      <p:sp>
+        <p:nvSpPr>
+          <p:cNvPr id="4" name="Text 1"/>
+          <p:cNvSpPr/>
+          <p:nvPr/>
+        </p:nvSpPr>
+        <p:spPr>
+          <a:xfrm>
+            <a:off x="886968" y="6528816"/>
+            <a:ext cx="6400800" cy="310896"/>
+          </a:xfrm>
+          <a:prstGeom prst="rect">
+            <a:avLst/>
+          </a:prstGeom>
+          <a:noFill/>
+          <a:ln/>
+        </p:spPr>
+        <p:txBody>
+          <a:bodyPr wrap="square" rtlCol="0" anchor="ctr"/>
+          <a:lstStyle/>
+          <a:p>
+            <a:pPr indent="0" marL="0">
+              <a:buNone/>
+            </a:pPr>
+            <a:r>
+              <a:rPr lang="en-US" sz="900" b="1" dirty="0">
+                <a:solidFill>
+                  <a:srgbClr val="64748B"/>
+                </a:solidFill>
+                <a:latin typeface="Arial" pitchFamily="34" charset="0"/>
+                <a:ea typeface="Arial" pitchFamily="34" charset="-122"/>
+                <a:cs typeface="Arial" pitchFamily="34" charset="-120"/>
+              </a:rPr>
+              <a:t>GD Solar  ·  Formação em Energia por Assinatura</a:t>
+            </a:r>
+            <a:endParaRPr lang="en-US" sz="900" dirty="0"/>
+          </a:p>
+        </p:txBody>
+      </p:sp>
+      <p:sp>
+        <p:nvSpPr>
+          <p:cNvPr id="5" name="Text 2"/>
+          <p:cNvSpPr/>
+          <p:nvPr/>
+        </p:nvSpPr>
+        <p:spPr>
+          <a:xfrm>
+            <a:off x="7132320" y="6528816"/>
+            <a:ext cx="4023360" cy="310896"/>
+          </a:xfrm>
+          <a:prstGeom prst="rect">
+            <a:avLst/>
+          </a:prstGeom>
+          <a:noFill/>
+          <a:ln/>
+        </p:spPr>
+        <p:txBody>
+          <a:bodyPr wrap="square" rtlCol="0" anchor="ctr"/>
+          <a:lstStyle/>
+          <a:p>
+            <a:pPr algn="r" indent="0" marL="0">
+              <a:buNone/>
+            </a:pPr>
+            <a:r>
+              <a:rPr lang="en-US" sz="900" dirty="0">
+                <a:solidFill>
+                  <a:srgbClr val="64748B"/>
+                </a:solidFill>
+                <a:latin typeface="Arial" pitchFamily="34" charset="0"/>
+                <a:ea typeface="Arial" pitchFamily="34" charset="-122"/>
+                <a:cs typeface="Arial" pitchFamily="34" charset="-120"/>
+              </a:rPr>
+              <a:t>M8 · Teste rápido</a:t>
+            </a:r>
+            <a:endParaRPr lang="en-US" sz="900" dirty="0"/>
+          </a:p>
+        </p:txBody>
+      </p:sp>
+      <p:sp>
+        <p:nvSpPr>
+          <p:cNvPr id="6" name="Shape 3"/>
+          <p:cNvSpPr/>
+          <p:nvPr/>
+        </p:nvSpPr>
+        <p:spPr>
+          <a:xfrm>
+            <a:off x="548640" y="384048"/>
+            <a:ext cx="82296" cy="658368"/>
+          </a:xfrm>
+          <a:prstGeom prst="rect">
+            <a:avLst/>
+          </a:prstGeom>
+          <a:solidFill>
+            <a:srgbClr val="F7A23B"/>
+          </a:solidFill>
+          <a:ln/>
+        </p:spPr>
+      </p:sp>
+      <p:sp>
+        <p:nvSpPr>
+          <p:cNvPr id="7" name="Text 4"/>
+          <p:cNvSpPr/>
+          <p:nvPr/>
+        </p:nvSpPr>
+        <p:spPr>
+          <a:xfrm>
+            <a:off x="777240" y="292608"/>
+            <a:ext cx="10972800" cy="274320"/>
+          </a:xfrm>
+          <a:prstGeom prst="rect">
+            <a:avLst/>
+          </a:prstGeom>
+          <a:noFill/>
+          <a:ln/>
+        </p:spPr>
+        <p:txBody>
+          <a:bodyPr wrap="square" rtlCol="0" anchor="ctr"/>
+          <a:lstStyle/>
+          <a:p>
+            <a:pPr indent="0" marL="0">
+              <a:buNone/>
+            </a:pPr>
+            <a:r>
+              <a:rPr lang="en-US" sz="1000" b="1" spc="100" kern="0" dirty="0">
+                <a:solidFill>
+                  <a:srgbClr val="F7A23B"/>
+                </a:solidFill>
+                <a:latin typeface="Arial" pitchFamily="34" charset="0"/>
+                <a:ea typeface="Arial" pitchFamily="34" charset="-122"/>
+                <a:cs typeface="Arial" pitchFamily="34" charset="-120"/>
+              </a:rPr>
+              <a:t>QUESTÕES 7–7 DE 7</a:t>
+            </a:r>
+            <a:endParaRPr lang="en-US" sz="1000" dirty="0"/>
+          </a:p>
+        </p:txBody>
+      </p:sp>
+      <p:sp>
+        <p:nvSpPr>
+          <p:cNvPr id="8" name="Text 5"/>
+          <p:cNvSpPr/>
+          <p:nvPr/>
+        </p:nvSpPr>
+        <p:spPr>
+          <a:xfrm>
+            <a:off x="777240" y="530352"/>
+            <a:ext cx="10881360" cy="566928"/>
+          </a:xfrm>
+          <a:prstGeom prst="rect">
+            <a:avLst/>
+          </a:prstGeom>
+          <a:noFill/>
+          <a:ln/>
+        </p:spPr>
+        <p:txBody>
+          <a:bodyPr wrap="square" rtlCol="0" anchor="ctr">
+            <a:normAutofit/>
+          </a:bodyPr>
+          <a:lstStyle/>
+          <a:p>
+            <a:pPr indent="0" marL="0">
+              <a:buNone/>
+            </a:pPr>
+            <a:r>
+              <a:rPr lang="en-US" sz="2600" b="1" dirty="0">
+                <a:solidFill>
+                  <a:srgbClr val="1B3A6B"/>
+                </a:solidFill>
+                <a:latin typeface="Arial" pitchFamily="34" charset="0"/>
+                <a:ea typeface="Arial" pitchFamily="34" charset="-122"/>
+                <a:cs typeface="Arial" pitchFamily="34" charset="-120"/>
+              </a:rPr>
+              <a:t>Teste rápido</a:t>
+            </a:r>
+            <a:endParaRPr lang="en-US" sz="2600" dirty="0"/>
+          </a:p>
+        </p:txBody>
+      </p:sp>
+      <p:sp>
+        <p:nvSpPr>
+          <p:cNvPr id="9" name="Shape 6"/>
+          <p:cNvSpPr/>
+          <p:nvPr/>
+        </p:nvSpPr>
+        <p:spPr>
+          <a:xfrm>
+            <a:off x="548640" y="1325880"/>
+            <a:ext cx="502920" cy="502920"/>
+          </a:xfrm>
+          <a:prstGeom prst="ellipse">
+            <a:avLst/>
+          </a:prstGeom>
+          <a:solidFill>
+            <a:srgbClr val="1B3A6B"/>
+          </a:solidFill>
+          <a:ln/>
+        </p:spPr>
+      </p:sp>
+      <p:sp>
+        <p:nvSpPr>
+          <p:cNvPr id="10" name="Text 7"/>
+          <p:cNvSpPr/>
+          <p:nvPr/>
+        </p:nvSpPr>
+        <p:spPr>
+          <a:xfrm>
+            <a:off x="548640" y="1325880"/>
+            <a:ext cx="502920" cy="502920"/>
+          </a:xfrm>
+          <a:prstGeom prst="rect">
+            <a:avLst/>
+          </a:prstGeom>
+          <a:noFill/>
+          <a:ln/>
+        </p:spPr>
+        <p:txBody>
+          <a:bodyPr wrap="square" rtlCol="0" anchor="ctr"/>
+          <a:lstStyle/>
+          <a:p>
+            <a:pPr algn="ctr" indent="0" marL="0">
+              <a:buNone/>
+            </a:pPr>
+            <a:r>
+              <a:rPr lang="en-US" sz="1600" b="1" dirty="0">
+                <a:solidFill>
+                  <a:srgbClr val="FFFFFF"/>
+                </a:solidFill>
+                <a:latin typeface="Arial" pitchFamily="34" charset="0"/>
+                <a:ea typeface="Arial" pitchFamily="34" charset="-122"/>
+                <a:cs typeface="Arial" pitchFamily="34" charset="-120"/>
+              </a:rPr>
+              <a:t>7</a:t>
+            </a:r>
+            <a:endParaRPr lang="en-US" sz="1600" dirty="0"/>
+          </a:p>
+        </p:txBody>
+      </p:sp>
+      <p:sp>
+        <p:nvSpPr>
+          <p:cNvPr id="11" name="Text 8"/>
+          <p:cNvSpPr/>
+          <p:nvPr/>
+        </p:nvSpPr>
+        <p:spPr>
+          <a:xfrm>
+            <a:off x="1234440" y="1280160"/>
+            <a:ext cx="10424160" cy="640080"/>
+          </a:xfrm>
+          <a:prstGeom prst="rect">
+            <a:avLst/>
+          </a:prstGeom>
+          <a:noFill/>
+          <a:ln/>
+        </p:spPr>
+        <p:txBody>
+          <a:bodyPr wrap="square" rtlCol="0" anchor="ctr"/>
+          <a:lstStyle/>
+          <a:p>
+            <a:pPr indent="0" marL="0">
+              <a:buNone/>
+            </a:pPr>
+            <a:r>
+              <a:rPr lang="en-US" sz="1800" b="1" dirty="0">
+                <a:solidFill>
+                  <a:srgbClr val="1B3A6B"/>
+                </a:solidFill>
+                <a:latin typeface="Arial" pitchFamily="34" charset="0"/>
+                <a:ea typeface="Arial" pitchFamily="34" charset="-122"/>
+                <a:cs typeface="Arial" pitchFamily="34" charset="-120"/>
+              </a:rPr>
+              <a:t>Comissão e inadimplência: o melhor momento para pagar comissão é:</a:t>
+            </a:r>
+            <a:endParaRPr lang="en-US" sz="1800" dirty="0"/>
+          </a:p>
+        </p:txBody>
+      </p:sp>
+      <p:sp>
+        <p:nvSpPr>
+          <p:cNvPr id="12" name="Shape 9"/>
+          <p:cNvSpPr/>
+          <p:nvPr/>
+        </p:nvSpPr>
+        <p:spPr>
+          <a:xfrm>
+            <a:off x="548640" y="2057400"/>
+            <a:ext cx="2601468" cy="1463040"/>
+          </a:xfrm>
+          <a:prstGeom prst="roundRect">
+            <a:avLst>
+              <a:gd name="adj" fmla="val 5000"/>
+            </a:avLst>
+          </a:prstGeom>
+          <a:solidFill>
+            <a:srgbClr val="FFFFFF"/>
+          </a:solidFill>
+          <a:ln w="9525">
+            <a:solidFill>
+              <a:srgbClr val="D8E0EC"/>
+            </a:solidFill>
+            <a:prstDash val="solid"/>
+          </a:ln>
+        </p:spPr>
+      </p:sp>
+      <p:sp>
+        <p:nvSpPr>
+          <p:cNvPr id="13" name="Text 10"/>
+          <p:cNvSpPr/>
+          <p:nvPr/>
+        </p:nvSpPr>
+        <p:spPr>
+          <a:xfrm>
+            <a:off x="685800" y="2148840"/>
+            <a:ext cx="365760" cy="365760"/>
+          </a:xfrm>
+          <a:prstGeom prst="rect">
+            <a:avLst/>
+          </a:prstGeom>
+          <a:noFill/>
+          <a:ln/>
+        </p:spPr>
+        <p:txBody>
+          <a:bodyPr wrap="square" rtlCol="0" anchor="ctr"/>
+          <a:lstStyle/>
+          <a:p>
+            <a:pPr indent="0" marL="0">
+              <a:buNone/>
+            </a:pPr>
+            <a:r>
+              <a:rPr lang="en-US" sz="1400" b="1" dirty="0">
+                <a:solidFill>
+                  <a:srgbClr val="F7A23B"/>
+                </a:solidFill>
+                <a:latin typeface="Arial" pitchFamily="34" charset="0"/>
+                <a:ea typeface="Arial" pitchFamily="34" charset="-122"/>
+                <a:cs typeface="Arial" pitchFamily="34" charset="-120"/>
+              </a:rPr>
+              <a:t>A</a:t>
+            </a:r>
+            <a:endParaRPr lang="en-US" sz="1400" dirty="0"/>
+          </a:p>
+        </p:txBody>
+      </p:sp>
+      <p:sp>
+        <p:nvSpPr>
+          <p:cNvPr id="14" name="Text 11"/>
+          <p:cNvSpPr/>
+          <p:nvPr/>
+        </p:nvSpPr>
+        <p:spPr>
+          <a:xfrm>
+            <a:off x="685800" y="2514600"/>
+            <a:ext cx="2327148" cy="914400"/>
+          </a:xfrm>
+          <a:prstGeom prst="rect">
+            <a:avLst/>
+          </a:prstGeom>
+          <a:noFill/>
+          <a:ln/>
+        </p:spPr>
+        <p:txBody>
+          <a:bodyPr wrap="square" rtlCol="0" anchor="t"/>
+          <a:lstStyle/>
+          <a:p>
+            <a:pPr indent="0" marL="0">
+              <a:buNone/>
+            </a:pPr>
+            <a:r>
+              <a:rPr lang="en-US" sz="1500" dirty="0">
+                <a:solidFill>
+                  <a:srgbClr val="1F2937"/>
+                </a:solidFill>
+                <a:latin typeface="Arial" pitchFamily="34" charset="0"/>
+                <a:ea typeface="Arial" pitchFamily="34" charset="-122"/>
+                <a:cs typeface="Arial" pitchFamily="34" charset="-120"/>
+              </a:rPr>
+              <a:t>proposta enviada</a:t>
+            </a:r>
+            <a:endParaRPr lang="en-US" sz="1500" dirty="0"/>
+          </a:p>
+        </p:txBody>
+      </p:sp>
+      <p:sp>
+        <p:nvSpPr>
+          <p:cNvPr id="15" name="Shape 12"/>
+          <p:cNvSpPr/>
+          <p:nvPr/>
+        </p:nvSpPr>
+        <p:spPr>
+          <a:xfrm>
+            <a:off x="3378708" y="2057400"/>
+            <a:ext cx="2601468" cy="1463040"/>
+          </a:xfrm>
+          <a:prstGeom prst="roundRect">
+            <a:avLst>
+              <a:gd name="adj" fmla="val 5000"/>
+            </a:avLst>
+          </a:prstGeom>
+          <a:solidFill>
+            <a:srgbClr val="FFFFFF"/>
+          </a:solidFill>
+          <a:ln w="9525">
+            <a:solidFill>
+              <a:srgbClr val="D8E0EC"/>
+            </a:solidFill>
+            <a:prstDash val="solid"/>
+          </a:ln>
+        </p:spPr>
+      </p:sp>
+      <p:sp>
+        <p:nvSpPr>
+          <p:cNvPr id="16" name="Text 13"/>
+          <p:cNvSpPr/>
+          <p:nvPr/>
+        </p:nvSpPr>
+        <p:spPr>
+          <a:xfrm>
+            <a:off x="3515868" y="2148840"/>
+            <a:ext cx="365760" cy="365760"/>
+          </a:xfrm>
+          <a:prstGeom prst="rect">
+            <a:avLst/>
+          </a:prstGeom>
+          <a:noFill/>
+          <a:ln/>
+        </p:spPr>
+        <p:txBody>
+          <a:bodyPr wrap="square" rtlCol="0" anchor="ctr"/>
+          <a:lstStyle/>
+          <a:p>
+            <a:pPr indent="0" marL="0">
+              <a:buNone/>
+            </a:pPr>
+            <a:r>
+              <a:rPr lang="en-US" sz="1400" b="1" dirty="0">
+                <a:solidFill>
+                  <a:srgbClr val="F7A23B"/>
+                </a:solidFill>
+                <a:latin typeface="Arial" pitchFamily="34" charset="0"/>
+                <a:ea typeface="Arial" pitchFamily="34" charset="-122"/>
+                <a:cs typeface="Arial" pitchFamily="34" charset="-120"/>
+              </a:rPr>
+              <a:t>B</a:t>
+            </a:r>
+            <a:endParaRPr lang="en-US" sz="1400" dirty="0"/>
+          </a:p>
+        </p:txBody>
+      </p:sp>
+      <p:sp>
+        <p:nvSpPr>
+          <p:cNvPr id="17" name="Text 14"/>
+          <p:cNvSpPr/>
+          <p:nvPr/>
+        </p:nvSpPr>
+        <p:spPr>
+          <a:xfrm>
+            <a:off x="3515868" y="2514600"/>
+            <a:ext cx="2327148" cy="914400"/>
+          </a:xfrm>
+          <a:prstGeom prst="rect">
+            <a:avLst/>
+          </a:prstGeom>
+          <a:noFill/>
+          <a:ln/>
+        </p:spPr>
+        <p:txBody>
+          <a:bodyPr wrap="square" rtlCol="0" anchor="t"/>
+          <a:lstStyle/>
+          <a:p>
+            <a:pPr indent="0" marL="0">
+              <a:buNone/>
+            </a:pPr>
+            <a:r>
+              <a:rPr lang="en-US" sz="1500" dirty="0">
+                <a:solidFill>
+                  <a:srgbClr val="1F2937"/>
+                </a:solidFill>
+                <a:latin typeface="Arial" pitchFamily="34" charset="0"/>
+                <a:ea typeface="Arial" pitchFamily="34" charset="-122"/>
+                <a:cs typeface="Arial" pitchFamily="34" charset="-120"/>
+              </a:rPr>
+              <a:t>primeira cobrança paga</a:t>
+            </a:r>
+            <a:endParaRPr lang="en-US" sz="1500" dirty="0"/>
+          </a:p>
+        </p:txBody>
+      </p:sp>
+      <p:sp>
+        <p:nvSpPr>
+          <p:cNvPr id="18" name="Shape 15"/>
+          <p:cNvSpPr/>
+          <p:nvPr/>
+        </p:nvSpPr>
+        <p:spPr>
+          <a:xfrm>
+            <a:off x="6208776" y="2057400"/>
+            <a:ext cx="2601468" cy="1463040"/>
+          </a:xfrm>
+          <a:prstGeom prst="roundRect">
+            <a:avLst>
+              <a:gd name="adj" fmla="val 5000"/>
+            </a:avLst>
+          </a:prstGeom>
+          <a:solidFill>
+            <a:srgbClr val="FFFFFF"/>
+          </a:solidFill>
+          <a:ln w="9525">
+            <a:solidFill>
+              <a:srgbClr val="D8E0EC"/>
+            </a:solidFill>
+            <a:prstDash val="solid"/>
+          </a:ln>
+        </p:spPr>
+      </p:sp>
+      <p:sp>
+        <p:nvSpPr>
+          <p:cNvPr id="19" name="Text 16"/>
+          <p:cNvSpPr/>
+          <p:nvPr/>
+        </p:nvSpPr>
+        <p:spPr>
+          <a:xfrm>
+            <a:off x="6345936" y="2148840"/>
+            <a:ext cx="365760" cy="365760"/>
+          </a:xfrm>
+          <a:prstGeom prst="rect">
+            <a:avLst/>
+          </a:prstGeom>
+          <a:noFill/>
+          <a:ln/>
+        </p:spPr>
+        <p:txBody>
+          <a:bodyPr wrap="square" rtlCol="0" anchor="ctr"/>
+          <a:lstStyle/>
+          <a:p>
+            <a:pPr indent="0" marL="0">
+              <a:buNone/>
+            </a:pPr>
+            <a:r>
+              <a:rPr lang="en-US" sz="1400" b="1" dirty="0">
+                <a:solidFill>
+                  <a:srgbClr val="F7A23B"/>
+                </a:solidFill>
+                <a:latin typeface="Arial" pitchFamily="34" charset="0"/>
+                <a:ea typeface="Arial" pitchFamily="34" charset="-122"/>
+                <a:cs typeface="Arial" pitchFamily="34" charset="-120"/>
+              </a:rPr>
+              <a:t>C</a:t>
+            </a:r>
+            <a:endParaRPr lang="en-US" sz="1400" dirty="0"/>
+          </a:p>
+        </p:txBody>
+      </p:sp>
+      <p:sp>
+        <p:nvSpPr>
+          <p:cNvPr id="20" name="Text 17"/>
+          <p:cNvSpPr/>
+          <p:nvPr/>
+        </p:nvSpPr>
+        <p:spPr>
+          <a:xfrm>
+            <a:off x="6345936" y="2514600"/>
+            <a:ext cx="2327148" cy="914400"/>
+          </a:xfrm>
+          <a:prstGeom prst="rect">
+            <a:avLst/>
+          </a:prstGeom>
+          <a:noFill/>
+          <a:ln/>
+        </p:spPr>
+        <p:txBody>
+          <a:bodyPr wrap="square" rtlCol="0" anchor="t"/>
+          <a:lstStyle/>
+          <a:p>
+            <a:pPr indent="0" marL="0">
+              <a:buNone/>
+            </a:pPr>
+            <a:r>
+              <a:rPr lang="en-US" sz="1500" dirty="0">
+                <a:solidFill>
+                  <a:srgbClr val="1F2937"/>
+                </a:solidFill>
+                <a:latin typeface="Arial" pitchFamily="34" charset="0"/>
+                <a:ea typeface="Arial" pitchFamily="34" charset="-122"/>
+                <a:cs typeface="Arial" pitchFamily="34" charset="-120"/>
+              </a:rPr>
+              <a:t>contrato emitido</a:t>
+            </a:r>
+            <a:endParaRPr lang="en-US" sz="1500" dirty="0"/>
+          </a:p>
+        </p:txBody>
+      </p:sp>
+      <p:sp>
+        <p:nvSpPr>
+          <p:cNvPr id="21" name="Shape 18"/>
+          <p:cNvSpPr/>
+          <p:nvPr/>
+        </p:nvSpPr>
+        <p:spPr>
+          <a:xfrm>
+            <a:off x="9038844" y="2057400"/>
+            <a:ext cx="2601468" cy="1463040"/>
+          </a:xfrm>
+          <a:prstGeom prst="roundRect">
+            <a:avLst>
+              <a:gd name="adj" fmla="val 5000"/>
+            </a:avLst>
+          </a:prstGeom>
+          <a:solidFill>
+            <a:srgbClr val="FFFFFF"/>
+          </a:solidFill>
+          <a:ln w="9525">
+            <a:solidFill>
+              <a:srgbClr val="D8E0EC"/>
+            </a:solidFill>
+            <a:prstDash val="solid"/>
+          </a:ln>
+        </p:spPr>
+      </p:sp>
+      <p:sp>
+        <p:nvSpPr>
+          <p:cNvPr id="22" name="Text 19"/>
+          <p:cNvSpPr/>
+          <p:nvPr/>
+        </p:nvSpPr>
+        <p:spPr>
+          <a:xfrm>
+            <a:off x="9176004" y="2148840"/>
+            <a:ext cx="365760" cy="365760"/>
+          </a:xfrm>
+          <a:prstGeom prst="rect">
+            <a:avLst/>
+          </a:prstGeom>
+          <a:noFill/>
+          <a:ln/>
+        </p:spPr>
+        <p:txBody>
+          <a:bodyPr wrap="square" rtlCol="0" anchor="ctr"/>
+          <a:lstStyle/>
+          <a:p>
+            <a:pPr indent="0" marL="0">
+              <a:buNone/>
+            </a:pPr>
+            <a:r>
+              <a:rPr lang="en-US" sz="1400" b="1" dirty="0">
+                <a:solidFill>
+                  <a:srgbClr val="F7A23B"/>
+                </a:solidFill>
+                <a:latin typeface="Arial" pitchFamily="34" charset="0"/>
+                <a:ea typeface="Arial" pitchFamily="34" charset="-122"/>
+                <a:cs typeface="Arial" pitchFamily="34" charset="-120"/>
+              </a:rPr>
+              <a:t>D</a:t>
+            </a:r>
+            <a:endParaRPr lang="en-US" sz="1400" dirty="0"/>
+          </a:p>
+        </p:txBody>
+      </p:sp>
+      <p:sp>
+        <p:nvSpPr>
+          <p:cNvPr id="23" name="Text 20"/>
+          <p:cNvSpPr/>
+          <p:nvPr/>
+        </p:nvSpPr>
+        <p:spPr>
+          <a:xfrm>
+            <a:off x="9176004" y="2514600"/>
+            <a:ext cx="2327148" cy="914400"/>
+          </a:xfrm>
+          <a:prstGeom prst="rect">
+            <a:avLst/>
+          </a:prstGeom>
+          <a:noFill/>
+          <a:ln/>
+        </p:spPr>
+        <p:txBody>
+          <a:bodyPr wrap="square" rtlCol="0" anchor="t"/>
+          <a:lstStyle/>
+          <a:p>
+            <a:pPr indent="0" marL="0">
+              <a:buNone/>
+            </a:pPr>
+            <a:r>
+              <a:rPr lang="en-US" sz="1500" dirty="0">
+                <a:solidFill>
+                  <a:srgbClr val="1F2937"/>
+                </a:solidFill>
+                <a:latin typeface="Arial" pitchFamily="34" charset="0"/>
+                <a:ea typeface="Arial" pitchFamily="34" charset="-122"/>
+                <a:cs typeface="Arial" pitchFamily="34" charset="-120"/>
+              </a:rPr>
+              <a:t>nunca</a:t>
+            </a:r>
+            <a:endParaRPr lang="en-US" sz="1500" dirty="0"/>
+          </a:p>
+        </p:txBody>
+      </p:sp>
+      <p:sp>
+        <p:nvSpPr>
+          <p:cNvPr id="25" name="Slide Number Placeholder 0"/>
+          <p:cNvSpPr>
+            <a:spLocks noGrp="1"/>
+          </p:cNvSpPr>
+          <p:nvPr>
+            <p:ph type="sldNum" sz="quarter" idx="4294967295"/>
+          </p:nvPr>
+        </p:nvSpPr>
+        <p:spPr>
+          <a:xfrm>
+            <a:off x="11292840" y="6556248"/>
+            <a:ext cx="548640" cy="256032"/>
+          </a:xfrm>
+          <a:prstGeom prst="rect">
+            <a:avLst/>
+          </a:prstGeom>
+          <a:extLst>
+            <a:ext uri="{C572A759-6A51-4108-AA02-DFA0A04FC94B}">
+              <ma14:wrappingTextBoxFlag xmlns:ma14="http://schemas.microsoft.com/office/mac/drawingml/2011/main" val="0"/>
+            </a:ext>
+          </a:extLst>
+        </p:spPr>
+        <p:txBody>
+          <a:bodyPr/>
+          <a:lstStyle>
+            <a:lvl1pPr>
+              <a:defRPr sz="900">
+                <a:solidFill>
+                  <a:srgbClr val="1B3A6B"/>
+                </a:solidFill>
+                <a:latin typeface="Arial"/>
+                <a:ea typeface="Arial"/>
+                <a:cs typeface="Arial"/>
+              </a:defRPr>
+            </a:lvl1pPr>
+          </a:lstStyle>
+          <a:p>
+            <a:pPr algn="r"/>
+            <a:fld id="{F7021451-1387-4CA6-816F-3879F97B5CBC}" type="slidenum">
+              <a:rPr b="1" lang="en-US"/>
+              <a:t>34</a:t>
+            </a:fld>
+            <a:endParaRPr lang="en-US"/>
+          </a:p>
+        </p:txBody>
+      </p:sp>
+    </p:spTree>
+  </p:cSld>
+  <p:clrMapOvr>
+    <a:masterClrMapping/>
+  </p:clrMapOvr>
+</p:sld>
+</file>
+
+<file path=ppt/slides/slide35.xml><?xml version="1.0" encoding="utf-8"?>
+<p:sld xmlns:a="http://schemas.openxmlformats.org/drawingml/2006/main" xmlns:r="http://schemas.openxmlformats.org/officeDocument/2006/relationships" xmlns:p="http://schemas.openxmlformats.org/presentationml/2006/main">
+  <p:cSld name="Slide 35">
+    <p:bg>
+      <p:bgPr>
+        <a:solidFill>
+          <a:srgbClr val="EEF3FA"/>
+        </a:solidFill>
+      </p:bgPr>
+    </p:bg>
+    <p:spTree>
+      <p:nvGrpSpPr>
+        <p:cNvPr id="1" name=""/>
+        <p:cNvGrpSpPr/>
+        <p:nvPr/>
+      </p:nvGrpSpPr>
+      <p:grpSpPr>
+        <a:xfrm>
+          <a:off x="0" y="0"/>
+          <a:ext cx="0" cy="0"/>
+          <a:chOff x="0" y="0"/>
+          <a:chExt cx="0" cy="0"/>
+        </a:xfrm>
+      </p:grpSpPr>
+      <p:sp>
+        <p:nvSpPr>
+          <p:cNvPr id="2" name="Shape 0"/>
+          <p:cNvSpPr/>
+          <p:nvPr/>
+        </p:nvSpPr>
+        <p:spPr>
+          <a:xfrm>
+            <a:off x="0" y="6510528"/>
+            <a:ext cx="12191695" cy="347472"/>
+          </a:xfrm>
+          <a:prstGeom prst="rect">
+            <a:avLst/>
+          </a:prstGeom>
+          <a:solidFill>
+            <a:srgbClr val="FFFFFF"/>
+          </a:solidFill>
+          <a:ln w="6350">
+            <a:solidFill>
+              <a:srgbClr val="D8E0EC"/>
+            </a:solidFill>
+            <a:prstDash val="solid"/>
+          </a:ln>
+        </p:spPr>
+      </p:sp>
+      <p:pic>
+        <p:nvPicPr>
+          <p:cNvPr id="3" name="Image 0" descr="/www/wwwroot/rexar/gdsolar/docs/curso/slides/assets/logo-gdsolar.png">    </p:cNvPr>
+          <p:cNvPicPr>
+            <a:picLocks noChangeAspect="1"/>
+          </p:cNvPicPr>
+          <p:nvPr/>
+        </p:nvPicPr>
+        <p:blipFill>
+          <a:blip r:embed="rId1"/>
+          <a:stretch>
+            <a:fillRect/>
+          </a:stretch>
+        </p:blipFill>
+        <p:spPr>
+          <a:xfrm>
+            <a:off x="548640" y="6547104"/>
+            <a:ext cx="274320" cy="274320"/>
+          </a:xfrm>
+          <a:prstGeom prst="rect">
+            <a:avLst/>
+          </a:prstGeom>
+        </p:spPr>
+      </p:pic>
+      <p:sp>
+        <p:nvSpPr>
+          <p:cNvPr id="4" name="Text 1"/>
+          <p:cNvSpPr/>
+          <p:nvPr/>
+        </p:nvSpPr>
+        <p:spPr>
+          <a:xfrm>
+            <a:off x="886968" y="6528816"/>
+            <a:ext cx="6400800" cy="310896"/>
+          </a:xfrm>
+          <a:prstGeom prst="rect">
+            <a:avLst/>
+          </a:prstGeom>
+          <a:noFill/>
+          <a:ln/>
+        </p:spPr>
+        <p:txBody>
+          <a:bodyPr wrap="square" rtlCol="0" anchor="ctr"/>
+          <a:lstStyle/>
+          <a:p>
+            <a:pPr indent="0" marL="0">
+              <a:buNone/>
+            </a:pPr>
+            <a:r>
+              <a:rPr lang="en-US" sz="900" b="1" dirty="0">
+                <a:solidFill>
+                  <a:srgbClr val="64748B"/>
+                </a:solidFill>
+                <a:latin typeface="Arial" pitchFamily="34" charset="0"/>
+                <a:ea typeface="Arial" pitchFamily="34" charset="-122"/>
+                <a:cs typeface="Arial" pitchFamily="34" charset="-120"/>
+              </a:rPr>
+              <a:t>GD Solar  ·  Formação em Energia por Assinatura</a:t>
+            </a:r>
+            <a:endParaRPr lang="en-US" sz="900" dirty="0"/>
+          </a:p>
+        </p:txBody>
+      </p:sp>
+      <p:sp>
+        <p:nvSpPr>
+          <p:cNvPr id="5" name="Text 2"/>
+          <p:cNvSpPr/>
+          <p:nvPr/>
+        </p:nvSpPr>
+        <p:spPr>
+          <a:xfrm>
+            <a:off x="7132320" y="6528816"/>
+            <a:ext cx="4023360" cy="310896"/>
+          </a:xfrm>
+          <a:prstGeom prst="rect">
+            <a:avLst/>
+          </a:prstGeom>
+          <a:noFill/>
+          <a:ln/>
+        </p:spPr>
+        <p:txBody>
+          <a:bodyPr wrap="square" rtlCol="0" anchor="ctr"/>
+          <a:lstStyle/>
+          <a:p>
+            <a:pPr algn="r" indent="0" marL="0">
+              <a:buNone/>
+            </a:pPr>
+            <a:r>
+              <a:rPr lang="en-US" sz="900" dirty="0">
+                <a:solidFill>
+                  <a:srgbClr val="64748B"/>
+                </a:solidFill>
+                <a:latin typeface="Arial" pitchFamily="34" charset="0"/>
+                <a:ea typeface="Arial" pitchFamily="34" charset="-122"/>
+                <a:cs typeface="Arial" pitchFamily="34" charset="-120"/>
+              </a:rPr>
+              <a:t>M8 · Teste rápido</a:t>
+            </a:r>
+            <a:endParaRPr lang="en-US" sz="900" dirty="0"/>
+          </a:p>
+        </p:txBody>
+      </p:sp>
+      <p:sp>
+        <p:nvSpPr>
+          <p:cNvPr id="6" name="Shape 3"/>
+          <p:cNvSpPr/>
+          <p:nvPr/>
+        </p:nvSpPr>
+        <p:spPr>
+          <a:xfrm>
+            <a:off x="548640" y="384048"/>
+            <a:ext cx="82296" cy="658368"/>
+          </a:xfrm>
+          <a:prstGeom prst="rect">
+            <a:avLst/>
+          </a:prstGeom>
+          <a:solidFill>
+            <a:srgbClr val="F7A23B"/>
+          </a:solidFill>
+          <a:ln/>
+        </p:spPr>
+      </p:sp>
+      <p:sp>
+        <p:nvSpPr>
+          <p:cNvPr id="7" name="Text 4"/>
+          <p:cNvSpPr/>
+          <p:nvPr/>
+        </p:nvSpPr>
+        <p:spPr>
+          <a:xfrm>
+            <a:off x="777240" y="292608"/>
+            <a:ext cx="10972800" cy="274320"/>
+          </a:xfrm>
+          <a:prstGeom prst="rect">
+            <a:avLst/>
+          </a:prstGeom>
+          <a:noFill/>
+          <a:ln/>
+        </p:spPr>
+        <p:txBody>
+          <a:bodyPr wrap="square" rtlCol="0" anchor="ctr"/>
+          <a:lstStyle/>
+          <a:p>
+            <a:pPr indent="0" marL="0">
+              <a:buNone/>
+            </a:pPr>
+            <a:r>
+              <a:rPr lang="en-US" sz="1000" b="1" spc="100" kern="0" dirty="0">
+                <a:solidFill>
+                  <a:srgbClr val="F7A23B"/>
+                </a:solidFill>
+                <a:latin typeface="Arial" pitchFamily="34" charset="0"/>
+                <a:ea typeface="Arial" pitchFamily="34" charset="-122"/>
+                <a:cs typeface="Arial" pitchFamily="34" charset="-120"/>
+              </a:rPr>
+              <a:t>CONFIRA SUAS RESPOSTAS</a:t>
+            </a:r>
+            <a:endParaRPr lang="en-US" sz="1000" dirty="0"/>
+          </a:p>
+        </p:txBody>
+      </p:sp>
+      <p:sp>
+        <p:nvSpPr>
+          <p:cNvPr id="8" name="Text 5"/>
+          <p:cNvSpPr/>
+          <p:nvPr/>
+        </p:nvSpPr>
+        <p:spPr>
+          <a:xfrm>
+            <a:off x="777240" y="530352"/>
+            <a:ext cx="10881360" cy="566928"/>
+          </a:xfrm>
+          <a:prstGeom prst="rect">
+            <a:avLst/>
+          </a:prstGeom>
+          <a:noFill/>
+          <a:ln/>
+        </p:spPr>
+        <p:txBody>
+          <a:bodyPr wrap="square" rtlCol="0" anchor="ctr">
+            <a:normAutofit/>
+          </a:bodyPr>
+          <a:lstStyle/>
+          <a:p>
+            <a:pPr indent="0" marL="0">
+              <a:buNone/>
+            </a:pPr>
+            <a:r>
+              <a:rPr lang="en-US" sz="2600" b="1" dirty="0">
+                <a:solidFill>
+                  <a:srgbClr val="1B3A6B"/>
+                </a:solidFill>
+                <a:latin typeface="Arial" pitchFamily="34" charset="0"/>
+                <a:ea typeface="Arial" pitchFamily="34" charset="-122"/>
+                <a:cs typeface="Arial" pitchFamily="34" charset="-120"/>
+              </a:rPr>
+              <a:t>Gabarito do teste rápido</a:t>
+            </a:r>
+            <a:endParaRPr lang="en-US" sz="2600" dirty="0"/>
+          </a:p>
+        </p:txBody>
+      </p:sp>
+      <p:sp>
+        <p:nvSpPr>
+          <p:cNvPr id="9" name="Shape 6"/>
+          <p:cNvSpPr/>
+          <p:nvPr/>
+        </p:nvSpPr>
+        <p:spPr>
+          <a:xfrm>
+            <a:off x="548640" y="1325880"/>
+            <a:ext cx="3544824" cy="1478280"/>
+          </a:xfrm>
+          <a:prstGeom prst="roundRect">
+            <a:avLst>
+              <a:gd name="adj" fmla="val 4948"/>
+            </a:avLst>
+          </a:prstGeom>
+          <a:solidFill>
+            <a:srgbClr val="FFFFFF"/>
+          </a:solidFill>
+          <a:ln w="9525">
+            <a:solidFill>
+              <a:srgbClr val="D8E0EC"/>
+            </a:solidFill>
+            <a:prstDash val="solid"/>
+          </a:ln>
+          <a:effectLst>
+            <a:outerShdw sx="100000" sy="100000" kx="0" ky="0" algn="bl" rotWithShape="0" blurRad="38100" dist="12700" dir="5400000">
+              <a:srgbClr val="000000">
+                <a:alpha val="8000"/>
+              </a:srgbClr>
+            </a:outerShdw>
+          </a:effectLst>
+        </p:spPr>
+      </p:sp>
+      <p:sp>
+        <p:nvSpPr>
+          <p:cNvPr id="10" name="Shape 7"/>
+          <p:cNvSpPr/>
+          <p:nvPr/>
+        </p:nvSpPr>
+        <p:spPr>
+          <a:xfrm>
+            <a:off x="731520" y="1508760"/>
+            <a:ext cx="457200" cy="457200"/>
+          </a:xfrm>
+          <a:prstGeom prst="ellipse">
+            <a:avLst/>
+          </a:prstGeom>
+          <a:solidFill>
+            <a:srgbClr val="1B3A6B"/>
+          </a:solidFill>
+          <a:ln/>
+        </p:spPr>
+      </p:sp>
+      <p:sp>
+        <p:nvSpPr>
+          <p:cNvPr id="11" name="Text 8"/>
+          <p:cNvSpPr/>
+          <p:nvPr/>
+        </p:nvSpPr>
+        <p:spPr>
+          <a:xfrm>
+            <a:off x="731520" y="1508760"/>
+            <a:ext cx="457200" cy="457200"/>
+          </a:xfrm>
+          <a:prstGeom prst="rect">
+            <a:avLst/>
+          </a:prstGeom>
+          <a:noFill/>
+          <a:ln/>
+        </p:spPr>
+        <p:txBody>
+          <a:bodyPr wrap="square" rtlCol="0" anchor="ctr"/>
+          <a:lstStyle/>
+          <a:p>
+            <a:pPr algn="ctr" indent="0" marL="0">
+              <a:buNone/>
+            </a:pPr>
+            <a:r>
+              <a:rPr lang="en-US" sz="1400" b="1" dirty="0">
+                <a:solidFill>
+                  <a:srgbClr val="FFFFFF"/>
+                </a:solidFill>
+                <a:latin typeface="Arial" pitchFamily="34" charset="0"/>
+                <a:ea typeface="Arial" pitchFamily="34" charset="-122"/>
+                <a:cs typeface="Arial" pitchFamily="34" charset="-120"/>
+              </a:rPr>
+              <a:t>1</a:t>
+            </a:r>
+            <a:endParaRPr lang="en-US" sz="1400" dirty="0"/>
+          </a:p>
+        </p:txBody>
+      </p:sp>
+      <p:sp>
+        <p:nvSpPr>
+          <p:cNvPr id="12" name="Text 9"/>
+          <p:cNvSpPr/>
+          <p:nvPr/>
+        </p:nvSpPr>
+        <p:spPr>
+          <a:xfrm>
+            <a:off x="1325880" y="1435608"/>
+            <a:ext cx="2630424" cy="1258824"/>
+          </a:xfrm>
+          <a:prstGeom prst="rect">
+            <a:avLst/>
+          </a:prstGeom>
+          <a:noFill/>
+          <a:ln/>
+        </p:spPr>
+        <p:txBody>
+          <a:bodyPr wrap="square" rtlCol="0" anchor="ctr">
+            <a:normAutofit/>
+          </a:bodyPr>
+          <a:lstStyle/>
+          <a:p>
+            <a:pPr indent="0" marL="0">
+              <a:buNone/>
+            </a:pPr>
+            <a:r>
+              <a:rPr lang="en-US" sz="1800" dirty="0">
+                <a:solidFill>
+                  <a:srgbClr val="1F2937"/>
+                </a:solidFill>
+                <a:latin typeface="Arial" pitchFamily="34" charset="0"/>
+                <a:ea typeface="Arial" pitchFamily="34" charset="-122"/>
+                <a:cs typeface="Arial" pitchFamily="34" charset="-120"/>
+              </a:rPr>
+              <a:t>A) rascunho</a:t>
+            </a:r>
+            <a:endParaRPr lang="en-US" sz="1800" dirty="0"/>
+          </a:p>
+        </p:txBody>
+      </p:sp>
+      <p:sp>
+        <p:nvSpPr>
+          <p:cNvPr id="13" name="Shape 10"/>
+          <p:cNvSpPr/>
+          <p:nvPr/>
+        </p:nvSpPr>
+        <p:spPr>
+          <a:xfrm>
+            <a:off x="4322064" y="1325880"/>
+            <a:ext cx="3544824" cy="1478280"/>
+          </a:xfrm>
+          <a:prstGeom prst="roundRect">
+            <a:avLst>
+              <a:gd name="adj" fmla="val 4948"/>
+            </a:avLst>
+          </a:prstGeom>
+          <a:solidFill>
+            <a:srgbClr val="FFFFFF"/>
+          </a:solidFill>
+          <a:ln w="9525">
+            <a:solidFill>
+              <a:srgbClr val="D8E0EC"/>
+            </a:solidFill>
+            <a:prstDash val="solid"/>
+          </a:ln>
+          <a:effectLst>
+            <a:outerShdw sx="100000" sy="100000" kx="0" ky="0" algn="bl" rotWithShape="0" blurRad="38100" dist="12700" dir="5400000">
+              <a:srgbClr val="000000">
+                <a:alpha val="8000"/>
+              </a:srgbClr>
+            </a:outerShdw>
+          </a:effectLst>
+        </p:spPr>
+      </p:sp>
+      <p:sp>
+        <p:nvSpPr>
+          <p:cNvPr id="14" name="Shape 11"/>
+          <p:cNvSpPr/>
+          <p:nvPr/>
+        </p:nvSpPr>
+        <p:spPr>
+          <a:xfrm>
+            <a:off x="4504944" y="1508760"/>
+            <a:ext cx="457200" cy="457200"/>
+          </a:xfrm>
+          <a:prstGeom prst="ellipse">
+            <a:avLst/>
+          </a:prstGeom>
+          <a:solidFill>
+            <a:srgbClr val="F7A23B"/>
+          </a:solidFill>
+          <a:ln/>
+        </p:spPr>
+      </p:sp>
+      <p:sp>
+        <p:nvSpPr>
+          <p:cNvPr id="15" name="Text 12"/>
+          <p:cNvSpPr/>
+          <p:nvPr/>
+        </p:nvSpPr>
+        <p:spPr>
+          <a:xfrm>
+            <a:off x="4504944" y="1508760"/>
+            <a:ext cx="457200" cy="457200"/>
+          </a:xfrm>
+          <a:prstGeom prst="rect">
+            <a:avLst/>
+          </a:prstGeom>
+          <a:noFill/>
+          <a:ln/>
+        </p:spPr>
+        <p:txBody>
+          <a:bodyPr wrap="square" rtlCol="0" anchor="ctr"/>
+          <a:lstStyle/>
+          <a:p>
+            <a:pPr algn="ctr" indent="0" marL="0">
+              <a:buNone/>
+            </a:pPr>
+            <a:r>
+              <a:rPr lang="en-US" sz="1400" b="1" dirty="0">
+                <a:solidFill>
+                  <a:srgbClr val="FFFFFF"/>
+                </a:solidFill>
+                <a:latin typeface="Arial" pitchFamily="34" charset="0"/>
+                <a:ea typeface="Arial" pitchFamily="34" charset="-122"/>
+                <a:cs typeface="Arial" pitchFamily="34" charset="-120"/>
+              </a:rPr>
+              <a:t>2</a:t>
+            </a:r>
+            <a:endParaRPr lang="en-US" sz="1400" dirty="0"/>
+          </a:p>
+        </p:txBody>
+      </p:sp>
+      <p:sp>
+        <p:nvSpPr>
+          <p:cNvPr id="16" name="Text 13"/>
+          <p:cNvSpPr/>
+          <p:nvPr/>
+        </p:nvSpPr>
+        <p:spPr>
+          <a:xfrm>
+            <a:off x="5099304" y="1435608"/>
+            <a:ext cx="2630424" cy="1258824"/>
+          </a:xfrm>
+          <a:prstGeom prst="rect">
+            <a:avLst/>
+          </a:prstGeom>
+          <a:noFill/>
+          <a:ln/>
+        </p:spPr>
+        <p:txBody>
+          <a:bodyPr wrap="square" rtlCol="0" anchor="ctr">
+            <a:normAutofit/>
+          </a:bodyPr>
+          <a:lstStyle/>
+          <a:p>
+            <a:pPr indent="0" marL="0">
+              <a:buNone/>
+            </a:pPr>
+            <a:r>
+              <a:rPr lang="en-US" sz="1800" dirty="0">
+                <a:solidFill>
+                  <a:srgbClr val="1F2937"/>
+                </a:solidFill>
+                <a:latin typeface="Arial" pitchFamily="34" charset="0"/>
+                <a:ea typeface="Arial" pitchFamily="34" charset="-122"/>
+                <a:cs typeface="Arial" pitchFamily="34" charset="-120"/>
+              </a:rPr>
+              <a:t>B) manualmente na tela da cobrança</a:t>
+            </a:r>
+            <a:endParaRPr lang="en-US" sz="1800" dirty="0"/>
+          </a:p>
+        </p:txBody>
+      </p:sp>
+      <p:sp>
+        <p:nvSpPr>
+          <p:cNvPr id="17" name="Shape 14"/>
+          <p:cNvSpPr/>
+          <p:nvPr/>
+        </p:nvSpPr>
+        <p:spPr>
+          <a:xfrm>
+            <a:off x="8095488" y="1325880"/>
+            <a:ext cx="3544824" cy="1478280"/>
+          </a:xfrm>
+          <a:prstGeom prst="roundRect">
+            <a:avLst>
+              <a:gd name="adj" fmla="val 4948"/>
+            </a:avLst>
+          </a:prstGeom>
+          <a:solidFill>
+            <a:srgbClr val="FFFFFF"/>
+          </a:solidFill>
+          <a:ln w="9525">
+            <a:solidFill>
+              <a:srgbClr val="D8E0EC"/>
+            </a:solidFill>
+            <a:prstDash val="solid"/>
+          </a:ln>
+          <a:effectLst>
+            <a:outerShdw sx="100000" sy="100000" kx="0" ky="0" algn="bl" rotWithShape="0" blurRad="38100" dist="12700" dir="5400000">
+              <a:srgbClr val="000000">
+                <a:alpha val="8000"/>
+              </a:srgbClr>
+            </a:outerShdw>
+          </a:effectLst>
+        </p:spPr>
+      </p:sp>
+      <p:sp>
+        <p:nvSpPr>
+          <p:cNvPr id="18" name="Shape 15"/>
+          <p:cNvSpPr/>
+          <p:nvPr/>
+        </p:nvSpPr>
+        <p:spPr>
+          <a:xfrm>
+            <a:off x="8278368" y="1508760"/>
+            <a:ext cx="457200" cy="457200"/>
+          </a:xfrm>
+          <a:prstGeom prst="ellipse">
+            <a:avLst/>
+          </a:prstGeom>
+          <a:solidFill>
+            <a:srgbClr val="1B3A6B"/>
+          </a:solidFill>
+          <a:ln/>
+        </p:spPr>
+      </p:sp>
+      <p:sp>
+        <p:nvSpPr>
+          <p:cNvPr id="19" name="Text 16"/>
+          <p:cNvSpPr/>
+          <p:nvPr/>
+        </p:nvSpPr>
+        <p:spPr>
+          <a:xfrm>
+            <a:off x="8278368" y="1508760"/>
+            <a:ext cx="457200" cy="457200"/>
+          </a:xfrm>
+          <a:prstGeom prst="rect">
+            <a:avLst/>
+          </a:prstGeom>
+          <a:noFill/>
+          <a:ln/>
+        </p:spPr>
+        <p:txBody>
+          <a:bodyPr wrap="square" rtlCol="0" anchor="ctr"/>
+          <a:lstStyle/>
+          <a:p>
+            <a:pPr algn="ctr" indent="0" marL="0">
+              <a:buNone/>
+            </a:pPr>
+            <a:r>
+              <a:rPr lang="en-US" sz="1400" b="1" dirty="0">
+                <a:solidFill>
+                  <a:srgbClr val="FFFFFF"/>
+                </a:solidFill>
+                <a:latin typeface="Arial" pitchFamily="34" charset="0"/>
+                <a:ea typeface="Arial" pitchFamily="34" charset="-122"/>
+                <a:cs typeface="Arial" pitchFamily="34" charset="-120"/>
+              </a:rPr>
+              <a:t>3</a:t>
+            </a:r>
+            <a:endParaRPr lang="en-US" sz="1400" dirty="0"/>
+          </a:p>
+        </p:txBody>
+      </p:sp>
+      <p:sp>
+        <p:nvSpPr>
+          <p:cNvPr id="20" name="Text 17"/>
+          <p:cNvSpPr/>
+          <p:nvPr/>
+        </p:nvSpPr>
+        <p:spPr>
+          <a:xfrm>
+            <a:off x="8872728" y="1435608"/>
+            <a:ext cx="2630424" cy="1258824"/>
+          </a:xfrm>
+          <a:prstGeom prst="rect">
+            <a:avLst/>
+          </a:prstGeom>
+          <a:noFill/>
+          <a:ln/>
+        </p:spPr>
+        <p:txBody>
+          <a:bodyPr wrap="square" rtlCol="0" anchor="ctr">
+            <a:normAutofit/>
+          </a:bodyPr>
+          <a:lstStyle/>
+          <a:p>
+            <a:pPr indent="0" marL="0">
+              <a:buNone/>
+            </a:pPr>
+            <a:r>
+              <a:rPr lang="en-US" sz="1800" dirty="0">
+                <a:solidFill>
+                  <a:srgbClr val="1F2937"/>
+                </a:solidFill>
+                <a:latin typeface="Arial" pitchFamily="34" charset="0"/>
+                <a:ea typeface="Arial" pitchFamily="34" charset="-122"/>
+                <a:cs typeface="Arial" pitchFamily="34" charset="-120"/>
+              </a:rPr>
+              <a:t>B) endereço completo do pagador</a:t>
+            </a:r>
+            <a:endParaRPr lang="en-US" sz="1800" dirty="0"/>
+          </a:p>
+        </p:txBody>
+      </p:sp>
+      <p:sp>
+        <p:nvSpPr>
+          <p:cNvPr id="21" name="Shape 18"/>
+          <p:cNvSpPr/>
+          <p:nvPr/>
+        </p:nvSpPr>
+        <p:spPr>
+          <a:xfrm>
+            <a:off x="548640" y="3032760"/>
+            <a:ext cx="3544824" cy="1478280"/>
+          </a:xfrm>
+          <a:prstGeom prst="roundRect">
+            <a:avLst>
+              <a:gd name="adj" fmla="val 4948"/>
+            </a:avLst>
+          </a:prstGeom>
+          <a:solidFill>
+            <a:srgbClr val="FFFFFF"/>
+          </a:solidFill>
+          <a:ln w="9525">
+            <a:solidFill>
+              <a:srgbClr val="D8E0EC"/>
+            </a:solidFill>
+            <a:prstDash val="solid"/>
+          </a:ln>
+          <a:effectLst>
+            <a:outerShdw sx="100000" sy="100000" kx="0" ky="0" algn="bl" rotWithShape="0" blurRad="38100" dist="12700" dir="5400000">
+              <a:srgbClr val="000000">
+                <a:alpha val="8000"/>
+              </a:srgbClr>
+            </a:outerShdw>
+          </a:effectLst>
+        </p:spPr>
+      </p:sp>
+      <p:sp>
+        <p:nvSpPr>
+          <p:cNvPr id="22" name="Shape 19"/>
+          <p:cNvSpPr/>
+          <p:nvPr/>
+        </p:nvSpPr>
+        <p:spPr>
+          <a:xfrm>
+            <a:off x="731520" y="3215640"/>
+            <a:ext cx="457200" cy="457200"/>
+          </a:xfrm>
+          <a:prstGeom prst="ellipse">
+            <a:avLst/>
+          </a:prstGeom>
+          <a:solidFill>
+            <a:srgbClr val="F7A23B"/>
+          </a:solidFill>
+          <a:ln/>
+        </p:spPr>
+      </p:sp>
+      <p:sp>
+        <p:nvSpPr>
+          <p:cNvPr id="23" name="Text 20"/>
+          <p:cNvSpPr/>
+          <p:nvPr/>
+        </p:nvSpPr>
+        <p:spPr>
+          <a:xfrm>
+            <a:off x="731520" y="3215640"/>
+            <a:ext cx="457200" cy="457200"/>
+          </a:xfrm>
+          <a:prstGeom prst="rect">
+            <a:avLst/>
+          </a:prstGeom>
+          <a:noFill/>
+          <a:ln/>
+        </p:spPr>
+        <p:txBody>
+          <a:bodyPr wrap="square" rtlCol="0" anchor="ctr"/>
+          <a:lstStyle/>
+          <a:p>
+            <a:pPr algn="ctr" indent="0" marL="0">
+              <a:buNone/>
+            </a:pPr>
+            <a:r>
+              <a:rPr lang="en-US" sz="1400" b="1" dirty="0">
+                <a:solidFill>
+                  <a:srgbClr val="FFFFFF"/>
+                </a:solidFill>
+                <a:latin typeface="Arial" pitchFamily="34" charset="0"/>
+                <a:ea typeface="Arial" pitchFamily="34" charset="-122"/>
+                <a:cs typeface="Arial" pitchFamily="34" charset="-120"/>
+              </a:rPr>
+              <a:t>4</a:t>
+            </a:r>
+            <a:endParaRPr lang="en-US" sz="1400" dirty="0"/>
+          </a:p>
+        </p:txBody>
+      </p:sp>
+      <p:sp>
+        <p:nvSpPr>
+          <p:cNvPr id="24" name="Text 21"/>
+          <p:cNvSpPr/>
+          <p:nvPr/>
+        </p:nvSpPr>
+        <p:spPr>
+          <a:xfrm>
+            <a:off x="1325880" y="3142488"/>
+            <a:ext cx="2630424" cy="1258824"/>
+          </a:xfrm>
+          <a:prstGeom prst="rect">
+            <a:avLst/>
+          </a:prstGeom>
+          <a:noFill/>
+          <a:ln/>
+        </p:spPr>
+        <p:txBody>
+          <a:bodyPr wrap="square" rtlCol="0" anchor="ctr">
+            <a:normAutofit/>
+          </a:bodyPr>
+          <a:lstStyle/>
+          <a:p>
+            <a:pPr indent="0" marL="0">
+              <a:buNone/>
+            </a:pPr>
+            <a:r>
+              <a:rPr lang="en-US" sz="1800" dirty="0">
+                <a:solidFill>
+                  <a:srgbClr val="1F2937"/>
+                </a:solidFill>
+                <a:latin typeface="Arial" pitchFamily="34" charset="0"/>
+                <a:ea typeface="Arial" pitchFamily="34" charset="-122"/>
+                <a:cs typeface="Arial" pitchFamily="34" charset="-120"/>
+              </a:rPr>
+              <a:t>A) webhook do Mercado Pago e sincronização periódica</a:t>
+            </a:r>
+            <a:endParaRPr lang="en-US" sz="1800" dirty="0"/>
+          </a:p>
+        </p:txBody>
+      </p:sp>
+      <p:sp>
+        <p:nvSpPr>
+          <p:cNvPr id="25" name="Shape 22"/>
+          <p:cNvSpPr/>
+          <p:nvPr/>
+        </p:nvSpPr>
+        <p:spPr>
+          <a:xfrm>
+            <a:off x="4322064" y="3032760"/>
+            <a:ext cx="3544824" cy="1478280"/>
+          </a:xfrm>
+          <a:prstGeom prst="roundRect">
+            <a:avLst>
+              <a:gd name="adj" fmla="val 4948"/>
+            </a:avLst>
+          </a:prstGeom>
+          <a:solidFill>
+            <a:srgbClr val="FFFFFF"/>
+          </a:solidFill>
+          <a:ln w="9525">
+            <a:solidFill>
+              <a:srgbClr val="D8E0EC"/>
+            </a:solidFill>
+            <a:prstDash val="solid"/>
+          </a:ln>
+          <a:effectLst>
+            <a:outerShdw sx="100000" sy="100000" kx="0" ky="0" algn="bl" rotWithShape="0" blurRad="38100" dist="12700" dir="5400000">
+              <a:srgbClr val="000000">
+                <a:alpha val="8000"/>
+              </a:srgbClr>
+            </a:outerShdw>
+          </a:effectLst>
+        </p:spPr>
+      </p:sp>
+      <p:sp>
+        <p:nvSpPr>
+          <p:cNvPr id="26" name="Shape 23"/>
+          <p:cNvSpPr/>
+          <p:nvPr/>
+        </p:nvSpPr>
+        <p:spPr>
+          <a:xfrm>
+            <a:off x="4504944" y="3215640"/>
+            <a:ext cx="457200" cy="457200"/>
+          </a:xfrm>
+          <a:prstGeom prst="ellipse">
+            <a:avLst/>
+          </a:prstGeom>
+          <a:solidFill>
+            <a:srgbClr val="1B3A6B"/>
+          </a:solidFill>
+          <a:ln/>
+        </p:spPr>
+      </p:sp>
+      <p:sp>
+        <p:nvSpPr>
+          <p:cNvPr id="27" name="Text 24"/>
+          <p:cNvSpPr/>
+          <p:nvPr/>
+        </p:nvSpPr>
+        <p:spPr>
+          <a:xfrm>
+            <a:off x="4504944" y="3215640"/>
+            <a:ext cx="457200" cy="457200"/>
+          </a:xfrm>
+          <a:prstGeom prst="rect">
+            <a:avLst/>
+          </a:prstGeom>
+          <a:noFill/>
+          <a:ln/>
+        </p:spPr>
+        <p:txBody>
+          <a:bodyPr wrap="square" rtlCol="0" anchor="ctr"/>
+          <a:lstStyle/>
+          <a:p>
+            <a:pPr algn="ctr" indent="0" marL="0">
+              <a:buNone/>
+            </a:pPr>
+            <a:r>
+              <a:rPr lang="en-US" sz="1400" b="1" dirty="0">
+                <a:solidFill>
+                  <a:srgbClr val="FFFFFF"/>
+                </a:solidFill>
+                <a:latin typeface="Arial" pitchFamily="34" charset="0"/>
+                <a:ea typeface="Arial" pitchFamily="34" charset="-122"/>
+                <a:cs typeface="Arial" pitchFamily="34" charset="-120"/>
+              </a:rPr>
+              <a:t>5</a:t>
+            </a:r>
+            <a:endParaRPr lang="en-US" sz="1400" dirty="0"/>
+          </a:p>
+        </p:txBody>
+      </p:sp>
+      <p:sp>
+        <p:nvSpPr>
+          <p:cNvPr id="28" name="Text 25"/>
+          <p:cNvSpPr/>
+          <p:nvPr/>
+        </p:nvSpPr>
+        <p:spPr>
+          <a:xfrm>
+            <a:off x="5099304" y="3142488"/>
+            <a:ext cx="2630424" cy="1258824"/>
+          </a:xfrm>
+          <a:prstGeom prst="rect">
+            <a:avLst/>
+          </a:prstGeom>
+          <a:noFill/>
+          <a:ln/>
+        </p:spPr>
+        <p:txBody>
+          <a:bodyPr wrap="square" rtlCol="0" anchor="ctr">
+            <a:normAutofit/>
+          </a:bodyPr>
+          <a:lstStyle/>
+          <a:p>
+            <a:pPr indent="0" marL="0">
+              <a:buNone/>
+            </a:pPr>
+            <a:r>
+              <a:rPr lang="en-US" sz="1800" dirty="0">
+                <a:solidFill>
+                  <a:srgbClr val="1F2937"/>
+                </a:solidFill>
+                <a:latin typeface="Arial" pitchFamily="34" charset="0"/>
+                <a:ea typeface="Arial" pitchFamily="34" charset="-122"/>
+                <a:cs typeface="Arial" pitchFamily="34" charset="-120"/>
+              </a:rPr>
+              <a:t>A) cancela e reemite o boleto com a nova data</a:t>
+            </a:r>
+            <a:endParaRPr lang="en-US" sz="1800" dirty="0"/>
+          </a:p>
+        </p:txBody>
+      </p:sp>
+      <p:sp>
+        <p:nvSpPr>
+          <p:cNvPr id="29" name="Shape 26"/>
+          <p:cNvSpPr/>
+          <p:nvPr/>
+        </p:nvSpPr>
+        <p:spPr>
+          <a:xfrm>
+            <a:off x="8095488" y="3032760"/>
+            <a:ext cx="3544824" cy="1478280"/>
+          </a:xfrm>
+          <a:prstGeom prst="roundRect">
+            <a:avLst>
+              <a:gd name="adj" fmla="val 4948"/>
+            </a:avLst>
+          </a:prstGeom>
+          <a:solidFill>
+            <a:srgbClr val="FFFFFF"/>
+          </a:solidFill>
+          <a:ln w="9525">
+            <a:solidFill>
+              <a:srgbClr val="D8E0EC"/>
+            </a:solidFill>
+            <a:prstDash val="solid"/>
+          </a:ln>
+          <a:effectLst>
+            <a:outerShdw sx="100000" sy="100000" kx="0" ky="0" algn="bl" rotWithShape="0" blurRad="38100" dist="12700" dir="5400000">
+              <a:srgbClr val="000000">
+                <a:alpha val="8000"/>
+              </a:srgbClr>
+            </a:outerShdw>
+          </a:effectLst>
+        </p:spPr>
+      </p:sp>
+      <p:sp>
+        <p:nvSpPr>
+          <p:cNvPr id="30" name="Shape 27"/>
+          <p:cNvSpPr/>
+          <p:nvPr/>
+        </p:nvSpPr>
+        <p:spPr>
+          <a:xfrm>
+            <a:off x="8278368" y="3215640"/>
+            <a:ext cx="457200" cy="457200"/>
+          </a:xfrm>
+          <a:prstGeom prst="ellipse">
+            <a:avLst/>
+          </a:prstGeom>
+          <a:solidFill>
+            <a:srgbClr val="F7A23B"/>
+          </a:solidFill>
+          <a:ln/>
+        </p:spPr>
+      </p:sp>
+      <p:sp>
+        <p:nvSpPr>
+          <p:cNvPr id="31" name="Text 28"/>
+          <p:cNvSpPr/>
+          <p:nvPr/>
+        </p:nvSpPr>
+        <p:spPr>
+          <a:xfrm>
+            <a:off x="8278368" y="3215640"/>
+            <a:ext cx="457200" cy="457200"/>
+          </a:xfrm>
+          <a:prstGeom prst="rect">
+            <a:avLst/>
+          </a:prstGeom>
+          <a:noFill/>
+          <a:ln/>
+        </p:spPr>
+        <p:txBody>
+          <a:bodyPr wrap="square" rtlCol="0" anchor="ctr"/>
+          <a:lstStyle/>
+          <a:p>
+            <a:pPr algn="ctr" indent="0" marL="0">
+              <a:buNone/>
+            </a:pPr>
+            <a:r>
+              <a:rPr lang="en-US" sz="1400" b="1" dirty="0">
+                <a:solidFill>
+                  <a:srgbClr val="FFFFFF"/>
+                </a:solidFill>
+                <a:latin typeface="Arial" pitchFamily="34" charset="0"/>
+                <a:ea typeface="Arial" pitchFamily="34" charset="-122"/>
+                <a:cs typeface="Arial" pitchFamily="34" charset="-120"/>
+              </a:rPr>
+              <a:t>6</a:t>
+            </a:r>
+            <a:endParaRPr lang="en-US" sz="1400" dirty="0"/>
+          </a:p>
+        </p:txBody>
+      </p:sp>
+      <p:sp>
+        <p:nvSpPr>
+          <p:cNvPr id="32" name="Text 29"/>
+          <p:cNvSpPr/>
+          <p:nvPr/>
+        </p:nvSpPr>
+        <p:spPr>
+          <a:xfrm>
+            <a:off x="8872728" y="3142488"/>
+            <a:ext cx="2630424" cy="1258824"/>
+          </a:xfrm>
+          <a:prstGeom prst="rect">
+            <a:avLst/>
+          </a:prstGeom>
+          <a:noFill/>
+          <a:ln/>
+        </p:spPr>
+        <p:txBody>
+          <a:bodyPr wrap="square" rtlCol="0" anchor="ctr">
+            <a:normAutofit/>
+          </a:bodyPr>
+          <a:lstStyle/>
+          <a:p>
+            <a:pPr indent="0" marL="0">
+              <a:buNone/>
+            </a:pPr>
+            <a:r>
+              <a:rPr lang="en-US" sz="1800" dirty="0">
+                <a:solidFill>
+                  <a:srgbClr val="1F2937"/>
+                </a:solidFill>
+                <a:latin typeface="Arial" pitchFamily="34" charset="0"/>
+                <a:ea typeface="Arial" pitchFamily="34" charset="-122"/>
+                <a:cs typeface="Arial" pitchFamily="34" charset="-120"/>
+              </a:rPr>
+              <a:t>A) 3 dias antes do vencimento, se houver boleto/Pix pagável</a:t>
+            </a:r>
+            <a:endParaRPr lang="en-US" sz="1800" dirty="0"/>
+          </a:p>
+        </p:txBody>
+      </p:sp>
+      <p:sp>
+        <p:nvSpPr>
+          <p:cNvPr id="33" name="Shape 30"/>
+          <p:cNvSpPr/>
+          <p:nvPr/>
+        </p:nvSpPr>
+        <p:spPr>
+          <a:xfrm>
+            <a:off x="548640" y="4739640"/>
+            <a:ext cx="3544824" cy="1478280"/>
+          </a:xfrm>
+          <a:prstGeom prst="roundRect">
+            <a:avLst>
+              <a:gd name="adj" fmla="val 4948"/>
+            </a:avLst>
+          </a:prstGeom>
+          <a:solidFill>
+            <a:srgbClr val="FFFFFF"/>
+          </a:solidFill>
+          <a:ln w="9525">
+            <a:solidFill>
+              <a:srgbClr val="D8E0EC"/>
+            </a:solidFill>
+            <a:prstDash val="solid"/>
+          </a:ln>
+          <a:effectLst>
+            <a:outerShdw sx="100000" sy="100000" kx="0" ky="0" algn="bl" rotWithShape="0" blurRad="38100" dist="12700" dir="5400000">
+              <a:srgbClr val="000000">
+                <a:alpha val="8000"/>
+              </a:srgbClr>
+            </a:outerShdw>
+          </a:effectLst>
+        </p:spPr>
+      </p:sp>
+      <p:sp>
+        <p:nvSpPr>
+          <p:cNvPr id="34" name="Shape 31"/>
+          <p:cNvSpPr/>
+          <p:nvPr/>
+        </p:nvSpPr>
+        <p:spPr>
+          <a:xfrm>
+            <a:off x="731520" y="4922520"/>
+            <a:ext cx="457200" cy="457200"/>
+          </a:xfrm>
+          <a:prstGeom prst="ellipse">
+            <a:avLst/>
+          </a:prstGeom>
+          <a:solidFill>
+            <a:srgbClr val="1B3A6B"/>
+          </a:solidFill>
+          <a:ln/>
+        </p:spPr>
+      </p:sp>
+      <p:sp>
+        <p:nvSpPr>
+          <p:cNvPr id="35" name="Text 32"/>
+          <p:cNvSpPr/>
+          <p:nvPr/>
+        </p:nvSpPr>
+        <p:spPr>
+          <a:xfrm>
+            <a:off x="731520" y="4922520"/>
+            <a:ext cx="457200" cy="457200"/>
+          </a:xfrm>
+          <a:prstGeom prst="rect">
+            <a:avLst/>
+          </a:prstGeom>
+          <a:noFill/>
+          <a:ln/>
+        </p:spPr>
+        <p:txBody>
+          <a:bodyPr wrap="square" rtlCol="0" anchor="ctr"/>
+          <a:lstStyle/>
+          <a:p>
+            <a:pPr algn="ctr" indent="0" marL="0">
+              <a:buNone/>
+            </a:pPr>
+            <a:r>
+              <a:rPr lang="en-US" sz="1400" b="1" dirty="0">
+                <a:solidFill>
+                  <a:srgbClr val="FFFFFF"/>
+                </a:solidFill>
+                <a:latin typeface="Arial" pitchFamily="34" charset="0"/>
+                <a:ea typeface="Arial" pitchFamily="34" charset="-122"/>
+                <a:cs typeface="Arial" pitchFamily="34" charset="-120"/>
+              </a:rPr>
+              <a:t>7</a:t>
+            </a:r>
+            <a:endParaRPr lang="en-US" sz="1400" dirty="0"/>
+          </a:p>
+        </p:txBody>
+      </p:sp>
+      <p:sp>
+        <p:nvSpPr>
+          <p:cNvPr id="36" name="Text 33"/>
+          <p:cNvSpPr/>
+          <p:nvPr/>
+        </p:nvSpPr>
+        <p:spPr>
+          <a:xfrm>
+            <a:off x="1325880" y="4849368"/>
+            <a:ext cx="2630424" cy="1258824"/>
+          </a:xfrm>
+          <a:prstGeom prst="rect">
+            <a:avLst/>
+          </a:prstGeom>
+          <a:noFill/>
+          <a:ln/>
+        </p:spPr>
+        <p:txBody>
+          <a:bodyPr wrap="square" rtlCol="0" anchor="ctr">
+            <a:normAutofit/>
+          </a:bodyPr>
+          <a:lstStyle/>
+          <a:p>
+            <a:pPr indent="0" marL="0">
+              <a:buNone/>
+            </a:pPr>
+            <a:r>
+              <a:rPr lang="en-US" sz="1800" dirty="0">
+                <a:solidFill>
+                  <a:srgbClr val="1F2937"/>
+                </a:solidFill>
+                <a:latin typeface="Arial" pitchFamily="34" charset="0"/>
+                <a:ea typeface="Arial" pitchFamily="34" charset="-122"/>
+                <a:cs typeface="Arial" pitchFamily="34" charset="-120"/>
+              </a:rPr>
+              <a:t>B) primeira cobrança paga</a:t>
+            </a:r>
+            <a:endParaRPr lang="en-US" sz="1800" dirty="0"/>
+          </a:p>
+        </p:txBody>
+      </p:sp>
+      <p:sp>
+        <p:nvSpPr>
+          <p:cNvPr id="25" name="Slide Number Placeholder 0"/>
+          <p:cNvSpPr>
+            <a:spLocks noGrp="1"/>
+          </p:cNvSpPr>
+          <p:nvPr>
+            <p:ph type="sldNum" sz="quarter" idx="4294967295"/>
+          </p:nvPr>
+        </p:nvSpPr>
+        <p:spPr>
+          <a:xfrm>
+            <a:off x="11292840" y="6556248"/>
+            <a:ext cx="548640" cy="256032"/>
+          </a:xfrm>
+          <a:prstGeom prst="rect">
+            <a:avLst/>
+          </a:prstGeom>
+          <a:extLst>
+            <a:ext uri="{C572A759-6A51-4108-AA02-DFA0A04FC94B}">
+              <ma14:wrappingTextBoxFlag xmlns:ma14="http://schemas.microsoft.com/office/mac/drawingml/2011/main" val="0"/>
+            </a:ext>
+          </a:extLst>
+        </p:spPr>
+        <p:txBody>
+          <a:bodyPr/>
+          <a:lstStyle>
+            <a:lvl1pPr>
+              <a:defRPr sz="900">
+                <a:solidFill>
+                  <a:srgbClr val="1B3A6B"/>
+                </a:solidFill>
+                <a:latin typeface="Arial"/>
+                <a:ea typeface="Arial"/>
+                <a:cs typeface="Arial"/>
+              </a:defRPr>
+            </a:lvl1pPr>
+          </a:lstStyle>
+          <a:p>
+            <a:pPr algn="r"/>
+            <a:fld id="{F7021451-1387-4CA6-816F-3879F97B5CBC}" type="slidenum">
+              <a:rPr b="1" lang="en-US"/>
+              <a:t>35</a:t>
+            </a:fld>
+            <a:endParaRPr lang="en-US"/>
+          </a:p>
+        </p:txBody>
+      </p:sp>
+    </p:spTree>
+  </p:cSld>
+  <p:clrMapOvr>
+    <a:masterClrMapping/>
+  </p:clrMapOvr>
+</p:sld>
+</file>
+
+<file path=ppt/slides/slide36.xml><?xml version="1.0" encoding="utf-8"?>
+<p:sld xmlns:a="http://schemas.openxmlformats.org/drawingml/2006/main" xmlns:r="http://schemas.openxmlformats.org/officeDocument/2006/relationships" xmlns:p="http://schemas.openxmlformats.org/presentationml/2006/main">
+  <p:cSld name="Slide 36">
+    <p:bg>
+      <p:bgPr>
+        <a:solidFill>
+          <a:srgbClr val="F6F8FB"/>
+        </a:solidFill>
+      </p:bgPr>
+    </p:bg>
+    <p:spTree>
+      <p:nvGrpSpPr>
+        <p:cNvPr id="1" name=""/>
+        <p:cNvGrpSpPr/>
+        <p:nvPr/>
+      </p:nvGrpSpPr>
+      <p:grpSpPr>
+        <a:xfrm>
+          <a:off x="0" y="0"/>
+          <a:ext cx="0" cy="0"/>
+          <a:chOff x="0" y="0"/>
+          <a:chExt cx="0" cy="0"/>
+        </a:xfrm>
+      </p:grpSpPr>
+      <p:sp>
+        <p:nvSpPr>
+          <p:cNvPr id="2" name="Shape 0"/>
+          <p:cNvSpPr/>
+          <p:nvPr/>
+        </p:nvSpPr>
+        <p:spPr>
+          <a:xfrm>
+            <a:off x="0" y="6510528"/>
+            <a:ext cx="12191695" cy="347472"/>
+          </a:xfrm>
+          <a:prstGeom prst="rect">
+            <a:avLst/>
+          </a:prstGeom>
+          <a:solidFill>
+            <a:srgbClr val="FFFFFF"/>
+          </a:solidFill>
+          <a:ln w="6350">
+            <a:solidFill>
+              <a:srgbClr val="D8E0EC"/>
+            </a:solidFill>
+            <a:prstDash val="solid"/>
+          </a:ln>
+        </p:spPr>
+      </p:sp>
+      <p:pic>
+        <p:nvPicPr>
+          <p:cNvPr id="3" name="Image 0" descr="/www/wwwroot/rexar/gdsolar/docs/curso/slides/assets/logo-gdsolar.png">    </p:cNvPr>
+          <p:cNvPicPr>
+            <a:picLocks noChangeAspect="1"/>
+          </p:cNvPicPr>
+          <p:nvPr/>
+        </p:nvPicPr>
+        <p:blipFill>
+          <a:blip r:embed="rId1"/>
+          <a:stretch>
+            <a:fillRect/>
+          </a:stretch>
+        </p:blipFill>
+        <p:spPr>
+          <a:xfrm>
+            <a:off x="548640" y="6547104"/>
+            <a:ext cx="274320" cy="274320"/>
+          </a:xfrm>
+          <a:prstGeom prst="rect">
+            <a:avLst/>
+          </a:prstGeom>
+        </p:spPr>
+      </p:pic>
+      <p:sp>
+        <p:nvSpPr>
+          <p:cNvPr id="4" name="Text 1"/>
+          <p:cNvSpPr/>
+          <p:nvPr/>
+        </p:nvSpPr>
+        <p:spPr>
+          <a:xfrm>
+            <a:off x="886968" y="6528816"/>
+            <a:ext cx="6400800" cy="310896"/>
+          </a:xfrm>
+          <a:prstGeom prst="rect">
+            <a:avLst/>
+          </a:prstGeom>
+          <a:noFill/>
+          <a:ln/>
+        </p:spPr>
+        <p:txBody>
+          <a:bodyPr wrap="square" rtlCol="0" anchor="ctr"/>
+          <a:lstStyle/>
+          <a:p>
+            <a:pPr indent="0" marL="0">
+              <a:buNone/>
+            </a:pPr>
+            <a:r>
+              <a:rPr lang="en-US" sz="900" b="1" dirty="0">
+                <a:solidFill>
+                  <a:srgbClr val="64748B"/>
+                </a:solidFill>
+                <a:latin typeface="Arial" pitchFamily="34" charset="0"/>
+                <a:ea typeface="Arial" pitchFamily="34" charset="-122"/>
+                <a:cs typeface="Arial" pitchFamily="34" charset="-120"/>
+              </a:rPr>
+              <a:t>GD Solar  ·  Formação em Energia por Assinatura</a:t>
+            </a:r>
+            <a:endParaRPr lang="en-US" sz="900" dirty="0"/>
+          </a:p>
+        </p:txBody>
+      </p:sp>
+      <p:sp>
+        <p:nvSpPr>
+          <p:cNvPr id="5" name="Text 2"/>
+          <p:cNvSpPr/>
+          <p:nvPr/>
+        </p:nvSpPr>
+        <p:spPr>
+          <a:xfrm>
+            <a:off x="7132320" y="6528816"/>
+            <a:ext cx="4023360" cy="310896"/>
+          </a:xfrm>
+          <a:prstGeom prst="rect">
+            <a:avLst/>
+          </a:prstGeom>
+          <a:noFill/>
+          <a:ln/>
+        </p:spPr>
+        <p:txBody>
+          <a:bodyPr wrap="square" rtlCol="0" anchor="ctr"/>
+          <a:lstStyle/>
+          <a:p>
+            <a:pPr algn="r" indent="0" marL="0">
+              <a:buNone/>
+            </a:pPr>
+            <a:r>
+              <a:rPr lang="en-US" sz="900" dirty="0">
+                <a:solidFill>
+                  <a:srgbClr val="64748B"/>
+                </a:solidFill>
+                <a:latin typeface="Arial" pitchFamily="34" charset="0"/>
+                <a:ea typeface="Arial" pitchFamily="34" charset="-122"/>
+                <a:cs typeface="Arial" pitchFamily="34" charset="-120"/>
+              </a:rPr>
+              <a:t>M8 · Fechamento</a:t>
+            </a:r>
+            <a:endParaRPr lang="en-US" sz="900" dirty="0"/>
+          </a:p>
+        </p:txBody>
+      </p:sp>
+      <p:sp>
+        <p:nvSpPr>
+          <p:cNvPr id="6" name="Shape 3"/>
+          <p:cNvSpPr/>
+          <p:nvPr/>
+        </p:nvSpPr>
+        <p:spPr>
+          <a:xfrm>
+            <a:off x="548640" y="384048"/>
+            <a:ext cx="82296" cy="658368"/>
+          </a:xfrm>
+          <a:prstGeom prst="rect">
+            <a:avLst/>
+          </a:prstGeom>
+          <a:solidFill>
+            <a:srgbClr val="F7A23B"/>
+          </a:solidFill>
+          <a:ln/>
+        </p:spPr>
+      </p:sp>
+      <p:sp>
+        <p:nvSpPr>
+          <p:cNvPr id="7" name="Text 4"/>
+          <p:cNvSpPr/>
+          <p:nvPr/>
+        </p:nvSpPr>
+        <p:spPr>
+          <a:xfrm>
+            <a:off x="777240" y="292608"/>
+            <a:ext cx="10972800" cy="274320"/>
+          </a:xfrm>
+          <a:prstGeom prst="rect">
+            <a:avLst/>
+          </a:prstGeom>
+          <a:noFill/>
+          <a:ln/>
+        </p:spPr>
+        <p:txBody>
+          <a:bodyPr wrap="square" rtlCol="0" anchor="ctr"/>
+          <a:lstStyle/>
+          <a:p>
+            <a:pPr indent="0" marL="0">
+              <a:buNone/>
+            </a:pPr>
+            <a:r>
+              <a:rPr lang="en-US" sz="1000" b="1" spc="100" kern="0" dirty="0">
+                <a:solidFill>
+                  <a:srgbClr val="F7A23B"/>
+                </a:solidFill>
+                <a:latin typeface="Arial" pitchFamily="34" charset="0"/>
+                <a:ea typeface="Arial" pitchFamily="34" charset="-122"/>
+                <a:cs typeface="Arial" pitchFamily="34" charset="-120"/>
+              </a:rPr>
+              <a:t>FECHAMENTO DO MÓDULO</a:t>
+            </a:r>
+            <a:endParaRPr lang="en-US" sz="1000" dirty="0"/>
+          </a:p>
+        </p:txBody>
+      </p:sp>
+      <p:sp>
+        <p:nvSpPr>
+          <p:cNvPr id="8" name="Text 5"/>
+          <p:cNvSpPr/>
+          <p:nvPr/>
+        </p:nvSpPr>
+        <p:spPr>
+          <a:xfrm>
+            <a:off x="777240" y="530352"/>
+            <a:ext cx="10881360" cy="566928"/>
+          </a:xfrm>
+          <a:prstGeom prst="rect">
+            <a:avLst/>
+          </a:prstGeom>
+          <a:noFill/>
+          <a:ln/>
+        </p:spPr>
+        <p:txBody>
+          <a:bodyPr wrap="square" rtlCol="0" anchor="ctr">
+            <a:normAutofit/>
+          </a:bodyPr>
+          <a:lstStyle/>
+          <a:p>
+            <a:pPr indent="0" marL="0">
+              <a:buNone/>
+            </a:pPr>
+            <a:r>
+              <a:rPr lang="en-US" sz="2600" b="1" dirty="0">
+                <a:solidFill>
+                  <a:srgbClr val="1B3A6B"/>
+                </a:solidFill>
+                <a:latin typeface="Arial" pitchFamily="34" charset="0"/>
+                <a:ea typeface="Arial" pitchFamily="34" charset="-122"/>
+                <a:cs typeface="Arial" pitchFamily="34" charset="-120"/>
+              </a:rPr>
+              <a:t>Pratique e entregue</a:t>
+            </a:r>
+            <a:endParaRPr lang="en-US" sz="2600" dirty="0"/>
+          </a:p>
+        </p:txBody>
+      </p:sp>
+      <p:sp>
+        <p:nvSpPr>
+          <p:cNvPr id="9" name="Text 6"/>
+          <p:cNvSpPr/>
+          <p:nvPr/>
+        </p:nvSpPr>
+        <p:spPr>
+          <a:xfrm>
+            <a:off x="548640" y="1325880"/>
+            <a:ext cx="5394960" cy="411480"/>
+          </a:xfrm>
+          <a:prstGeom prst="rect">
+            <a:avLst/>
+          </a:prstGeom>
+          <a:noFill/>
+          <a:ln/>
+        </p:spPr>
+        <p:txBody>
+          <a:bodyPr wrap="square" rtlCol="0" anchor="ctr"/>
+          <a:lstStyle/>
+          <a:p>
+            <a:pPr indent="0" marL="0">
+              <a:buNone/>
+            </a:pPr>
+            <a:r>
+              <a:rPr lang="en-US" sz="1600" b="1" dirty="0">
+                <a:solidFill>
+                  <a:srgbClr val="1B3A6B"/>
+                </a:solidFill>
+                <a:latin typeface="Arial" pitchFamily="34" charset="0"/>
+                <a:ea typeface="Arial" pitchFamily="34" charset="-122"/>
+                <a:cs typeface="Arial" pitchFamily="34" charset="-120"/>
+              </a:rPr>
+              <a:t>Exercícios</a:t>
+            </a:r>
+            <a:endParaRPr lang="en-US" sz="1600" dirty="0"/>
+          </a:p>
+        </p:txBody>
+      </p:sp>
+      <p:sp>
+        <p:nvSpPr>
+          <p:cNvPr id="10" name="Text 7"/>
+          <p:cNvSpPr/>
+          <p:nvPr/>
+        </p:nvSpPr>
+        <p:spPr>
+          <a:xfrm>
+            <a:off x="548640" y="1783080"/>
+            <a:ext cx="5394960" cy="4480560"/>
+          </a:xfrm>
+          <a:prstGeom prst="rect">
+            <a:avLst/>
+          </a:prstGeom>
+          <a:noFill/>
+          <a:ln/>
+        </p:spPr>
+        <p:txBody>
+          <a:bodyPr wrap="square" rtlCol="0" anchor="t">
+            <a:normAutofit/>
+          </a:bodyPr>
+          <a:lstStyle/>
+          <a:p>
+            <a:pPr indent="0" marL="0">
+              <a:spcAft>
+                <a:spcPts val="800"/>
+              </a:spcAft>
+              <a:buNone/>
+            </a:pPr>
+            <a:r>
+              <a:rPr lang="en-US" sz="1600" dirty="0">
+                <a:solidFill>
+                  <a:srgbClr val="1F2937"/>
+                </a:solidFill>
+                <a:latin typeface="Arial" pitchFamily="34" charset="0"/>
+                <a:ea typeface="Arial" pitchFamily="34" charset="-122"/>
+                <a:cs typeface="Arial" pitchFamily="34" charset="-120"/>
+              </a:rPr>
+              <a:t>1. Cobrança de R$ 1.695,20 com um desconto manual de R$ 50 (cortesia pela demora no primeiro crédito). Valor final?</a:t>
+            </a:r>
+            <a:endParaRPr lang="en-US" sz="1600" dirty="0"/>
+          </a:p>
+          <a:p>
+            <a:pPr indent="0" marL="0">
+              <a:spcAft>
+                <a:spcPts val="800"/>
+              </a:spcAft>
+              <a:buNone/>
+            </a:pPr>
+            <a:r>
+              <a:rPr lang="en-US" sz="1600" dirty="0">
+                <a:solidFill>
+                  <a:srgbClr val="1F2937"/>
+                </a:solidFill>
+                <a:latin typeface="Arial" pitchFamily="34" charset="0"/>
+                <a:ea typeface="Arial" pitchFamily="34" charset="-122"/>
+                <a:cs typeface="Arial" pitchFamily="34" charset="-120"/>
+              </a:rPr>
+              <a:t>2. Monte uma régua para uma cobrança com vencimento dia 10: o que acontece nos dias 7, 10, 11, 15, 20 e 30?</a:t>
+            </a:r>
+            <a:endParaRPr lang="en-US" sz="1600" dirty="0"/>
+          </a:p>
+          <a:p>
+            <a:pPr indent="0" marL="0">
+              <a:spcAft>
+                <a:spcPts val="800"/>
+              </a:spcAft>
+              <a:buNone/>
+            </a:pPr>
+            <a:r>
+              <a:rPr lang="en-US" sz="1600" dirty="0">
+                <a:solidFill>
+                  <a:srgbClr val="1F2937"/>
+                </a:solidFill>
+                <a:latin typeface="Arial" pitchFamily="34" charset="0"/>
+                <a:ea typeface="Arial" pitchFamily="34" charset="-122"/>
+                <a:cs typeface="Arial" pitchFamily="34" charset="-120"/>
+              </a:rPr>
+              <a:t>3. Por que a plataforma não cancela o boleto vencido no Mercado Pago imediatamente?</a:t>
+            </a:r>
+            <a:endParaRPr lang="en-US" sz="1600" dirty="0"/>
+          </a:p>
+        </p:txBody>
+      </p:sp>
+      <p:sp>
+        <p:nvSpPr>
+          <p:cNvPr id="11" name="Shape 8"/>
+          <p:cNvSpPr/>
+          <p:nvPr/>
+        </p:nvSpPr>
+        <p:spPr>
+          <a:xfrm>
+            <a:off x="6172200" y="1325880"/>
+            <a:ext cx="5468112" cy="4937760"/>
+          </a:xfrm>
+          <a:prstGeom prst="roundRect">
+            <a:avLst>
+              <a:gd name="adj" fmla="val 1852"/>
+            </a:avLst>
+          </a:prstGeom>
+          <a:solidFill>
+            <a:srgbClr val="1B3A6B"/>
+          </a:solidFill>
+          <a:ln/>
+        </p:spPr>
+      </p:sp>
+      <p:sp>
+        <p:nvSpPr>
+          <p:cNvPr id="12" name="Text 9"/>
+          <p:cNvSpPr/>
+          <p:nvPr/>
+        </p:nvSpPr>
+        <p:spPr>
+          <a:xfrm>
+            <a:off x="6492240" y="1554480"/>
+            <a:ext cx="4828032" cy="4480560"/>
+          </a:xfrm>
+          <a:prstGeom prst="rect">
+            <a:avLst/>
+          </a:prstGeom>
+          <a:noFill/>
+          <a:ln/>
+        </p:spPr>
+        <p:txBody>
+          <a:bodyPr wrap="square" rtlCol="0" anchor="t">
+            <a:normAutofit/>
+          </a:bodyPr>
+          <a:lstStyle/>
+          <a:p>
+            <a:pPr indent="0" marL="0">
+              <a:buNone/>
+            </a:pPr>
+            <a:r>
+              <a:rPr lang="en-US" sz="1300" b="1" spc="100" kern="0" dirty="0">
+                <a:solidFill>
+                  <a:srgbClr val="F7A23B"/>
+                </a:solidFill>
+                <a:latin typeface="Arial" pitchFamily="34" charset="0"/>
+                <a:ea typeface="Arial" pitchFamily="34" charset="-122"/>
+                <a:cs typeface="Arial" pitchFamily="34" charset="-120"/>
+              </a:rPr>
+              <a:t>ENTREGÁVEL DO MÓDULO
+</a:t>
+            </a:r>
+            <a:pPr indent="0" marL="0">
+              <a:buNone/>
+            </a:pPr>
+            <a:r>
+              <a:rPr lang="en-US" sz="1600" dirty="0">
+                <a:solidFill>
+                  <a:srgbClr val="FFFFFF"/>
+                </a:solidFill>
+                <a:latin typeface="Arial" pitchFamily="34" charset="0"/>
+                <a:ea typeface="Arial" pitchFamily="34" charset="-122"/>
+                <a:cs typeface="Arial" pitchFamily="34" charset="-120"/>
+              </a:rPr>
+              <a:t>Primeiro faturamento: cobranças do mês 1 geradas e abertas para os 15 clientes; Pix ou boleto emitido para todos; pelo menos 10 pagos (simulados), 1 com ajuste justificado, 1 com vencimento alterado e 1 vencida tratada (boleto reemitido); e a régua de cobrança da sua empresa em uma página.</a:t>
+            </a:r>
+            <a:endParaRPr lang="en-US" sz="1300" dirty="0"/>
+          </a:p>
+        </p:txBody>
+      </p:sp>
+      <p:sp>
+        <p:nvSpPr>
+          <p:cNvPr id="25" name="Slide Number Placeholder 0"/>
+          <p:cNvSpPr>
+            <a:spLocks noGrp="1"/>
+          </p:cNvSpPr>
+          <p:nvPr>
+            <p:ph type="sldNum" sz="quarter" idx="4294967295"/>
+          </p:nvPr>
+        </p:nvSpPr>
+        <p:spPr>
+          <a:xfrm>
+            <a:off x="11292840" y="6556248"/>
+            <a:ext cx="548640" cy="256032"/>
+          </a:xfrm>
+          <a:prstGeom prst="rect">
+            <a:avLst/>
+          </a:prstGeom>
+          <a:extLst>
+            <a:ext uri="{C572A759-6A51-4108-AA02-DFA0A04FC94B}">
+              <ma14:wrappingTextBoxFlag xmlns:ma14="http://schemas.microsoft.com/office/mac/drawingml/2011/main" val="0"/>
+            </a:ext>
+          </a:extLst>
+        </p:spPr>
+        <p:txBody>
+          <a:bodyPr/>
+          <a:lstStyle>
+            <a:lvl1pPr>
+              <a:defRPr sz="900">
+                <a:solidFill>
+                  <a:srgbClr val="1B3A6B"/>
+                </a:solidFill>
+                <a:latin typeface="Arial"/>
+                <a:ea typeface="Arial"/>
+                <a:cs typeface="Arial"/>
+              </a:defRPr>
+            </a:lvl1pPr>
+          </a:lstStyle>
+          <a:p>
+            <a:pPr algn="r"/>
+            <a:fld id="{F7021451-1387-4CA6-816F-3879F97B5CBC}" type="slidenum">
+              <a:rPr b="1" lang="en-US"/>
+              <a:t>36</a:t>
             </a:fld>
             <a:endParaRPr lang="en-US"/>
           </a:p>
@@ -19816,7 +27097,7 @@
         <p:spPr>
           <a:xfrm>
             <a:off x="822960" y="2286000"/>
-            <a:ext cx="2965704" cy="3749040"/>
+            <a:ext cx="2965704" cy="2286000"/>
           </a:xfrm>
           <a:prstGeom prst="rect">
             <a:avLst/>
@@ -19897,6 +27178,65 @@
       <p:sp>
         <p:nvSpPr>
           <p:cNvPr id="13" name="Shape 10"/>
+          <p:cNvSpPr/>
+          <p:nvPr/>
+        </p:nvSpPr>
+        <p:spPr>
+          <a:xfrm>
+            <a:off x="822960" y="4663440"/>
+            <a:ext cx="2965704" cy="18288"/>
+          </a:xfrm>
+          <a:prstGeom prst="rect">
+            <a:avLst/>
+          </a:prstGeom>
+          <a:solidFill>
+            <a:srgbClr val="D8E0EC"/>
+          </a:solidFill>
+          <a:ln/>
+        </p:spPr>
+      </p:sp>
+      <p:sp>
+        <p:nvSpPr>
+          <p:cNvPr id="14" name="Text 11"/>
+          <p:cNvSpPr/>
+          <p:nvPr/>
+        </p:nvSpPr>
+        <p:spPr>
+          <a:xfrm>
+            <a:off x="822960" y="4754880"/>
+            <a:ext cx="2965704" cy="1371600"/>
+          </a:xfrm>
+          <a:prstGeom prst="rect">
+            <a:avLst/>
+          </a:prstGeom>
+          <a:noFill/>
+          <a:ln/>
+        </p:spPr>
+        <p:txBody>
+          <a:bodyPr wrap="square" rtlCol="0" anchor="t"/>
+          <a:lstStyle/>
+          <a:p>
+            <a:pPr indent="0" marL="0">
+              <a:buNone/>
+            </a:pPr>
+            <a:r>
+              <a:rPr lang="en-US" sz="1300" i="1" dirty="0">
+                <a:solidFill>
+                  <a:srgbClr val="64748B"/>
+                </a:solidFill>
+                <a:latin typeface="Arial" pitchFamily="34" charset="0"/>
+                <a:ea typeface="Arial" pitchFamily="34" charset="-122"/>
+                <a:cs typeface="Arial" pitchFamily="34" charset="-120"/>
+              </a:rPr>
+              <a:t>Ela é gerada sozinha, de hora em hora, ou com um clique. Nunca há duas cobranças ativas para a mesma fatura.</a:t>
+            </a:r>
+            <a:endParaRPr lang="en-US" sz="1300" dirty="0"/>
+          </a:p>
+        </p:txBody>
+      </p:sp>
+      <p:sp>
+        <p:nvSpPr>
+          <p:cNvPr id="15" name="Shape 12"/>
           <p:cNvSpPr/>
           <p:nvPr/>
         </p:nvSpPr>
@@ -19930,7 +27270,7 @@
       </p:sp>
       <p:sp>
         <p:nvSpPr>
-          <p:cNvPr id="14" name="Shape 11"/>
+          <p:cNvPr id="16" name="Shape 13"/>
           <p:cNvSpPr/>
           <p:nvPr/>
         </p:nvSpPr>
@@ -19950,7 +27290,7 @@
       </p:sp>
       <p:sp>
         <p:nvSpPr>
-          <p:cNvPr id="15" name="Text 12"/>
+          <p:cNvPr id="17" name="Text 14"/>
           <p:cNvSpPr/>
           <p:nvPr/>
         </p:nvSpPr>
@@ -19991,14 +27331,14 @@
       </p:sp>
       <p:sp>
         <p:nvSpPr>
-          <p:cNvPr id="16" name="Text 13"/>
+          <p:cNvPr id="18" name="Text 15"/>
           <p:cNvSpPr/>
           <p:nvPr/>
         </p:nvSpPr>
         <p:spPr>
           <a:xfrm>
             <a:off x="4611624" y="2286000"/>
-            <a:ext cx="2965704" cy="3749040"/>
+            <a:ext cx="2965704" cy="2286000"/>
           </a:xfrm>
           <a:prstGeom prst="rect">
             <a:avLst/>
@@ -20078,7 +27418,66 @@
       </p:sp>
       <p:sp>
         <p:nvSpPr>
-          <p:cNvPr id="17" name="Shape 14"/>
+          <p:cNvPr id="19" name="Shape 16"/>
+          <p:cNvSpPr/>
+          <p:nvPr/>
+        </p:nvSpPr>
+        <p:spPr>
+          <a:xfrm>
+            <a:off x="4611624" y="4663440"/>
+            <a:ext cx="2965704" cy="18288"/>
+          </a:xfrm>
+          <a:prstGeom prst="rect">
+            <a:avLst/>
+          </a:prstGeom>
+          <a:solidFill>
+            <a:srgbClr val="D8E0EC"/>
+          </a:solidFill>
+          <a:ln/>
+        </p:spPr>
+      </p:sp>
+      <p:sp>
+        <p:nvSpPr>
+          <p:cNvPr id="20" name="Text 17"/>
+          <p:cNvSpPr/>
+          <p:nvPr/>
+        </p:nvSpPr>
+        <p:spPr>
+          <a:xfrm>
+            <a:off x="4611624" y="4754880"/>
+            <a:ext cx="2965704" cy="1371600"/>
+          </a:xfrm>
+          <a:prstGeom prst="rect">
+            <a:avLst/>
+          </a:prstGeom>
+          <a:noFill/>
+          <a:ln/>
+        </p:spPr>
+        <p:txBody>
+          <a:bodyPr wrap="square" rtlCol="0" anchor="t"/>
+          <a:lstStyle/>
+          <a:p>
+            <a:pPr indent="0" marL="0">
+              <a:buNone/>
+            </a:pPr>
+            <a:r>
+              <a:rPr lang="en-US" sz="1300" i="1" dirty="0">
+                <a:solidFill>
+                  <a:srgbClr val="64748B"/>
+                </a:solidFill>
+                <a:latin typeface="Arial" pitchFamily="34" charset="0"/>
+                <a:ea typeface="Arial" pitchFamily="34" charset="-122"/>
+                <a:cs typeface="Arial" pitchFamily="34" charset="-120"/>
+              </a:rPr>
+              <a:t>Toda cobrança nasce em rascunho, a sua chance de conferir antes de o cliente ver. Depois ela é aberta, aguarda o pagamento e termina paga, vencida ou cancelada.</a:t>
+            </a:r>
+            <a:endParaRPr lang="en-US" sz="1300" dirty="0"/>
+          </a:p>
+        </p:txBody>
+      </p:sp>
+      <p:sp>
+        <p:nvSpPr>
+          <p:cNvPr id="21" name="Shape 18"/>
           <p:cNvSpPr/>
           <p:nvPr/>
         </p:nvSpPr>
@@ -20112,7 +27511,7 @@
       </p:sp>
       <p:sp>
         <p:nvSpPr>
-          <p:cNvPr id="18" name="Shape 15"/>
+          <p:cNvPr id="22" name="Shape 19"/>
           <p:cNvSpPr/>
           <p:nvPr/>
         </p:nvSpPr>
@@ -20132,7 +27531,7 @@
       </p:sp>
       <p:sp>
         <p:nvSpPr>
-          <p:cNvPr id="19" name="Text 16"/>
+          <p:cNvPr id="23" name="Text 20"/>
           <p:cNvSpPr/>
           <p:nvPr/>
         </p:nvSpPr>
@@ -20173,14 +27572,14 @@
       </p:sp>
       <p:sp>
         <p:nvSpPr>
-          <p:cNvPr id="20" name="Text 17"/>
+          <p:cNvPr id="24" name="Text 21"/>
           <p:cNvSpPr/>
           <p:nvPr/>
         </p:nvSpPr>
         <p:spPr>
           <a:xfrm>
             <a:off x="8400288" y="2286000"/>
-            <a:ext cx="2965704" cy="3749040"/>
+            <a:ext cx="2965704" cy="2286000"/>
           </a:xfrm>
           <a:prstGeom prst="rect">
             <a:avLst/>
@@ -20234,6 +27633,65 @@
               <a:t>alerta: cobrança vencendo em 5 dias sem pagamento gerado</a:t>
             </a:r>
             <a:endParaRPr lang="en-US" sz="1700" dirty="0"/>
+          </a:p>
+        </p:txBody>
+      </p:sp>
+      <p:sp>
+        <p:nvSpPr>
+          <p:cNvPr id="25" name="Shape 22"/>
+          <p:cNvSpPr/>
+          <p:nvPr/>
+        </p:nvSpPr>
+        <p:spPr>
+          <a:xfrm>
+            <a:off x="8400288" y="4663440"/>
+            <a:ext cx="2965704" cy="18288"/>
+          </a:xfrm>
+          <a:prstGeom prst="rect">
+            <a:avLst/>
+          </a:prstGeom>
+          <a:solidFill>
+            <a:srgbClr val="D8E0EC"/>
+          </a:solidFill>
+          <a:ln/>
+        </p:spPr>
+      </p:sp>
+      <p:sp>
+        <p:nvSpPr>
+          <p:cNvPr id="26" name="Text 23"/>
+          <p:cNvSpPr/>
+          <p:nvPr/>
+        </p:nvSpPr>
+        <p:spPr>
+          <a:xfrm>
+            <a:off x="8400288" y="4754880"/>
+            <a:ext cx="2965704" cy="1371600"/>
+          </a:xfrm>
+          <a:prstGeom prst="rect">
+            <a:avLst/>
+          </a:prstGeom>
+          <a:noFill/>
+          <a:ln/>
+        </p:spPr>
+        <p:txBody>
+          <a:bodyPr wrap="square" rtlCol="0" anchor="t"/>
+          <a:lstStyle/>
+          <a:p>
+            <a:pPr indent="0" marL="0">
+              <a:buNone/>
+            </a:pPr>
+            <a:r>
+              <a:rPr lang="en-US" sz="1300" i="1" dirty="0">
+                <a:solidFill>
+                  <a:srgbClr val="64748B"/>
+                </a:solidFill>
+                <a:latin typeface="Arial" pitchFamily="34" charset="0"/>
+                <a:ea typeface="Arial" pitchFamily="34" charset="-122"/>
+                <a:cs typeface="Arial" pitchFamily="34" charset="-120"/>
+              </a:rPr>
+              <a:t>O Pix ou boleto é sempre emitido por uma pessoa, por segurança. Para não virar esquecimento, a plataforma alerta sobre cobranças perto do vencimento sem pagamento gerado.</a:t>
+            </a:r>
+            <a:endParaRPr lang="en-US" sz="1300" dirty="0"/>
           </a:p>
         </p:txBody>
       </p:sp>
@@ -21684,7 +29142,7 @@
         <p:spPr>
           <a:xfrm>
             <a:off x="548640" y="1325880"/>
-            <a:ext cx="3544824" cy="4892040"/>
+            <a:ext cx="3544824" cy="3977640"/>
           </a:xfrm>
           <a:prstGeom prst="roundRect">
             <a:avLst>
@@ -21777,7 +29235,7 @@
         <p:spPr>
           <a:xfrm>
             <a:off x="1325880" y="1435608"/>
-            <a:ext cx="2630424" cy="4672584"/>
+            <a:ext cx="2630424" cy="3758184"/>
           </a:xfrm>
           <a:prstGeom prst="rect">
             <a:avLst/>
@@ -21818,7 +29276,7 @@
         <p:spPr>
           <a:xfrm>
             <a:off x="4322064" y="1325880"/>
-            <a:ext cx="3544824" cy="4892040"/>
+            <a:ext cx="3544824" cy="3977640"/>
           </a:xfrm>
           <a:prstGeom prst="roundRect">
             <a:avLst>
@@ -21911,7 +29369,7 @@
         <p:spPr>
           <a:xfrm>
             <a:off x="5099304" y="1435608"/>
-            <a:ext cx="2630424" cy="4672584"/>
+            <a:ext cx="2630424" cy="3758184"/>
           </a:xfrm>
           <a:prstGeom prst="rect">
             <a:avLst/>
@@ -21952,7 +29410,7 @@
         <p:spPr>
           <a:xfrm>
             <a:off x="8095488" y="1325880"/>
-            <a:ext cx="3544824" cy="4892040"/>
+            <a:ext cx="3544824" cy="3977640"/>
           </a:xfrm>
           <a:prstGeom prst="roundRect">
             <a:avLst>
@@ -22045,7 +29503,7 @@
         <p:spPr>
           <a:xfrm>
             <a:off x="8872728" y="1435608"/>
-            <a:ext cx="2630424" cy="4672584"/>
+            <a:ext cx="2630424" cy="3758184"/>
           </a:xfrm>
           <a:prstGeom prst="rect">
             <a:avLst/>
@@ -22074,6 +29532,92 @@
               <a:t>Sempre: tipo + valor + descrição</a:t>
             </a:r>
             <a:endParaRPr lang="en-US" sz="1800" dirty="0"/>
+          </a:p>
+        </p:txBody>
+      </p:sp>
+      <p:sp>
+        <p:nvSpPr>
+          <p:cNvPr id="21" name="Shape 18"/>
+          <p:cNvSpPr/>
+          <p:nvPr/>
+        </p:nvSpPr>
+        <p:spPr>
+          <a:xfrm>
+            <a:off x="548640" y="5413248"/>
+            <a:ext cx="11091672" cy="868680"/>
+          </a:xfrm>
+          <a:prstGeom prst="roundRect">
+            <a:avLst>
+              <a:gd name="adj" fmla="val 8421"/>
+            </a:avLst>
+          </a:prstGeom>
+          <a:solidFill>
+            <a:srgbClr val="EEF3FA"/>
+          </a:solidFill>
+          <a:ln w="6350">
+            <a:solidFill>
+              <a:srgbClr val="D8E0EC"/>
+            </a:solidFill>
+            <a:prstDash val="solid"/>
+          </a:ln>
+        </p:spPr>
+      </p:sp>
+      <p:sp>
+        <p:nvSpPr>
+          <p:cNvPr id="22" name="Shape 19"/>
+          <p:cNvSpPr/>
+          <p:nvPr/>
+        </p:nvSpPr>
+        <p:spPr>
+          <a:xfrm>
+            <a:off x="548640" y="5413248"/>
+            <a:ext cx="91440" cy="868680"/>
+          </a:xfrm>
+          <a:prstGeom prst="rect">
+            <a:avLst/>
+          </a:prstGeom>
+          <a:solidFill>
+            <a:srgbClr val="F7A23B"/>
+          </a:solidFill>
+          <a:ln/>
+        </p:spPr>
+      </p:sp>
+      <p:sp>
+        <p:nvSpPr>
+          <p:cNvPr id="23" name="Text 20"/>
+          <p:cNvSpPr/>
+          <p:nvPr/>
+        </p:nvSpPr>
+        <p:spPr>
+          <a:xfrm>
+            <a:off x="777240" y="5458968"/>
+            <a:ext cx="10744200" cy="777240"/>
+          </a:xfrm>
+          <a:prstGeom prst="rect">
+            <a:avLst/>
+          </a:prstGeom>
+          <a:noFill/>
+          <a:ln/>
+        </p:spPr>
+        <p:txBody>
+          <a:bodyPr wrap="square" rtlCol="0" anchor="ctr"/>
+          <a:lstStyle/>
+          <a:p>
+            <a:pPr indent="0" marL="0">
+              <a:buNone/>
+            </a:pPr>
+            <a:r>
+              <a:rPr lang="en-US" sz="1500" dirty="0">
+                <a:solidFill>
+                  <a:srgbClr val="1F2937"/>
+                </a:solidFill>
+                <a:latin typeface="Arial" pitchFamily="34" charset="0"/>
+                <a:ea typeface="Arial" pitchFamily="34" charset="-122"/>
+                <a:cs typeface="Arial" pitchFamily="34" charset="-120"/>
+              </a:rPr>
+              <a:t>Use desconto manual para cortesias e correções, e acréscimo para diferenças de meses anteriores. Sempre com descrição clara e combinado com o cliente.</a:t>
+            </a:r>
+            <a:endParaRPr lang="en-US" sz="1500" dirty="0"/>
           </a:p>
         </p:txBody>
       </p:sp>
@@ -22392,7 +29936,7 @@
         </p:nvSpPr>
         <p:spPr>
           <a:xfrm>
-            <a:off x="548640" y="2651760"/>
+            <a:off x="548640" y="2583180"/>
             <a:ext cx="5596128" cy="1463040"/>
           </a:xfrm>
           <a:prstGeom prst="chevron">
@@ -22417,7 +29961,7 @@
         </p:nvSpPr>
         <p:spPr>
           <a:xfrm>
-            <a:off x="868680" y="2651760"/>
+            <a:off x="868680" y="2583180"/>
             <a:ext cx="5074920" cy="1463040"/>
           </a:xfrm>
           <a:prstGeom prst="rect">
@@ -22458,7 +30002,7 @@
         </p:nvSpPr>
         <p:spPr>
           <a:xfrm>
-            <a:off x="6035040" y="2651760"/>
+            <a:off x="6035040" y="2583180"/>
             <a:ext cx="5596128" cy="1463040"/>
           </a:xfrm>
           <a:prstGeom prst="chevron">
@@ -22483,7 +30027,7 @@
         </p:nvSpPr>
         <p:spPr>
           <a:xfrm>
-            <a:off x="6355080" y="2651760"/>
+            <a:off x="6355080" y="2583180"/>
             <a:ext cx="5074920" cy="1463040"/>
           </a:xfrm>
           <a:prstGeom prst="rect">
@@ -22511,6 +30055,92 @@
                 <a:cs typeface="Arial" pitchFamily="34" charset="-120"/>
               </a:rPr>
               <a:t>recalcular a cobrança (enquanto não paga)</a:t>
+            </a:r>
+            <a:endParaRPr lang="en-US" sz="1500" dirty="0"/>
+          </a:p>
+        </p:txBody>
+      </p:sp>
+      <p:sp>
+        <p:nvSpPr>
+          <p:cNvPr id="13" name="Shape 10"/>
+          <p:cNvSpPr/>
+          <p:nvPr/>
+        </p:nvSpPr>
+        <p:spPr>
+          <a:xfrm>
+            <a:off x="548640" y="5413248"/>
+            <a:ext cx="11091672" cy="868680"/>
+          </a:xfrm>
+          <a:prstGeom prst="roundRect">
+            <a:avLst>
+              <a:gd name="adj" fmla="val 8421"/>
+            </a:avLst>
+          </a:prstGeom>
+          <a:solidFill>
+            <a:srgbClr val="EEF3FA"/>
+          </a:solidFill>
+          <a:ln w="6350">
+            <a:solidFill>
+              <a:srgbClr val="D8E0EC"/>
+            </a:solidFill>
+            <a:prstDash val="solid"/>
+          </a:ln>
+        </p:spPr>
+      </p:sp>
+      <p:sp>
+        <p:nvSpPr>
+          <p:cNvPr id="14" name="Shape 11"/>
+          <p:cNvSpPr/>
+          <p:nvPr/>
+        </p:nvSpPr>
+        <p:spPr>
+          <a:xfrm>
+            <a:off x="548640" y="5413248"/>
+            <a:ext cx="91440" cy="868680"/>
+          </a:xfrm>
+          <a:prstGeom prst="rect">
+            <a:avLst/>
+          </a:prstGeom>
+          <a:solidFill>
+            <a:srgbClr val="F7A23B"/>
+          </a:solidFill>
+          <a:ln/>
+        </p:spPr>
+      </p:sp>
+      <p:sp>
+        <p:nvSpPr>
+          <p:cNvPr id="15" name="Text 12"/>
+          <p:cNvSpPr/>
+          <p:nvPr/>
+        </p:nvSpPr>
+        <p:spPr>
+          <a:xfrm>
+            <a:off x="777240" y="5458968"/>
+            <a:ext cx="10744200" cy="777240"/>
+          </a:xfrm>
+          <a:prstGeom prst="rect">
+            <a:avLst/>
+          </a:prstGeom>
+          <a:noFill/>
+          <a:ln/>
+        </p:spPr>
+        <p:txBody>
+          <a:bodyPr wrap="square" rtlCol="0" anchor="ctr"/>
+          <a:lstStyle/>
+          <a:p>
+            <a:pPr indent="0" marL="0">
+              <a:buNone/>
+            </a:pPr>
+            <a:r>
+              <a:rPr lang="en-US" sz="1500" dirty="0">
+                <a:solidFill>
+                  <a:srgbClr val="1F2937"/>
+                </a:solidFill>
+                <a:latin typeface="Arial" pitchFamily="34" charset="0"/>
+                <a:ea typeface="Arial" pitchFamily="34" charset="-122"/>
+                <a:cs typeface="Arial" pitchFamily="34" charset="-120"/>
+              </a:rPr>
+              <a:t>Se a fatura ou o desconto mudou, recalcule antes de emitir o pagamento.</a:t>
             </a:r>
             <a:endParaRPr lang="en-US" sz="1500" dirty="0"/>
           </a:p>
@@ -22832,11 +30462,11 @@
         <p:spPr>
           <a:xfrm>
             <a:off x="548640" y="1325880"/>
-            <a:ext cx="11091672" cy="4892040"/>
+            <a:ext cx="11091672" cy="3977640"/>
           </a:xfrm>
           <a:prstGeom prst="roundRect">
             <a:avLst>
-              <a:gd name="adj" fmla="val 1495"/>
+              <a:gd name="adj" fmla="val 1839"/>
             </a:avLst>
           </a:prstGeom>
           <a:solidFill>
@@ -22925,7 +30555,7 @@
         <p:spPr>
           <a:xfrm>
             <a:off x="1325880" y="1435608"/>
-            <a:ext cx="10177272" cy="4672584"/>
+            <a:ext cx="10177272" cy="3758184"/>
           </a:xfrm>
           <a:prstGeom prst="rect">
             <a:avLst/>
@@ -22954,6 +30584,92 @@
               <a:t>Mudou o vencimento ou o valor? O boleto ativo é cancelado e reemitido</a:t>
             </a:r>
             <a:endParaRPr lang="en-US" sz="1800" dirty="0"/>
+          </a:p>
+        </p:txBody>
+      </p:sp>
+      <p:sp>
+        <p:nvSpPr>
+          <p:cNvPr id="13" name="Shape 10"/>
+          <p:cNvSpPr/>
+          <p:nvPr/>
+        </p:nvSpPr>
+        <p:spPr>
+          <a:xfrm>
+            <a:off x="548640" y="5413248"/>
+            <a:ext cx="11091672" cy="868680"/>
+          </a:xfrm>
+          <a:prstGeom prst="roundRect">
+            <a:avLst>
+              <a:gd name="adj" fmla="val 8421"/>
+            </a:avLst>
+          </a:prstGeom>
+          <a:solidFill>
+            <a:srgbClr val="EEF3FA"/>
+          </a:solidFill>
+          <a:ln w="6350">
+            <a:solidFill>
+              <a:srgbClr val="D8E0EC"/>
+            </a:solidFill>
+            <a:prstDash val="solid"/>
+          </a:ln>
+        </p:spPr>
+      </p:sp>
+      <p:sp>
+        <p:nvSpPr>
+          <p:cNvPr id="14" name="Shape 11"/>
+          <p:cNvSpPr/>
+          <p:nvPr/>
+        </p:nvSpPr>
+        <p:spPr>
+          <a:xfrm>
+            <a:off x="548640" y="5413248"/>
+            <a:ext cx="91440" cy="868680"/>
+          </a:xfrm>
+          <a:prstGeom prst="rect">
+            <a:avLst/>
+          </a:prstGeom>
+          <a:solidFill>
+            <a:srgbClr val="F7A23B"/>
+          </a:solidFill>
+          <a:ln/>
+        </p:spPr>
+      </p:sp>
+      <p:sp>
+        <p:nvSpPr>
+          <p:cNvPr id="15" name="Text 12"/>
+          <p:cNvSpPr/>
+          <p:nvPr/>
+        </p:nvSpPr>
+        <p:spPr>
+          <a:xfrm>
+            <a:off x="777240" y="5458968"/>
+            <a:ext cx="10744200" cy="777240"/>
+          </a:xfrm>
+          <a:prstGeom prst="rect">
+            <a:avLst/>
+          </a:prstGeom>
+          <a:noFill/>
+          <a:ln/>
+        </p:spPr>
+        <p:txBody>
+          <a:bodyPr wrap="square" rtlCol="0" anchor="ctr"/>
+          <a:lstStyle/>
+          <a:p>
+            <a:pPr indent="0" marL="0">
+              <a:buNone/>
+            </a:pPr>
+            <a:r>
+              <a:rPr lang="en-US" sz="1500" dirty="0">
+                <a:solidFill>
+                  <a:srgbClr val="1F2937"/>
+                </a:solidFill>
+                <a:latin typeface="Arial" pitchFamily="34" charset="0"/>
+                <a:ea typeface="Arial" pitchFamily="34" charset="-122"/>
+                <a:cs typeface="Arial" pitchFamily="34" charset="-120"/>
+              </a:rPr>
+              <a:t>Mudou o vencimento ou o valor, o boleto ativo é cancelado e reemitido automaticamente.</a:t>
+            </a:r>
+            <a:endParaRPr lang="en-US" sz="1500" dirty="0"/>
           </a:p>
         </p:txBody>
       </p:sp>
